--- a/Enterprise_Analytics_AI_Team.pptx
+++ b/Enterprise_Analytics_AI_Team.pptx
@@ -3108,7 +3108,7 @@
             <a:avLst/>
           </a:prstGeom>
           <a:solidFill>
-            <a:srgbClr val="005293"/>
+            <a:srgbClr val="172A45"/>
           </a:solidFill>
           <a:ln>
             <a:noFill/>
@@ -3144,14 +3144,14 @@
         </p:nvSpPr>
         <p:spPr>
           <a:xfrm>
-            <a:off x="0" y="4754880"/>
-            <a:ext cx="12191695" cy="137160"/>
+            <a:off x="0" y="5029200"/>
+            <a:ext cx="12191695" cy="73152"/>
           </a:xfrm>
           <a:prstGeom prst="rect">
             <a:avLst/>
           </a:prstGeom>
           <a:solidFill>
-            <a:srgbClr val="009688"/>
+            <a:srgbClr val="008080"/>
           </a:solidFill>
           <a:ln>
             <a:noFill/>
@@ -3181,14 +3181,57 @@
       </p:sp>
       <p:sp>
         <p:nvSpPr>
-          <p:cNvPr id="4" name="TextBox 3"/>
+          <p:cNvPr id="4" name="Rectangle 3"/>
+          <p:cNvSpPr/>
+          <p:nvPr/>
+        </p:nvSpPr>
+        <p:spPr>
+          <a:xfrm>
+            <a:off x="0" y="5166360"/>
+            <a:ext cx="7315200" cy="36576"/>
+          </a:xfrm>
+          <a:prstGeom prst="rect">
+            <a:avLst/>
+          </a:prstGeom>
+          <a:solidFill>
+            <a:srgbClr val="558B6E"/>
+          </a:solidFill>
+          <a:ln>
+            <a:noFill/>
+          </a:ln>
+        </p:spPr>
+        <p:style>
+          <a:lnRef idx="1">
+            <a:schemeClr val="accent1"/>
+          </a:lnRef>
+          <a:fillRef idx="3">
+            <a:schemeClr val="accent1"/>
+          </a:fillRef>
+          <a:effectRef idx="2">
+            <a:schemeClr val="accent1"/>
+          </a:effectRef>
+          <a:fontRef idx="minor">
+            <a:schemeClr val="lt1"/>
+          </a:fontRef>
+        </p:style>
+        <p:txBody>
+          <a:bodyPr rtlCol="0" anchor="ctr"/>
+          <a:lstStyle/>
+          <a:p>
+            <a:pPr algn="ctr"/>
+          </a:p>
+        </p:txBody>
+      </p:sp>
+      <p:sp>
+        <p:nvSpPr>
+          <p:cNvPr id="5" name="TextBox 4"/>
           <p:cNvSpPr txBox="1"/>
           <p:nvPr/>
         </p:nvSpPr>
         <p:spPr>
           <a:xfrm>
-            <a:off x="685800" y="2286000"/>
-            <a:ext cx="10820095" cy="1371600"/>
+            <a:off x="731520" y="2377440"/>
+            <a:ext cx="10728655" cy="1097280"/>
           </a:xfrm>
           <a:prstGeom prst="rect">
             <a:avLst/>
@@ -3202,7 +3245,7 @@
           <a:lstStyle/>
           <a:p>
             <a:pPr algn="l">
-              <a:defRPr sz="5400" b="1">
+              <a:defRPr sz="5200" b="1">
                 <a:solidFill>
                   <a:srgbClr val="FFFFFF"/>
                 </a:solidFill>
@@ -3216,14 +3259,14 @@
       </p:sp>
       <p:sp>
         <p:nvSpPr>
-          <p:cNvPr id="5" name="TextBox 4"/>
+          <p:cNvPr id="6" name="TextBox 5"/>
           <p:cNvSpPr txBox="1"/>
           <p:nvPr/>
         </p:nvSpPr>
         <p:spPr>
           <a:xfrm>
-            <a:off x="685800" y="3840480"/>
-            <a:ext cx="10820095" cy="914400"/>
+            <a:off x="731520" y="3657600"/>
+            <a:ext cx="10728655" cy="731520"/>
           </a:xfrm>
           <a:prstGeom prst="rect">
             <a:avLst/>
@@ -3237,28 +3280,28 @@
           <a:lstStyle/>
           <a:p>
             <a:pPr algn="l">
-              <a:defRPr sz="2800">
-                <a:solidFill>
-                  <a:srgbClr val="C8DCF0"/>
-                </a:solidFill>
-              </a:defRPr>
-            </a:pPr>
-            <a:r>
-              <a:t>Your Partners in Data-Driven Development</a:t>
-            </a:r>
-          </a:p>
-        </p:txBody>
-      </p:sp>
-      <p:sp>
-        <p:nvSpPr>
-          <p:cNvPr id="6" name="TextBox 5"/>
+              <a:defRPr sz="2400">
+                <a:solidFill>
+                  <a:srgbClr val="B0C4DE"/>
+                </a:solidFill>
+              </a:defRPr>
+            </a:pPr>
+            <a:r>
+              <a:t>Partnering with teams to turn data into decisions</a:t>
+            </a:r>
+          </a:p>
+        </p:txBody>
+      </p:sp>
+      <p:sp>
+        <p:nvSpPr>
+          <p:cNvPr id="7" name="TextBox 6"/>
           <p:cNvSpPr txBox="1"/>
           <p:nvPr/>
         </p:nvSpPr>
         <p:spPr>
           <a:xfrm>
-            <a:off x="685800" y="5303520"/>
-            <a:ext cx="10820095" cy="914400"/>
+            <a:off x="731520" y="5669280"/>
+            <a:ext cx="10728655" cy="548640"/>
           </a:xfrm>
           <a:prstGeom prst="rect">
             <a:avLst/>
@@ -3272,14 +3315,14 @@
           <a:lstStyle/>
           <a:p>
             <a:pPr algn="l">
-              <a:defRPr sz="1800" i="1">
-                <a:solidFill>
-                  <a:srgbClr val="B4C8DC"/>
-                </a:solidFill>
-              </a:defRPr>
-            </a:pPr>
-            <a:r>
-              <a:t>Helping teams turn data into insights, and insights into action</a:t>
+              <a:defRPr sz="1600" i="1">
+                <a:solidFill>
+                  <a:srgbClr val="8CA0B4"/>
+                </a:solidFill>
+              </a:defRPr>
+            </a:pPr>
+            <a:r>
+              <a:t>From land acquisition through permitting — we help you see the full picture</a:t>
             </a:r>
           </a:p>
         </p:txBody>
@@ -3304,95 +3347,23 @@
       <p:grpSpPr/>
       <p:sp>
         <p:nvSpPr>
-          <p:cNvPr id="2" name="TextBox 1"/>
-          <p:cNvSpPr txBox="1"/>
-          <p:nvPr/>
-        </p:nvSpPr>
-        <p:spPr>
-          <a:xfrm>
-            <a:off x="457200" y="365760"/>
-            <a:ext cx="11277295" cy="914400"/>
-          </a:xfrm>
-          <a:prstGeom prst="rect">
-            <a:avLst/>
-          </a:prstGeom>
-          <a:noFill/>
-        </p:spPr>
-        <p:txBody>
-          <a:bodyPr wrap="square">
-            <a:spAutoFit/>
-          </a:bodyPr>
-          <a:lstStyle/>
-          <a:p>
-            <a:pPr algn="l">
-              <a:defRPr sz="4400" b="1">
-                <a:solidFill>
-                  <a:srgbClr val="005293"/>
-                </a:solidFill>
-              </a:defRPr>
-            </a:pPr>
-            <a:r>
-              <a:t>Who We Are</a:t>
-            </a:r>
-          </a:p>
-        </p:txBody>
-      </p:sp>
-      <p:sp>
-        <p:nvSpPr>
-          <p:cNvPr id="3" name="TextBox 2"/>
-          <p:cNvSpPr txBox="1"/>
-          <p:nvPr/>
-        </p:nvSpPr>
-        <p:spPr>
-          <a:xfrm>
-            <a:off x="457200" y="1097280"/>
-            <a:ext cx="10972800" cy="731520"/>
-          </a:xfrm>
-          <a:prstGeom prst="rect">
-            <a:avLst/>
-          </a:prstGeom>
-          <a:noFill/>
-        </p:spPr>
-        <p:txBody>
-          <a:bodyPr wrap="none">
-            <a:spAutoFit/>
-          </a:bodyPr>
-          <a:lstStyle/>
-          <a:p>
-            <a:pPr>
-              <a:defRPr sz="2400" i="1">
-                <a:solidFill>
-                  <a:srgbClr val="009688"/>
-                </a:solidFill>
-              </a:defRPr>
-            </a:pPr>
-            <a:r>
-              <a:t>Think of us as your in-house technology translators</a:t>
-            </a:r>
-          </a:p>
-        </p:txBody>
-      </p:sp>
-      <p:sp>
-        <p:nvSpPr>
-          <p:cNvPr id="4" name="Rounded Rectangle 3"/>
+          <p:cNvPr id="2" name="Rectangle 1"/>
           <p:cNvSpPr/>
           <p:nvPr/>
         </p:nvSpPr>
         <p:spPr>
           <a:xfrm>
-            <a:off x="457200" y="1828800"/>
-            <a:ext cx="11277295" cy="2011680"/>
-          </a:xfrm>
-          <a:prstGeom prst="roundRect">
+            <a:off x="0" y="0"/>
+            <a:ext cx="12191695" cy="6858000"/>
+          </a:xfrm>
+          <a:prstGeom prst="rect">
             <a:avLst/>
           </a:prstGeom>
           <a:solidFill>
-            <a:srgbClr val="F0F8FF"/>
+            <a:srgbClr val="FFFFFF"/>
           </a:solidFill>
           <a:ln>
-            <a:solidFill>
-              <a:srgbClr val="4285F4"/>
-            </a:solidFill>
+            <a:noFill/>
           </a:ln>
         </p:spPr>
         <p:style>
@@ -3419,85 +3390,20 @@
       </p:sp>
       <p:sp>
         <p:nvSpPr>
-          <p:cNvPr id="5" name="TextBox 4"/>
-          <p:cNvSpPr txBox="1"/>
-          <p:nvPr/>
-        </p:nvSpPr>
-        <p:spPr>
-          <a:xfrm>
-            <a:off x="731520" y="2011680"/>
-            <a:ext cx="10789920" cy="1828800"/>
-          </a:xfrm>
-          <a:prstGeom prst="rect">
-            <a:avLst/>
-          </a:prstGeom>
-          <a:noFill/>
-        </p:spPr>
-        <p:txBody>
-          <a:bodyPr wrap="square">
-            <a:spAutoFit/>
-          </a:bodyPr>
-          <a:lstStyle/>
-          <a:p>
-            <a:pPr>
-              <a:spcAft>
-                <a:spcPts val="1200"/>
-              </a:spcAft>
-              <a:defRPr sz="2000">
-                <a:solidFill>
-                  <a:srgbClr val="3C3C3C"/>
-                </a:solidFill>
-              </a:defRPr>
-            </a:pPr>
-            <a:r>
-              <a:t>Imagine having a neighbor who could build you a custom website...</a:t>
-            </a:r>
-          </a:p>
-          <a:p>
-            <a:pPr>
-              <a:spcAft>
-                <a:spcPts val="1200"/>
-              </a:spcAft>
-              <a:defRPr sz="2000">
-                <a:solidFill>
-                  <a:srgbClr val="3C3C3C"/>
-                </a:solidFill>
-              </a:defRPr>
-            </a:pPr>
-            <a:r>
-              <a:t>Now imagine that neighbor also knows how to build the systems that help Netflix figure out which movies to recommend to you, or how Amazon predicts what you might want to buy next.</a:t>
-            </a:r>
-          </a:p>
-          <a:p>
-            <a:pPr>
-              <a:defRPr sz="2000" b="1">
-                <a:solidFill>
-                  <a:srgbClr val="005293"/>
-                </a:solidFill>
-              </a:defRPr>
-            </a:pPr>
-            <a:r>
-              <a:t>That's us — technologists with computer science and data science backgrounds who specialize in finding patterns in data and building tools that make complex information useful.</a:t>
-            </a:r>
-          </a:p>
-        </p:txBody>
-      </p:sp>
-      <p:sp>
-        <p:nvSpPr>
-          <p:cNvPr id="6" name="Rounded Rectangle 5"/>
+          <p:cNvPr id="3" name="Rectangle 2"/>
           <p:cNvSpPr/>
           <p:nvPr/>
         </p:nvSpPr>
         <p:spPr>
           <a:xfrm>
-            <a:off x="548640" y="4114800"/>
-            <a:ext cx="3474720" cy="2286000"/>
-          </a:xfrm>
-          <a:prstGeom prst="roundRect">
+            <a:off x="0" y="0"/>
+            <a:ext cx="12191695" cy="1188720"/>
+          </a:xfrm>
+          <a:prstGeom prst="rect">
             <a:avLst/>
           </a:prstGeom>
           <a:solidFill>
-            <a:srgbClr val="005293"/>
+            <a:srgbClr val="172A45"/>
           </a:solidFill>
           <a:ln>
             <a:noFill/>
@@ -3527,14 +3433,14 @@
       </p:sp>
       <p:sp>
         <p:nvSpPr>
-          <p:cNvPr id="7" name="TextBox 6"/>
+          <p:cNvPr id="4" name="TextBox 3"/>
           <p:cNvSpPr txBox="1"/>
           <p:nvPr/>
         </p:nvSpPr>
         <p:spPr>
           <a:xfrm>
-            <a:off x="731520" y="4297680"/>
-            <a:ext cx="3108960" cy="2103120"/>
+            <a:off x="731520" y="320040"/>
+            <a:ext cx="10728655" cy="731520"/>
           </a:xfrm>
           <a:prstGeom prst="rect">
             <a:avLst/>
@@ -3542,58 +3448,45 @@
           <a:noFill/>
         </p:spPr>
         <p:txBody>
-          <a:bodyPr wrap="square">
+          <a:bodyPr wrap="none">
             <a:spAutoFit/>
           </a:bodyPr>
           <a:lstStyle/>
           <a:p>
             <a:pPr>
-              <a:spcAft>
-                <a:spcPts val="800"/>
-              </a:spcAft>
-              <a:defRPr sz="2000" b="1">
+              <a:defRPr sz="3600" b="1">
                 <a:solidFill>
                   <a:srgbClr val="FFFFFF"/>
                 </a:solidFill>
               </a:defRPr>
             </a:pPr>
             <a:r>
-              <a:t>🔧 We Build</a:t>
-            </a:r>
-          </a:p>
-          <a:p>
-            <a:pPr>
-              <a:defRPr sz="1600">
-                <a:solidFill>
-                  <a:srgbClr val="FFFFFF"/>
-                </a:solidFill>
-              </a:defRPr>
-            </a:pPr>
-            <a:r>
-              <a:t>Databases, dashboards, automated reports, forecasting models, and AI-powered tools</a:t>
-            </a:r>
-          </a:p>
-        </p:txBody>
-      </p:sp>
-      <p:sp>
-        <p:nvSpPr>
-          <p:cNvPr id="8" name="Rounded Rectangle 7"/>
+              <a:t>Who We Are</a:t>
+            </a:r>
+          </a:p>
+        </p:txBody>
+      </p:sp>
+      <p:sp>
+        <p:nvSpPr>
+          <p:cNvPr id="5" name="Rounded Rectangle 4"/>
           <p:cNvSpPr/>
           <p:nvPr/>
         </p:nvSpPr>
         <p:spPr>
           <a:xfrm>
-            <a:off x="4389120" y="4114800"/>
-            <a:ext cx="3474720" cy="2286000"/>
+            <a:off x="548640" y="1554480"/>
+            <a:ext cx="11094415" cy="1645920"/>
           </a:xfrm>
           <a:prstGeom prst="roundRect">
             <a:avLst/>
           </a:prstGeom>
           <a:solidFill>
-            <a:srgbClr val="009688"/>
+            <a:srgbClr val="F0F8FF"/>
           </a:solidFill>
-          <a:ln>
-            <a:noFill/>
+          <a:ln w="19050">
+            <a:solidFill>
+              <a:srgbClr val="4682B4"/>
+            </a:solidFill>
           </a:ln>
         </p:spPr>
         <p:style>
@@ -3620,14 +3513,14 @@
       </p:sp>
       <p:sp>
         <p:nvSpPr>
-          <p:cNvPr id="9" name="TextBox 8"/>
+          <p:cNvPr id="6" name="TextBox 5"/>
           <p:cNvSpPr txBox="1"/>
           <p:nvPr/>
         </p:nvSpPr>
         <p:spPr>
           <a:xfrm>
-            <a:off x="4572000" y="4297680"/>
-            <a:ext cx="3108960" cy="2103120"/>
+            <a:off x="822960" y="1691640"/>
+            <a:ext cx="10515600" cy="1463040"/>
           </a:xfrm>
           <a:prstGeom prst="rect">
             <a:avLst/>
@@ -3642,51 +3535,53 @@
           <a:p>
             <a:pPr>
               <a:spcAft>
-                <a:spcPts val="800"/>
+                <a:spcPts val="1200"/>
               </a:spcAft>
-              <a:defRPr sz="2000" b="1">
-                <a:solidFill>
-                  <a:srgbClr val="FFFFFF"/>
-                </a:solidFill>
-              </a:defRPr>
-            </a:pPr>
-            <a:r>
-              <a:t>🔍 We Analyze</a:t>
+              <a:defRPr sz="2200" b="1">
+                <a:solidFill>
+                  <a:srgbClr val="172A45"/>
+                </a:solidFill>
+              </a:defRPr>
+            </a:pPr>
+            <a:r>
+              <a:t>Think of us as technology specialists who speak your language.</a:t>
             </a:r>
           </a:p>
           <a:p>
             <a:pPr>
-              <a:defRPr sz="1600">
-                <a:solidFill>
-                  <a:srgbClr val="FFFFFF"/>
-                </a:solidFill>
-              </a:defRPr>
-            </a:pPr>
-            <a:r>
-              <a:t>Find trends, spot patterns, predict outcomes, and turn messy data into clear answers</a:t>
-            </a:r>
-          </a:p>
-        </p:txBody>
-      </p:sp>
-      <p:sp>
-        <p:nvSpPr>
-          <p:cNvPr id="10" name="Rounded Rectangle 9"/>
+              <a:defRPr sz="1700">
+                <a:solidFill>
+                  <a:srgbClr val="475569"/>
+                </a:solidFill>
+              </a:defRPr>
+            </a:pPr>
+            <a:r>
+              <a:t>You know how Netflix somehow knows which shows you'll like? Or how your phone can identify a song in seconds? We're the people who build those kinds of systems — but for business problems. We create tools that find patterns in your data, predict what's coming next, and automate the tedious stuff so you can focus on what matters.</a:t>
+            </a:r>
+          </a:p>
+        </p:txBody>
+      </p:sp>
+      <p:sp>
+        <p:nvSpPr>
+          <p:cNvPr id="7" name="Rounded Rectangle 6"/>
           <p:cNvSpPr/>
           <p:nvPr/>
         </p:nvSpPr>
         <p:spPr>
           <a:xfrm>
-            <a:off x="8229600" y="4114800"/>
-            <a:ext cx="3474720" cy="2286000"/>
+            <a:off x="548640" y="3474720"/>
+            <a:ext cx="3566160" cy="1920240"/>
           </a:xfrm>
           <a:prstGeom prst="roundRect">
             <a:avLst/>
           </a:prstGeom>
           <a:solidFill>
-            <a:srgbClr val="4285F4"/>
+            <a:srgbClr val="FFFFFF"/>
           </a:solidFill>
-          <a:ln>
-            <a:noFill/>
+          <a:ln w="25400">
+            <a:solidFill>
+              <a:srgbClr val="008080"/>
+            </a:solidFill>
           </a:ln>
         </p:spPr>
         <p:style>
@@ -3713,14 +3608,92 @@
       </p:sp>
       <p:sp>
         <p:nvSpPr>
-          <p:cNvPr id="11" name="TextBox 10"/>
+          <p:cNvPr id="8" name="Rectangle 7"/>
+          <p:cNvSpPr/>
+          <p:nvPr/>
+        </p:nvSpPr>
+        <p:spPr>
+          <a:xfrm>
+            <a:off x="548640" y="3474720"/>
+            <a:ext cx="3566160" cy="109728"/>
+          </a:xfrm>
+          <a:prstGeom prst="rect">
+            <a:avLst/>
+          </a:prstGeom>
+          <a:solidFill>
+            <a:srgbClr val="008080"/>
+          </a:solidFill>
+          <a:ln>
+            <a:noFill/>
+          </a:ln>
+        </p:spPr>
+        <p:style>
+          <a:lnRef idx="1">
+            <a:schemeClr val="accent1"/>
+          </a:lnRef>
+          <a:fillRef idx="3">
+            <a:schemeClr val="accent1"/>
+          </a:fillRef>
+          <a:effectRef idx="2">
+            <a:schemeClr val="accent1"/>
+          </a:effectRef>
+          <a:fontRef idx="minor">
+            <a:schemeClr val="lt1"/>
+          </a:fontRef>
+        </p:style>
+        <p:txBody>
+          <a:bodyPr rtlCol="0" anchor="ctr"/>
+          <a:lstStyle/>
+          <a:p>
+            <a:pPr algn="ctr"/>
+          </a:p>
+        </p:txBody>
+      </p:sp>
+      <p:sp>
+        <p:nvSpPr>
+          <p:cNvPr id="9" name="TextBox 8"/>
           <p:cNvSpPr txBox="1"/>
           <p:nvPr/>
         </p:nvSpPr>
         <p:spPr>
           <a:xfrm>
-            <a:off x="8412480" y="4297680"/>
-            <a:ext cx="3108960" cy="2103120"/>
+            <a:off x="731520" y="3749040"/>
+            <a:ext cx="3200400" cy="457200"/>
+          </a:xfrm>
+          <a:prstGeom prst="rect">
+            <a:avLst/>
+          </a:prstGeom>
+          <a:noFill/>
+        </p:spPr>
+        <p:txBody>
+          <a:bodyPr wrap="none">
+            <a:spAutoFit/>
+          </a:bodyPr>
+          <a:lstStyle/>
+          <a:p>
+            <a:pPr>
+              <a:defRPr sz="1800" b="1">
+                <a:solidFill>
+                  <a:srgbClr val="008080"/>
+                </a:solidFill>
+              </a:defRPr>
+            </a:pPr>
+            <a:r>
+              <a:t>We Build Tools</a:t>
+            </a:r>
+          </a:p>
+        </p:txBody>
+      </p:sp>
+      <p:sp>
+        <p:nvSpPr>
+          <p:cNvPr id="10" name="TextBox 9"/>
+          <p:cNvSpPr txBox="1"/>
+          <p:nvPr/>
+        </p:nvSpPr>
+        <p:spPr>
+          <a:xfrm>
+            <a:off x="731520" y="4251960"/>
+            <a:ext cx="3200400" cy="1005840"/>
           </a:xfrm>
           <a:prstGeom prst="rect">
             <a:avLst/>
@@ -3734,29 +3707,400 @@
           <a:lstStyle/>
           <a:p>
             <a:pPr>
-              <a:spcAft>
-                <a:spcPts val="800"/>
-              </a:spcAft>
-              <a:defRPr sz="2000" b="1">
-                <a:solidFill>
-                  <a:srgbClr val="FFFFFF"/>
-                </a:solidFill>
-              </a:defRPr>
-            </a:pPr>
-            <a:r>
-              <a:t>🤝 We Partner</a:t>
-            </a:r>
-          </a:p>
+              <a:defRPr sz="1400">
+                <a:solidFill>
+                  <a:srgbClr val="475569"/>
+                </a:solidFill>
+              </a:defRPr>
+            </a:pPr>
+            <a:r>
+              <a:t>From simple dashboards to smart systems that learn and improve over time</a:t>
+            </a:r>
+          </a:p>
+        </p:txBody>
+      </p:sp>
+      <p:sp>
+        <p:nvSpPr>
+          <p:cNvPr id="11" name="Rounded Rectangle 10"/>
+          <p:cNvSpPr/>
+          <p:nvPr/>
+        </p:nvSpPr>
+        <p:spPr>
+          <a:xfrm>
+            <a:off x="4343400" y="3474720"/>
+            <a:ext cx="3566160" cy="1920240"/>
+          </a:xfrm>
+          <a:prstGeom prst="roundRect">
+            <a:avLst/>
+          </a:prstGeom>
+          <a:solidFill>
+            <a:srgbClr val="FFFFFF"/>
+          </a:solidFill>
+          <a:ln w="25400">
+            <a:solidFill>
+              <a:srgbClr val="4682B4"/>
+            </a:solidFill>
+          </a:ln>
+        </p:spPr>
+        <p:style>
+          <a:lnRef idx="1">
+            <a:schemeClr val="accent1"/>
+          </a:lnRef>
+          <a:fillRef idx="3">
+            <a:schemeClr val="accent1"/>
+          </a:fillRef>
+          <a:effectRef idx="2">
+            <a:schemeClr val="accent1"/>
+          </a:effectRef>
+          <a:fontRef idx="minor">
+            <a:schemeClr val="lt1"/>
+          </a:fontRef>
+        </p:style>
+        <p:txBody>
+          <a:bodyPr rtlCol="0" anchor="ctr"/>
+          <a:lstStyle/>
+          <a:p>
+            <a:pPr algn="ctr"/>
+          </a:p>
+        </p:txBody>
+      </p:sp>
+      <p:sp>
+        <p:nvSpPr>
+          <p:cNvPr id="12" name="Rectangle 11"/>
+          <p:cNvSpPr/>
+          <p:nvPr/>
+        </p:nvSpPr>
+        <p:spPr>
+          <a:xfrm>
+            <a:off x="4343400" y="3474720"/>
+            <a:ext cx="3566160" cy="109728"/>
+          </a:xfrm>
+          <a:prstGeom prst="rect">
+            <a:avLst/>
+          </a:prstGeom>
+          <a:solidFill>
+            <a:srgbClr val="4682B4"/>
+          </a:solidFill>
+          <a:ln>
+            <a:noFill/>
+          </a:ln>
+        </p:spPr>
+        <p:style>
+          <a:lnRef idx="1">
+            <a:schemeClr val="accent1"/>
+          </a:lnRef>
+          <a:fillRef idx="3">
+            <a:schemeClr val="accent1"/>
+          </a:fillRef>
+          <a:effectRef idx="2">
+            <a:schemeClr val="accent1"/>
+          </a:effectRef>
+          <a:fontRef idx="minor">
+            <a:schemeClr val="lt1"/>
+          </a:fontRef>
+        </p:style>
+        <p:txBody>
+          <a:bodyPr rtlCol="0" anchor="ctr"/>
+          <a:lstStyle/>
+          <a:p>
+            <a:pPr algn="ctr"/>
+          </a:p>
+        </p:txBody>
+      </p:sp>
+      <p:sp>
+        <p:nvSpPr>
+          <p:cNvPr id="13" name="TextBox 12"/>
+          <p:cNvSpPr txBox="1"/>
+          <p:nvPr/>
+        </p:nvSpPr>
+        <p:spPr>
+          <a:xfrm>
+            <a:off x="4526280" y="3749040"/>
+            <a:ext cx="3200400" cy="457200"/>
+          </a:xfrm>
+          <a:prstGeom prst="rect">
+            <a:avLst/>
+          </a:prstGeom>
+          <a:noFill/>
+        </p:spPr>
+        <p:txBody>
+          <a:bodyPr wrap="none">
+            <a:spAutoFit/>
+          </a:bodyPr>
+          <a:lstStyle/>
           <a:p>
             <a:pPr>
-              <a:defRPr sz="1600">
-                <a:solidFill>
-                  <a:srgbClr val="FFFFFF"/>
-                </a:solidFill>
-              </a:defRPr>
-            </a:pPr>
-            <a:r>
-              <a:t>Work alongside you to understand your challenges and create solutions that actually work</a:t>
+              <a:defRPr sz="1800" b="1">
+                <a:solidFill>
+                  <a:srgbClr val="4682B4"/>
+                </a:solidFill>
+              </a:defRPr>
+            </a:pPr>
+            <a:r>
+              <a:t>We Analyze Data</a:t>
+            </a:r>
+          </a:p>
+        </p:txBody>
+      </p:sp>
+      <p:sp>
+        <p:nvSpPr>
+          <p:cNvPr id="14" name="TextBox 13"/>
+          <p:cNvSpPr txBox="1"/>
+          <p:nvPr/>
+        </p:nvSpPr>
+        <p:spPr>
+          <a:xfrm>
+            <a:off x="4526280" y="4251960"/>
+            <a:ext cx="3200400" cy="1005840"/>
+          </a:xfrm>
+          <a:prstGeom prst="rect">
+            <a:avLst/>
+          </a:prstGeom>
+          <a:noFill/>
+        </p:spPr>
+        <p:txBody>
+          <a:bodyPr wrap="square">
+            <a:spAutoFit/>
+          </a:bodyPr>
+          <a:lstStyle/>
+          <a:p>
+            <a:pPr>
+              <a:defRPr sz="1400">
+                <a:solidFill>
+                  <a:srgbClr val="475569"/>
+                </a:solidFill>
+              </a:defRPr>
+            </a:pPr>
+            <a:r>
+              <a:t>Finding the patterns and trends hidden in your spreadsheets and databases</a:t>
+            </a:r>
+          </a:p>
+        </p:txBody>
+      </p:sp>
+      <p:sp>
+        <p:nvSpPr>
+          <p:cNvPr id="15" name="Rounded Rectangle 14"/>
+          <p:cNvSpPr/>
+          <p:nvPr/>
+        </p:nvSpPr>
+        <p:spPr>
+          <a:xfrm>
+            <a:off x="8138160" y="3474720"/>
+            <a:ext cx="3566160" cy="1920240"/>
+          </a:xfrm>
+          <a:prstGeom prst="roundRect">
+            <a:avLst/>
+          </a:prstGeom>
+          <a:solidFill>
+            <a:srgbClr val="FFFFFF"/>
+          </a:solidFill>
+          <a:ln w="25400">
+            <a:solidFill>
+              <a:srgbClr val="558B6E"/>
+            </a:solidFill>
+          </a:ln>
+        </p:spPr>
+        <p:style>
+          <a:lnRef idx="1">
+            <a:schemeClr val="accent1"/>
+          </a:lnRef>
+          <a:fillRef idx="3">
+            <a:schemeClr val="accent1"/>
+          </a:fillRef>
+          <a:effectRef idx="2">
+            <a:schemeClr val="accent1"/>
+          </a:effectRef>
+          <a:fontRef idx="minor">
+            <a:schemeClr val="lt1"/>
+          </a:fontRef>
+        </p:style>
+        <p:txBody>
+          <a:bodyPr rtlCol="0" anchor="ctr"/>
+          <a:lstStyle/>
+          <a:p>
+            <a:pPr algn="ctr"/>
+          </a:p>
+        </p:txBody>
+      </p:sp>
+      <p:sp>
+        <p:nvSpPr>
+          <p:cNvPr id="16" name="Rectangle 15"/>
+          <p:cNvSpPr/>
+          <p:nvPr/>
+        </p:nvSpPr>
+        <p:spPr>
+          <a:xfrm>
+            <a:off x="8138160" y="3474720"/>
+            <a:ext cx="3566160" cy="109728"/>
+          </a:xfrm>
+          <a:prstGeom prst="rect">
+            <a:avLst/>
+          </a:prstGeom>
+          <a:solidFill>
+            <a:srgbClr val="558B6E"/>
+          </a:solidFill>
+          <a:ln>
+            <a:noFill/>
+          </a:ln>
+        </p:spPr>
+        <p:style>
+          <a:lnRef idx="1">
+            <a:schemeClr val="accent1"/>
+          </a:lnRef>
+          <a:fillRef idx="3">
+            <a:schemeClr val="accent1"/>
+          </a:fillRef>
+          <a:effectRef idx="2">
+            <a:schemeClr val="accent1"/>
+          </a:effectRef>
+          <a:fontRef idx="minor">
+            <a:schemeClr val="lt1"/>
+          </a:fontRef>
+        </p:style>
+        <p:txBody>
+          <a:bodyPr rtlCol="0" anchor="ctr"/>
+          <a:lstStyle/>
+          <a:p>
+            <a:pPr algn="ctr"/>
+          </a:p>
+        </p:txBody>
+      </p:sp>
+      <p:sp>
+        <p:nvSpPr>
+          <p:cNvPr id="17" name="TextBox 16"/>
+          <p:cNvSpPr txBox="1"/>
+          <p:nvPr/>
+        </p:nvSpPr>
+        <p:spPr>
+          <a:xfrm>
+            <a:off x="8321040" y="3749040"/>
+            <a:ext cx="3200400" cy="457200"/>
+          </a:xfrm>
+          <a:prstGeom prst="rect">
+            <a:avLst/>
+          </a:prstGeom>
+          <a:noFill/>
+        </p:spPr>
+        <p:txBody>
+          <a:bodyPr wrap="none">
+            <a:spAutoFit/>
+          </a:bodyPr>
+          <a:lstStyle/>
+          <a:p>
+            <a:pPr>
+              <a:defRPr sz="1800" b="1">
+                <a:solidFill>
+                  <a:srgbClr val="558B6E"/>
+                </a:solidFill>
+              </a:defRPr>
+            </a:pPr>
+            <a:r>
+              <a:t>We Solve Problems</a:t>
+            </a:r>
+          </a:p>
+        </p:txBody>
+      </p:sp>
+      <p:sp>
+        <p:nvSpPr>
+          <p:cNvPr id="18" name="TextBox 17"/>
+          <p:cNvSpPr txBox="1"/>
+          <p:nvPr/>
+        </p:nvSpPr>
+        <p:spPr>
+          <a:xfrm>
+            <a:off x="8321040" y="4251960"/>
+            <a:ext cx="3200400" cy="1005840"/>
+          </a:xfrm>
+          <a:prstGeom prst="rect">
+            <a:avLst/>
+          </a:prstGeom>
+          <a:noFill/>
+        </p:spPr>
+        <p:txBody>
+          <a:bodyPr wrap="square">
+            <a:spAutoFit/>
+          </a:bodyPr>
+          <a:lstStyle/>
+          <a:p>
+            <a:pPr>
+              <a:defRPr sz="1400">
+                <a:solidFill>
+                  <a:srgbClr val="475569"/>
+                </a:solidFill>
+              </a:defRPr>
+            </a:pPr>
+            <a:r>
+              <a:t>Working alongside you to tackle challenges with the right technology</a:t>
+            </a:r>
+          </a:p>
+        </p:txBody>
+      </p:sp>
+      <p:sp>
+        <p:nvSpPr>
+          <p:cNvPr id="19" name="TextBox 18"/>
+          <p:cNvSpPr txBox="1"/>
+          <p:nvPr/>
+        </p:nvSpPr>
+        <p:spPr>
+          <a:xfrm>
+            <a:off x="548640" y="5669280"/>
+            <a:ext cx="10972800" cy="548640"/>
+          </a:xfrm>
+          <a:prstGeom prst="rect">
+            <a:avLst/>
+          </a:prstGeom>
+          <a:noFill/>
+        </p:spPr>
+        <p:txBody>
+          <a:bodyPr wrap="none">
+            <a:spAutoFit/>
+          </a:bodyPr>
+          <a:lstStyle/>
+          <a:p>
+            <a:pPr algn="ctr">
+              <a:defRPr sz="1500" i="1">
+                <a:solidFill>
+                  <a:srgbClr val="64748B"/>
+                </a:solidFill>
+              </a:defRPr>
+            </a:pPr>
+            <a:r>
+              <a:t>Computer science + data science backgrounds → Real-world solutions for your team</a:t>
+            </a:r>
+          </a:p>
+        </p:txBody>
+      </p:sp>
+      <p:sp>
+        <p:nvSpPr>
+          <p:cNvPr id="20" name="TextBox 19"/>
+          <p:cNvSpPr txBox="1"/>
+          <p:nvPr/>
+        </p:nvSpPr>
+        <p:spPr>
+          <a:xfrm>
+            <a:off x="457200" y="6492240"/>
+            <a:ext cx="3657600" cy="274320"/>
+          </a:xfrm>
+          <a:prstGeom prst="rect">
+            <a:avLst/>
+          </a:prstGeom>
+          <a:noFill/>
+        </p:spPr>
+        <p:txBody>
+          <a:bodyPr wrap="none">
+            <a:spAutoFit/>
+          </a:bodyPr>
+          <a:lstStyle/>
+          <a:p>
+            <a:pPr>
+              <a:defRPr sz="900" i="1">
+                <a:solidFill>
+                  <a:srgbClr val="64748B"/>
+                </a:solidFill>
+              </a:defRPr>
+            </a:pPr>
+            <a:r>
+              <a:t>Enterprise Analytics and AI</a:t>
             </a:r>
           </a:p>
         </p:txBody>
@@ -3781,90 +4125,20 @@
       <p:grpSpPr/>
       <p:sp>
         <p:nvSpPr>
-          <p:cNvPr id="2" name="TextBox 1"/>
-          <p:cNvSpPr txBox="1"/>
-          <p:nvPr/>
-        </p:nvSpPr>
-        <p:spPr>
-          <a:xfrm>
-            <a:off x="457200" y="274320"/>
-            <a:ext cx="11277295" cy="914400"/>
-          </a:xfrm>
-          <a:prstGeom prst="rect">
-            <a:avLst/>
-          </a:prstGeom>
-          <a:noFill/>
-        </p:spPr>
-        <p:txBody>
-          <a:bodyPr wrap="square">
-            <a:spAutoFit/>
-          </a:bodyPr>
-          <a:lstStyle/>
-          <a:p>
-            <a:pPr algn="l">
-              <a:defRPr sz="4400" b="1">
-                <a:solidFill>
-                  <a:srgbClr val="005293"/>
-                </a:solidFill>
-              </a:defRPr>
-            </a:pPr>
-            <a:r>
-              <a:t>How We Work With You</a:t>
-            </a:r>
-          </a:p>
-        </p:txBody>
-      </p:sp>
-      <p:sp>
-        <p:nvSpPr>
-          <p:cNvPr id="3" name="TextBox 2"/>
-          <p:cNvSpPr txBox="1"/>
-          <p:nvPr/>
-        </p:nvSpPr>
-        <p:spPr>
-          <a:xfrm>
-            <a:off x="457200" y="1005840"/>
-            <a:ext cx="10972800" cy="548640"/>
-          </a:xfrm>
-          <a:prstGeom prst="rect">
-            <a:avLst/>
-          </a:prstGeom>
-          <a:noFill/>
-        </p:spPr>
-        <p:txBody>
-          <a:bodyPr wrap="none">
-            <a:spAutoFit/>
-          </a:bodyPr>
-          <a:lstStyle/>
-          <a:p>
-            <a:pPr>
-              <a:defRPr sz="1800">
-                <a:solidFill>
-                  <a:srgbClr val="3C3C3C"/>
-                </a:solidFill>
-              </a:defRPr>
-            </a:pPr>
-            <a:r>
-              <a:t>We're a shared resource that amplifies your team's capabilities — not a replacement</a:t>
-            </a:r>
-          </a:p>
-        </p:txBody>
-      </p:sp>
-      <p:sp>
-        <p:nvSpPr>
-          <p:cNvPr id="4" name="Oval 3"/>
+          <p:cNvPr id="2" name="Rectangle 1"/>
           <p:cNvSpPr/>
           <p:nvPr/>
         </p:nvSpPr>
         <p:spPr>
           <a:xfrm>
-            <a:off x="5089550" y="2651760"/>
-            <a:ext cx="2011680" cy="2011680"/>
-          </a:xfrm>
-          <a:prstGeom prst="ellipse">
+            <a:off x="0" y="0"/>
+            <a:ext cx="12191695" cy="6858000"/>
+          </a:xfrm>
+          <a:prstGeom prst="rect">
             <a:avLst/>
           </a:prstGeom>
           <a:solidFill>
-            <a:srgbClr val="005293"/>
+            <a:srgbClr val="FFFFFF"/>
           </a:solidFill>
           <a:ln>
             <a:noFill/>
@@ -3894,14 +4168,170 @@
       </p:sp>
       <p:sp>
         <p:nvSpPr>
+          <p:cNvPr id="3" name="Rectangle 2"/>
+          <p:cNvSpPr/>
+          <p:nvPr/>
+        </p:nvSpPr>
+        <p:spPr>
+          <a:xfrm>
+            <a:off x="0" y="0"/>
+            <a:ext cx="12191695" cy="1188720"/>
+          </a:xfrm>
+          <a:prstGeom prst="rect">
+            <a:avLst/>
+          </a:prstGeom>
+          <a:solidFill>
+            <a:srgbClr val="172A45"/>
+          </a:solidFill>
+          <a:ln>
+            <a:noFill/>
+          </a:ln>
+        </p:spPr>
+        <p:style>
+          <a:lnRef idx="1">
+            <a:schemeClr val="accent1"/>
+          </a:lnRef>
+          <a:fillRef idx="3">
+            <a:schemeClr val="accent1"/>
+          </a:fillRef>
+          <a:effectRef idx="2">
+            <a:schemeClr val="accent1"/>
+          </a:effectRef>
+          <a:fontRef idx="minor">
+            <a:schemeClr val="lt1"/>
+          </a:fontRef>
+        </p:style>
+        <p:txBody>
+          <a:bodyPr rtlCol="0" anchor="ctr"/>
+          <a:lstStyle/>
+          <a:p>
+            <a:pPr algn="ctr"/>
+          </a:p>
+        </p:txBody>
+      </p:sp>
+      <p:sp>
+        <p:nvSpPr>
+          <p:cNvPr id="4" name="TextBox 3"/>
+          <p:cNvSpPr txBox="1"/>
+          <p:nvPr/>
+        </p:nvSpPr>
+        <p:spPr>
+          <a:xfrm>
+            <a:off x="731520" y="320040"/>
+            <a:ext cx="10728655" cy="731520"/>
+          </a:xfrm>
+          <a:prstGeom prst="rect">
+            <a:avLst/>
+          </a:prstGeom>
+          <a:noFill/>
+        </p:spPr>
+        <p:txBody>
+          <a:bodyPr wrap="none">
+            <a:spAutoFit/>
+          </a:bodyPr>
+          <a:lstStyle/>
+          <a:p>
+            <a:pPr>
+              <a:defRPr sz="3600" b="1">
+                <a:solidFill>
+                  <a:srgbClr val="FFFFFF"/>
+                </a:solidFill>
+              </a:defRPr>
+            </a:pPr>
+            <a:r>
+              <a:t>How We Work With You</a:t>
+            </a:r>
+          </a:p>
+        </p:txBody>
+      </p:sp>
+      <p:sp>
+        <p:nvSpPr>
           <p:cNvPr id="5" name="TextBox 4"/>
           <p:cNvSpPr txBox="1"/>
           <p:nvPr/>
         </p:nvSpPr>
         <p:spPr>
           <a:xfrm>
-            <a:off x="5226710" y="3291840"/>
-            <a:ext cx="1737360" cy="731520"/>
+            <a:off x="731520" y="1371600"/>
+            <a:ext cx="10515600" cy="457200"/>
+          </a:xfrm>
+          <a:prstGeom prst="rect">
+            <a:avLst/>
+          </a:prstGeom>
+          <a:noFill/>
+        </p:spPr>
+        <p:txBody>
+          <a:bodyPr wrap="none">
+            <a:spAutoFit/>
+          </a:bodyPr>
+          <a:lstStyle/>
+          <a:p>
+            <a:pPr>
+              <a:defRPr sz="1600">
+                <a:solidFill>
+                  <a:srgbClr val="64748B"/>
+                </a:solidFill>
+              </a:defRPr>
+            </a:pPr>
+            <a:r>
+              <a:t>A shared resource that amplifies your capabilities — we don't replace your expertise, we enhance it</a:t>
+            </a:r>
+          </a:p>
+        </p:txBody>
+      </p:sp>
+      <p:sp>
+        <p:nvSpPr>
+          <p:cNvPr id="6" name="Oval 5"/>
+          <p:cNvSpPr/>
+          <p:nvPr/>
+        </p:nvSpPr>
+        <p:spPr>
+          <a:xfrm>
+            <a:off x="5272430" y="3108960"/>
+            <a:ext cx="1645920" cy="1645920"/>
+          </a:xfrm>
+          <a:prstGeom prst="ellipse">
+            <a:avLst/>
+          </a:prstGeom>
+          <a:solidFill>
+            <a:srgbClr val="172A45"/>
+          </a:solidFill>
+          <a:ln>
+            <a:noFill/>
+          </a:ln>
+        </p:spPr>
+        <p:style>
+          <a:lnRef idx="1">
+            <a:schemeClr val="accent1"/>
+          </a:lnRef>
+          <a:fillRef idx="3">
+            <a:schemeClr val="accent1"/>
+          </a:fillRef>
+          <a:effectRef idx="2">
+            <a:schemeClr val="accent1"/>
+          </a:effectRef>
+          <a:fontRef idx="minor">
+            <a:schemeClr val="lt1"/>
+          </a:fontRef>
+        </p:style>
+        <p:txBody>
+          <a:bodyPr rtlCol="0" anchor="ctr"/>
+          <a:lstStyle/>
+          <a:p>
+            <a:pPr algn="ctr"/>
+          </a:p>
+        </p:txBody>
+      </p:sp>
+      <p:sp>
+        <p:nvSpPr>
+          <p:cNvPr id="7" name="TextBox 6"/>
+          <p:cNvSpPr txBox="1"/>
+          <p:nvPr/>
+        </p:nvSpPr>
+        <p:spPr>
+          <a:xfrm>
+            <a:off x="5409590" y="3611880"/>
+            <a:ext cx="1371600" cy="640080"/>
           </a:xfrm>
           <a:prstGeom prst="rect">
             <a:avLst/>
@@ -3915,35 +4345,39 @@
           <a:lstStyle/>
           <a:p>
             <a:pPr algn="ctr">
-              <a:defRPr sz="1400" b="1">
+              <a:defRPr sz="1100" b="1">
                 <a:solidFill>
                   <a:srgbClr val="FFFFFF"/>
                 </a:solidFill>
               </a:defRPr>
             </a:pPr>
             <a:r>
-              <a:t>Enterprise Analytics &amp; AI</a:t>
+              <a:t>Enterprise</a:t>
+            </a:r>
+            <a:br/>
+            <a:r>
+              <a:t>Analytics &amp; AI</a:t>
             </a:r>
           </a:p>
         </p:txBody>
       </p:sp>
       <p:cxnSp>
         <p:nvCxnSpPr>
-          <p:cNvPr id="6" name="Connector 5"/>
+          <p:cNvPr id="8" name="Connector 7"/>
           <p:cNvCxnSpPr/>
           <p:nvPr/>
         </p:nvCxnSpPr>
         <p:spPr>
           <a:xfrm>
-            <a:off x="2971800.0" y="2514600.0"/>
-            <a:ext cx="3123590.0" cy="1143000.0"/>
+            <a:off x="6095390.0" y="1828800.0"/>
+            <a:ext cx="0.0" cy="2103120.0"/>
           </a:xfrm>
           <a:prstGeom prst="line">
             <a:avLst/>
           </a:prstGeom>
           <a:ln w="25400">
             <a:solidFill>
-              <a:srgbClr val="B4C8DC"/>
+              <a:srgbClr val="C8D7E6"/>
             </a:solidFill>
           </a:ln>
         </p:spPr>
@@ -3964,20 +4398,20 @@
       </p:cxnSp>
       <p:sp>
         <p:nvSpPr>
-          <p:cNvPr id="7" name="Oval 6"/>
+          <p:cNvPr id="9" name="Oval 8"/>
           <p:cNvSpPr/>
           <p:nvPr/>
         </p:nvSpPr>
         <p:spPr>
           <a:xfrm>
-            <a:off x="2286000" y="1828800"/>
-            <a:ext cx="1371600" cy="1371600"/>
+            <a:off x="5546750" y="1280160"/>
+            <a:ext cx="1097280" cy="1097280"/>
           </a:xfrm>
           <a:prstGeom prst="ellipse">
             <a:avLst/>
           </a:prstGeom>
           <a:solidFill>
-            <a:srgbClr val="009688"/>
+            <a:srgbClr val="008080"/>
           </a:solidFill>
           <a:ln>
             <a:noFill/>
@@ -4007,14 +4441,14 @@
       </p:sp>
       <p:sp>
         <p:nvSpPr>
-          <p:cNvPr id="8" name="TextBox 7"/>
+          <p:cNvPr id="10" name="TextBox 9"/>
           <p:cNvSpPr txBox="1"/>
           <p:nvPr/>
         </p:nvSpPr>
         <p:spPr>
           <a:xfrm>
-            <a:off x="2377440" y="2240280"/>
-            <a:ext cx="1188720" cy="548640"/>
+            <a:off x="5638190" y="1600200"/>
+            <a:ext cx="914400" cy="457200"/>
           </a:xfrm>
           <a:prstGeom prst="rect">
             <a:avLst/>
@@ -4028,7 +4462,7 @@
           <a:lstStyle/>
           <a:p>
             <a:pPr algn="ctr">
-              <a:defRPr sz="1200" b="1">
+              <a:defRPr sz="1000" b="1">
                 <a:solidFill>
                   <a:srgbClr val="FFFFFF"/>
                 </a:solidFill>
@@ -4046,21 +4480,21 @@
       </p:sp>
       <p:cxnSp>
         <p:nvCxnSpPr>
-          <p:cNvPr id="9" name="Connector 8"/>
+          <p:cNvPr id="11" name="Connector 10"/>
           <p:cNvCxnSpPr/>
           <p:nvPr/>
         </p:nvCxnSpPr>
         <p:spPr>
           <a:xfrm flipH="1">
-            <a:off x="6095390" y="2514600.0"/>
-            <a:ext cx="3734410.0" cy="1143000.0"/>
+            <a:off x="6095390" y="2880360.0"/>
+            <a:ext cx="1821355.347207129" cy="1051560.0"/>
           </a:xfrm>
           <a:prstGeom prst="line">
             <a:avLst/>
           </a:prstGeom>
           <a:ln w="25400">
             <a:solidFill>
-              <a:srgbClr val="B4C8DC"/>
+              <a:srgbClr val="C8D7E6"/>
             </a:solidFill>
           </a:ln>
         </p:spPr>
@@ -4081,20 +4515,20 @@
       </p:cxnSp>
       <p:sp>
         <p:nvSpPr>
-          <p:cNvPr id="10" name="Oval 9"/>
+          <p:cNvPr id="12" name="Oval 11"/>
           <p:cNvSpPr/>
           <p:nvPr/>
         </p:nvSpPr>
         <p:spPr>
           <a:xfrm>
-            <a:off x="9144000" y="1828800"/>
-            <a:ext cx="1371600" cy="1371600"/>
+            <a:off x="7368105" y="2331720"/>
+            <a:ext cx="1097280" cy="1097280"/>
           </a:xfrm>
           <a:prstGeom prst="ellipse">
             <a:avLst/>
           </a:prstGeom>
           <a:solidFill>
-            <a:srgbClr val="009688"/>
+            <a:srgbClr val="008080"/>
           </a:solidFill>
           <a:ln>
             <a:noFill/>
@@ -4124,14 +4558,14 @@
       </p:sp>
       <p:sp>
         <p:nvSpPr>
-          <p:cNvPr id="11" name="TextBox 10"/>
+          <p:cNvPr id="13" name="TextBox 12"/>
           <p:cNvSpPr txBox="1"/>
           <p:nvPr/>
         </p:nvSpPr>
         <p:spPr>
           <a:xfrm>
-            <a:off x="9235440" y="2240280"/>
-            <a:ext cx="1188720" cy="548640"/>
+            <a:off x="7459545" y="2651760"/>
+            <a:ext cx="914400" cy="457200"/>
           </a:xfrm>
           <a:prstGeom prst="rect">
             <a:avLst/>
@@ -4145,7 +4579,7 @@
           <a:lstStyle/>
           <a:p>
             <a:pPr algn="ctr">
-              <a:defRPr sz="1200" b="1">
+              <a:defRPr sz="1000" b="1">
                 <a:solidFill>
                   <a:srgbClr val="FFFFFF"/>
                 </a:solidFill>
@@ -4159,21 +4593,21 @@
       </p:sp>
       <p:cxnSp>
         <p:nvCxnSpPr>
-          <p:cNvPr id="12" name="Connector 11"/>
+          <p:cNvPr id="14" name="Connector 13"/>
           <p:cNvCxnSpPr/>
           <p:nvPr/>
         </p:nvCxnSpPr>
         <p:spPr>
           <a:xfrm flipH="1" flipV="1">
-            <a:off x="6095390" y="3657600"/>
-            <a:ext cx="4191610.0" cy="1600200.0"/>
+            <a:off x="6095390" y="3931920"/>
+            <a:ext cx="1821355.347207129" cy="1051560.0"/>
           </a:xfrm>
           <a:prstGeom prst="line">
             <a:avLst/>
           </a:prstGeom>
           <a:ln w="25400">
             <a:solidFill>
-              <a:srgbClr val="B4C8DC"/>
+              <a:srgbClr val="C8D7E6"/>
             </a:solidFill>
           </a:ln>
         </p:spPr>
@@ -4194,20 +4628,20 @@
       </p:cxnSp>
       <p:sp>
         <p:nvSpPr>
-          <p:cNvPr id="13" name="Oval 12"/>
+          <p:cNvPr id="15" name="Oval 14"/>
           <p:cNvSpPr/>
           <p:nvPr/>
         </p:nvSpPr>
         <p:spPr>
           <a:xfrm>
-            <a:off x="9601200" y="4572000"/>
-            <a:ext cx="1371600" cy="1371600"/>
+            <a:off x="7368105" y="4434840"/>
+            <a:ext cx="1097280" cy="1097280"/>
           </a:xfrm>
           <a:prstGeom prst="ellipse">
             <a:avLst/>
           </a:prstGeom>
           <a:solidFill>
-            <a:srgbClr val="009688"/>
+            <a:srgbClr val="008080"/>
           </a:solidFill>
           <a:ln>
             <a:noFill/>
@@ -4237,14 +4671,14 @@
       </p:sp>
       <p:sp>
         <p:nvSpPr>
-          <p:cNvPr id="14" name="TextBox 13"/>
+          <p:cNvPr id="16" name="TextBox 15"/>
           <p:cNvSpPr txBox="1"/>
           <p:nvPr/>
         </p:nvSpPr>
         <p:spPr>
           <a:xfrm>
-            <a:off x="9692640" y="4983480"/>
-            <a:ext cx="1188720" cy="548640"/>
+            <a:off x="7459545" y="4754880"/>
+            <a:ext cx="914400" cy="457200"/>
           </a:xfrm>
           <a:prstGeom prst="rect">
             <a:avLst/>
@@ -4258,7 +4692,7 @@
           <a:lstStyle/>
           <a:p>
             <a:pPr algn="ctr">
-              <a:defRPr sz="1200" b="1">
+              <a:defRPr sz="1000" b="1">
                 <a:solidFill>
                   <a:srgbClr val="FFFFFF"/>
                 </a:solidFill>
@@ -4272,21 +4706,21 @@
       </p:sp>
       <p:cxnSp>
         <p:nvCxnSpPr>
-          <p:cNvPr id="15" name="Connector 14"/>
+          <p:cNvPr id="17" name="Connector 16"/>
           <p:cNvCxnSpPr/>
           <p:nvPr/>
         </p:nvCxnSpPr>
         <p:spPr>
           <a:xfrm flipV="1">
-            <a:off x="2514600.0" y="3657600"/>
-            <a:ext cx="3580790.0" cy="1783080.0"/>
+            <a:off x="6095390.0" y="3931920"/>
+            <a:ext cx="0.0" cy="2103120.0"/>
           </a:xfrm>
           <a:prstGeom prst="line">
             <a:avLst/>
           </a:prstGeom>
           <a:ln w="25400">
             <a:solidFill>
-              <a:srgbClr val="B4C8DC"/>
+              <a:srgbClr val="C8D7E6"/>
             </a:solidFill>
           </a:ln>
         </p:spPr>
@@ -4307,20 +4741,20 @@
       </p:cxnSp>
       <p:sp>
         <p:nvSpPr>
-          <p:cNvPr id="16" name="Oval 15"/>
+          <p:cNvPr id="18" name="Oval 17"/>
           <p:cNvSpPr/>
           <p:nvPr/>
         </p:nvSpPr>
         <p:spPr>
           <a:xfrm>
-            <a:off x="1828800" y="4754880"/>
-            <a:ext cx="1371600" cy="1371600"/>
+            <a:off x="5546750" y="5486400"/>
+            <a:ext cx="1097280" cy="1097280"/>
           </a:xfrm>
           <a:prstGeom prst="ellipse">
             <a:avLst/>
           </a:prstGeom>
           <a:solidFill>
-            <a:srgbClr val="009688"/>
+            <a:srgbClr val="008080"/>
           </a:solidFill>
           <a:ln>
             <a:noFill/>
@@ -4350,14 +4784,14 @@
       </p:sp>
       <p:sp>
         <p:nvSpPr>
-          <p:cNvPr id="17" name="TextBox 16"/>
+          <p:cNvPr id="19" name="TextBox 18"/>
           <p:cNvSpPr txBox="1"/>
           <p:nvPr/>
         </p:nvSpPr>
         <p:spPr>
           <a:xfrm>
-            <a:off x="1920240" y="5166360"/>
-            <a:ext cx="1188720" cy="548640"/>
+            <a:off x="5638190" y="5806440"/>
+            <a:ext cx="914400" cy="457200"/>
           </a:xfrm>
           <a:prstGeom prst="rect">
             <a:avLst/>
@@ -4371,7 +4805,7 @@
           <a:lstStyle/>
           <a:p>
             <a:pPr algn="ctr">
-              <a:defRPr sz="1200" b="1">
+              <a:defRPr sz="1000" b="1">
                 <a:solidFill>
                   <a:srgbClr val="FFFFFF"/>
                 </a:solidFill>
@@ -4385,21 +4819,21 @@
       </p:sp>
       <p:cxnSp>
         <p:nvCxnSpPr>
-          <p:cNvPr id="18" name="Connector 17"/>
+          <p:cNvPr id="20" name="Connector 19"/>
           <p:cNvCxnSpPr/>
           <p:nvPr/>
         </p:nvCxnSpPr>
         <p:spPr>
           <a:xfrm flipV="1">
-            <a:off x="5715000.0" y="3657600"/>
-            <a:ext cx="380390.0" cy="2788920.0"/>
+            <a:off x="4274034.652792871" y="3931920"/>
+            <a:ext cx="1821355.347207129" cy="1051560.0"/>
           </a:xfrm>
           <a:prstGeom prst="line">
             <a:avLst/>
           </a:prstGeom>
           <a:ln w="25400">
             <a:solidFill>
-              <a:srgbClr val="B4C8DC"/>
+              <a:srgbClr val="C8D7E6"/>
             </a:solidFill>
           </a:ln>
         </p:spPr>
@@ -4420,20 +4854,20 @@
       </p:cxnSp>
       <p:sp>
         <p:nvSpPr>
-          <p:cNvPr id="19" name="Oval 18"/>
+          <p:cNvPr id="21" name="Oval 20"/>
           <p:cNvSpPr/>
           <p:nvPr/>
         </p:nvSpPr>
         <p:spPr>
           <a:xfrm>
-            <a:off x="5029200" y="5760720"/>
-            <a:ext cx="1371600" cy="1371600"/>
+            <a:off x="3725394" y="4434840"/>
+            <a:ext cx="1097280" cy="1097280"/>
           </a:xfrm>
           <a:prstGeom prst="ellipse">
             <a:avLst/>
           </a:prstGeom>
           <a:solidFill>
-            <a:srgbClr val="009688"/>
+            <a:srgbClr val="008080"/>
           </a:solidFill>
           <a:ln>
             <a:noFill/>
@@ -4463,14 +4897,14 @@
       </p:sp>
       <p:sp>
         <p:nvSpPr>
-          <p:cNvPr id="20" name="TextBox 19"/>
+          <p:cNvPr id="22" name="TextBox 21"/>
           <p:cNvSpPr txBox="1"/>
           <p:nvPr/>
         </p:nvSpPr>
         <p:spPr>
           <a:xfrm>
-            <a:off x="5120640" y="6172200"/>
-            <a:ext cx="1188720" cy="548640"/>
+            <a:off x="3816834" y="4754880"/>
+            <a:ext cx="914400" cy="457200"/>
           </a:xfrm>
           <a:prstGeom prst="rect">
             <a:avLst/>
@@ -4484,7 +4918,7 @@
           <a:lstStyle/>
           <a:p>
             <a:pPr algn="ctr">
-              <a:defRPr sz="1200" b="1">
+              <a:defRPr sz="1000" b="1">
                 <a:solidFill>
                   <a:srgbClr val="FFFFFF"/>
                 </a:solidFill>
@@ -4498,21 +4932,21 @@
       </p:sp>
       <p:cxnSp>
         <p:nvCxnSpPr>
-          <p:cNvPr id="21" name="Connector 20"/>
+          <p:cNvPr id="23" name="Connector 22"/>
           <p:cNvCxnSpPr/>
           <p:nvPr/>
         </p:nvCxnSpPr>
         <p:spPr>
-          <a:xfrm flipH="1" flipV="1">
-            <a:off x="6095390" y="3657600"/>
-            <a:ext cx="1448410.0" cy="2788920.0"/>
+          <a:xfrm>
+            <a:off x="4274034.652792871" y="2880360.0"/>
+            <a:ext cx="1821355.347207129" cy="1051560.0"/>
           </a:xfrm>
           <a:prstGeom prst="line">
             <a:avLst/>
           </a:prstGeom>
           <a:ln w="25400">
             <a:solidFill>
-              <a:srgbClr val="B4C8DC"/>
+              <a:srgbClr val="C8D7E6"/>
             </a:solidFill>
           </a:ln>
         </p:spPr>
@@ -4533,20 +4967,20 @@
       </p:cxnSp>
       <p:sp>
         <p:nvSpPr>
-          <p:cNvPr id="22" name="Oval 21"/>
+          <p:cNvPr id="24" name="Oval 23"/>
           <p:cNvSpPr/>
           <p:nvPr/>
         </p:nvSpPr>
         <p:spPr>
           <a:xfrm>
-            <a:off x="6858000" y="5760720"/>
-            <a:ext cx="1371600" cy="1371600"/>
+            <a:off x="3725394" y="2331720"/>
+            <a:ext cx="1097280" cy="1097280"/>
           </a:xfrm>
           <a:prstGeom prst="ellipse">
             <a:avLst/>
           </a:prstGeom>
           <a:solidFill>
-            <a:srgbClr val="009688"/>
+            <a:srgbClr val="008080"/>
           </a:solidFill>
           <a:ln>
             <a:noFill/>
@@ -4576,14 +5010,14 @@
       </p:sp>
       <p:sp>
         <p:nvSpPr>
-          <p:cNvPr id="23" name="TextBox 22"/>
+          <p:cNvPr id="25" name="TextBox 24"/>
           <p:cNvSpPr txBox="1"/>
           <p:nvPr/>
         </p:nvSpPr>
         <p:spPr>
           <a:xfrm>
-            <a:off x="6949440" y="6172200"/>
-            <a:ext cx="1188720" cy="548640"/>
+            <a:off x="3816834" y="2651760"/>
+            <a:ext cx="914400" cy="457200"/>
           </a:xfrm>
           <a:prstGeom prst="rect">
             <a:avLst/>
@@ -4597,7 +5031,7 @@
           <a:lstStyle/>
           <a:p>
             <a:pPr algn="ctr">
-              <a:defRPr sz="1200" b="1">
+              <a:defRPr sz="1000" b="1">
                 <a:solidFill>
                   <a:srgbClr val="FFFFFF"/>
                 </a:solidFill>
@@ -4611,24 +5045,24 @@
       </p:sp>
       <p:sp>
         <p:nvSpPr>
-          <p:cNvPr id="24" name="Rounded Rectangle 23"/>
+          <p:cNvPr id="26" name="Rounded Rectangle 25"/>
           <p:cNvSpPr/>
           <p:nvPr/>
         </p:nvSpPr>
         <p:spPr>
           <a:xfrm>
-            <a:off x="457200" y="1463040"/>
-            <a:ext cx="3474720" cy="822960"/>
+            <a:off x="457200" y="2103120"/>
+            <a:ext cx="3017520" cy="2011680"/>
           </a:xfrm>
           <a:prstGeom prst="roundRect">
             <a:avLst/>
           </a:prstGeom>
           <a:solidFill>
-            <a:srgbClr val="E8F5E9"/>
+            <a:srgbClr val="F0FDFA"/>
           </a:solidFill>
-          <a:ln>
+          <a:ln w="12700">
             <a:solidFill>
-              <a:srgbClr val="009688"/>
+              <a:srgbClr val="558B6E"/>
             </a:solidFill>
           </a:ln>
         </p:spPr>
@@ -4656,14 +5090,14 @@
       </p:sp>
       <p:sp>
         <p:nvSpPr>
-          <p:cNvPr id="25" name="TextBox 24"/>
+          <p:cNvPr id="27" name="TextBox 26"/>
           <p:cNvSpPr txBox="1"/>
           <p:nvPr/>
         </p:nvSpPr>
         <p:spPr>
           <a:xfrm>
-            <a:off x="640080" y="1600200"/>
-            <a:ext cx="3108960" cy="640080"/>
+            <a:off x="640080" y="2286000"/>
+            <a:ext cx="2651760" cy="548640"/>
           </a:xfrm>
           <a:prstGeom prst="rect">
             <a:avLst/>
@@ -4677,38 +5111,108 @@
           <a:lstStyle/>
           <a:p>
             <a:pPr>
-              <a:defRPr sz="1400">
-                <a:solidFill>
-                  <a:srgbClr val="3C3C3C"/>
-                </a:solidFill>
-              </a:defRPr>
-            </a:pPr>
-            <a:r>
-              <a:t>✓ You keep your domain expertise</a:t>
-            </a:r>
-          </a:p>
-        </p:txBody>
-      </p:sp>
-      <p:sp>
-        <p:nvSpPr>
-          <p:cNvPr id="26" name="Rounded Rectangle 25"/>
+              <a:defRPr sz="1300">
+                <a:solidFill>
+                  <a:srgbClr val="475569"/>
+                </a:solidFill>
+              </a:defRPr>
+            </a:pPr>
+            <a:r>
+              <a:t>✓ You remain the expert in your domain</a:t>
+            </a:r>
+          </a:p>
+        </p:txBody>
+      </p:sp>
+      <p:sp>
+        <p:nvSpPr>
+          <p:cNvPr id="28" name="TextBox 27"/>
+          <p:cNvSpPr txBox="1"/>
+          <p:nvPr/>
+        </p:nvSpPr>
+        <p:spPr>
+          <a:xfrm>
+            <a:off x="640080" y="2880360"/>
+            <a:ext cx="2651760" cy="548640"/>
+          </a:xfrm>
+          <a:prstGeom prst="rect">
+            <a:avLst/>
+          </a:prstGeom>
+          <a:noFill/>
+        </p:spPr>
+        <p:txBody>
+          <a:bodyPr wrap="square">
+            <a:spAutoFit/>
+          </a:bodyPr>
+          <a:lstStyle/>
+          <a:p>
+            <a:pPr>
+              <a:defRPr sz="1300">
+                <a:solidFill>
+                  <a:srgbClr val="475569"/>
+                </a:solidFill>
+              </a:defRPr>
+            </a:pPr>
+            <a:r>
+              <a:t>✓ We add technology capabilities</a:t>
+            </a:r>
+          </a:p>
+        </p:txBody>
+      </p:sp>
+      <p:sp>
+        <p:nvSpPr>
+          <p:cNvPr id="29" name="TextBox 28"/>
+          <p:cNvSpPr txBox="1"/>
+          <p:nvPr/>
+        </p:nvSpPr>
+        <p:spPr>
+          <a:xfrm>
+            <a:off x="640080" y="3474720"/>
+            <a:ext cx="2651760" cy="548640"/>
+          </a:xfrm>
+          <a:prstGeom prst="rect">
+            <a:avLst/>
+          </a:prstGeom>
+          <a:noFill/>
+        </p:spPr>
+        <p:txBody>
+          <a:bodyPr wrap="square">
+            <a:spAutoFit/>
+          </a:bodyPr>
+          <a:lstStyle/>
+          <a:p>
+            <a:pPr>
+              <a:defRPr sz="1300">
+                <a:solidFill>
+                  <a:srgbClr val="475569"/>
+                </a:solidFill>
+              </a:defRPr>
+            </a:pPr>
+            <a:r>
+              <a:t>✓ Solutions built for your actual needs</a:t>
+            </a:r>
+          </a:p>
+        </p:txBody>
+      </p:sp>
+      <p:sp>
+        <p:nvSpPr>
+          <p:cNvPr id="30" name="Rounded Rectangle 29"/>
           <p:cNvSpPr/>
           <p:nvPr/>
         </p:nvSpPr>
         <p:spPr>
           <a:xfrm>
-            <a:off x="4114800" y="1463040"/>
-            <a:ext cx="3474720" cy="822960"/>
+            <a:off x="8716975" y="2103120"/>
+            <a:ext cx="3017520" cy="2011680"/>
           </a:xfrm>
           <a:prstGeom prst="roundRect">
             <a:avLst/>
           </a:prstGeom>
           <a:solidFill>
-            <a:srgbClr val="E8F5E9"/>
+            <a:srgbClr val="F0F8FF"/>
           </a:solidFill>
-          <a:ln>
+          <a:ln w="12700">
             <a:solidFill>
-              <a:srgbClr val="009688"/>
+              <a:srgbClr val="4682B4"/>
             </a:solidFill>
           </a:ln>
         </p:spPr>
@@ -4736,14 +5240,14 @@
       </p:sp>
       <p:sp>
         <p:nvSpPr>
-          <p:cNvPr id="27" name="TextBox 26"/>
+          <p:cNvPr id="31" name="TextBox 30"/>
           <p:cNvSpPr txBox="1"/>
           <p:nvPr/>
         </p:nvSpPr>
         <p:spPr>
           <a:xfrm>
-            <a:off x="4297680" y="1600200"/>
-            <a:ext cx="3108960" cy="640080"/>
+            <a:off x="8899855" y="2286000"/>
+            <a:ext cx="2651760" cy="548640"/>
           </a:xfrm>
           <a:prstGeom prst="rect">
             <a:avLst/>
@@ -4757,73 +5261,28 @@
           <a:lstStyle/>
           <a:p>
             <a:pPr>
-              <a:defRPr sz="1400">
-                <a:solidFill>
-                  <a:srgbClr val="3C3C3C"/>
-                </a:solidFill>
-              </a:defRPr>
-            </a:pPr>
-            <a:r>
-              <a:t>✓ We bring technology skills</a:t>
-            </a:r>
-          </a:p>
-        </p:txBody>
-      </p:sp>
-      <p:sp>
-        <p:nvSpPr>
-          <p:cNvPr id="28" name="Rounded Rectangle 27"/>
-          <p:cNvSpPr/>
-          <p:nvPr/>
-        </p:nvSpPr>
-        <p:spPr>
-          <a:xfrm>
-            <a:off x="7772400" y="1463040"/>
-            <a:ext cx="3931920" cy="822960"/>
-          </a:xfrm>
-          <a:prstGeom prst="roundRect">
-            <a:avLst/>
-          </a:prstGeom>
-          <a:solidFill>
-            <a:srgbClr val="E8F5E9"/>
-          </a:solidFill>
-          <a:ln>
-            <a:solidFill>
-              <a:srgbClr val="009688"/>
-            </a:solidFill>
-          </a:ln>
-        </p:spPr>
-        <p:style>
-          <a:lnRef idx="1">
-            <a:schemeClr val="accent1"/>
-          </a:lnRef>
-          <a:fillRef idx="3">
-            <a:schemeClr val="accent1"/>
-          </a:fillRef>
-          <a:effectRef idx="2">
-            <a:schemeClr val="accent1"/>
-          </a:effectRef>
-          <a:fontRef idx="minor">
-            <a:schemeClr val="lt1"/>
-          </a:fontRef>
-        </p:style>
-        <p:txBody>
-          <a:bodyPr rtlCol="0" anchor="ctr"/>
-          <a:lstStyle/>
-          <a:p>
-            <a:pPr algn="ctr"/>
-          </a:p>
-        </p:txBody>
-      </p:sp>
-      <p:sp>
-        <p:nvSpPr>
-          <p:cNvPr id="29" name="TextBox 28"/>
+              <a:defRPr sz="1300">
+                <a:solidFill>
+                  <a:srgbClr val="475569"/>
+                </a:solidFill>
+              </a:defRPr>
+            </a:pPr>
+            <a:r>
+              <a:t>✓ One team serves the whole company</a:t>
+            </a:r>
+          </a:p>
+        </p:txBody>
+      </p:sp>
+      <p:sp>
+        <p:nvSpPr>
+          <p:cNvPr id="32" name="TextBox 31"/>
           <p:cNvSpPr txBox="1"/>
           <p:nvPr/>
         </p:nvSpPr>
         <p:spPr>
           <a:xfrm>
-            <a:off x="7955279" y="1600200"/>
-            <a:ext cx="3566160" cy="640080"/>
+            <a:off x="8899855" y="2880360"/>
+            <a:ext cx="2651760" cy="548640"/>
           </a:xfrm>
           <a:prstGeom prst="rect">
             <a:avLst/>
@@ -4837,14 +5296,84 @@
           <a:lstStyle/>
           <a:p>
             <a:pPr>
-              <a:defRPr sz="1400">
-                <a:solidFill>
-                  <a:srgbClr val="3C3C3C"/>
-                </a:solidFill>
-              </a:defRPr>
-            </a:pPr>
-            <a:r>
-              <a:t>✓ Together we build cross-team tools</a:t>
+              <a:defRPr sz="1300">
+                <a:solidFill>
+                  <a:srgbClr val="475569"/>
+                </a:solidFill>
+              </a:defRPr>
+            </a:pPr>
+            <a:r>
+              <a:t>✓ Best practices shared across groups</a:t>
+            </a:r>
+          </a:p>
+        </p:txBody>
+      </p:sp>
+      <p:sp>
+        <p:nvSpPr>
+          <p:cNvPr id="33" name="TextBox 32"/>
+          <p:cNvSpPr txBox="1"/>
+          <p:nvPr/>
+        </p:nvSpPr>
+        <p:spPr>
+          <a:xfrm>
+            <a:off x="8899855" y="3474720"/>
+            <a:ext cx="2651760" cy="548640"/>
+          </a:xfrm>
+          <a:prstGeom prst="rect">
+            <a:avLst/>
+          </a:prstGeom>
+          <a:noFill/>
+        </p:spPr>
+        <p:txBody>
+          <a:bodyPr wrap="square">
+            <a:spAutoFit/>
+          </a:bodyPr>
+          <a:lstStyle/>
+          <a:p>
+            <a:pPr>
+              <a:defRPr sz="1300">
+                <a:solidFill>
+                  <a:srgbClr val="475569"/>
+                </a:solidFill>
+              </a:defRPr>
+            </a:pPr>
+            <a:r>
+              <a:t>✓ Tools that work across departments</a:t>
+            </a:r>
+          </a:p>
+        </p:txBody>
+      </p:sp>
+      <p:sp>
+        <p:nvSpPr>
+          <p:cNvPr id="34" name="TextBox 33"/>
+          <p:cNvSpPr txBox="1"/>
+          <p:nvPr/>
+        </p:nvSpPr>
+        <p:spPr>
+          <a:xfrm>
+            <a:off x="457200" y="6492240"/>
+            <a:ext cx="3657600" cy="274320"/>
+          </a:xfrm>
+          <a:prstGeom prst="rect">
+            <a:avLst/>
+          </a:prstGeom>
+          <a:noFill/>
+        </p:spPr>
+        <p:txBody>
+          <a:bodyPr wrap="none">
+            <a:spAutoFit/>
+          </a:bodyPr>
+          <a:lstStyle/>
+          <a:p>
+            <a:pPr>
+              <a:defRPr sz="900" i="1">
+                <a:solidFill>
+                  <a:srgbClr val="64748B"/>
+                </a:solidFill>
+              </a:defRPr>
+            </a:pPr>
+            <a:r>
+              <a:t>Enterprise Analytics and AI</a:t>
             </a:r>
           </a:p>
         </p:txBody>
@@ -4869,90 +5398,20 @@
       <p:grpSpPr/>
       <p:sp>
         <p:nvSpPr>
-          <p:cNvPr id="2" name="TextBox 1"/>
-          <p:cNvSpPr txBox="1"/>
-          <p:nvPr/>
-        </p:nvSpPr>
-        <p:spPr>
-          <a:xfrm>
-            <a:off x="457200" y="274320"/>
-            <a:ext cx="11277295" cy="914400"/>
-          </a:xfrm>
-          <a:prstGeom prst="rect">
-            <a:avLst/>
-          </a:prstGeom>
-          <a:noFill/>
-        </p:spPr>
-        <p:txBody>
-          <a:bodyPr wrap="square">
-            <a:spAutoFit/>
-          </a:bodyPr>
-          <a:lstStyle/>
-          <a:p>
-            <a:pPr algn="l">
-              <a:defRPr sz="4400" b="1">
-                <a:solidFill>
-                  <a:srgbClr val="005293"/>
-                </a:solidFill>
-              </a:defRPr>
-            </a:pPr>
-            <a:r>
-              <a:t>We're Like Internal Consultants</a:t>
-            </a:r>
-          </a:p>
-        </p:txBody>
-      </p:sp>
-      <p:sp>
-        <p:nvSpPr>
-          <p:cNvPr id="3" name="TextBox 2"/>
-          <p:cNvSpPr txBox="1"/>
-          <p:nvPr/>
-        </p:nvSpPr>
-        <p:spPr>
-          <a:xfrm>
-            <a:off x="457200" y="1005840"/>
-            <a:ext cx="10972800" cy="548640"/>
-          </a:xfrm>
-          <a:prstGeom prst="rect">
-            <a:avLst/>
-          </a:prstGeom>
-          <a:noFill/>
-        </p:spPr>
-        <p:txBody>
-          <a:bodyPr wrap="none">
-            <a:spAutoFit/>
-          </a:bodyPr>
-          <a:lstStyle/>
-          <a:p>
-            <a:pPr>
-              <a:defRPr sz="2000" i="1">
-                <a:solidFill>
-                  <a:srgbClr val="009688"/>
-                </a:solidFill>
-              </a:defRPr>
-            </a:pPr>
-            <a:r>
-              <a:t>You're the expert in your work. We're experts in building technology to support it.</a:t>
-            </a:r>
-          </a:p>
-        </p:txBody>
-      </p:sp>
-      <p:sp>
-        <p:nvSpPr>
-          <p:cNvPr id="4" name="Rounded Rectangle 3"/>
+          <p:cNvPr id="2" name="Rectangle 1"/>
           <p:cNvSpPr/>
           <p:nvPr/>
         </p:nvSpPr>
         <p:spPr>
           <a:xfrm>
-            <a:off x="457200" y="1737360"/>
-            <a:ext cx="5029200" cy="640080"/>
-          </a:xfrm>
-          <a:prstGeom prst="roundRect">
+            <a:off x="0" y="0"/>
+            <a:ext cx="12191695" cy="6858000"/>
+          </a:xfrm>
+          <a:prstGeom prst="rect">
             <a:avLst/>
           </a:prstGeom>
           <a:solidFill>
-            <a:srgbClr val="009688"/>
+            <a:srgbClr val="FFFFFF"/>
           </a:solidFill>
           <a:ln>
             <a:noFill/>
@@ -4982,60 +5441,23 @@
       </p:sp>
       <p:sp>
         <p:nvSpPr>
-          <p:cNvPr id="5" name="TextBox 4"/>
-          <p:cNvSpPr txBox="1"/>
-          <p:nvPr/>
-        </p:nvSpPr>
-        <p:spPr>
-          <a:xfrm>
-            <a:off x="640080" y="1828800"/>
-            <a:ext cx="4663440" cy="457200"/>
-          </a:xfrm>
-          <a:prstGeom prst="rect">
-            <a:avLst/>
-          </a:prstGeom>
-          <a:noFill/>
-        </p:spPr>
-        <p:txBody>
-          <a:bodyPr wrap="none">
-            <a:spAutoFit/>
-          </a:bodyPr>
-          <a:lstStyle/>
-          <a:p>
-            <a:pPr algn="ctr">
-              <a:defRPr sz="2200" b="1">
-                <a:solidFill>
-                  <a:srgbClr val="FFFFFF"/>
-                </a:solidFill>
-              </a:defRPr>
-            </a:pPr>
-            <a:r>
-              <a:t>What You Bring</a:t>
-            </a:r>
-          </a:p>
-        </p:txBody>
-      </p:sp>
-      <p:sp>
-        <p:nvSpPr>
-          <p:cNvPr id="6" name="Rounded Rectangle 5"/>
+          <p:cNvPr id="3" name="Rectangle 2"/>
           <p:cNvSpPr/>
           <p:nvPr/>
         </p:nvSpPr>
         <p:spPr>
           <a:xfrm>
-            <a:off x="457200" y="2377440"/>
-            <a:ext cx="5029200" cy="2560320"/>
-          </a:xfrm>
-          <a:prstGeom prst="roundRect">
+            <a:off x="0" y="0"/>
+            <a:ext cx="12191695" cy="1188720"/>
+          </a:xfrm>
+          <a:prstGeom prst="rect">
             <a:avLst/>
           </a:prstGeom>
           <a:solidFill>
-            <a:srgbClr val="F0F8F5"/>
+            <a:srgbClr val="172A45"/>
           </a:solidFill>
           <a:ln>
-            <a:solidFill>
-              <a:srgbClr val="009688"/>
-            </a:solidFill>
+            <a:noFill/>
           </a:ln>
         </p:spPr>
         <p:style>
@@ -5062,14 +5484,14 @@
       </p:sp>
       <p:sp>
         <p:nvSpPr>
-          <p:cNvPr id="7" name="TextBox 6"/>
+          <p:cNvPr id="4" name="TextBox 3"/>
           <p:cNvSpPr txBox="1"/>
           <p:nvPr/>
         </p:nvSpPr>
         <p:spPr>
           <a:xfrm>
-            <a:off x="640080" y="2560320"/>
-            <a:ext cx="4663440" cy="2286000"/>
+            <a:off x="731520" y="320040"/>
+            <a:ext cx="10728655" cy="731520"/>
           </a:xfrm>
           <a:prstGeom prst="rect">
             <a:avLst/>
@@ -5077,91 +5499,45 @@
           <a:noFill/>
         </p:spPr>
         <p:txBody>
-          <a:bodyPr wrap="square">
+          <a:bodyPr wrap="none">
             <a:spAutoFit/>
           </a:bodyPr>
           <a:lstStyle/>
           <a:p>
             <a:pPr>
-              <a:spcAft>
-                <a:spcPts val="800"/>
-              </a:spcAft>
-              <a:defRPr sz="1500">
-                <a:solidFill>
-                  <a:srgbClr val="3C3C3C"/>
-                </a:solidFill>
-              </a:defRPr>
-            </a:pPr>
-            <a:r>
-              <a:t>• Deep knowledge of land acquisition, permitting, or your specialty</a:t>
-            </a:r>
-          </a:p>
-          <a:p>
-            <a:pPr>
-              <a:spcAft>
-                <a:spcPts val="800"/>
-              </a:spcAft>
-              <a:defRPr sz="1500">
-                <a:solidFill>
-                  <a:srgbClr val="3C3C3C"/>
-                </a:solidFill>
-              </a:defRPr>
-            </a:pPr>
-            <a:r>
-              <a:t>• Understanding of what questions need answers</a:t>
-            </a:r>
-          </a:p>
-          <a:p>
-            <a:pPr>
-              <a:spcAft>
-                <a:spcPts val="800"/>
-              </a:spcAft>
-              <a:defRPr sz="1500">
-                <a:solidFill>
-                  <a:srgbClr val="3C3C3C"/>
-                </a:solidFill>
-              </a:defRPr>
-            </a:pPr>
-            <a:r>
-              <a:t>• Relationships with landowners, agencies, stakeholders</a:t>
-            </a:r>
-          </a:p>
-          <a:p>
-            <a:pPr>
-              <a:spcAft>
-                <a:spcPts val="800"/>
-              </a:spcAft>
-              <a:defRPr sz="1500">
-                <a:solidFill>
-                  <a:srgbClr val="3C3C3C"/>
-                </a:solidFill>
-              </a:defRPr>
-            </a:pPr>
-            <a:r>
-              <a:t>• Experience navigating complex project requirements</a:t>
-            </a:r>
-          </a:p>
-        </p:txBody>
-      </p:sp>
-      <p:sp>
-        <p:nvSpPr>
-          <p:cNvPr id="8" name="Rounded Rectangle 7"/>
+              <a:defRPr sz="3600" b="1">
+                <a:solidFill>
+                  <a:srgbClr val="FFFFFF"/>
+                </a:solidFill>
+              </a:defRPr>
+            </a:pPr>
+            <a:r>
+              <a:t>What We Offer</a:t>
+            </a:r>
+          </a:p>
+        </p:txBody>
+      </p:sp>
+      <p:sp>
+        <p:nvSpPr>
+          <p:cNvPr id="5" name="Rounded Rectangle 4"/>
           <p:cNvSpPr/>
           <p:nvPr/>
         </p:nvSpPr>
         <p:spPr>
           <a:xfrm>
-            <a:off x="5943600" y="1737360"/>
-            <a:ext cx="5760720" cy="640080"/>
+            <a:off x="548640" y="1417320"/>
+            <a:ext cx="5546750" cy="2468880"/>
           </a:xfrm>
           <a:prstGeom prst="roundRect">
             <a:avLst/>
           </a:prstGeom>
           <a:solidFill>
-            <a:srgbClr val="005293"/>
+            <a:srgbClr val="FFFFFF"/>
           </a:solidFill>
-          <a:ln>
-            <a:noFill/>
+          <a:ln w="25400">
+            <a:solidFill>
+              <a:srgbClr val="4682B4"/>
+            </a:solidFill>
           </a:ln>
         </p:spPr>
         <p:style>
@@ -5188,60 +5564,23 @@
       </p:sp>
       <p:sp>
         <p:nvSpPr>
-          <p:cNvPr id="9" name="TextBox 8"/>
-          <p:cNvSpPr txBox="1"/>
-          <p:nvPr/>
-        </p:nvSpPr>
-        <p:spPr>
-          <a:xfrm>
-            <a:off x="6126480" y="1828800"/>
-            <a:ext cx="5394960" cy="457200"/>
-          </a:xfrm>
-          <a:prstGeom prst="rect">
-            <a:avLst/>
-          </a:prstGeom>
-          <a:noFill/>
-        </p:spPr>
-        <p:txBody>
-          <a:bodyPr wrap="none">
-            <a:spAutoFit/>
-          </a:bodyPr>
-          <a:lstStyle/>
-          <a:p>
-            <a:pPr algn="ctr">
-              <a:defRPr sz="2200" b="1">
-                <a:solidFill>
-                  <a:srgbClr val="FFFFFF"/>
-                </a:solidFill>
-              </a:defRPr>
-            </a:pPr>
-            <a:r>
-              <a:t>What We Bring</a:t>
-            </a:r>
-          </a:p>
-        </p:txBody>
-      </p:sp>
-      <p:sp>
-        <p:nvSpPr>
-          <p:cNvPr id="10" name="Rounded Rectangle 9"/>
+          <p:cNvPr id="6" name="Rectangle 5"/>
           <p:cNvSpPr/>
           <p:nvPr/>
         </p:nvSpPr>
         <p:spPr>
           <a:xfrm>
-            <a:off x="5943600" y="2377440"/>
-            <a:ext cx="5760720" cy="2560320"/>
-          </a:xfrm>
-          <a:prstGeom prst="roundRect">
+            <a:off x="548640" y="1417320"/>
+            <a:ext cx="137160" cy="2468880"/>
+          </a:xfrm>
+          <a:prstGeom prst="rect">
             <a:avLst/>
           </a:prstGeom>
           <a:solidFill>
-            <a:srgbClr val="F0F5FA"/>
+            <a:srgbClr val="4682B4"/>
           </a:solidFill>
           <a:ln>
-            <a:solidFill>
-              <a:srgbClr val="005293"/>
-            </a:solidFill>
+            <a:noFill/>
           </a:ln>
         </p:spPr>
         <p:style>
@@ -5268,14 +5607,84 @@
       </p:sp>
       <p:sp>
         <p:nvSpPr>
-          <p:cNvPr id="11" name="TextBox 10"/>
+          <p:cNvPr id="7" name="TextBox 6"/>
           <p:cNvSpPr txBox="1"/>
           <p:nvPr/>
         </p:nvSpPr>
         <p:spPr>
           <a:xfrm>
-            <a:off x="6126480" y="2560320"/>
-            <a:ext cx="5394960" cy="2286000"/>
+            <a:off x="868680" y="1554480"/>
+            <a:ext cx="5089550" cy="457200"/>
+          </a:xfrm>
+          <a:prstGeom prst="rect">
+            <a:avLst/>
+          </a:prstGeom>
+          <a:noFill/>
+        </p:spPr>
+        <p:txBody>
+          <a:bodyPr wrap="none">
+            <a:spAutoFit/>
+          </a:bodyPr>
+          <a:lstStyle/>
+          <a:p>
+            <a:pPr>
+              <a:defRPr sz="2000" b="1">
+                <a:solidFill>
+                  <a:srgbClr val="4682B4"/>
+                </a:solidFill>
+              </a:defRPr>
+            </a:pPr>
+            <a:r>
+              <a:t>📊  Data &amp; Dashboards</a:t>
+            </a:r>
+          </a:p>
+        </p:txBody>
+      </p:sp>
+      <p:sp>
+        <p:nvSpPr>
+          <p:cNvPr id="8" name="TextBox 7"/>
+          <p:cNvSpPr txBox="1"/>
+          <p:nvPr/>
+        </p:nvSpPr>
+        <p:spPr>
+          <a:xfrm>
+            <a:off x="868680" y="1965960"/>
+            <a:ext cx="5089550" cy="365760"/>
+          </a:xfrm>
+          <a:prstGeom prst="rect">
+            <a:avLst/>
+          </a:prstGeom>
+          <a:noFill/>
+        </p:spPr>
+        <p:txBody>
+          <a:bodyPr wrap="none">
+            <a:spAutoFit/>
+          </a:bodyPr>
+          <a:lstStyle/>
+          <a:p>
+            <a:pPr>
+              <a:defRPr sz="1300" i="1">
+                <a:solidFill>
+                  <a:srgbClr val="64748B"/>
+                </a:solidFill>
+              </a:defRPr>
+            </a:pPr>
+            <a:r>
+              <a:t>See what's happening across your projects</a:t>
+            </a:r>
+          </a:p>
+        </p:txBody>
+      </p:sp>
+      <p:sp>
+        <p:nvSpPr>
+          <p:cNvPr id="9" name="TextBox 8"/>
+          <p:cNvSpPr txBox="1"/>
+          <p:nvPr/>
+        </p:nvSpPr>
+        <p:spPr>
+          <a:xfrm>
+            <a:off x="868680" y="2377440"/>
+            <a:ext cx="5089550" cy="1371600"/>
           </a:xfrm>
           <a:prstGeom prst="rect">
             <a:avLst/>
@@ -5290,84 +5699,86 @@
           <a:p>
             <a:pPr>
               <a:spcAft>
-                <a:spcPts val="800"/>
+                <a:spcPts val="300"/>
               </a:spcAft>
-              <a:defRPr sz="1500">
-                <a:solidFill>
-                  <a:srgbClr val="3C3C3C"/>
-                </a:solidFill>
-              </a:defRPr>
-            </a:pPr>
-            <a:r>
-              <a:t>• Ability to connect scattered data sources into one view</a:t>
+              <a:defRPr sz="1200">
+                <a:solidFill>
+                  <a:srgbClr val="475569"/>
+                </a:solidFill>
+              </a:defRPr>
+            </a:pPr>
+            <a:r>
+              <a:t>• Connect scattered data into one clear view</a:t>
             </a:r>
           </a:p>
           <a:p>
             <a:pPr>
               <a:spcAft>
-                <a:spcPts val="800"/>
+                <a:spcPts val="300"/>
               </a:spcAft>
-              <a:defRPr sz="1500">
-                <a:solidFill>
-                  <a:srgbClr val="3C3C3C"/>
-                </a:solidFill>
-              </a:defRPr>
-            </a:pPr>
-            <a:r>
-              <a:t>• Skills to automate repetitive data tasks</a:t>
+              <a:defRPr sz="1200">
+                <a:solidFill>
+                  <a:srgbClr val="475569"/>
+                </a:solidFill>
+              </a:defRPr>
+            </a:pPr>
+            <a:r>
+              <a:t>• Build visual dashboards that update automatically</a:t>
             </a:r>
           </a:p>
           <a:p>
             <a:pPr>
               <a:spcAft>
-                <a:spcPts val="800"/>
+                <a:spcPts val="300"/>
               </a:spcAft>
-              <a:defRPr sz="1500">
-                <a:solidFill>
-                  <a:srgbClr val="3C3C3C"/>
-                </a:solidFill>
-              </a:defRPr>
-            </a:pPr>
-            <a:r>
-              <a:t>• Experience building predictive models and AI tools</a:t>
+              <a:defRPr sz="1200">
+                <a:solidFill>
+                  <a:srgbClr val="475569"/>
+                </a:solidFill>
+              </a:defRPr>
+            </a:pPr>
+            <a:r>
+              <a:t>• Perform deep-dive analysis to spot trends</a:t>
             </a:r>
           </a:p>
           <a:p>
             <a:pPr>
               <a:spcAft>
-                <a:spcPts val="800"/>
+                <a:spcPts val="300"/>
               </a:spcAft>
-              <a:defRPr sz="1500">
-                <a:solidFill>
-                  <a:srgbClr val="3C3C3C"/>
-                </a:solidFill>
-              </a:defRPr>
-            </a:pPr>
-            <a:r>
-              <a:t>• Knowledge of best practices from across the industry</a:t>
-            </a:r>
-          </a:p>
-        </p:txBody>
-      </p:sp>
-      <p:sp>
-        <p:nvSpPr>
-          <p:cNvPr id="12" name="Rounded Rectangle 11"/>
+              <a:defRPr sz="1200">
+                <a:solidFill>
+                  <a:srgbClr val="475569"/>
+                </a:solidFill>
+              </a:defRPr>
+            </a:pPr>
+            <a:r>
+              <a:t>• Support teams that don't have dedicated data staff</a:t>
+            </a:r>
+          </a:p>
+        </p:txBody>
+      </p:sp>
+      <p:sp>
+        <p:nvSpPr>
+          <p:cNvPr id="10" name="Rounded Rectangle 9"/>
           <p:cNvSpPr/>
           <p:nvPr/>
         </p:nvSpPr>
         <p:spPr>
           <a:xfrm>
-            <a:off x="457200" y="5120640"/>
-            <a:ext cx="11247120" cy="548640"/>
+            <a:off x="6323990" y="1417320"/>
+            <a:ext cx="5546750" cy="2468880"/>
           </a:xfrm>
           <a:prstGeom prst="roundRect">
             <a:avLst/>
           </a:prstGeom>
           <a:solidFill>
-            <a:srgbClr val="4285F4"/>
+            <a:srgbClr val="FFFFFF"/>
           </a:solidFill>
-          <a:ln>
-            <a:noFill/>
+          <a:ln w="25400">
+            <a:solidFill>
+              <a:srgbClr val="008080"/>
+            </a:solidFill>
           </a:ln>
         </p:spPr>
         <p:style>
@@ -5394,60 +5805,23 @@
       </p:sp>
       <p:sp>
         <p:nvSpPr>
-          <p:cNvPr id="13" name="TextBox 12"/>
-          <p:cNvSpPr txBox="1"/>
-          <p:nvPr/>
-        </p:nvSpPr>
-        <p:spPr>
-          <a:xfrm>
-            <a:off x="640080" y="5193792"/>
-            <a:ext cx="10881360" cy="457200"/>
-          </a:xfrm>
-          <a:prstGeom prst="rect">
-            <a:avLst/>
-          </a:prstGeom>
-          <a:noFill/>
-        </p:spPr>
-        <p:txBody>
-          <a:bodyPr wrap="none">
-            <a:spAutoFit/>
-          </a:bodyPr>
-          <a:lstStyle/>
-          <a:p>
-            <a:pPr algn="ctr">
-              <a:defRPr sz="2000" b="1">
-                <a:solidFill>
-                  <a:srgbClr val="FFFFFF"/>
-                </a:solidFill>
-              </a:defRPr>
-            </a:pPr>
-            <a:r>
-              <a:t>Together We Create</a:t>
-            </a:r>
-          </a:p>
-        </p:txBody>
-      </p:sp>
-      <p:sp>
-        <p:nvSpPr>
-          <p:cNvPr id="14" name="Rounded Rectangle 13"/>
+          <p:cNvPr id="11" name="Rectangle 10"/>
           <p:cNvSpPr/>
           <p:nvPr/>
         </p:nvSpPr>
         <p:spPr>
           <a:xfrm>
-            <a:off x="457200" y="5669280"/>
-            <a:ext cx="11247120" cy="1005840"/>
-          </a:xfrm>
-          <a:prstGeom prst="roundRect">
+            <a:off x="6323990" y="1417320"/>
+            <a:ext cx="137160" cy="2468880"/>
+          </a:xfrm>
+          <a:prstGeom prst="rect">
             <a:avLst/>
           </a:prstGeom>
           <a:solidFill>
-            <a:srgbClr val="E8F0FE"/>
+            <a:srgbClr val="008080"/>
           </a:solidFill>
           <a:ln>
-            <a:solidFill>
-              <a:srgbClr val="4285F4"/>
-            </a:solidFill>
+            <a:noFill/>
           </a:ln>
         </p:spPr>
         <p:style>
@@ -5474,14 +5848,14 @@
       </p:sp>
       <p:sp>
         <p:nvSpPr>
-          <p:cNvPr id="15" name="TextBox 14"/>
+          <p:cNvPr id="12" name="TextBox 11"/>
           <p:cNvSpPr txBox="1"/>
           <p:nvPr/>
         </p:nvSpPr>
         <p:spPr>
           <a:xfrm>
-            <a:off x="640080" y="5806440"/>
-            <a:ext cx="10881360" cy="822960"/>
+            <a:off x="6644030" y="1554480"/>
+            <a:ext cx="5089550" cy="457200"/>
           </a:xfrm>
           <a:prstGeom prst="rect">
             <a:avLst/>
@@ -5494,15 +5868,650 @@
           </a:bodyPr>
           <a:lstStyle/>
           <a:p>
-            <a:pPr algn="ctr">
-              <a:defRPr sz="1800">
-                <a:solidFill>
-                  <a:srgbClr val="3C3C3C"/>
-                </a:solidFill>
-              </a:defRPr>
-            </a:pPr>
-            <a:r>
-              <a:t>Solutions that actually solve your real problems — because we build them together based on your expertise</a:t>
+            <a:pPr>
+              <a:defRPr sz="2000" b="1">
+                <a:solidFill>
+                  <a:srgbClr val="008080"/>
+                </a:solidFill>
+              </a:defRPr>
+            </a:pPr>
+            <a:r>
+              <a:t>🤖  Custom AI Solutions</a:t>
+            </a:r>
+          </a:p>
+        </p:txBody>
+      </p:sp>
+      <p:sp>
+        <p:nvSpPr>
+          <p:cNvPr id="13" name="TextBox 12"/>
+          <p:cNvSpPr txBox="1"/>
+          <p:nvPr/>
+        </p:nvSpPr>
+        <p:spPr>
+          <a:xfrm>
+            <a:off x="6644030" y="1965960"/>
+            <a:ext cx="5089550" cy="365760"/>
+          </a:xfrm>
+          <a:prstGeom prst="rect">
+            <a:avLst/>
+          </a:prstGeom>
+          <a:noFill/>
+        </p:spPr>
+        <p:txBody>
+          <a:bodyPr wrap="none">
+            <a:spAutoFit/>
+          </a:bodyPr>
+          <a:lstStyle/>
+          <a:p>
+            <a:pPr>
+              <a:defRPr sz="1300" i="1">
+                <a:solidFill>
+                  <a:srgbClr val="64748B"/>
+                </a:solidFill>
+              </a:defRPr>
+            </a:pPr>
+            <a:r>
+              <a:t>Smart tools built for your specific challenges</a:t>
+            </a:r>
+          </a:p>
+        </p:txBody>
+      </p:sp>
+      <p:sp>
+        <p:nvSpPr>
+          <p:cNvPr id="14" name="TextBox 13"/>
+          <p:cNvSpPr txBox="1"/>
+          <p:nvPr/>
+        </p:nvSpPr>
+        <p:spPr>
+          <a:xfrm>
+            <a:off x="6644030" y="2377440"/>
+            <a:ext cx="5089550" cy="1371600"/>
+          </a:xfrm>
+          <a:prstGeom prst="rect">
+            <a:avLst/>
+          </a:prstGeom>
+          <a:noFill/>
+        </p:spPr>
+        <p:txBody>
+          <a:bodyPr wrap="square">
+            <a:spAutoFit/>
+          </a:bodyPr>
+          <a:lstStyle/>
+          <a:p>
+            <a:pPr>
+              <a:spcAft>
+                <a:spcPts val="300"/>
+              </a:spcAft>
+              <a:defRPr sz="1200">
+                <a:solidFill>
+                  <a:srgbClr val="475569"/>
+                </a:solidFill>
+              </a:defRPr>
+            </a:pPr>
+            <a:r>
+              <a:t>• Predict outcomes (like permit timelines)</a:t>
+            </a:r>
+          </a:p>
+          <a:p>
+            <a:pPr>
+              <a:spcAft>
+                <a:spcPts val="300"/>
+              </a:spcAft>
+              <a:defRPr sz="1200">
+                <a:solidFill>
+                  <a:srgbClr val="475569"/>
+                </a:solidFill>
+              </a:defRPr>
+            </a:pPr>
+            <a:r>
+              <a:t>• Automate repetitive data tasks</a:t>
+            </a:r>
+          </a:p>
+          <a:p>
+            <a:pPr>
+              <a:spcAft>
+                <a:spcPts val="300"/>
+              </a:spcAft>
+              <a:defRPr sz="1200">
+                <a:solidFill>
+                  <a:srgbClr val="475569"/>
+                </a:solidFill>
+              </a:defRPr>
+            </a:pPr>
+            <a:r>
+              <a:t>• Build assistants that answer questions from your data</a:t>
+            </a:r>
+          </a:p>
+          <a:p>
+            <a:pPr>
+              <a:spcAft>
+                <a:spcPts val="300"/>
+              </a:spcAft>
+              <a:defRPr sz="1200">
+                <a:solidFill>
+                  <a:srgbClr val="475569"/>
+                </a:solidFill>
+              </a:defRPr>
+            </a:pPr>
+            <a:r>
+              <a:t>• Create systems that learn and improve over time</a:t>
+            </a:r>
+          </a:p>
+        </p:txBody>
+      </p:sp>
+      <p:sp>
+        <p:nvSpPr>
+          <p:cNvPr id="15" name="Rounded Rectangle 14"/>
+          <p:cNvSpPr/>
+          <p:nvPr/>
+        </p:nvSpPr>
+        <p:spPr>
+          <a:xfrm>
+            <a:off x="548640" y="4114800"/>
+            <a:ext cx="5546750" cy="2468880"/>
+          </a:xfrm>
+          <a:prstGeom prst="roundRect">
+            <a:avLst/>
+          </a:prstGeom>
+          <a:solidFill>
+            <a:srgbClr val="FFFFFF"/>
+          </a:solidFill>
+          <a:ln w="25400">
+            <a:solidFill>
+              <a:srgbClr val="558B6E"/>
+            </a:solidFill>
+          </a:ln>
+        </p:spPr>
+        <p:style>
+          <a:lnRef idx="1">
+            <a:schemeClr val="accent1"/>
+          </a:lnRef>
+          <a:fillRef idx="3">
+            <a:schemeClr val="accent1"/>
+          </a:fillRef>
+          <a:effectRef idx="2">
+            <a:schemeClr val="accent1"/>
+          </a:effectRef>
+          <a:fontRef idx="minor">
+            <a:schemeClr val="lt1"/>
+          </a:fontRef>
+        </p:style>
+        <p:txBody>
+          <a:bodyPr rtlCol="0" anchor="ctr"/>
+          <a:lstStyle/>
+          <a:p>
+            <a:pPr algn="ctr"/>
+          </a:p>
+        </p:txBody>
+      </p:sp>
+      <p:sp>
+        <p:nvSpPr>
+          <p:cNvPr id="16" name="Rectangle 15"/>
+          <p:cNvSpPr/>
+          <p:nvPr/>
+        </p:nvSpPr>
+        <p:spPr>
+          <a:xfrm>
+            <a:off x="548640" y="4114800"/>
+            <a:ext cx="137160" cy="2468880"/>
+          </a:xfrm>
+          <a:prstGeom prst="rect">
+            <a:avLst/>
+          </a:prstGeom>
+          <a:solidFill>
+            <a:srgbClr val="558B6E"/>
+          </a:solidFill>
+          <a:ln>
+            <a:noFill/>
+          </a:ln>
+        </p:spPr>
+        <p:style>
+          <a:lnRef idx="1">
+            <a:schemeClr val="accent1"/>
+          </a:lnRef>
+          <a:fillRef idx="3">
+            <a:schemeClr val="accent1"/>
+          </a:fillRef>
+          <a:effectRef idx="2">
+            <a:schemeClr val="accent1"/>
+          </a:effectRef>
+          <a:fontRef idx="minor">
+            <a:schemeClr val="lt1"/>
+          </a:fontRef>
+        </p:style>
+        <p:txBody>
+          <a:bodyPr rtlCol="0" anchor="ctr"/>
+          <a:lstStyle/>
+          <a:p>
+            <a:pPr algn="ctr"/>
+          </a:p>
+        </p:txBody>
+      </p:sp>
+      <p:sp>
+        <p:nvSpPr>
+          <p:cNvPr id="17" name="TextBox 16"/>
+          <p:cNvSpPr txBox="1"/>
+          <p:nvPr/>
+        </p:nvSpPr>
+        <p:spPr>
+          <a:xfrm>
+            <a:off x="868680" y="4251960"/>
+            <a:ext cx="5089550" cy="457200"/>
+          </a:xfrm>
+          <a:prstGeom prst="rect">
+            <a:avLst/>
+          </a:prstGeom>
+          <a:noFill/>
+        </p:spPr>
+        <p:txBody>
+          <a:bodyPr wrap="none">
+            <a:spAutoFit/>
+          </a:bodyPr>
+          <a:lstStyle/>
+          <a:p>
+            <a:pPr>
+              <a:defRPr sz="2000" b="1">
+                <a:solidFill>
+                  <a:srgbClr val="558B6E"/>
+                </a:solidFill>
+              </a:defRPr>
+            </a:pPr>
+            <a:r>
+              <a:t>🔍  AI Tools &amp; Guidance</a:t>
+            </a:r>
+          </a:p>
+        </p:txBody>
+      </p:sp>
+      <p:sp>
+        <p:nvSpPr>
+          <p:cNvPr id="18" name="TextBox 17"/>
+          <p:cNvSpPr txBox="1"/>
+          <p:nvPr/>
+        </p:nvSpPr>
+        <p:spPr>
+          <a:xfrm>
+            <a:off x="868680" y="4663440"/>
+            <a:ext cx="5089550" cy="365760"/>
+          </a:xfrm>
+          <a:prstGeom prst="rect">
+            <a:avLst/>
+          </a:prstGeom>
+          <a:noFill/>
+        </p:spPr>
+        <p:txBody>
+          <a:bodyPr wrap="none">
+            <a:spAutoFit/>
+          </a:bodyPr>
+          <a:lstStyle/>
+          <a:p>
+            <a:pPr>
+              <a:defRPr sz="1300" i="1">
+                <a:solidFill>
+                  <a:srgbClr val="64748B"/>
+                </a:solidFill>
+              </a:defRPr>
+            </a:pPr>
+            <a:r>
+              <a:t>Navigate the AI landscape safely</a:t>
+            </a:r>
+          </a:p>
+        </p:txBody>
+      </p:sp>
+      <p:sp>
+        <p:nvSpPr>
+          <p:cNvPr id="19" name="TextBox 18"/>
+          <p:cNvSpPr txBox="1"/>
+          <p:nvPr/>
+        </p:nvSpPr>
+        <p:spPr>
+          <a:xfrm>
+            <a:off x="868680" y="5074920"/>
+            <a:ext cx="5089550" cy="1371600"/>
+          </a:xfrm>
+          <a:prstGeom prst="rect">
+            <a:avLst/>
+          </a:prstGeom>
+          <a:noFill/>
+        </p:spPr>
+        <p:txBody>
+          <a:bodyPr wrap="square">
+            <a:spAutoFit/>
+          </a:bodyPr>
+          <a:lstStyle/>
+          <a:p>
+            <a:pPr>
+              <a:spcAft>
+                <a:spcPts val="300"/>
+              </a:spcAft>
+              <a:defRPr sz="1200">
+                <a:solidFill>
+                  <a:srgbClr val="475569"/>
+                </a:solidFill>
+              </a:defRPr>
+            </a:pPr>
+            <a:r>
+              <a:t>• Help you use ChatGPT and similar tools wisely</a:t>
+            </a:r>
+          </a:p>
+          <a:p>
+            <a:pPr>
+              <a:spcAft>
+                <a:spcPts val="300"/>
+              </a:spcAft>
+              <a:defRPr sz="1200">
+                <a:solidFill>
+                  <a:srgbClr val="475569"/>
+                </a:solidFill>
+              </a:defRPr>
+            </a:pPr>
+            <a:r>
+              <a:t>• Evaluate which AI products are worth buying</a:t>
+            </a:r>
+          </a:p>
+          <a:p>
+            <a:pPr>
+              <a:spcAft>
+                <a:spcPts val="300"/>
+              </a:spcAft>
+              <a:defRPr sz="1200">
+                <a:solidFill>
+                  <a:srgbClr val="475569"/>
+                </a:solidFill>
+              </a:defRPr>
+            </a:pPr>
+            <a:r>
+              <a:t>• Connect with universities and research partners</a:t>
+            </a:r>
+          </a:p>
+          <a:p>
+            <a:pPr>
+              <a:spcAft>
+                <a:spcPts val="300"/>
+              </a:spcAft>
+              <a:defRPr sz="1200">
+                <a:solidFill>
+                  <a:srgbClr val="475569"/>
+                </a:solidFill>
+              </a:defRPr>
+            </a:pPr>
+            <a:r>
+              <a:t>• Ensure AI is used responsibly and securely</a:t>
+            </a:r>
+          </a:p>
+        </p:txBody>
+      </p:sp>
+      <p:sp>
+        <p:nvSpPr>
+          <p:cNvPr id="20" name="Rounded Rectangle 19"/>
+          <p:cNvSpPr/>
+          <p:nvPr/>
+        </p:nvSpPr>
+        <p:spPr>
+          <a:xfrm>
+            <a:off x="6323990" y="4114800"/>
+            <a:ext cx="5546750" cy="2468880"/>
+          </a:xfrm>
+          <a:prstGeom prst="roundRect">
+            <a:avLst/>
+          </a:prstGeom>
+          <a:solidFill>
+            <a:srgbClr val="FFFFFF"/>
+          </a:solidFill>
+          <a:ln w="25400">
+            <a:solidFill>
+              <a:srgbClr val="9370A5"/>
+            </a:solidFill>
+          </a:ln>
+        </p:spPr>
+        <p:style>
+          <a:lnRef idx="1">
+            <a:schemeClr val="accent1"/>
+          </a:lnRef>
+          <a:fillRef idx="3">
+            <a:schemeClr val="accent1"/>
+          </a:fillRef>
+          <a:effectRef idx="2">
+            <a:schemeClr val="accent1"/>
+          </a:effectRef>
+          <a:fontRef idx="minor">
+            <a:schemeClr val="lt1"/>
+          </a:fontRef>
+        </p:style>
+        <p:txBody>
+          <a:bodyPr rtlCol="0" anchor="ctr"/>
+          <a:lstStyle/>
+          <a:p>
+            <a:pPr algn="ctr"/>
+          </a:p>
+        </p:txBody>
+      </p:sp>
+      <p:sp>
+        <p:nvSpPr>
+          <p:cNvPr id="21" name="Rectangle 20"/>
+          <p:cNvSpPr/>
+          <p:nvPr/>
+        </p:nvSpPr>
+        <p:spPr>
+          <a:xfrm>
+            <a:off x="6323990" y="4114800"/>
+            <a:ext cx="137160" cy="2468880"/>
+          </a:xfrm>
+          <a:prstGeom prst="rect">
+            <a:avLst/>
+          </a:prstGeom>
+          <a:solidFill>
+            <a:srgbClr val="9370A5"/>
+          </a:solidFill>
+          <a:ln>
+            <a:noFill/>
+          </a:ln>
+        </p:spPr>
+        <p:style>
+          <a:lnRef idx="1">
+            <a:schemeClr val="accent1"/>
+          </a:lnRef>
+          <a:fillRef idx="3">
+            <a:schemeClr val="accent1"/>
+          </a:fillRef>
+          <a:effectRef idx="2">
+            <a:schemeClr val="accent1"/>
+          </a:effectRef>
+          <a:fontRef idx="minor">
+            <a:schemeClr val="lt1"/>
+          </a:fontRef>
+        </p:style>
+        <p:txBody>
+          <a:bodyPr rtlCol="0" anchor="ctr"/>
+          <a:lstStyle/>
+          <a:p>
+            <a:pPr algn="ctr"/>
+          </a:p>
+        </p:txBody>
+      </p:sp>
+      <p:sp>
+        <p:nvSpPr>
+          <p:cNvPr id="22" name="TextBox 21"/>
+          <p:cNvSpPr txBox="1"/>
+          <p:nvPr/>
+        </p:nvSpPr>
+        <p:spPr>
+          <a:xfrm>
+            <a:off x="6644030" y="4251960"/>
+            <a:ext cx="5089550" cy="457200"/>
+          </a:xfrm>
+          <a:prstGeom prst="rect">
+            <a:avLst/>
+          </a:prstGeom>
+          <a:noFill/>
+        </p:spPr>
+        <p:txBody>
+          <a:bodyPr wrap="none">
+            <a:spAutoFit/>
+          </a:bodyPr>
+          <a:lstStyle/>
+          <a:p>
+            <a:pPr>
+              <a:defRPr sz="2000" b="1">
+                <a:solidFill>
+                  <a:srgbClr val="9370A5"/>
+                </a:solidFill>
+              </a:defRPr>
+            </a:pPr>
+            <a:r>
+              <a:t>🤝  Company-Wide Collaboration</a:t>
+            </a:r>
+          </a:p>
+        </p:txBody>
+      </p:sp>
+      <p:sp>
+        <p:nvSpPr>
+          <p:cNvPr id="23" name="TextBox 22"/>
+          <p:cNvSpPr txBox="1"/>
+          <p:nvPr/>
+        </p:nvSpPr>
+        <p:spPr>
+          <a:xfrm>
+            <a:off x="6644030" y="4663440"/>
+            <a:ext cx="5089550" cy="365760"/>
+          </a:xfrm>
+          <a:prstGeom prst="rect">
+            <a:avLst/>
+          </a:prstGeom>
+          <a:noFill/>
+        </p:spPr>
+        <p:txBody>
+          <a:bodyPr wrap="none">
+            <a:spAutoFit/>
+          </a:bodyPr>
+          <a:lstStyle/>
+          <a:p>
+            <a:pPr>
+              <a:defRPr sz="1300" i="1">
+                <a:solidFill>
+                  <a:srgbClr val="64748B"/>
+                </a:solidFill>
+              </a:defRPr>
+            </a:pPr>
+            <a:r>
+              <a:t>Connecting data expertise across teams</a:t>
+            </a:r>
+          </a:p>
+        </p:txBody>
+      </p:sp>
+      <p:sp>
+        <p:nvSpPr>
+          <p:cNvPr id="24" name="TextBox 23"/>
+          <p:cNvSpPr txBox="1"/>
+          <p:nvPr/>
+        </p:nvSpPr>
+        <p:spPr>
+          <a:xfrm>
+            <a:off x="6644030" y="5074920"/>
+            <a:ext cx="5089550" cy="1371600"/>
+          </a:xfrm>
+          <a:prstGeom prst="rect">
+            <a:avLst/>
+          </a:prstGeom>
+          <a:noFill/>
+        </p:spPr>
+        <p:txBody>
+          <a:bodyPr wrap="square">
+            <a:spAutoFit/>
+          </a:bodyPr>
+          <a:lstStyle/>
+          <a:p>
+            <a:pPr>
+              <a:spcAft>
+                <a:spcPts val="300"/>
+              </a:spcAft>
+              <a:defRPr sz="1200">
+                <a:solidFill>
+                  <a:srgbClr val="475569"/>
+                </a:solidFill>
+              </a:defRPr>
+            </a:pPr>
+            <a:r>
+              <a:t>• Work alongside data professionals in every department</a:t>
+            </a:r>
+          </a:p>
+          <a:p>
+            <a:pPr>
+              <a:spcAft>
+                <a:spcPts val="300"/>
+              </a:spcAft>
+              <a:defRPr sz="1200">
+                <a:solidFill>
+                  <a:srgbClr val="475569"/>
+                </a:solidFill>
+              </a:defRPr>
+            </a:pPr>
+            <a:r>
+              <a:t>• Share best practices so everyone benefits</a:t>
+            </a:r>
+          </a:p>
+          <a:p>
+            <a:pPr>
+              <a:spcAft>
+                <a:spcPts val="300"/>
+              </a:spcAft>
+              <a:defRPr sz="1200">
+                <a:solidFill>
+                  <a:srgbClr val="475569"/>
+                </a:solidFill>
+              </a:defRPr>
+            </a:pPr>
+            <a:r>
+              <a:t>• Organize working groups to solve common challenges</a:t>
+            </a:r>
+          </a:p>
+          <a:p>
+            <a:pPr>
+              <a:spcAft>
+                <a:spcPts val="300"/>
+              </a:spcAft>
+              <a:defRPr sz="1200">
+                <a:solidFill>
+                  <a:srgbClr val="475569"/>
+                </a:solidFill>
+              </a:defRPr>
+            </a:pPr>
+            <a:r>
+              <a:t>• Build tools that multiple teams can use</a:t>
+            </a:r>
+          </a:p>
+        </p:txBody>
+      </p:sp>
+      <p:sp>
+        <p:nvSpPr>
+          <p:cNvPr id="25" name="TextBox 24"/>
+          <p:cNvSpPr txBox="1"/>
+          <p:nvPr/>
+        </p:nvSpPr>
+        <p:spPr>
+          <a:xfrm>
+            <a:off x="457200" y="6492240"/>
+            <a:ext cx="3657600" cy="274320"/>
+          </a:xfrm>
+          <a:prstGeom prst="rect">
+            <a:avLst/>
+          </a:prstGeom>
+          <a:noFill/>
+        </p:spPr>
+        <p:txBody>
+          <a:bodyPr wrap="none">
+            <a:spAutoFit/>
+          </a:bodyPr>
+          <a:lstStyle/>
+          <a:p>
+            <a:pPr>
+              <a:defRPr sz="900" i="1">
+                <a:solidFill>
+                  <a:srgbClr val="64748B"/>
+                </a:solidFill>
+              </a:defRPr>
+            </a:pPr>
+            <a:r>
+              <a:t>Enterprise Analytics and AI</a:t>
             </a:r>
           </a:p>
         </p:txBody>
@@ -5527,95 +6536,23 @@
       <p:grpSpPr/>
       <p:sp>
         <p:nvSpPr>
-          <p:cNvPr id="2" name="TextBox 1"/>
-          <p:cNvSpPr txBox="1"/>
-          <p:nvPr/>
-        </p:nvSpPr>
-        <p:spPr>
-          <a:xfrm>
-            <a:off x="457200" y="274320"/>
-            <a:ext cx="11277295" cy="914400"/>
-          </a:xfrm>
-          <a:prstGeom prst="rect">
-            <a:avLst/>
-          </a:prstGeom>
-          <a:noFill/>
-        </p:spPr>
-        <p:txBody>
-          <a:bodyPr wrap="square">
-            <a:spAutoFit/>
-          </a:bodyPr>
-          <a:lstStyle/>
-          <a:p>
-            <a:pPr algn="l">
-              <a:defRPr sz="4400" b="1">
-                <a:solidFill>
-                  <a:srgbClr val="005293"/>
-                </a:solidFill>
-              </a:defRPr>
-            </a:pPr>
-            <a:r>
-              <a:t>What Can We Build Together?</a:t>
-            </a:r>
-          </a:p>
-        </p:txBody>
-      </p:sp>
-      <p:sp>
-        <p:nvSpPr>
-          <p:cNvPr id="3" name="TextBox 2"/>
-          <p:cNvSpPr txBox="1"/>
-          <p:nvPr/>
-        </p:nvSpPr>
-        <p:spPr>
-          <a:xfrm>
-            <a:off x="457200" y="914400"/>
-            <a:ext cx="10972800" cy="548640"/>
-          </a:xfrm>
-          <a:prstGeom prst="rect">
-            <a:avLst/>
-          </a:prstGeom>
-          <a:noFill/>
-        </p:spPr>
-        <p:txBody>
-          <a:bodyPr wrap="none">
-            <a:spAutoFit/>
-          </a:bodyPr>
-          <a:lstStyle/>
-          <a:p>
-            <a:pPr>
-              <a:defRPr sz="1600">
-                <a:solidFill>
-                  <a:srgbClr val="3C3C3C"/>
-                </a:solidFill>
-              </a:defRPr>
-            </a:pPr>
-            <a:r>
-              <a:t>Examples relevant to getting projects from land acquisition through permitting</a:t>
-            </a:r>
-          </a:p>
-        </p:txBody>
-      </p:sp>
-      <p:sp>
-        <p:nvSpPr>
-          <p:cNvPr id="4" name="Rounded Rectangle 3"/>
+          <p:cNvPr id="2" name="Rectangle 1"/>
           <p:cNvSpPr/>
           <p:nvPr/>
         </p:nvSpPr>
         <p:spPr>
           <a:xfrm>
-            <a:off x="457200" y="1463040"/>
-            <a:ext cx="3657600" cy="2011680"/>
-          </a:xfrm>
-          <a:prstGeom prst="roundRect">
+            <a:off x="0" y="0"/>
+            <a:ext cx="12191695" cy="6858000"/>
+          </a:xfrm>
+          <a:prstGeom prst="rect">
             <a:avLst/>
           </a:prstGeom>
           <a:solidFill>
             <a:srgbClr val="FFFFFF"/>
           </a:solidFill>
-          <a:ln w="12700">
-            <a:solidFill>
-              <a:srgbClr val="C8D2DC"/>
-            </a:solidFill>
+          <a:ln>
+            <a:noFill/>
           </a:ln>
         </p:spPr>
         <p:style>
@@ -5642,20 +6579,20 @@
       </p:sp>
       <p:sp>
         <p:nvSpPr>
-          <p:cNvPr id="5" name="Rectangle 4"/>
+          <p:cNvPr id="3" name="Rectangle 2"/>
           <p:cNvSpPr/>
           <p:nvPr/>
         </p:nvSpPr>
         <p:spPr>
           <a:xfrm>
-            <a:off x="457200" y="1463040"/>
-            <a:ext cx="3657600" cy="137160"/>
+            <a:off x="0" y="0"/>
+            <a:ext cx="12191695" cy="1188720"/>
           </a:xfrm>
           <a:prstGeom prst="rect">
             <a:avLst/>
           </a:prstGeom>
           <a:solidFill>
-            <a:srgbClr val="005293"/>
+            <a:srgbClr val="172A45"/>
           </a:solidFill>
           <a:ln>
             <a:noFill/>
@@ -5685,14 +6622,14 @@
       </p:sp>
       <p:sp>
         <p:nvSpPr>
-          <p:cNvPr id="6" name="TextBox 5"/>
+          <p:cNvPr id="4" name="TextBox 3"/>
           <p:cNvSpPr txBox="1"/>
           <p:nvPr/>
         </p:nvSpPr>
         <p:spPr>
           <a:xfrm>
-            <a:off x="594360" y="1691640"/>
-            <a:ext cx="3383280" cy="457200"/>
+            <a:off x="731520" y="320040"/>
+            <a:ext cx="10728655" cy="731520"/>
           </a:xfrm>
           <a:prstGeom prst="rect">
             <a:avLst/>
@@ -5706,73 +6643,38 @@
           <a:lstStyle/>
           <a:p>
             <a:pPr>
-              <a:defRPr sz="1500" b="1">
-                <a:solidFill>
-                  <a:srgbClr val="3C3C3C"/>
-                </a:solidFill>
-              </a:defRPr>
-            </a:pPr>
-            <a:r>
-              <a:t>📊 Unified Project Dashboard</a:t>
-            </a:r>
-          </a:p>
-        </p:txBody>
-      </p:sp>
-      <p:sp>
-        <p:nvSpPr>
-          <p:cNvPr id="7" name="TextBox 6"/>
-          <p:cNvSpPr txBox="1"/>
-          <p:nvPr/>
-        </p:nvSpPr>
-        <p:spPr>
-          <a:xfrm>
-            <a:off x="594360" y="2148840"/>
-            <a:ext cx="3383280" cy="1280160"/>
-          </a:xfrm>
-          <a:prstGeom prst="rect">
-            <a:avLst/>
-          </a:prstGeom>
-          <a:noFill/>
-        </p:spPr>
-        <p:txBody>
-          <a:bodyPr wrap="square">
-            <a:spAutoFit/>
-          </a:bodyPr>
-          <a:lstStyle/>
-          <a:p>
-            <a:pPr>
-              <a:defRPr sz="1300">
-                <a:solidFill>
-                  <a:srgbClr val="646464"/>
-                </a:solidFill>
-              </a:defRPr>
-            </a:pPr>
-            <a:r>
-              <a:t>One place to see every project's status from initial land contact through permit approval</a:t>
-            </a:r>
-          </a:p>
-        </p:txBody>
-      </p:sp>
-      <p:sp>
-        <p:nvSpPr>
-          <p:cNvPr id="8" name="Rounded Rectangle 7"/>
+              <a:defRPr sz="3600" b="1">
+                <a:solidFill>
+                  <a:srgbClr val="FFFFFF"/>
+                </a:solidFill>
+              </a:defRPr>
+            </a:pPr>
+            <a:r>
+              <a:t>Examples: What This Looks Like in Practice</a:t>
+            </a:r>
+          </a:p>
+        </p:txBody>
+      </p:sp>
+      <p:sp>
+        <p:nvSpPr>
+          <p:cNvPr id="5" name="Rounded Rectangle 4"/>
           <p:cNvSpPr/>
           <p:nvPr/>
         </p:nvSpPr>
         <p:spPr>
           <a:xfrm>
-            <a:off x="4297680" y="1463040"/>
-            <a:ext cx="3657600" cy="2011680"/>
+            <a:off x="502920" y="1371600"/>
+            <a:ext cx="3657600" cy="1600200"/>
           </a:xfrm>
           <a:prstGeom prst="roundRect">
             <a:avLst/>
           </a:prstGeom>
           <a:solidFill>
-            <a:srgbClr val="FFFFFF"/>
+            <a:srgbClr val="F8FAFC"/>
           </a:solidFill>
-          <a:ln w="12700">
+          <a:ln w="19050">
             <a:solidFill>
-              <a:srgbClr val="C8D2DC"/>
+              <a:srgbClr val="4682B4"/>
             </a:solidFill>
           </a:ln>
         </p:spPr>
@@ -5800,20 +6702,20 @@
       </p:sp>
       <p:sp>
         <p:nvSpPr>
-          <p:cNvPr id="9" name="Rectangle 8"/>
+          <p:cNvPr id="6" name="Oval 5"/>
           <p:cNvSpPr/>
           <p:nvPr/>
         </p:nvSpPr>
         <p:spPr>
           <a:xfrm>
-            <a:off x="4297680" y="1463040"/>
-            <a:ext cx="3657600" cy="137160"/>
-          </a:xfrm>
-          <a:prstGeom prst="rect">
+            <a:off x="640080" y="1508760"/>
+            <a:ext cx="457200" cy="457200"/>
+          </a:xfrm>
+          <a:prstGeom prst="ellipse">
             <a:avLst/>
           </a:prstGeom>
           <a:solidFill>
-            <a:srgbClr val="009688"/>
+            <a:srgbClr val="4682B4"/>
           </a:solidFill>
           <a:ln>
             <a:noFill/>
@@ -5843,14 +6745,14 @@
       </p:sp>
       <p:sp>
         <p:nvSpPr>
-          <p:cNvPr id="10" name="TextBox 9"/>
+          <p:cNvPr id="7" name="TextBox 6"/>
           <p:cNvSpPr txBox="1"/>
           <p:nvPr/>
         </p:nvSpPr>
         <p:spPr>
           <a:xfrm>
-            <a:off x="4434840" y="1691640"/>
-            <a:ext cx="3383280" cy="457200"/>
+            <a:off x="640080" y="1554480"/>
+            <a:ext cx="457200" cy="365760"/>
           </a:xfrm>
           <a:prstGeom prst="rect">
             <a:avLst/>
@@ -5863,29 +6765,60 @@
           </a:bodyPr>
           <a:lstStyle/>
           <a:p>
+            <a:pPr algn="ctr">
+              <a:defRPr sz="2000"/>
+            </a:pPr>
+            <a:r>
+              <a:t>📋</a:t>
+            </a:r>
+          </a:p>
+        </p:txBody>
+      </p:sp>
+      <p:sp>
+        <p:nvSpPr>
+          <p:cNvPr id="8" name="TextBox 7"/>
+          <p:cNvSpPr txBox="1"/>
+          <p:nvPr/>
+        </p:nvSpPr>
+        <p:spPr>
+          <a:xfrm>
+            <a:off x="1188720" y="1554480"/>
+            <a:ext cx="2834640" cy="411480"/>
+          </a:xfrm>
+          <a:prstGeom prst="rect">
+            <a:avLst/>
+          </a:prstGeom>
+          <a:noFill/>
+        </p:spPr>
+        <p:txBody>
+          <a:bodyPr wrap="none">
+            <a:spAutoFit/>
+          </a:bodyPr>
+          <a:lstStyle/>
+          <a:p>
             <a:pPr>
-              <a:defRPr sz="1500" b="1">
-                <a:solidFill>
-                  <a:srgbClr val="3C3C3C"/>
-                </a:solidFill>
-              </a:defRPr>
-            </a:pPr>
-            <a:r>
-              <a:t>🗄️ Connected Databases</a:t>
-            </a:r>
-          </a:p>
-        </p:txBody>
-      </p:sp>
-      <p:sp>
-        <p:nvSpPr>
-          <p:cNvPr id="11" name="TextBox 10"/>
+              <a:defRPr sz="1400" b="1">
+                <a:solidFill>
+                  <a:srgbClr val="172A45"/>
+                </a:solidFill>
+              </a:defRPr>
+            </a:pPr>
+            <a:r>
+              <a:t>Project Pipeline Dashboard</a:t>
+            </a:r>
+          </a:p>
+        </p:txBody>
+      </p:sp>
+      <p:sp>
+        <p:nvSpPr>
+          <p:cNvPr id="9" name="TextBox 8"/>
           <p:cNvSpPr txBox="1"/>
           <p:nvPr/>
         </p:nvSpPr>
         <p:spPr>
           <a:xfrm>
-            <a:off x="4434840" y="2148840"/>
-            <a:ext cx="3383280" cy="1280160"/>
+            <a:off x="640080" y="2011680"/>
+            <a:ext cx="3383280" cy="914400"/>
           </a:xfrm>
           <a:prstGeom prst="rect">
             <a:avLst/>
@@ -5899,38 +6832,38 @@
           <a:lstStyle/>
           <a:p>
             <a:pPr>
-              <a:defRPr sz="1300">
-                <a:solidFill>
-                  <a:srgbClr val="646464"/>
-                </a:solidFill>
-              </a:defRPr>
-            </a:pPr>
-            <a:r>
-              <a:t>Link your spreadsheets, documents, and systems so data flows automatically instead of manual updates</a:t>
-            </a:r>
-          </a:p>
-        </p:txBody>
-      </p:sp>
-      <p:sp>
-        <p:nvSpPr>
-          <p:cNvPr id="12" name="Rounded Rectangle 11"/>
+              <a:defRPr sz="1100">
+                <a:solidFill>
+                  <a:srgbClr val="475569"/>
+                </a:solidFill>
+              </a:defRPr>
+            </a:pPr>
+            <a:r>
+              <a:t>One screen showing every project's status from first landowner contact through permit approval — always up to date</a:t>
+            </a:r>
+          </a:p>
+        </p:txBody>
+      </p:sp>
+      <p:sp>
+        <p:nvSpPr>
+          <p:cNvPr id="10" name="Rounded Rectangle 9"/>
           <p:cNvSpPr/>
           <p:nvPr/>
         </p:nvSpPr>
         <p:spPr>
           <a:xfrm>
-            <a:off x="8138160" y="1463040"/>
-            <a:ext cx="3657600" cy="2011680"/>
+            <a:off x="4297680" y="1371600"/>
+            <a:ext cx="3657600" cy="1600200"/>
           </a:xfrm>
           <a:prstGeom prst="roundRect">
             <a:avLst/>
           </a:prstGeom>
           <a:solidFill>
-            <a:srgbClr val="FFFFFF"/>
+            <a:srgbClr val="F8FAFC"/>
           </a:solidFill>
-          <a:ln w="12700">
+          <a:ln w="19050">
             <a:solidFill>
-              <a:srgbClr val="C8D2DC"/>
+              <a:srgbClr val="008080"/>
             </a:solidFill>
           </a:ln>
         </p:spPr>
@@ -5958,20 +6891,20 @@
       </p:sp>
       <p:sp>
         <p:nvSpPr>
-          <p:cNvPr id="13" name="Rectangle 12"/>
+          <p:cNvPr id="11" name="Oval 10"/>
           <p:cNvSpPr/>
           <p:nvPr/>
         </p:nvSpPr>
         <p:spPr>
           <a:xfrm>
-            <a:off x="8138160" y="1463040"/>
-            <a:ext cx="3657600" cy="137160"/>
-          </a:xfrm>
-          <a:prstGeom prst="rect">
+            <a:off x="4434840" y="1508760"/>
+            <a:ext cx="457200" cy="457200"/>
+          </a:xfrm>
+          <a:prstGeom prst="ellipse">
             <a:avLst/>
           </a:prstGeom>
           <a:solidFill>
-            <a:srgbClr val="4285F4"/>
+            <a:srgbClr val="008080"/>
           </a:solidFill>
           <a:ln>
             <a:noFill/>
@@ -6001,14 +6934,14 @@
       </p:sp>
       <p:sp>
         <p:nvSpPr>
-          <p:cNvPr id="14" name="TextBox 13"/>
+          <p:cNvPr id="12" name="TextBox 11"/>
           <p:cNvSpPr txBox="1"/>
           <p:nvPr/>
         </p:nvSpPr>
         <p:spPr>
           <a:xfrm>
-            <a:off x="8275320" y="1691640"/>
-            <a:ext cx="3383280" cy="457200"/>
+            <a:off x="4434840" y="1554480"/>
+            <a:ext cx="457200" cy="365760"/>
           </a:xfrm>
           <a:prstGeom prst="rect">
             <a:avLst/>
@@ -6021,29 +6954,60 @@
           </a:bodyPr>
           <a:lstStyle/>
           <a:p>
+            <a:pPr algn="ctr">
+              <a:defRPr sz="2000"/>
+            </a:pPr>
+            <a:r>
+              <a:t>🔮</a:t>
+            </a:r>
+          </a:p>
+        </p:txBody>
+      </p:sp>
+      <p:sp>
+        <p:nvSpPr>
+          <p:cNvPr id="13" name="TextBox 12"/>
+          <p:cNvSpPr txBox="1"/>
+          <p:nvPr/>
+        </p:nvSpPr>
+        <p:spPr>
+          <a:xfrm>
+            <a:off x="4983480" y="1554480"/>
+            <a:ext cx="2834640" cy="411480"/>
+          </a:xfrm>
+          <a:prstGeom prst="rect">
+            <a:avLst/>
+          </a:prstGeom>
+          <a:noFill/>
+        </p:spPr>
+        <p:txBody>
+          <a:bodyPr wrap="none">
+            <a:spAutoFit/>
+          </a:bodyPr>
+          <a:lstStyle/>
+          <a:p>
             <a:pPr>
-              <a:defRPr sz="1500" b="1">
-                <a:solidFill>
-                  <a:srgbClr val="3C3C3C"/>
-                </a:solidFill>
-              </a:defRPr>
-            </a:pPr>
-            <a:r>
-              <a:t>📈 Trend Analysis</a:t>
-            </a:r>
-          </a:p>
-        </p:txBody>
-      </p:sp>
-      <p:sp>
-        <p:nvSpPr>
-          <p:cNvPr id="15" name="TextBox 14"/>
+              <a:defRPr sz="1400" b="1">
+                <a:solidFill>
+                  <a:srgbClr val="172A45"/>
+                </a:solidFill>
+              </a:defRPr>
+            </a:pPr>
+            <a:r>
+              <a:t>Permit Timeline Predictor</a:t>
+            </a:r>
+          </a:p>
+        </p:txBody>
+      </p:sp>
+      <p:sp>
+        <p:nvSpPr>
+          <p:cNvPr id="14" name="TextBox 13"/>
           <p:cNvSpPr txBox="1"/>
           <p:nvPr/>
         </p:nvSpPr>
         <p:spPr>
           <a:xfrm>
-            <a:off x="8275320" y="2148840"/>
-            <a:ext cx="3383280" cy="1280160"/>
+            <a:off x="4434840" y="2011680"/>
+            <a:ext cx="3383280" cy="914400"/>
           </a:xfrm>
           <a:prstGeom prst="rect">
             <a:avLst/>
@@ -6057,38 +7021,38 @@
           <a:lstStyle/>
           <a:p>
             <a:pPr>
-              <a:defRPr sz="1300">
-                <a:solidFill>
-                  <a:srgbClr val="646464"/>
-                </a:solidFill>
-              </a:defRPr>
-            </a:pPr>
-            <a:r>
-              <a:t>See patterns like which counties approve permits faster, or what landowner characteristics predict success</a:t>
-            </a:r>
-          </a:p>
-        </p:txBody>
-      </p:sp>
-      <p:sp>
-        <p:nvSpPr>
-          <p:cNvPr id="16" name="Rounded Rectangle 15"/>
+              <a:defRPr sz="1100">
+                <a:solidFill>
+                  <a:srgbClr val="475569"/>
+                </a:solidFill>
+              </a:defRPr>
+            </a:pPr>
+            <a:r>
+              <a:t>A tool that estimates realistic approval dates based on county, project size, and historical patterns</a:t>
+            </a:r>
+          </a:p>
+        </p:txBody>
+      </p:sp>
+      <p:sp>
+        <p:nvSpPr>
+          <p:cNvPr id="15" name="Rounded Rectangle 14"/>
           <p:cNvSpPr/>
           <p:nvPr/>
         </p:nvSpPr>
         <p:spPr>
           <a:xfrm>
-            <a:off x="457200" y="3657600"/>
-            <a:ext cx="3657600" cy="2011680"/>
+            <a:off x="8092440" y="1371600"/>
+            <a:ext cx="3657600" cy="1600200"/>
           </a:xfrm>
           <a:prstGeom prst="roundRect">
             <a:avLst/>
           </a:prstGeom>
           <a:solidFill>
-            <a:srgbClr val="FFFFFF"/>
+            <a:srgbClr val="F8FAFC"/>
           </a:solidFill>
-          <a:ln w="12700">
+          <a:ln w="19050">
             <a:solidFill>
-              <a:srgbClr val="C8D2DC"/>
+              <a:srgbClr val="558B6E"/>
             </a:solidFill>
           </a:ln>
         </p:spPr>
@@ -6116,20 +7080,20 @@
       </p:sp>
       <p:sp>
         <p:nvSpPr>
-          <p:cNvPr id="17" name="Rectangle 16"/>
+          <p:cNvPr id="16" name="Oval 15"/>
           <p:cNvSpPr/>
           <p:nvPr/>
         </p:nvSpPr>
         <p:spPr>
           <a:xfrm>
-            <a:off x="457200" y="3657600"/>
-            <a:ext cx="3657600" cy="137160"/>
-          </a:xfrm>
-          <a:prstGeom prst="rect">
+            <a:off x="8229600" y="1508760"/>
+            <a:ext cx="457200" cy="457200"/>
+          </a:xfrm>
+          <a:prstGeom prst="ellipse">
             <a:avLst/>
           </a:prstGeom>
           <a:solidFill>
-            <a:srgbClr val="9C27B0"/>
+            <a:srgbClr val="558B6E"/>
           </a:solidFill>
           <a:ln>
             <a:noFill/>
@@ -6159,14 +7123,14 @@
       </p:sp>
       <p:sp>
         <p:nvSpPr>
-          <p:cNvPr id="18" name="TextBox 17"/>
+          <p:cNvPr id="17" name="TextBox 16"/>
           <p:cNvSpPr txBox="1"/>
           <p:nvPr/>
         </p:nvSpPr>
         <p:spPr>
           <a:xfrm>
-            <a:off x="594360" y="3886200"/>
-            <a:ext cx="3383280" cy="457200"/>
+            <a:off x="8229600" y="1554480"/>
+            <a:ext cx="457200" cy="365760"/>
           </a:xfrm>
           <a:prstGeom prst="rect">
             <a:avLst/>
@@ -6179,15 +7143,46 @@
           </a:bodyPr>
           <a:lstStyle/>
           <a:p>
+            <a:pPr algn="ctr">
+              <a:defRPr sz="2000"/>
+            </a:pPr>
+            <a:r>
+              <a:t>📄</a:t>
+            </a:r>
+          </a:p>
+        </p:txBody>
+      </p:sp>
+      <p:sp>
+        <p:nvSpPr>
+          <p:cNvPr id="18" name="TextBox 17"/>
+          <p:cNvSpPr txBox="1"/>
+          <p:nvPr/>
+        </p:nvSpPr>
+        <p:spPr>
+          <a:xfrm>
+            <a:off x="8778240" y="1554480"/>
+            <a:ext cx="2834640" cy="411480"/>
+          </a:xfrm>
+          <a:prstGeom prst="rect">
+            <a:avLst/>
+          </a:prstGeom>
+          <a:noFill/>
+        </p:spPr>
+        <p:txBody>
+          <a:bodyPr wrap="none">
+            <a:spAutoFit/>
+          </a:bodyPr>
+          <a:lstStyle/>
+          <a:p>
             <a:pPr>
-              <a:defRPr sz="1500" b="1">
-                <a:solidFill>
-                  <a:srgbClr val="3C3C3C"/>
-                </a:solidFill>
-              </a:defRPr>
-            </a:pPr>
-            <a:r>
-              <a:t>🔮 Timeline Predictions</a:t>
+              <a:defRPr sz="1400" b="1">
+                <a:solidFill>
+                  <a:srgbClr val="172A45"/>
+                </a:solidFill>
+              </a:defRPr>
+            </a:pPr>
+            <a:r>
+              <a:t>Automatic Report Generator</a:t>
             </a:r>
           </a:p>
         </p:txBody>
@@ -6200,8 +7195,8 @@
         </p:nvSpPr>
         <p:spPr>
           <a:xfrm>
-            <a:off x="594360" y="4343400"/>
-            <a:ext cx="3383280" cy="1280160"/>
+            <a:off x="8229600" y="2011680"/>
+            <a:ext cx="3383280" cy="914400"/>
           </a:xfrm>
           <a:prstGeom prst="rect">
             <a:avLst/>
@@ -6215,14 +7210,14 @@
           <a:lstStyle/>
           <a:p>
             <a:pPr>
-              <a:defRPr sz="1300">
-                <a:solidFill>
-                  <a:srgbClr val="646464"/>
-                </a:solidFill>
-              </a:defRPr>
-            </a:pPr>
-            <a:r>
-              <a:t>Forecast realistic permit approval dates based on historical data and current conditions</a:t>
+              <a:defRPr sz="1100">
+                <a:solidFill>
+                  <a:srgbClr val="475569"/>
+                </a:solidFill>
+              </a:defRPr>
+            </a:pPr>
+            <a:r>
+              <a:t>Feed in your project data, get a formatted status report or permit application draft — ready to review</a:t>
             </a:r>
           </a:p>
         </p:txBody>
@@ -6235,18 +7230,18 @@
         </p:nvSpPr>
         <p:spPr>
           <a:xfrm>
-            <a:off x="4297680" y="3657600"/>
-            <a:ext cx="3657600" cy="2011680"/>
+            <a:off x="502920" y="3108960"/>
+            <a:ext cx="3657600" cy="1600200"/>
           </a:xfrm>
           <a:prstGeom prst="roundRect">
             <a:avLst/>
           </a:prstGeom>
           <a:solidFill>
-            <a:srgbClr val="FFFFFF"/>
+            <a:srgbClr val="F8FAFC"/>
           </a:solidFill>
-          <a:ln w="12700">
+          <a:ln w="19050">
             <a:solidFill>
-              <a:srgbClr val="C8D2DC"/>
+              <a:srgbClr val="9370A5"/>
             </a:solidFill>
           </a:ln>
         </p:spPr>
@@ -6274,20 +7269,20 @@
       </p:sp>
       <p:sp>
         <p:nvSpPr>
-          <p:cNvPr id="21" name="Rectangle 20"/>
+          <p:cNvPr id="21" name="Oval 20"/>
           <p:cNvSpPr/>
           <p:nvPr/>
         </p:nvSpPr>
         <p:spPr>
           <a:xfrm>
-            <a:off x="4297680" y="3657600"/>
-            <a:ext cx="3657600" cy="137160"/>
-          </a:xfrm>
-          <a:prstGeom prst="rect">
+            <a:off x="640080" y="3246120"/>
+            <a:ext cx="457200" cy="457200"/>
+          </a:xfrm>
+          <a:prstGeom prst="ellipse">
             <a:avLst/>
           </a:prstGeom>
           <a:solidFill>
-            <a:srgbClr val="FF9800"/>
+            <a:srgbClr val="9370A5"/>
           </a:solidFill>
           <a:ln>
             <a:noFill/>
@@ -6323,8 +7318,8 @@
         </p:nvSpPr>
         <p:spPr>
           <a:xfrm>
-            <a:off x="4434840" y="3886200"/>
-            <a:ext cx="3383280" cy="457200"/>
+            <a:off x="640080" y="3291840"/>
+            <a:ext cx="457200" cy="365760"/>
           </a:xfrm>
           <a:prstGeom prst="rect">
             <a:avLst/>
@@ -6337,15 +7332,11 @@
           </a:bodyPr>
           <a:lstStyle/>
           <a:p>
-            <a:pPr>
-              <a:defRPr sz="1500" b="1">
-                <a:solidFill>
-                  <a:srgbClr val="3C3C3C"/>
-                </a:solidFill>
-              </a:defRPr>
-            </a:pPr>
-            <a:r>
-              <a:t>🤖 AI Document Tools</a:t>
+            <a:pPr algn="ctr">
+              <a:defRPr sz="2000"/>
+            </a:pPr>
+            <a:r>
+              <a:t>🗺️</a:t>
             </a:r>
           </a:p>
         </p:txBody>
@@ -6358,8 +7349,43 @@
         </p:nvSpPr>
         <p:spPr>
           <a:xfrm>
-            <a:off x="4434840" y="4343400"/>
-            <a:ext cx="3383280" cy="1280160"/>
+            <a:off x="1188720" y="3291840"/>
+            <a:ext cx="2834640" cy="411480"/>
+          </a:xfrm>
+          <a:prstGeom prst="rect">
+            <a:avLst/>
+          </a:prstGeom>
+          <a:noFill/>
+        </p:spPr>
+        <p:txBody>
+          <a:bodyPr wrap="none">
+            <a:spAutoFit/>
+          </a:bodyPr>
+          <a:lstStyle/>
+          <a:p>
+            <a:pPr>
+              <a:defRPr sz="1400" b="1">
+                <a:solidFill>
+                  <a:srgbClr val="172A45"/>
+                </a:solidFill>
+              </a:defRPr>
+            </a:pPr>
+            <a:r>
+              <a:t>Interactive Project Maps</a:t>
+            </a:r>
+          </a:p>
+        </p:txBody>
+      </p:sp>
+      <p:sp>
+        <p:nvSpPr>
+          <p:cNvPr id="24" name="TextBox 23"/>
+          <p:cNvSpPr txBox="1"/>
+          <p:nvPr/>
+        </p:nvSpPr>
+        <p:spPr>
+          <a:xfrm>
+            <a:off x="640080" y="3749040"/>
+            <a:ext cx="3383280" cy="914400"/>
           </a:xfrm>
           <a:prstGeom prst="rect">
             <a:avLst/>
@@ -6373,38 +7399,38 @@
           <a:lstStyle/>
           <a:p>
             <a:pPr>
-              <a:defRPr sz="1300">
-                <a:solidFill>
-                  <a:srgbClr val="646464"/>
-                </a:solidFill>
-              </a:defRPr>
-            </a:pPr>
-            <a:r>
-              <a:t>Auto-generate permit applications, landowner letters, or reports from your project data</a:t>
-            </a:r>
-          </a:p>
-        </p:txBody>
-      </p:sp>
-      <p:sp>
-        <p:nvSpPr>
-          <p:cNvPr id="24" name="Rounded Rectangle 23"/>
+              <a:defRPr sz="1100">
+                <a:solidFill>
+                  <a:srgbClr val="475569"/>
+                </a:solidFill>
+              </a:defRPr>
+            </a:pPr>
+            <a:r>
+              <a:t>Visual maps showing land status, permitting progress, and key metrics you can explore and filter</a:t>
+            </a:r>
+          </a:p>
+        </p:txBody>
+      </p:sp>
+      <p:sp>
+        <p:nvSpPr>
+          <p:cNvPr id="25" name="Rounded Rectangle 24"/>
           <p:cNvSpPr/>
           <p:nvPr/>
         </p:nvSpPr>
         <p:spPr>
           <a:xfrm>
-            <a:off x="8138160" y="3657600"/>
-            <a:ext cx="3657600" cy="2011680"/>
+            <a:off x="4297680" y="3108960"/>
+            <a:ext cx="3657600" cy="1600200"/>
           </a:xfrm>
           <a:prstGeom prst="roundRect">
             <a:avLst/>
           </a:prstGeom>
           <a:solidFill>
-            <a:srgbClr val="FFFFFF"/>
+            <a:srgbClr val="F8FAFC"/>
           </a:solidFill>
-          <a:ln w="12700">
+          <a:ln w="19050">
             <a:solidFill>
-              <a:srgbClr val="C8D2DC"/>
+              <a:srgbClr val="CD853F"/>
             </a:solidFill>
           </a:ln>
         </p:spPr>
@@ -6432,20 +7458,20 @@
       </p:sp>
       <p:sp>
         <p:nvSpPr>
-          <p:cNvPr id="25" name="Rectangle 24"/>
+          <p:cNvPr id="26" name="Oval 25"/>
           <p:cNvSpPr/>
           <p:nvPr/>
         </p:nvSpPr>
         <p:spPr>
           <a:xfrm>
-            <a:off x="8138160" y="3657600"/>
-            <a:ext cx="3657600" cy="137160"/>
-          </a:xfrm>
-          <a:prstGeom prst="rect">
+            <a:off x="4434840" y="3246120"/>
+            <a:ext cx="457200" cy="457200"/>
+          </a:xfrm>
+          <a:prstGeom prst="ellipse">
             <a:avLst/>
           </a:prstGeom>
           <a:solidFill>
-            <a:srgbClr val="4CAF50"/>
+            <a:srgbClr val="CD853F"/>
           </a:solidFill>
           <a:ln>
             <a:noFill/>
@@ -6475,14 +7501,14 @@
       </p:sp>
       <p:sp>
         <p:nvSpPr>
-          <p:cNvPr id="26" name="TextBox 25"/>
+          <p:cNvPr id="27" name="TextBox 26"/>
           <p:cNvSpPr txBox="1"/>
           <p:nvPr/>
         </p:nvSpPr>
         <p:spPr>
           <a:xfrm>
-            <a:off x="8275320" y="3886200"/>
-            <a:ext cx="3383280" cy="457200"/>
+            <a:off x="4434840" y="3291840"/>
+            <a:ext cx="457200" cy="365760"/>
           </a:xfrm>
           <a:prstGeom prst="rect">
             <a:avLst/>
@@ -6495,29 +7521,60 @@
           </a:bodyPr>
           <a:lstStyle/>
           <a:p>
+            <a:pPr algn="ctr">
+              <a:defRPr sz="2000"/>
+            </a:pPr>
+            <a:r>
+              <a:t>💬</a:t>
+            </a:r>
+          </a:p>
+        </p:txBody>
+      </p:sp>
+      <p:sp>
+        <p:nvSpPr>
+          <p:cNvPr id="28" name="TextBox 27"/>
+          <p:cNvSpPr txBox="1"/>
+          <p:nvPr/>
+        </p:nvSpPr>
+        <p:spPr>
+          <a:xfrm>
+            <a:off x="4983480" y="3291840"/>
+            <a:ext cx="2834640" cy="411480"/>
+          </a:xfrm>
+          <a:prstGeom prst="rect">
+            <a:avLst/>
+          </a:prstGeom>
+          <a:noFill/>
+        </p:spPr>
+        <p:txBody>
+          <a:bodyPr wrap="none">
+            <a:spAutoFit/>
+          </a:bodyPr>
+          <a:lstStyle/>
+          <a:p>
             <a:pPr>
-              <a:defRPr sz="1500" b="1">
-                <a:solidFill>
-                  <a:srgbClr val="3C3C3C"/>
-                </a:solidFill>
-              </a:defRPr>
-            </a:pPr>
-            <a:r>
-              <a:t>🗺️ Visual Mapping</a:t>
-            </a:r>
-          </a:p>
-        </p:txBody>
-      </p:sp>
-      <p:sp>
-        <p:nvSpPr>
-          <p:cNvPr id="27" name="TextBox 26"/>
+              <a:defRPr sz="1400" b="1">
+                <a:solidFill>
+                  <a:srgbClr val="172A45"/>
+                </a:solidFill>
+              </a:defRPr>
+            </a:pPr>
+            <a:r>
+              <a:t>Project Data Assistant</a:t>
+            </a:r>
+          </a:p>
+        </p:txBody>
+      </p:sp>
+      <p:sp>
+        <p:nvSpPr>
+          <p:cNvPr id="29" name="TextBox 28"/>
           <p:cNvSpPr txBox="1"/>
           <p:nvPr/>
         </p:nvSpPr>
         <p:spPr>
           <a:xfrm>
-            <a:off x="8275320" y="4343400"/>
-            <a:ext cx="3383280" cy="1280160"/>
+            <a:off x="4434840" y="3749040"/>
+            <a:ext cx="3383280" cy="914400"/>
           </a:xfrm>
           <a:prstGeom prst="rect">
             <a:avLst/>
@@ -6531,28 +7588,116 @@
           <a:lstStyle/>
           <a:p>
             <a:pPr>
-              <a:defRPr sz="1300">
-                <a:solidFill>
-                  <a:srgbClr val="646464"/>
-                </a:solidFill>
-              </a:defRPr>
-            </a:pPr>
-            <a:r>
-              <a:t>Interactive maps showing project pipeline, land status, and key metrics at a glance</a:t>
-            </a:r>
-          </a:p>
-        </p:txBody>
-      </p:sp>
-      <p:sp>
-        <p:nvSpPr>
-          <p:cNvPr id="28" name="TextBox 27"/>
+              <a:defRPr sz="1100">
+                <a:solidFill>
+                  <a:srgbClr val="475569"/>
+                </a:solidFill>
+              </a:defRPr>
+            </a:pPr>
+            <a:r>
+              <a:t>Ask questions in plain English like "Which projects in Texas are waiting on permits?" and get instant answers</a:t>
+            </a:r>
+          </a:p>
+        </p:txBody>
+      </p:sp>
+      <p:sp>
+        <p:nvSpPr>
+          <p:cNvPr id="30" name="Rounded Rectangle 29"/>
+          <p:cNvSpPr/>
+          <p:nvPr/>
+        </p:nvSpPr>
+        <p:spPr>
+          <a:xfrm>
+            <a:off x="8092440" y="3108960"/>
+            <a:ext cx="3657600" cy="1600200"/>
+          </a:xfrm>
+          <a:prstGeom prst="roundRect">
+            <a:avLst/>
+          </a:prstGeom>
+          <a:solidFill>
+            <a:srgbClr val="F8FAFC"/>
+          </a:solidFill>
+          <a:ln w="19050">
+            <a:solidFill>
+              <a:srgbClr val="778899"/>
+            </a:solidFill>
+          </a:ln>
+        </p:spPr>
+        <p:style>
+          <a:lnRef idx="1">
+            <a:schemeClr val="accent1"/>
+          </a:lnRef>
+          <a:fillRef idx="3">
+            <a:schemeClr val="accent1"/>
+          </a:fillRef>
+          <a:effectRef idx="2">
+            <a:schemeClr val="accent1"/>
+          </a:effectRef>
+          <a:fontRef idx="minor">
+            <a:schemeClr val="lt1"/>
+          </a:fontRef>
+        </p:style>
+        <p:txBody>
+          <a:bodyPr rtlCol="0" anchor="ctr"/>
+          <a:lstStyle/>
+          <a:p>
+            <a:pPr algn="ctr"/>
+          </a:p>
+        </p:txBody>
+      </p:sp>
+      <p:sp>
+        <p:nvSpPr>
+          <p:cNvPr id="31" name="Oval 30"/>
+          <p:cNvSpPr/>
+          <p:nvPr/>
+        </p:nvSpPr>
+        <p:spPr>
+          <a:xfrm>
+            <a:off x="8229600" y="3246120"/>
+            <a:ext cx="457200" cy="457200"/>
+          </a:xfrm>
+          <a:prstGeom prst="ellipse">
+            <a:avLst/>
+          </a:prstGeom>
+          <a:solidFill>
+            <a:srgbClr val="778899"/>
+          </a:solidFill>
+          <a:ln>
+            <a:noFill/>
+          </a:ln>
+        </p:spPr>
+        <p:style>
+          <a:lnRef idx="1">
+            <a:schemeClr val="accent1"/>
+          </a:lnRef>
+          <a:fillRef idx="3">
+            <a:schemeClr val="accent1"/>
+          </a:fillRef>
+          <a:effectRef idx="2">
+            <a:schemeClr val="accent1"/>
+          </a:effectRef>
+          <a:fontRef idx="minor">
+            <a:schemeClr val="lt1"/>
+          </a:fontRef>
+        </p:style>
+        <p:txBody>
+          <a:bodyPr rtlCol="0" anchor="ctr"/>
+          <a:lstStyle/>
+          <a:p>
+            <a:pPr algn="ctr"/>
+          </a:p>
+        </p:txBody>
+      </p:sp>
+      <p:sp>
+        <p:nvSpPr>
+          <p:cNvPr id="32" name="TextBox 31"/>
           <p:cNvSpPr txBox="1"/>
           <p:nvPr/>
         </p:nvSpPr>
         <p:spPr>
           <a:xfrm>
-            <a:off x="457200" y="5669280"/>
-            <a:ext cx="11247120" cy="548640"/>
+            <a:off x="8229600" y="3291840"/>
+            <a:ext cx="457200" cy="365760"/>
           </a:xfrm>
           <a:prstGeom prst="rect">
             <a:avLst/>
@@ -6566,14 +7711,150 @@
           <a:lstStyle/>
           <a:p>
             <a:pPr algn="ctr">
-              <a:defRPr sz="1600" i="1">
-                <a:solidFill>
-                  <a:srgbClr val="009688"/>
-                </a:solidFill>
-              </a:defRPr>
-            </a:pPr>
-            <a:r>
-              <a:t>These are just examples — we tailor solutions to your specific challenges</a:t>
+              <a:defRPr sz="2000"/>
+            </a:pPr>
+            <a:r>
+              <a:t>🔗</a:t>
+            </a:r>
+          </a:p>
+        </p:txBody>
+      </p:sp>
+      <p:sp>
+        <p:nvSpPr>
+          <p:cNvPr id="33" name="TextBox 32"/>
+          <p:cNvSpPr txBox="1"/>
+          <p:nvPr/>
+        </p:nvSpPr>
+        <p:spPr>
+          <a:xfrm>
+            <a:off x="8778240" y="3291840"/>
+            <a:ext cx="2834640" cy="411480"/>
+          </a:xfrm>
+          <a:prstGeom prst="rect">
+            <a:avLst/>
+          </a:prstGeom>
+          <a:noFill/>
+        </p:spPr>
+        <p:txBody>
+          <a:bodyPr wrap="none">
+            <a:spAutoFit/>
+          </a:bodyPr>
+          <a:lstStyle/>
+          <a:p>
+            <a:pPr>
+              <a:defRPr sz="1400" b="1">
+                <a:solidFill>
+                  <a:srgbClr val="172A45"/>
+                </a:solidFill>
+              </a:defRPr>
+            </a:pPr>
+            <a:r>
+              <a:t>Connected Data Systems</a:t>
+            </a:r>
+          </a:p>
+        </p:txBody>
+      </p:sp>
+      <p:sp>
+        <p:nvSpPr>
+          <p:cNvPr id="34" name="TextBox 33"/>
+          <p:cNvSpPr txBox="1"/>
+          <p:nvPr/>
+        </p:nvSpPr>
+        <p:spPr>
+          <a:xfrm>
+            <a:off x="8229600" y="3749040"/>
+            <a:ext cx="3383280" cy="914400"/>
+          </a:xfrm>
+          <a:prstGeom prst="rect">
+            <a:avLst/>
+          </a:prstGeom>
+          <a:noFill/>
+        </p:spPr>
+        <p:txBody>
+          <a:bodyPr wrap="square">
+            <a:spAutoFit/>
+          </a:bodyPr>
+          <a:lstStyle/>
+          <a:p>
+            <a:pPr>
+              <a:defRPr sz="1100">
+                <a:solidFill>
+                  <a:srgbClr val="475569"/>
+                </a:solidFill>
+              </a:defRPr>
+            </a:pPr>
+            <a:r>
+              <a:t>Link your spreadsheets, databases, and documents so information flows automatically — no more manual updates</a:t>
+            </a:r>
+          </a:p>
+        </p:txBody>
+      </p:sp>
+      <p:sp>
+        <p:nvSpPr>
+          <p:cNvPr id="35" name="TextBox 34"/>
+          <p:cNvSpPr txBox="1"/>
+          <p:nvPr/>
+        </p:nvSpPr>
+        <p:spPr>
+          <a:xfrm>
+            <a:off x="457200" y="4709160"/>
+            <a:ext cx="11247120" cy="457200"/>
+          </a:xfrm>
+          <a:prstGeom prst="rect">
+            <a:avLst/>
+          </a:prstGeom>
+          <a:noFill/>
+        </p:spPr>
+        <p:txBody>
+          <a:bodyPr wrap="none">
+            <a:spAutoFit/>
+          </a:bodyPr>
+          <a:lstStyle/>
+          <a:p>
+            <a:pPr algn="ctr">
+              <a:defRPr sz="1400" i="1">
+                <a:solidFill>
+                  <a:srgbClr val="64748B"/>
+                </a:solidFill>
+              </a:defRPr>
+            </a:pPr>
+            <a:r>
+              <a:t>These are just examples — every solution is tailored to your specific needs</a:t>
+            </a:r>
+          </a:p>
+        </p:txBody>
+      </p:sp>
+      <p:sp>
+        <p:nvSpPr>
+          <p:cNvPr id="36" name="TextBox 35"/>
+          <p:cNvSpPr txBox="1"/>
+          <p:nvPr/>
+        </p:nvSpPr>
+        <p:spPr>
+          <a:xfrm>
+            <a:off x="457200" y="6492240"/>
+            <a:ext cx="3657600" cy="274320"/>
+          </a:xfrm>
+          <a:prstGeom prst="rect">
+            <a:avLst/>
+          </a:prstGeom>
+          <a:noFill/>
+        </p:spPr>
+        <p:txBody>
+          <a:bodyPr wrap="none">
+            <a:spAutoFit/>
+          </a:bodyPr>
+          <a:lstStyle/>
+          <a:p>
+            <a:pPr>
+              <a:defRPr sz="900" i="1">
+                <a:solidFill>
+                  <a:srgbClr val="64748B"/>
+                </a:solidFill>
+              </a:defRPr>
+            </a:pPr>
+            <a:r>
+              <a:t>Enterprise Analytics and AI</a:t>
             </a:r>
           </a:p>
         </p:txBody>
@@ -6598,55 +7879,20 @@
       <p:grpSpPr/>
       <p:sp>
         <p:nvSpPr>
-          <p:cNvPr id="2" name="TextBox 1"/>
-          <p:cNvSpPr txBox="1"/>
-          <p:nvPr/>
-        </p:nvSpPr>
-        <p:spPr>
-          <a:xfrm>
-            <a:off x="457200" y="274320"/>
-            <a:ext cx="11277295" cy="914400"/>
-          </a:xfrm>
-          <a:prstGeom prst="rect">
-            <a:avLst/>
-          </a:prstGeom>
-          <a:noFill/>
-        </p:spPr>
-        <p:txBody>
-          <a:bodyPr wrap="square">
-            <a:spAutoFit/>
-          </a:bodyPr>
-          <a:lstStyle/>
-          <a:p>
-            <a:pPr algn="l">
-              <a:defRPr sz="4400" b="1">
-                <a:solidFill>
-                  <a:srgbClr val="005293"/>
-                </a:solidFill>
-              </a:defRPr>
-            </a:pPr>
-            <a:r>
-              <a:t>How to Work With Us</a:t>
-            </a:r>
-          </a:p>
-        </p:txBody>
-      </p:sp>
-      <p:sp>
-        <p:nvSpPr>
-          <p:cNvPr id="3" name="Oval 2"/>
+          <p:cNvPr id="2" name="Rectangle 1"/>
           <p:cNvSpPr/>
           <p:nvPr/>
         </p:nvSpPr>
         <p:spPr>
           <a:xfrm>
-            <a:off x="1463040" y="1371600"/>
-            <a:ext cx="731520" cy="731520"/>
-          </a:xfrm>
-          <a:prstGeom prst="ellipse">
+            <a:off x="0" y="0"/>
+            <a:ext cx="12191695" cy="6858000"/>
+          </a:xfrm>
+          <a:prstGeom prst="rect">
             <a:avLst/>
           </a:prstGeom>
           <a:solidFill>
-            <a:srgbClr val="005293"/>
+            <a:srgbClr val="FFFFFF"/>
           </a:solidFill>
           <a:ln>
             <a:noFill/>
@@ -6676,125 +7922,20 @@
       </p:sp>
       <p:sp>
         <p:nvSpPr>
-          <p:cNvPr id="4" name="TextBox 3"/>
-          <p:cNvSpPr txBox="1"/>
-          <p:nvPr/>
-        </p:nvSpPr>
-        <p:spPr>
-          <a:xfrm>
-            <a:off x="1508760" y="1508760"/>
-            <a:ext cx="640080" cy="457200"/>
-          </a:xfrm>
-          <a:prstGeom prst="rect">
-            <a:avLst/>
-          </a:prstGeom>
-          <a:noFill/>
-        </p:spPr>
-        <p:txBody>
-          <a:bodyPr wrap="none">
-            <a:spAutoFit/>
-          </a:bodyPr>
-          <a:lstStyle/>
-          <a:p>
-            <a:pPr algn="ctr">
-              <a:defRPr sz="2800" b="1">
-                <a:solidFill>
-                  <a:srgbClr val="FFFFFF"/>
-                </a:solidFill>
-              </a:defRPr>
-            </a:pPr>
-            <a:r>
-              <a:t>1</a:t>
-            </a:r>
-          </a:p>
-        </p:txBody>
-      </p:sp>
-      <p:sp>
-        <p:nvSpPr>
-          <p:cNvPr id="5" name="TextBox 4"/>
-          <p:cNvSpPr txBox="1"/>
-          <p:nvPr/>
-        </p:nvSpPr>
-        <p:spPr>
-          <a:xfrm>
-            <a:off x="548640" y="2286000"/>
-            <a:ext cx="2560320" cy="548640"/>
-          </a:xfrm>
-          <a:prstGeom prst="rect">
-            <a:avLst/>
-          </a:prstGeom>
-          <a:noFill/>
-        </p:spPr>
-        <p:txBody>
-          <a:bodyPr wrap="square">
-            <a:spAutoFit/>
-          </a:bodyPr>
-          <a:lstStyle/>
-          <a:p>
-            <a:pPr algn="ctr">
-              <a:defRPr sz="1800" b="1">
-                <a:solidFill>
-                  <a:srgbClr val="3C3C3C"/>
-                </a:solidFill>
-              </a:defRPr>
-            </a:pPr>
-            <a:r>
-              <a:t>Share Your Challenge</a:t>
-            </a:r>
-          </a:p>
-        </p:txBody>
-      </p:sp>
-      <p:sp>
-        <p:nvSpPr>
-          <p:cNvPr id="6" name="TextBox 5"/>
-          <p:cNvSpPr txBox="1"/>
-          <p:nvPr/>
-        </p:nvSpPr>
-        <p:spPr>
-          <a:xfrm>
-            <a:off x="548640" y="2834640"/>
-            <a:ext cx="2560320" cy="1371600"/>
-          </a:xfrm>
-          <a:prstGeom prst="rect">
-            <a:avLst/>
-          </a:prstGeom>
-          <a:noFill/>
-        </p:spPr>
-        <p:txBody>
-          <a:bodyPr wrap="square">
-            <a:spAutoFit/>
-          </a:bodyPr>
-          <a:lstStyle/>
-          <a:p>
-            <a:pPr algn="ctr">
-              <a:defRPr sz="1400">
-                <a:solidFill>
-                  <a:srgbClr val="646464"/>
-                </a:solidFill>
-              </a:defRPr>
-            </a:pPr>
-            <a:r>
-              <a:t>Tell us about a problem you're facing or an idea you have</a:t>
-            </a:r>
-          </a:p>
-        </p:txBody>
-      </p:sp>
-      <p:sp>
-        <p:nvSpPr>
-          <p:cNvPr id="7" name="Right Arrow 6"/>
+          <p:cNvPr id="3" name="Rectangle 2"/>
           <p:cNvSpPr/>
           <p:nvPr/>
         </p:nvSpPr>
         <p:spPr>
           <a:xfrm>
-            <a:off x="3154680" y="1554480"/>
-            <a:ext cx="274320" cy="365760"/>
-          </a:xfrm>
-          <a:prstGeom prst="rightArrow">
+            <a:off x="0" y="0"/>
+            <a:ext cx="12191695" cy="1188720"/>
+          </a:xfrm>
+          <a:prstGeom prst="rect">
             <a:avLst/>
           </a:prstGeom>
           <a:solidFill>
-            <a:srgbClr val="C8D2DC"/>
+            <a:srgbClr val="172A45"/>
           </a:solidFill>
           <a:ln>
             <a:noFill/>
@@ -6824,20 +7965,55 @@
       </p:sp>
       <p:sp>
         <p:nvSpPr>
-          <p:cNvPr id="8" name="Oval 7"/>
+          <p:cNvPr id="4" name="TextBox 3"/>
+          <p:cNvSpPr txBox="1"/>
+          <p:nvPr/>
+        </p:nvSpPr>
+        <p:spPr>
+          <a:xfrm>
+            <a:off x="731520" y="320040"/>
+            <a:ext cx="10728655" cy="731520"/>
+          </a:xfrm>
+          <a:prstGeom prst="rect">
+            <a:avLst/>
+          </a:prstGeom>
+          <a:noFill/>
+        </p:spPr>
+        <p:txBody>
+          <a:bodyPr wrap="none">
+            <a:spAutoFit/>
+          </a:bodyPr>
+          <a:lstStyle/>
+          <a:p>
+            <a:pPr>
+              <a:defRPr sz="3600" b="1">
+                <a:solidFill>
+                  <a:srgbClr val="FFFFFF"/>
+                </a:solidFill>
+              </a:defRPr>
+            </a:pPr>
+            <a:r>
+              <a:t>How to Work With Us</a:t>
+            </a:r>
+          </a:p>
+        </p:txBody>
+      </p:sp>
+      <p:sp>
+        <p:nvSpPr>
+          <p:cNvPr id="5" name="Oval 4"/>
           <p:cNvSpPr/>
           <p:nvPr/>
         </p:nvSpPr>
         <p:spPr>
           <a:xfrm>
-            <a:off x="4389120" y="1371600"/>
-            <a:ext cx="731520" cy="731520"/>
+            <a:off x="1737360" y="1554480"/>
+            <a:ext cx="640080" cy="640080"/>
           </a:xfrm>
           <a:prstGeom prst="ellipse">
             <a:avLst/>
           </a:prstGeom>
           <a:solidFill>
-            <a:srgbClr val="009688"/>
+            <a:srgbClr val="008080"/>
           </a:solidFill>
           <a:ln>
             <a:noFill/>
@@ -6867,14 +8043,14 @@
       </p:sp>
       <p:sp>
         <p:nvSpPr>
-          <p:cNvPr id="9" name="TextBox 8"/>
+          <p:cNvPr id="6" name="TextBox 5"/>
           <p:cNvSpPr txBox="1"/>
           <p:nvPr/>
         </p:nvSpPr>
         <p:spPr>
           <a:xfrm>
-            <a:off x="4434840" y="1508760"/>
-            <a:ext cx="640080" cy="457200"/>
+            <a:off x="1783080" y="1664208"/>
+            <a:ext cx="548640" cy="457200"/>
           </a:xfrm>
           <a:prstGeom prst="rect">
             <a:avLst/>
@@ -6888,28 +8064,63 @@
           <a:lstStyle/>
           <a:p>
             <a:pPr algn="ctr">
-              <a:defRPr sz="2800" b="1">
+              <a:defRPr sz="2600" b="1">
                 <a:solidFill>
                   <a:srgbClr val="FFFFFF"/>
                 </a:solidFill>
               </a:defRPr>
             </a:pPr>
             <a:r>
-              <a:t>2</a:t>
-            </a:r>
-          </a:p>
-        </p:txBody>
-      </p:sp>
-      <p:sp>
-        <p:nvSpPr>
-          <p:cNvPr id="10" name="TextBox 9"/>
+              <a:t>1</a:t>
+            </a:r>
+          </a:p>
+        </p:txBody>
+      </p:sp>
+      <p:sp>
+        <p:nvSpPr>
+          <p:cNvPr id="7" name="TextBox 6"/>
           <p:cNvSpPr txBox="1"/>
           <p:nvPr/>
         </p:nvSpPr>
         <p:spPr>
           <a:xfrm>
-            <a:off x="3474720" y="2286000"/>
-            <a:ext cx="2560320" cy="548640"/>
+            <a:off x="822960" y="2377440"/>
+            <a:ext cx="2468880" cy="457200"/>
+          </a:xfrm>
+          <a:prstGeom prst="rect">
+            <a:avLst/>
+          </a:prstGeom>
+          <a:noFill/>
+        </p:spPr>
+        <p:txBody>
+          <a:bodyPr wrap="none">
+            <a:spAutoFit/>
+          </a:bodyPr>
+          <a:lstStyle/>
+          <a:p>
+            <a:pPr algn="ctr">
+              <a:defRPr sz="1600" b="1">
+                <a:solidFill>
+                  <a:srgbClr val="172A45"/>
+                </a:solidFill>
+              </a:defRPr>
+            </a:pPr>
+            <a:r>
+              <a:t>Start a Conversation</a:t>
+            </a:r>
+          </a:p>
+        </p:txBody>
+      </p:sp>
+      <p:sp>
+        <p:nvSpPr>
+          <p:cNvPr id="8" name="TextBox 7"/>
+          <p:cNvSpPr txBox="1"/>
+          <p:nvPr/>
+        </p:nvSpPr>
+        <p:spPr>
+          <a:xfrm>
+            <a:off x="822960" y="2834640"/>
+            <a:ext cx="2468880" cy="914400"/>
           </a:xfrm>
           <a:prstGeom prst="rect">
             <a:avLst/>
@@ -6923,69 +8134,38 @@
           <a:lstStyle/>
           <a:p>
             <a:pPr algn="ctr">
-              <a:defRPr sz="1800" b="1">
-                <a:solidFill>
-                  <a:srgbClr val="3C3C3C"/>
-                </a:solidFill>
-              </a:defRPr>
-            </a:pPr>
-            <a:r>
-              <a:t>We Explore Together</a:t>
-            </a:r>
-          </a:p>
-        </p:txBody>
-      </p:sp>
-      <p:sp>
-        <p:nvSpPr>
-          <p:cNvPr id="11" name="TextBox 10"/>
-          <p:cNvSpPr txBox="1"/>
-          <p:nvPr/>
-        </p:nvSpPr>
-        <p:spPr>
-          <a:xfrm>
-            <a:off x="3474720" y="2834640"/>
-            <a:ext cx="2560320" cy="1371600"/>
-          </a:xfrm>
-          <a:prstGeom prst="rect">
-            <a:avLst/>
-          </a:prstGeom>
-          <a:noFill/>
-        </p:spPr>
-        <p:txBody>
-          <a:bodyPr wrap="square">
-            <a:spAutoFit/>
-          </a:bodyPr>
-          <a:lstStyle/>
-          <a:p>
-            <a:pPr algn="ctr">
-              <a:defRPr sz="1400">
-                <a:solidFill>
-                  <a:srgbClr val="646464"/>
-                </a:solidFill>
-              </a:defRPr>
-            </a:pPr>
-            <a:r>
-              <a:t>We ask questions to understand your world and what success looks like</a:t>
-            </a:r>
-          </a:p>
-        </p:txBody>
-      </p:sp>
-      <p:sp>
-        <p:nvSpPr>
-          <p:cNvPr id="12" name="Right Arrow 11"/>
+              <a:defRPr sz="1200">
+                <a:solidFill>
+                  <a:srgbClr val="475569"/>
+                </a:solidFill>
+              </a:defRPr>
+            </a:pPr>
+            <a:r>
+              <a:t>Tell us about a challenge you're</a:t>
+            </a:r>
+            <a:br/>
+            <a:r>
+              <a:t>facing or an idea you have</a:t>
+            </a:r>
+          </a:p>
+        </p:txBody>
+      </p:sp>
+      <p:sp>
+        <p:nvSpPr>
+          <p:cNvPr id="9" name="Right Arrow 8"/>
           <p:cNvSpPr/>
           <p:nvPr/>
         </p:nvSpPr>
         <p:spPr>
           <a:xfrm>
-            <a:off x="6080760" y="1554480"/>
-            <a:ext cx="274320" cy="365760"/>
+            <a:off x="3383280" y="1737360"/>
+            <a:ext cx="274320" cy="274320"/>
           </a:xfrm>
           <a:prstGeom prst="rightArrow">
             <a:avLst/>
           </a:prstGeom>
           <a:solidFill>
-            <a:srgbClr val="C8D2DC"/>
+            <a:srgbClr val="C8D7E6"/>
           </a:solidFill>
           <a:ln>
             <a:noFill/>
@@ -7015,20 +8195,20 @@
       </p:sp>
       <p:sp>
         <p:nvSpPr>
-          <p:cNvPr id="13" name="Oval 12"/>
+          <p:cNvPr id="10" name="Oval 9"/>
           <p:cNvSpPr/>
           <p:nvPr/>
         </p:nvSpPr>
         <p:spPr>
           <a:xfrm>
-            <a:off x="7315200" y="1371600"/>
-            <a:ext cx="731520" cy="731520"/>
+            <a:off x="4663440" y="1554480"/>
+            <a:ext cx="640080" cy="640080"/>
           </a:xfrm>
           <a:prstGeom prst="ellipse">
             <a:avLst/>
           </a:prstGeom>
           <a:solidFill>
-            <a:srgbClr val="005293"/>
+            <a:srgbClr val="4682B4"/>
           </a:solidFill>
           <a:ln>
             <a:noFill/>
@@ -7058,14 +8238,14 @@
       </p:sp>
       <p:sp>
         <p:nvSpPr>
-          <p:cNvPr id="14" name="TextBox 13"/>
+          <p:cNvPr id="11" name="TextBox 10"/>
           <p:cNvSpPr txBox="1"/>
           <p:nvPr/>
         </p:nvSpPr>
         <p:spPr>
           <a:xfrm>
-            <a:off x="7360920" y="1508760"/>
-            <a:ext cx="640080" cy="457200"/>
+            <a:off x="4709160" y="1664208"/>
+            <a:ext cx="548640" cy="457200"/>
           </a:xfrm>
           <a:prstGeom prst="rect">
             <a:avLst/>
@@ -7079,28 +8259,63 @@
           <a:lstStyle/>
           <a:p>
             <a:pPr algn="ctr">
-              <a:defRPr sz="2800" b="1">
+              <a:defRPr sz="2600" b="1">
                 <a:solidFill>
                   <a:srgbClr val="FFFFFF"/>
                 </a:solidFill>
               </a:defRPr>
             </a:pPr>
             <a:r>
-              <a:t>3</a:t>
-            </a:r>
-          </a:p>
-        </p:txBody>
-      </p:sp>
-      <p:sp>
-        <p:nvSpPr>
-          <p:cNvPr id="15" name="TextBox 14"/>
+              <a:t>2</a:t>
+            </a:r>
+          </a:p>
+        </p:txBody>
+      </p:sp>
+      <p:sp>
+        <p:nvSpPr>
+          <p:cNvPr id="12" name="TextBox 11"/>
           <p:cNvSpPr txBox="1"/>
           <p:nvPr/>
         </p:nvSpPr>
         <p:spPr>
           <a:xfrm>
-            <a:off x="6400800" y="2286000"/>
-            <a:ext cx="2560320" cy="548640"/>
+            <a:off x="3749040" y="2377440"/>
+            <a:ext cx="2468880" cy="457200"/>
+          </a:xfrm>
+          <a:prstGeom prst="rect">
+            <a:avLst/>
+          </a:prstGeom>
+          <a:noFill/>
+        </p:spPr>
+        <p:txBody>
+          <a:bodyPr wrap="none">
+            <a:spAutoFit/>
+          </a:bodyPr>
+          <a:lstStyle/>
+          <a:p>
+            <a:pPr algn="ctr">
+              <a:defRPr sz="1600" b="1">
+                <a:solidFill>
+                  <a:srgbClr val="172A45"/>
+                </a:solidFill>
+              </a:defRPr>
+            </a:pPr>
+            <a:r>
+              <a:t>We Learn Your World</a:t>
+            </a:r>
+          </a:p>
+        </p:txBody>
+      </p:sp>
+      <p:sp>
+        <p:nvSpPr>
+          <p:cNvPr id="13" name="TextBox 12"/>
+          <p:cNvSpPr txBox="1"/>
+          <p:nvPr/>
+        </p:nvSpPr>
+        <p:spPr>
+          <a:xfrm>
+            <a:off x="3749040" y="2834640"/>
+            <a:ext cx="2468880" cy="914400"/>
           </a:xfrm>
           <a:prstGeom prst="rect">
             <a:avLst/>
@@ -7114,69 +8329,38 @@
           <a:lstStyle/>
           <a:p>
             <a:pPr algn="ctr">
-              <a:defRPr sz="1800" b="1">
-                <a:solidFill>
-                  <a:srgbClr val="3C3C3C"/>
-                </a:solidFill>
-              </a:defRPr>
-            </a:pPr>
-            <a:r>
-              <a:t>Design a Solution</a:t>
-            </a:r>
-          </a:p>
-        </p:txBody>
-      </p:sp>
-      <p:sp>
-        <p:nvSpPr>
-          <p:cNvPr id="16" name="TextBox 15"/>
-          <p:cNvSpPr txBox="1"/>
-          <p:nvPr/>
-        </p:nvSpPr>
-        <p:spPr>
-          <a:xfrm>
-            <a:off x="6400800" y="2834640"/>
-            <a:ext cx="2560320" cy="1371600"/>
-          </a:xfrm>
-          <a:prstGeom prst="rect">
-            <a:avLst/>
-          </a:prstGeom>
-          <a:noFill/>
-        </p:spPr>
-        <p:txBody>
-          <a:bodyPr wrap="square">
-            <a:spAutoFit/>
-          </a:bodyPr>
-          <a:lstStyle/>
-          <a:p>
-            <a:pPr algn="ctr">
-              <a:defRPr sz="1400">
-                <a:solidFill>
-                  <a:srgbClr val="646464"/>
-                </a:solidFill>
-              </a:defRPr>
-            </a:pPr>
-            <a:r>
-              <a:t>We propose approaches and you help us refine them</a:t>
-            </a:r>
-          </a:p>
-        </p:txBody>
-      </p:sp>
-      <p:sp>
-        <p:nvSpPr>
-          <p:cNvPr id="17" name="Right Arrow 16"/>
+              <a:defRPr sz="1200">
+                <a:solidFill>
+                  <a:srgbClr val="475569"/>
+                </a:solidFill>
+              </a:defRPr>
+            </a:pPr>
+            <a:r>
+              <a:t>We ask questions to understand</a:t>
+            </a:r>
+            <a:br/>
+            <a:r>
+              <a:t>your work and what success means</a:t>
+            </a:r>
+          </a:p>
+        </p:txBody>
+      </p:sp>
+      <p:sp>
+        <p:nvSpPr>
+          <p:cNvPr id="14" name="Right Arrow 13"/>
           <p:cNvSpPr/>
           <p:nvPr/>
         </p:nvSpPr>
         <p:spPr>
           <a:xfrm>
-            <a:off x="9006840" y="1554480"/>
-            <a:ext cx="274320" cy="365760"/>
+            <a:off x="6309360" y="1737360"/>
+            <a:ext cx="274320" cy="274320"/>
           </a:xfrm>
           <a:prstGeom prst="rightArrow">
             <a:avLst/>
           </a:prstGeom>
           <a:solidFill>
-            <a:srgbClr val="C8D2DC"/>
+            <a:srgbClr val="C8D7E6"/>
           </a:solidFill>
           <a:ln>
             <a:noFill/>
@@ -7206,20 +8390,20 @@
       </p:sp>
       <p:sp>
         <p:nvSpPr>
-          <p:cNvPr id="18" name="Oval 17"/>
+          <p:cNvPr id="15" name="Oval 14"/>
           <p:cNvSpPr/>
           <p:nvPr/>
         </p:nvSpPr>
         <p:spPr>
           <a:xfrm>
-            <a:off x="10241280" y="1371600"/>
-            <a:ext cx="731520" cy="731520"/>
+            <a:off x="7589520" y="1554480"/>
+            <a:ext cx="640080" cy="640080"/>
           </a:xfrm>
           <a:prstGeom prst="ellipse">
             <a:avLst/>
           </a:prstGeom>
           <a:solidFill>
-            <a:srgbClr val="009688"/>
+            <a:srgbClr val="008080"/>
           </a:solidFill>
           <a:ln>
             <a:noFill/>
@@ -7249,14 +8433,14 @@
       </p:sp>
       <p:sp>
         <p:nvSpPr>
-          <p:cNvPr id="19" name="TextBox 18"/>
+          <p:cNvPr id="16" name="TextBox 15"/>
           <p:cNvSpPr txBox="1"/>
           <p:nvPr/>
         </p:nvSpPr>
         <p:spPr>
           <a:xfrm>
-            <a:off x="10287000" y="1508760"/>
-            <a:ext cx="640080" cy="457200"/>
+            <a:off x="7635240" y="1664208"/>
+            <a:ext cx="548640" cy="457200"/>
           </a:xfrm>
           <a:prstGeom prst="rect">
             <a:avLst/>
@@ -7270,28 +8454,63 @@
           <a:lstStyle/>
           <a:p>
             <a:pPr algn="ctr">
-              <a:defRPr sz="2800" b="1">
+              <a:defRPr sz="2600" b="1">
                 <a:solidFill>
                   <a:srgbClr val="FFFFFF"/>
                 </a:solidFill>
               </a:defRPr>
             </a:pPr>
             <a:r>
-              <a:t>4</a:t>
-            </a:r>
-          </a:p>
-        </p:txBody>
-      </p:sp>
-      <p:sp>
-        <p:nvSpPr>
-          <p:cNvPr id="20" name="TextBox 19"/>
+              <a:t>3</a:t>
+            </a:r>
+          </a:p>
+        </p:txBody>
+      </p:sp>
+      <p:sp>
+        <p:nvSpPr>
+          <p:cNvPr id="17" name="TextBox 16"/>
           <p:cNvSpPr txBox="1"/>
           <p:nvPr/>
         </p:nvSpPr>
         <p:spPr>
           <a:xfrm>
-            <a:off x="9326880" y="2286000"/>
-            <a:ext cx="2560320" cy="548640"/>
+            <a:off x="6675120" y="2377440"/>
+            <a:ext cx="2468880" cy="457200"/>
+          </a:xfrm>
+          <a:prstGeom prst="rect">
+            <a:avLst/>
+          </a:prstGeom>
+          <a:noFill/>
+        </p:spPr>
+        <p:txBody>
+          <a:bodyPr wrap="none">
+            <a:spAutoFit/>
+          </a:bodyPr>
+          <a:lstStyle/>
+          <a:p>
+            <a:pPr algn="ctr">
+              <a:defRPr sz="1600" b="1">
+                <a:solidFill>
+                  <a:srgbClr val="172A45"/>
+                </a:solidFill>
+              </a:defRPr>
+            </a:pPr>
+            <a:r>
+              <a:t>Design Together</a:t>
+            </a:r>
+          </a:p>
+        </p:txBody>
+      </p:sp>
+      <p:sp>
+        <p:nvSpPr>
+          <p:cNvPr id="18" name="TextBox 17"/>
+          <p:cNvSpPr txBox="1"/>
+          <p:nvPr/>
+        </p:nvSpPr>
+        <p:spPr>
+          <a:xfrm>
+            <a:off x="6675120" y="2834640"/>
+            <a:ext cx="2468880" cy="914400"/>
           </a:xfrm>
           <a:prstGeom prst="rect">
             <a:avLst/>
@@ -7305,74 +8524,41 @@
           <a:lstStyle/>
           <a:p>
             <a:pPr algn="ctr">
-              <a:defRPr sz="1800" b="1">
-                <a:solidFill>
-                  <a:srgbClr val="3C3C3C"/>
-                </a:solidFill>
-              </a:defRPr>
-            </a:pPr>
-            <a:r>
-              <a:t>Build &amp; Iterate</a:t>
-            </a:r>
-          </a:p>
-        </p:txBody>
-      </p:sp>
-      <p:sp>
-        <p:nvSpPr>
-          <p:cNvPr id="21" name="TextBox 20"/>
-          <p:cNvSpPr txBox="1"/>
-          <p:nvPr/>
-        </p:nvSpPr>
-        <p:spPr>
-          <a:xfrm>
-            <a:off x="9326880" y="2834640"/>
-            <a:ext cx="2560320" cy="1371600"/>
-          </a:xfrm>
-          <a:prstGeom prst="rect">
-            <a:avLst/>
-          </a:prstGeom>
-          <a:noFill/>
-        </p:spPr>
-        <p:txBody>
-          <a:bodyPr wrap="square">
-            <a:spAutoFit/>
-          </a:bodyPr>
-          <a:lstStyle/>
-          <a:p>
-            <a:pPr algn="ctr">
-              <a:defRPr sz="1400">
-                <a:solidFill>
-                  <a:srgbClr val="646464"/>
-                </a:solidFill>
-              </a:defRPr>
-            </a:pPr>
-            <a:r>
-              <a:t>We create, you test, we improve together</a:t>
-            </a:r>
-          </a:p>
-        </p:txBody>
-      </p:sp>
-      <p:sp>
-        <p:nvSpPr>
-          <p:cNvPr id="22" name="Rounded Rectangle 21"/>
+              <a:defRPr sz="1200">
+                <a:solidFill>
+                  <a:srgbClr val="475569"/>
+                </a:solidFill>
+              </a:defRPr>
+            </a:pPr>
+            <a:r>
+              <a:t>We propose approaches and you</a:t>
+            </a:r>
+            <a:br/>
+            <a:r>
+              <a:t>help us make them practical</a:t>
+            </a:r>
+          </a:p>
+        </p:txBody>
+      </p:sp>
+      <p:sp>
+        <p:nvSpPr>
+          <p:cNvPr id="19" name="Right Arrow 18"/>
           <p:cNvSpPr/>
           <p:nvPr/>
         </p:nvSpPr>
         <p:spPr>
           <a:xfrm>
-            <a:off x="457200" y="4846320"/>
-            <a:ext cx="11247120" cy="1645920"/>
-          </a:xfrm>
-          <a:prstGeom prst="roundRect">
+            <a:off x="9235440" y="1737360"/>
+            <a:ext cx="274320" cy="274320"/>
+          </a:xfrm>
+          <a:prstGeom prst="rightArrow">
             <a:avLst/>
           </a:prstGeom>
           <a:solidFill>
-            <a:srgbClr val="F0F8FF"/>
+            <a:srgbClr val="C8D7E6"/>
           </a:solidFill>
           <a:ln>
-            <a:solidFill>
-              <a:srgbClr val="005293"/>
-            </a:solidFill>
+            <a:noFill/>
           </a:ln>
         </p:spPr>
         <p:style>
@@ -7399,14 +8585,57 @@
       </p:sp>
       <p:sp>
         <p:nvSpPr>
-          <p:cNvPr id="23" name="TextBox 22"/>
+          <p:cNvPr id="20" name="Oval 19"/>
+          <p:cNvSpPr/>
+          <p:nvPr/>
+        </p:nvSpPr>
+        <p:spPr>
+          <a:xfrm>
+            <a:off x="10515600" y="1554480"/>
+            <a:ext cx="640080" cy="640080"/>
+          </a:xfrm>
+          <a:prstGeom prst="ellipse">
+            <a:avLst/>
+          </a:prstGeom>
+          <a:solidFill>
+            <a:srgbClr val="4682B4"/>
+          </a:solidFill>
+          <a:ln>
+            <a:noFill/>
+          </a:ln>
+        </p:spPr>
+        <p:style>
+          <a:lnRef idx="1">
+            <a:schemeClr val="accent1"/>
+          </a:lnRef>
+          <a:fillRef idx="3">
+            <a:schemeClr val="accent1"/>
+          </a:fillRef>
+          <a:effectRef idx="2">
+            <a:schemeClr val="accent1"/>
+          </a:effectRef>
+          <a:fontRef idx="minor">
+            <a:schemeClr val="lt1"/>
+          </a:fontRef>
+        </p:style>
+        <p:txBody>
+          <a:bodyPr rtlCol="0" anchor="ctr"/>
+          <a:lstStyle/>
+          <a:p>
+            <a:pPr algn="ctr"/>
+          </a:p>
+        </p:txBody>
+      </p:sp>
+      <p:sp>
+        <p:nvSpPr>
+          <p:cNvPr id="21" name="TextBox 20"/>
           <p:cNvSpPr txBox="1"/>
           <p:nvPr/>
         </p:nvSpPr>
         <p:spPr>
           <a:xfrm>
-            <a:off x="640080" y="5029200"/>
-            <a:ext cx="10881360" cy="457200"/>
+            <a:off x="10561320" y="1664208"/>
+            <a:ext cx="548640" cy="457200"/>
           </a:xfrm>
           <a:prstGeom prst="rect">
             <a:avLst/>
@@ -7420,28 +8649,63 @@
           <a:lstStyle/>
           <a:p>
             <a:pPr algn="ctr">
-              <a:defRPr sz="2200" b="1">
-                <a:solidFill>
-                  <a:srgbClr val="005293"/>
-                </a:solidFill>
-              </a:defRPr>
-            </a:pPr>
-            <a:r>
-              <a:t>No request is too small or too ambitious</a:t>
-            </a:r>
-          </a:p>
-        </p:txBody>
-      </p:sp>
-      <p:sp>
-        <p:nvSpPr>
-          <p:cNvPr id="24" name="TextBox 23"/>
+              <a:defRPr sz="2600" b="1">
+                <a:solidFill>
+                  <a:srgbClr val="FFFFFF"/>
+                </a:solidFill>
+              </a:defRPr>
+            </a:pPr>
+            <a:r>
+              <a:t>4</a:t>
+            </a:r>
+          </a:p>
+        </p:txBody>
+      </p:sp>
+      <p:sp>
+        <p:nvSpPr>
+          <p:cNvPr id="22" name="TextBox 21"/>
           <p:cNvSpPr txBox="1"/>
           <p:nvPr/>
         </p:nvSpPr>
         <p:spPr>
           <a:xfrm>
-            <a:off x="640080" y="5577840"/>
-            <a:ext cx="10881360" cy="822960"/>
+            <a:off x="9601200" y="2377440"/>
+            <a:ext cx="2468880" cy="457200"/>
+          </a:xfrm>
+          <a:prstGeom prst="rect">
+            <a:avLst/>
+          </a:prstGeom>
+          <a:noFill/>
+        </p:spPr>
+        <p:txBody>
+          <a:bodyPr wrap="none">
+            <a:spAutoFit/>
+          </a:bodyPr>
+          <a:lstStyle/>
+          <a:p>
+            <a:pPr algn="ctr">
+              <a:defRPr sz="1600" b="1">
+                <a:solidFill>
+                  <a:srgbClr val="172A45"/>
+                </a:solidFill>
+              </a:defRPr>
+            </a:pPr>
+            <a:r>
+              <a:t>Build &amp; Refine</a:t>
+            </a:r>
+          </a:p>
+        </p:txBody>
+      </p:sp>
+      <p:sp>
+        <p:nvSpPr>
+          <p:cNvPr id="23" name="TextBox 22"/>
+          <p:cNvSpPr txBox="1"/>
+          <p:nvPr/>
+        </p:nvSpPr>
+        <p:spPr>
+          <a:xfrm>
+            <a:off x="9601200" y="2834640"/>
+            <a:ext cx="2468880" cy="914400"/>
           </a:xfrm>
           <a:prstGeom prst="rect">
             <a:avLst/>
@@ -7455,14 +8719,213 @@
           <a:lstStyle/>
           <a:p>
             <a:pPr algn="ctr">
-              <a:defRPr sz="1600">
-                <a:solidFill>
-                  <a:srgbClr val="3C3C3C"/>
-                </a:solidFill>
-              </a:defRPr>
-            </a:pPr>
-            <a:r>
-              <a:t>Whether it's "Can you help me understand this spreadsheet?" or "We need a system to track 500 projects" — we're here to help. The best solutions often start with a simple conversation.</a:t>
+              <a:defRPr sz="1200">
+                <a:solidFill>
+                  <a:srgbClr val="475569"/>
+                </a:solidFill>
+              </a:defRPr>
+            </a:pPr>
+            <a:r>
+              <a:t>We create, you test, we improve</a:t>
+            </a:r>
+            <a:br/>
+            <a:r>
+              <a:t>until it works for you</a:t>
+            </a:r>
+          </a:p>
+        </p:txBody>
+      </p:sp>
+      <p:sp>
+        <p:nvSpPr>
+          <p:cNvPr id="24" name="Rounded Rectangle 23"/>
+          <p:cNvSpPr/>
+          <p:nvPr/>
+        </p:nvSpPr>
+        <p:spPr>
+          <a:xfrm>
+            <a:off x="548640" y="4023360"/>
+            <a:ext cx="11094415" cy="2377440"/>
+          </a:xfrm>
+          <a:prstGeom prst="roundRect">
+            <a:avLst/>
+          </a:prstGeom>
+          <a:solidFill>
+            <a:srgbClr val="F0F8FF"/>
+          </a:solidFill>
+          <a:ln w="25400">
+            <a:solidFill>
+              <a:srgbClr val="4682B4"/>
+            </a:solidFill>
+          </a:ln>
+        </p:spPr>
+        <p:style>
+          <a:lnRef idx="1">
+            <a:schemeClr val="accent1"/>
+          </a:lnRef>
+          <a:fillRef idx="3">
+            <a:schemeClr val="accent1"/>
+          </a:fillRef>
+          <a:effectRef idx="2">
+            <a:schemeClr val="accent1"/>
+          </a:effectRef>
+          <a:fontRef idx="minor">
+            <a:schemeClr val="lt1"/>
+          </a:fontRef>
+        </p:style>
+        <p:txBody>
+          <a:bodyPr rtlCol="0" anchor="ctr"/>
+          <a:lstStyle/>
+          <a:p>
+            <a:pPr algn="ctr"/>
+          </a:p>
+        </p:txBody>
+      </p:sp>
+      <p:sp>
+        <p:nvSpPr>
+          <p:cNvPr id="25" name="TextBox 24"/>
+          <p:cNvSpPr txBox="1"/>
+          <p:nvPr/>
+        </p:nvSpPr>
+        <p:spPr>
+          <a:xfrm>
+            <a:off x="822960" y="4206240"/>
+            <a:ext cx="10515600" cy="548640"/>
+          </a:xfrm>
+          <a:prstGeom prst="rect">
+            <a:avLst/>
+          </a:prstGeom>
+          <a:noFill/>
+        </p:spPr>
+        <p:txBody>
+          <a:bodyPr wrap="none">
+            <a:spAutoFit/>
+          </a:bodyPr>
+          <a:lstStyle/>
+          <a:p>
+            <a:pPr algn="ctr">
+              <a:defRPr sz="2200" b="1">
+                <a:solidFill>
+                  <a:srgbClr val="172A45"/>
+                </a:solidFill>
+              </a:defRPr>
+            </a:pPr>
+            <a:r>
+              <a:t>No question is too small. No idea is too ambitious.</a:t>
+            </a:r>
+          </a:p>
+        </p:txBody>
+      </p:sp>
+      <p:sp>
+        <p:nvSpPr>
+          <p:cNvPr id="26" name="TextBox 25"/>
+          <p:cNvSpPr txBox="1"/>
+          <p:nvPr/>
+        </p:nvSpPr>
+        <p:spPr>
+          <a:xfrm>
+            <a:off x="822960" y="4754880"/>
+            <a:ext cx="10515600" cy="1371600"/>
+          </a:xfrm>
+          <a:prstGeom prst="rect">
+            <a:avLst/>
+          </a:prstGeom>
+          <a:noFill/>
+        </p:spPr>
+        <p:txBody>
+          <a:bodyPr wrap="square">
+            <a:spAutoFit/>
+          </a:bodyPr>
+          <a:lstStyle/>
+          <a:p>
+            <a:pPr algn="ctr">
+              <a:spcAft>
+                <a:spcPts val="400"/>
+              </a:spcAft>
+              <a:defRPr sz="1400">
+                <a:solidFill>
+                  <a:srgbClr val="475569"/>
+                </a:solidFill>
+              </a:defRPr>
+            </a:pPr>
+            <a:r>
+              <a:t>"Can you help me make sense of this spreadsheet?"</a:t>
+            </a:r>
+          </a:p>
+          <a:p>
+            <a:pPr algn="ctr">
+              <a:spcAft>
+                <a:spcPts val="400"/>
+              </a:spcAft>
+              <a:defRPr sz="1400">
+                <a:solidFill>
+                  <a:srgbClr val="475569"/>
+                </a:solidFill>
+              </a:defRPr>
+            </a:pPr>
+            <a:r>
+              <a:t>"We need to track 500 projects and predict which permits will be delayed."</a:t>
+            </a:r>
+          </a:p>
+          <a:p>
+            <a:pPr algn="ctr">
+              <a:spcAft>
+                <a:spcPts val="1200"/>
+              </a:spcAft>
+              <a:defRPr sz="1400">
+                <a:solidFill>
+                  <a:srgbClr val="475569"/>
+                </a:solidFill>
+              </a:defRPr>
+            </a:pPr>
+            <a:r>
+              <a:t>"Is there an AI tool that could help with this?"</a:t>
+            </a:r>
+          </a:p>
+          <a:p>
+            <a:pPr algn="ctr">
+              <a:defRPr sz="1600" b="1">
+                <a:solidFill>
+                  <a:srgbClr val="008080"/>
+                </a:solidFill>
+              </a:defRPr>
+            </a:pPr>
+            <a:r>
+              <a:t>We're here to help. The best solutions often start with a simple conversation.</a:t>
+            </a:r>
+          </a:p>
+        </p:txBody>
+      </p:sp>
+      <p:sp>
+        <p:nvSpPr>
+          <p:cNvPr id="27" name="TextBox 26"/>
+          <p:cNvSpPr txBox="1"/>
+          <p:nvPr/>
+        </p:nvSpPr>
+        <p:spPr>
+          <a:xfrm>
+            <a:off x="457200" y="6492240"/>
+            <a:ext cx="3657600" cy="274320"/>
+          </a:xfrm>
+          <a:prstGeom prst="rect">
+            <a:avLst/>
+          </a:prstGeom>
+          <a:noFill/>
+        </p:spPr>
+        <p:txBody>
+          <a:bodyPr wrap="none">
+            <a:spAutoFit/>
+          </a:bodyPr>
+          <a:lstStyle/>
+          <a:p>
+            <a:pPr>
+              <a:defRPr sz="900" i="1">
+                <a:solidFill>
+                  <a:srgbClr val="64748B"/>
+                </a:solidFill>
+              </a:defRPr>
+            </a:pPr>
+            <a:r>
+              <a:t>Enterprise Analytics and AI</a:t>
             </a:r>
           </a:p>
         </p:txBody>

--- a/Enterprise_Analytics_AI_Team.pptx
+++ b/Enterprise_Analytics_AI_Team.pptx
@@ -3475,7 +3475,7 @@
         <p:spPr>
           <a:xfrm>
             <a:off x="548640" y="1554480"/>
-            <a:ext cx="11094415" cy="1645920"/>
+            <a:ext cx="11094415" cy="1280160"/>
           </a:xfrm>
           <a:prstGeom prst="roundRect">
             <a:avLst/>
@@ -3519,8 +3519,8 @@
         </p:nvSpPr>
         <p:spPr>
           <a:xfrm>
-            <a:off x="822960" y="1691640"/>
-            <a:ext cx="10515600" cy="1463040"/>
+            <a:off x="822960" y="1737360"/>
+            <a:ext cx="10515600" cy="1005840"/>
           </a:xfrm>
           <a:prstGeom prst="rect">
             <a:avLst/>
@@ -3534,29 +3534,14 @@
           <a:lstStyle/>
           <a:p>
             <a:pPr>
-              <a:spcAft>
-                <a:spcPts val="1200"/>
-              </a:spcAft>
-              <a:defRPr sz="2200" b="1">
-                <a:solidFill>
-                  <a:srgbClr val="172A45"/>
-                </a:solidFill>
-              </a:defRPr>
-            </a:pPr>
-            <a:r>
-              <a:t>Think of us as technology specialists who speak your language.</a:t>
-            </a:r>
-          </a:p>
-          <a:p>
-            <a:pPr>
-              <a:defRPr sz="1700">
+              <a:defRPr sz="2000">
                 <a:solidFill>
                   <a:srgbClr val="475569"/>
                 </a:solidFill>
               </a:defRPr>
             </a:pPr>
             <a:r>
-              <a:t>You know how Netflix somehow knows which shows you'll like? Or how your phone can identify a song in seconds? We're the people who build those kinds of systems — but for business problems. We create tools that find patterns in your data, predict what's coming next, and automate the tedious stuff so you can focus on what matters.</a:t>
+              <a:t>You know how Netflix figures out which shows you'll like, or how your phone identifies a song in seconds? We build those kinds of systems — but for your business problems.</a:t>
             </a:r>
           </a:p>
         </p:txBody>
@@ -3569,7 +3554,7 @@
         </p:nvSpPr>
         <p:spPr>
           <a:xfrm>
-            <a:off x="548640" y="3474720"/>
+            <a:off x="548640" y="3108960"/>
             <a:ext cx="3566160" cy="1920240"/>
           </a:xfrm>
           <a:prstGeom prst="roundRect">
@@ -3614,7 +3599,7 @@
         </p:nvSpPr>
         <p:spPr>
           <a:xfrm>
-            <a:off x="548640" y="3474720"/>
+            <a:off x="548640" y="3108960"/>
             <a:ext cx="3566160" cy="109728"/>
           </a:xfrm>
           <a:prstGeom prst="rect">
@@ -3657,7 +3642,7 @@
         </p:nvSpPr>
         <p:spPr>
           <a:xfrm>
-            <a:off x="731520" y="3749040"/>
+            <a:off x="731520" y="3383280"/>
             <a:ext cx="3200400" cy="457200"/>
           </a:xfrm>
           <a:prstGeom prst="rect">
@@ -3692,7 +3677,7 @@
         </p:nvSpPr>
         <p:spPr>
           <a:xfrm>
-            <a:off x="731520" y="4251960"/>
+            <a:off x="731520" y="3886200"/>
             <a:ext cx="3200400" cy="1005840"/>
           </a:xfrm>
           <a:prstGeom prst="rect">
@@ -3727,7 +3712,7 @@
         </p:nvSpPr>
         <p:spPr>
           <a:xfrm>
-            <a:off x="4343400" y="3474720"/>
+            <a:off x="4343400" y="3108960"/>
             <a:ext cx="3566160" cy="1920240"/>
           </a:xfrm>
           <a:prstGeom prst="roundRect">
@@ -3772,7 +3757,7 @@
         </p:nvSpPr>
         <p:spPr>
           <a:xfrm>
-            <a:off x="4343400" y="3474720"/>
+            <a:off x="4343400" y="3108960"/>
             <a:ext cx="3566160" cy="109728"/>
           </a:xfrm>
           <a:prstGeom prst="rect">
@@ -3815,7 +3800,7 @@
         </p:nvSpPr>
         <p:spPr>
           <a:xfrm>
-            <a:off x="4526280" y="3749040"/>
+            <a:off x="4526280" y="3383280"/>
             <a:ext cx="3200400" cy="457200"/>
           </a:xfrm>
           <a:prstGeom prst="rect">
@@ -3850,7 +3835,7 @@
         </p:nvSpPr>
         <p:spPr>
           <a:xfrm>
-            <a:off x="4526280" y="4251960"/>
+            <a:off x="4526280" y="3886200"/>
             <a:ext cx="3200400" cy="1005840"/>
           </a:xfrm>
           <a:prstGeom prst="rect">
@@ -3885,7 +3870,7 @@
         </p:nvSpPr>
         <p:spPr>
           <a:xfrm>
-            <a:off x="8138160" y="3474720"/>
+            <a:off x="8138160" y="3108960"/>
             <a:ext cx="3566160" cy="1920240"/>
           </a:xfrm>
           <a:prstGeom prst="roundRect">
@@ -3930,7 +3915,7 @@
         </p:nvSpPr>
         <p:spPr>
           <a:xfrm>
-            <a:off x="8138160" y="3474720"/>
+            <a:off x="8138160" y="3108960"/>
             <a:ext cx="3566160" cy="109728"/>
           </a:xfrm>
           <a:prstGeom prst="rect">
@@ -3973,7 +3958,7 @@
         </p:nvSpPr>
         <p:spPr>
           <a:xfrm>
-            <a:off x="8321040" y="3749040"/>
+            <a:off x="8321040" y="3383280"/>
             <a:ext cx="3200400" cy="457200"/>
           </a:xfrm>
           <a:prstGeom prst="rect">
@@ -4008,7 +3993,7 @@
         </p:nvSpPr>
         <p:spPr>
           <a:xfrm>
-            <a:off x="8321040" y="4251960"/>
+            <a:off x="8321040" y="3886200"/>
             <a:ext cx="3200400" cy="1005840"/>
           </a:xfrm>
           <a:prstGeom prst="rect">
@@ -4043,7 +4028,7 @@
         </p:nvSpPr>
         <p:spPr>
           <a:xfrm>
-            <a:off x="548640" y="5669280"/>
+            <a:off x="548640" y="5303520"/>
             <a:ext cx="10972800" cy="548640"/>
           </a:xfrm>
           <a:prstGeom prst="rect">
@@ -5345,7 +5330,122 @@
       </p:sp>
       <p:sp>
         <p:nvSpPr>
-          <p:cNvPr id="34" name="TextBox 33"/>
+          <p:cNvPr id="34" name="Rounded Rectangle 33"/>
+          <p:cNvSpPr/>
+          <p:nvPr/>
+        </p:nvSpPr>
+        <p:spPr>
+          <a:xfrm>
+            <a:off x="457200" y="5852160"/>
+            <a:ext cx="11277295" cy="822960"/>
+          </a:xfrm>
+          <a:prstGeom prst="roundRect">
+            <a:avLst/>
+          </a:prstGeom>
+          <a:solidFill>
+            <a:srgbClr val="FFFAF0"/>
+          </a:solidFill>
+          <a:ln w="19050">
+            <a:solidFill>
+              <a:srgbClr val="CD853F"/>
+            </a:solidFill>
+          </a:ln>
+        </p:spPr>
+        <p:style>
+          <a:lnRef idx="1">
+            <a:schemeClr val="accent1"/>
+          </a:lnRef>
+          <a:fillRef idx="3">
+            <a:schemeClr val="accent1"/>
+          </a:fillRef>
+          <a:effectRef idx="2">
+            <a:schemeClr val="accent1"/>
+          </a:effectRef>
+          <a:fontRef idx="minor">
+            <a:schemeClr val="lt1"/>
+          </a:fontRef>
+        </p:style>
+        <p:txBody>
+          <a:bodyPr rtlCol="0" anchor="ctr"/>
+          <a:lstStyle/>
+          <a:p>
+            <a:pPr algn="ctr"/>
+          </a:p>
+        </p:txBody>
+      </p:sp>
+      <p:sp>
+        <p:nvSpPr>
+          <p:cNvPr id="35" name="TextBox 34"/>
+          <p:cNvSpPr txBox="1"/>
+          <p:nvPr/>
+        </p:nvSpPr>
+        <p:spPr>
+          <a:xfrm>
+            <a:off x="731520" y="5943600"/>
+            <a:ext cx="2743200" cy="365760"/>
+          </a:xfrm>
+          <a:prstGeom prst="rect">
+            <a:avLst/>
+          </a:prstGeom>
+          <a:noFill/>
+        </p:spPr>
+        <p:txBody>
+          <a:bodyPr wrap="none">
+            <a:spAutoFit/>
+          </a:bodyPr>
+          <a:lstStyle/>
+          <a:p>
+            <a:pPr>
+              <a:defRPr sz="1400" b="1">
+                <a:solidFill>
+                  <a:srgbClr val="B46432"/>
+                </a:solidFill>
+              </a:defRPr>
+            </a:pPr>
+            <a:r>
+              <a:t>What we need from you:</a:t>
+            </a:r>
+          </a:p>
+        </p:txBody>
+      </p:sp>
+      <p:sp>
+        <p:nvSpPr>
+          <p:cNvPr id="36" name="TextBox 35"/>
+          <p:cNvSpPr txBox="1"/>
+          <p:nvPr/>
+        </p:nvSpPr>
+        <p:spPr>
+          <a:xfrm>
+            <a:off x="3474720" y="5943600"/>
+            <a:ext cx="8046720" cy="640080"/>
+          </a:xfrm>
+          <a:prstGeom prst="rect">
+            <a:avLst/>
+          </a:prstGeom>
+          <a:noFill/>
+        </p:spPr>
+        <p:txBody>
+          <a:bodyPr wrap="square">
+            <a:spAutoFit/>
+          </a:bodyPr>
+          <a:lstStyle/>
+          <a:p>
+            <a:pPr>
+              <a:defRPr sz="1400">
+                <a:solidFill>
+                  <a:srgbClr val="475569"/>
+                </a:solidFill>
+              </a:defRPr>
+            </a:pPr>
+            <a:r>
+              <a:t>A conversation or two to help us understand your work. That's it. We handle the technical building — you stay focused on your job.</a:t>
+            </a:r>
+          </a:p>
+        </p:txBody>
+      </p:sp>
+      <p:sp>
+        <p:nvSpPr>
+          <p:cNvPr id="37" name="TextBox 36"/>
           <p:cNvSpPr txBox="1"/>
           <p:nvPr/>
         </p:nvSpPr>
@@ -6650,29 +6750,64 @@
               </a:defRPr>
             </a:pPr>
             <a:r>
-              <a:t>Examples: What This Looks Like in Practice</a:t>
-            </a:r>
-          </a:p>
-        </p:txBody>
-      </p:sp>
-      <p:sp>
-        <p:nvSpPr>
-          <p:cNvPr id="5" name="Rounded Rectangle 4"/>
+              <a:t>Types of Solutions We Build</a:t>
+            </a:r>
+          </a:p>
+        </p:txBody>
+      </p:sp>
+      <p:sp>
+        <p:nvSpPr>
+          <p:cNvPr id="5" name="TextBox 4"/>
+          <p:cNvSpPr txBox="1"/>
+          <p:nvPr/>
+        </p:nvSpPr>
+        <p:spPr>
+          <a:xfrm>
+            <a:off x="731520" y="1371600"/>
+            <a:ext cx="10515600" cy="457200"/>
+          </a:xfrm>
+          <a:prstGeom prst="rect">
+            <a:avLst/>
+          </a:prstGeom>
+          <a:noFill/>
+        </p:spPr>
+        <p:txBody>
+          <a:bodyPr wrap="none">
+            <a:spAutoFit/>
+          </a:bodyPr>
+          <a:lstStyle/>
+          <a:p>
+            <a:pPr>
+              <a:defRPr sz="1600">
+                <a:solidFill>
+                  <a:srgbClr val="64748B"/>
+                </a:solidFill>
+              </a:defRPr>
+            </a:pPr>
+            <a:r>
+              <a:t>A spectrum of tools — from simple visibility to intelligent automation</a:t>
+            </a:r>
+          </a:p>
+        </p:txBody>
+      </p:sp>
+      <p:sp>
+        <p:nvSpPr>
+          <p:cNvPr id="6" name="Rounded Rectangle 5"/>
           <p:cNvSpPr/>
           <p:nvPr/>
         </p:nvSpPr>
         <p:spPr>
           <a:xfrm>
-            <a:off x="502920" y="1371600"/>
-            <a:ext cx="3657600" cy="1600200"/>
+            <a:off x="457200" y="1920240"/>
+            <a:ext cx="2148840" cy="3840480"/>
           </a:xfrm>
           <a:prstGeom prst="roundRect">
             <a:avLst/>
           </a:prstGeom>
           <a:solidFill>
-            <a:srgbClr val="F8FAFC"/>
+            <a:srgbClr val="FFFFFF"/>
           </a:solidFill>
-          <a:ln w="19050">
+          <a:ln w="25400">
             <a:solidFill>
               <a:srgbClr val="4682B4"/>
             </a:solidFill>
@@ -6702,16 +6837,16 @@
       </p:sp>
       <p:sp>
         <p:nvSpPr>
-          <p:cNvPr id="6" name="Oval 5"/>
+          <p:cNvPr id="7" name="Rectangle 6"/>
           <p:cNvSpPr/>
           <p:nvPr/>
         </p:nvSpPr>
         <p:spPr>
           <a:xfrm>
-            <a:off x="640080" y="1508760"/>
-            <a:ext cx="457200" cy="457200"/>
-          </a:xfrm>
-          <a:prstGeom prst="ellipse">
+            <a:off x="457200" y="1920240"/>
+            <a:ext cx="2148840" cy="137160"/>
+          </a:xfrm>
+          <a:prstGeom prst="rect">
             <a:avLst/>
           </a:prstGeom>
           <a:solidFill>
@@ -6745,126 +6880,23 @@
       </p:sp>
       <p:sp>
         <p:nvSpPr>
-          <p:cNvPr id="7" name="TextBox 6"/>
-          <p:cNvSpPr txBox="1"/>
-          <p:nvPr/>
-        </p:nvSpPr>
-        <p:spPr>
-          <a:xfrm>
-            <a:off x="640080" y="1554480"/>
-            <a:ext cx="457200" cy="365760"/>
-          </a:xfrm>
-          <a:prstGeom prst="rect">
-            <a:avLst/>
-          </a:prstGeom>
-          <a:noFill/>
-        </p:spPr>
-        <p:txBody>
-          <a:bodyPr wrap="none">
-            <a:spAutoFit/>
-          </a:bodyPr>
-          <a:lstStyle/>
-          <a:p>
-            <a:pPr algn="ctr">
-              <a:defRPr sz="2000"/>
-            </a:pPr>
-            <a:r>
-              <a:t>📋</a:t>
-            </a:r>
-          </a:p>
-        </p:txBody>
-      </p:sp>
-      <p:sp>
-        <p:nvSpPr>
-          <p:cNvPr id="8" name="TextBox 7"/>
-          <p:cNvSpPr txBox="1"/>
-          <p:nvPr/>
-        </p:nvSpPr>
-        <p:spPr>
-          <a:xfrm>
-            <a:off x="1188720" y="1554480"/>
-            <a:ext cx="2834640" cy="411480"/>
-          </a:xfrm>
-          <a:prstGeom prst="rect">
-            <a:avLst/>
-          </a:prstGeom>
-          <a:noFill/>
-        </p:spPr>
-        <p:txBody>
-          <a:bodyPr wrap="none">
-            <a:spAutoFit/>
-          </a:bodyPr>
-          <a:lstStyle/>
-          <a:p>
-            <a:pPr>
-              <a:defRPr sz="1400" b="1">
-                <a:solidFill>
-                  <a:srgbClr val="172A45"/>
-                </a:solidFill>
-              </a:defRPr>
-            </a:pPr>
-            <a:r>
-              <a:t>Project Pipeline Dashboard</a:t>
-            </a:r>
-          </a:p>
-        </p:txBody>
-      </p:sp>
-      <p:sp>
-        <p:nvSpPr>
-          <p:cNvPr id="9" name="TextBox 8"/>
-          <p:cNvSpPr txBox="1"/>
-          <p:nvPr/>
-        </p:nvSpPr>
-        <p:spPr>
-          <a:xfrm>
-            <a:off x="640080" y="2011680"/>
-            <a:ext cx="3383280" cy="914400"/>
-          </a:xfrm>
-          <a:prstGeom prst="rect">
-            <a:avLst/>
-          </a:prstGeom>
-          <a:noFill/>
-        </p:spPr>
-        <p:txBody>
-          <a:bodyPr wrap="square">
-            <a:spAutoFit/>
-          </a:bodyPr>
-          <a:lstStyle/>
-          <a:p>
-            <a:pPr>
-              <a:defRPr sz="1100">
-                <a:solidFill>
-                  <a:srgbClr val="475569"/>
-                </a:solidFill>
-              </a:defRPr>
-            </a:pPr>
-            <a:r>
-              <a:t>One screen showing every project's status from first landowner contact through permit approval — always up to date</a:t>
-            </a:r>
-          </a:p>
-        </p:txBody>
-      </p:sp>
-      <p:sp>
-        <p:nvSpPr>
-          <p:cNvPr id="10" name="Rounded Rectangle 9"/>
+          <p:cNvPr id="8" name="Oval 7"/>
           <p:cNvSpPr/>
           <p:nvPr/>
         </p:nvSpPr>
         <p:spPr>
           <a:xfrm>
-            <a:off x="4297680" y="1371600"/>
-            <a:ext cx="3657600" cy="1600200"/>
-          </a:xfrm>
-          <a:prstGeom prst="roundRect">
+            <a:off x="1165860" y="2240280"/>
+            <a:ext cx="731520" cy="731520"/>
+          </a:xfrm>
+          <a:prstGeom prst="ellipse">
             <a:avLst/>
           </a:prstGeom>
           <a:solidFill>
-            <a:srgbClr val="F8FAFC"/>
+            <a:srgbClr val="4682B4"/>
           </a:solidFill>
-          <a:ln w="19050">
-            <a:solidFill>
-              <a:srgbClr val="008080"/>
-            </a:solidFill>
+          <a:ln>
+            <a:noFill/>
           </a:ln>
         </p:spPr>
         <p:style>
@@ -6891,16 +6923,244 @@
       </p:sp>
       <p:sp>
         <p:nvSpPr>
-          <p:cNvPr id="11" name="Oval 10"/>
+          <p:cNvPr id="9" name="TextBox 8"/>
+          <p:cNvSpPr txBox="1"/>
+          <p:nvPr/>
+        </p:nvSpPr>
+        <p:spPr>
+          <a:xfrm>
+            <a:off x="1211580" y="2331720"/>
+            <a:ext cx="640080" cy="548640"/>
+          </a:xfrm>
+          <a:prstGeom prst="rect">
+            <a:avLst/>
+          </a:prstGeom>
+          <a:noFill/>
+        </p:spPr>
+        <p:txBody>
+          <a:bodyPr wrap="none">
+            <a:spAutoFit/>
+          </a:bodyPr>
+          <a:lstStyle/>
+          <a:p>
+            <a:pPr algn="ctr">
+              <a:defRPr sz="2800"/>
+            </a:pPr>
+            <a:r>
+              <a:t>📊</a:t>
+            </a:r>
+          </a:p>
+        </p:txBody>
+      </p:sp>
+      <p:sp>
+        <p:nvSpPr>
+          <p:cNvPr id="10" name="TextBox 9"/>
+          <p:cNvSpPr txBox="1"/>
+          <p:nvPr/>
+        </p:nvSpPr>
+        <p:spPr>
+          <a:xfrm>
+            <a:off x="548640" y="3063240"/>
+            <a:ext cx="1965960" cy="731520"/>
+          </a:xfrm>
+          <a:prstGeom prst="rect">
+            <a:avLst/>
+          </a:prstGeom>
+          <a:noFill/>
+        </p:spPr>
+        <p:txBody>
+          <a:bodyPr wrap="square">
+            <a:spAutoFit/>
+          </a:bodyPr>
+          <a:lstStyle/>
+          <a:p>
+            <a:pPr algn="ctr">
+              <a:defRPr sz="1400" b="1">
+                <a:solidFill>
+                  <a:srgbClr val="4682B4"/>
+                </a:solidFill>
+              </a:defRPr>
+            </a:pPr>
+            <a:r>
+              <a:t>Dashboards &amp;</a:t>
+            </a:r>
+            <a:br/>
+            <a:r>
+              <a:t>Visualizations</a:t>
+            </a:r>
+          </a:p>
+        </p:txBody>
+      </p:sp>
+      <p:sp>
+        <p:nvSpPr>
+          <p:cNvPr id="11" name="TextBox 10"/>
+          <p:cNvSpPr txBox="1"/>
+          <p:nvPr/>
+        </p:nvSpPr>
+        <p:spPr>
+          <a:xfrm>
+            <a:off x="548640" y="3794759"/>
+            <a:ext cx="1965960" cy="457200"/>
+          </a:xfrm>
+          <a:prstGeom prst="rect">
+            <a:avLst/>
+          </a:prstGeom>
+          <a:noFill/>
+        </p:spPr>
+        <p:txBody>
+          <a:bodyPr wrap="square">
+            <a:spAutoFit/>
+          </a:bodyPr>
+          <a:lstStyle/>
+          <a:p>
+            <a:pPr algn="ctr">
+              <a:defRPr sz="1300" b="1">
+                <a:solidFill>
+                  <a:srgbClr val="475569"/>
+                </a:solidFill>
+              </a:defRPr>
+            </a:pPr>
+            <a:r>
+              <a:t>See your data clearly</a:t>
+            </a:r>
+          </a:p>
+        </p:txBody>
+      </p:sp>
+      <p:sp>
+        <p:nvSpPr>
+          <p:cNvPr id="12" name="TextBox 11"/>
+          <p:cNvSpPr txBox="1"/>
+          <p:nvPr/>
+        </p:nvSpPr>
+        <p:spPr>
+          <a:xfrm>
+            <a:off x="548640" y="4251960"/>
+            <a:ext cx="1965960" cy="1280160"/>
+          </a:xfrm>
+          <a:prstGeom prst="rect">
+            <a:avLst/>
+          </a:prstGeom>
+          <a:noFill/>
+        </p:spPr>
+        <p:txBody>
+          <a:bodyPr wrap="square">
+            <a:spAutoFit/>
+          </a:bodyPr>
+          <a:lstStyle/>
+          <a:p>
+            <a:pPr algn="ctr">
+              <a:defRPr sz="1100">
+                <a:solidFill>
+                  <a:srgbClr val="64748B"/>
+                </a:solidFill>
+              </a:defRPr>
+            </a:pPr>
+            <a:r>
+              <a:t>Status trackers, maps, charts that update automatically</a:t>
+            </a:r>
+          </a:p>
+        </p:txBody>
+      </p:sp>
+      <p:sp>
+        <p:nvSpPr>
+          <p:cNvPr id="13" name="Right Arrow 12"/>
           <p:cNvSpPr/>
           <p:nvPr/>
         </p:nvSpPr>
         <p:spPr>
           <a:xfrm>
-            <a:off x="4434840" y="1508760"/>
-            <a:ext cx="457200" cy="457200"/>
-          </a:xfrm>
-          <a:prstGeom prst="ellipse">
+            <a:off x="2624328" y="2651760"/>
+            <a:ext cx="146304" cy="228600"/>
+          </a:xfrm>
+          <a:prstGeom prst="rightArrow">
+            <a:avLst/>
+          </a:prstGeom>
+          <a:solidFill>
+            <a:srgbClr val="C8D2DC"/>
+          </a:solidFill>
+          <a:ln>
+            <a:noFill/>
+          </a:ln>
+        </p:spPr>
+        <p:style>
+          <a:lnRef idx="1">
+            <a:schemeClr val="accent1"/>
+          </a:lnRef>
+          <a:fillRef idx="3">
+            <a:schemeClr val="accent1"/>
+          </a:fillRef>
+          <a:effectRef idx="2">
+            <a:schemeClr val="accent1"/>
+          </a:effectRef>
+          <a:fontRef idx="minor">
+            <a:schemeClr val="lt1"/>
+          </a:fontRef>
+        </p:style>
+        <p:txBody>
+          <a:bodyPr rtlCol="0" anchor="ctr"/>
+          <a:lstStyle/>
+          <a:p>
+            <a:pPr algn="ctr"/>
+          </a:p>
+        </p:txBody>
+      </p:sp>
+      <p:sp>
+        <p:nvSpPr>
+          <p:cNvPr id="14" name="Rounded Rectangle 13"/>
+          <p:cNvSpPr/>
+          <p:nvPr/>
+        </p:nvSpPr>
+        <p:spPr>
+          <a:xfrm>
+            <a:off x="2788920" y="1920240"/>
+            <a:ext cx="2148840" cy="3840480"/>
+          </a:xfrm>
+          <a:prstGeom prst="roundRect">
+            <a:avLst/>
+          </a:prstGeom>
+          <a:solidFill>
+            <a:srgbClr val="FFFFFF"/>
+          </a:solidFill>
+          <a:ln w="25400">
+            <a:solidFill>
+              <a:srgbClr val="008080"/>
+            </a:solidFill>
+          </a:ln>
+        </p:spPr>
+        <p:style>
+          <a:lnRef idx="1">
+            <a:schemeClr val="accent1"/>
+          </a:lnRef>
+          <a:fillRef idx="3">
+            <a:schemeClr val="accent1"/>
+          </a:fillRef>
+          <a:effectRef idx="2">
+            <a:schemeClr val="accent1"/>
+          </a:effectRef>
+          <a:fontRef idx="minor">
+            <a:schemeClr val="lt1"/>
+          </a:fontRef>
+        </p:style>
+        <p:txBody>
+          <a:bodyPr rtlCol="0" anchor="ctr"/>
+          <a:lstStyle/>
+          <a:p>
+            <a:pPr algn="ctr"/>
+          </a:p>
+        </p:txBody>
+      </p:sp>
+      <p:sp>
+        <p:nvSpPr>
+          <p:cNvPr id="15" name="Rectangle 14"/>
+          <p:cNvSpPr/>
+          <p:nvPr/>
+        </p:nvSpPr>
+        <p:spPr>
+          <a:xfrm>
+            <a:off x="2788920" y="1920240"/>
+            <a:ext cx="2148840" cy="137160"/>
+          </a:xfrm>
+          <a:prstGeom prst="rect">
             <a:avLst/>
           </a:prstGeom>
           <a:solidFill>
@@ -6934,126 +7194,23 @@
       </p:sp>
       <p:sp>
         <p:nvSpPr>
-          <p:cNvPr id="12" name="TextBox 11"/>
-          <p:cNvSpPr txBox="1"/>
-          <p:nvPr/>
-        </p:nvSpPr>
-        <p:spPr>
-          <a:xfrm>
-            <a:off x="4434840" y="1554480"/>
-            <a:ext cx="457200" cy="365760"/>
-          </a:xfrm>
-          <a:prstGeom prst="rect">
-            <a:avLst/>
-          </a:prstGeom>
-          <a:noFill/>
-        </p:spPr>
-        <p:txBody>
-          <a:bodyPr wrap="none">
-            <a:spAutoFit/>
-          </a:bodyPr>
-          <a:lstStyle/>
-          <a:p>
-            <a:pPr algn="ctr">
-              <a:defRPr sz="2000"/>
-            </a:pPr>
-            <a:r>
-              <a:t>🔮</a:t>
-            </a:r>
-          </a:p>
-        </p:txBody>
-      </p:sp>
-      <p:sp>
-        <p:nvSpPr>
-          <p:cNvPr id="13" name="TextBox 12"/>
-          <p:cNvSpPr txBox="1"/>
-          <p:nvPr/>
-        </p:nvSpPr>
-        <p:spPr>
-          <a:xfrm>
-            <a:off x="4983480" y="1554480"/>
-            <a:ext cx="2834640" cy="411480"/>
-          </a:xfrm>
-          <a:prstGeom prst="rect">
-            <a:avLst/>
-          </a:prstGeom>
-          <a:noFill/>
-        </p:spPr>
-        <p:txBody>
-          <a:bodyPr wrap="none">
-            <a:spAutoFit/>
-          </a:bodyPr>
-          <a:lstStyle/>
-          <a:p>
-            <a:pPr>
-              <a:defRPr sz="1400" b="1">
-                <a:solidFill>
-                  <a:srgbClr val="172A45"/>
-                </a:solidFill>
-              </a:defRPr>
-            </a:pPr>
-            <a:r>
-              <a:t>Permit Timeline Predictor</a:t>
-            </a:r>
-          </a:p>
-        </p:txBody>
-      </p:sp>
-      <p:sp>
-        <p:nvSpPr>
-          <p:cNvPr id="14" name="TextBox 13"/>
-          <p:cNvSpPr txBox="1"/>
-          <p:nvPr/>
-        </p:nvSpPr>
-        <p:spPr>
-          <a:xfrm>
-            <a:off x="4434840" y="2011680"/>
-            <a:ext cx="3383280" cy="914400"/>
-          </a:xfrm>
-          <a:prstGeom prst="rect">
-            <a:avLst/>
-          </a:prstGeom>
-          <a:noFill/>
-        </p:spPr>
-        <p:txBody>
-          <a:bodyPr wrap="square">
-            <a:spAutoFit/>
-          </a:bodyPr>
-          <a:lstStyle/>
-          <a:p>
-            <a:pPr>
-              <a:defRPr sz="1100">
-                <a:solidFill>
-                  <a:srgbClr val="475569"/>
-                </a:solidFill>
-              </a:defRPr>
-            </a:pPr>
-            <a:r>
-              <a:t>A tool that estimates realistic approval dates based on county, project size, and historical patterns</a:t>
-            </a:r>
-          </a:p>
-        </p:txBody>
-      </p:sp>
-      <p:sp>
-        <p:nvSpPr>
-          <p:cNvPr id="15" name="Rounded Rectangle 14"/>
+          <p:cNvPr id="16" name="Oval 15"/>
           <p:cNvSpPr/>
           <p:nvPr/>
         </p:nvSpPr>
         <p:spPr>
           <a:xfrm>
-            <a:off x="8092440" y="1371600"/>
-            <a:ext cx="3657600" cy="1600200"/>
-          </a:xfrm>
-          <a:prstGeom prst="roundRect">
+            <a:off x="3497580" y="2240280"/>
+            <a:ext cx="731520" cy="731520"/>
+          </a:xfrm>
+          <a:prstGeom prst="ellipse">
             <a:avLst/>
           </a:prstGeom>
           <a:solidFill>
-            <a:srgbClr val="F8FAFC"/>
+            <a:srgbClr val="008080"/>
           </a:solidFill>
-          <a:ln w="19050">
-            <a:solidFill>
-              <a:srgbClr val="558B6E"/>
-            </a:solidFill>
+          <a:ln>
+            <a:noFill/>
           </a:ln>
         </p:spPr>
         <p:style>
@@ -7080,16 +7237,244 @@
       </p:sp>
       <p:sp>
         <p:nvSpPr>
-          <p:cNvPr id="16" name="Oval 15"/>
+          <p:cNvPr id="17" name="TextBox 16"/>
+          <p:cNvSpPr txBox="1"/>
+          <p:nvPr/>
+        </p:nvSpPr>
+        <p:spPr>
+          <a:xfrm>
+            <a:off x="3543300" y="2331720"/>
+            <a:ext cx="640080" cy="548640"/>
+          </a:xfrm>
+          <a:prstGeom prst="rect">
+            <a:avLst/>
+          </a:prstGeom>
+          <a:noFill/>
+        </p:spPr>
+        <p:txBody>
+          <a:bodyPr wrap="none">
+            <a:spAutoFit/>
+          </a:bodyPr>
+          <a:lstStyle/>
+          <a:p>
+            <a:pPr algn="ctr">
+              <a:defRPr sz="2800"/>
+            </a:pPr>
+            <a:r>
+              <a:t>🔗</a:t>
+            </a:r>
+          </a:p>
+        </p:txBody>
+      </p:sp>
+      <p:sp>
+        <p:nvSpPr>
+          <p:cNvPr id="18" name="TextBox 17"/>
+          <p:cNvSpPr txBox="1"/>
+          <p:nvPr/>
+        </p:nvSpPr>
+        <p:spPr>
+          <a:xfrm>
+            <a:off x="2880360" y="3063240"/>
+            <a:ext cx="1965960" cy="731520"/>
+          </a:xfrm>
+          <a:prstGeom prst="rect">
+            <a:avLst/>
+          </a:prstGeom>
+          <a:noFill/>
+        </p:spPr>
+        <p:txBody>
+          <a:bodyPr wrap="square">
+            <a:spAutoFit/>
+          </a:bodyPr>
+          <a:lstStyle/>
+          <a:p>
+            <a:pPr algn="ctr">
+              <a:defRPr sz="1400" b="1">
+                <a:solidFill>
+                  <a:srgbClr val="008080"/>
+                </a:solidFill>
+              </a:defRPr>
+            </a:pPr>
+            <a:r>
+              <a:t>Connected</a:t>
+            </a:r>
+            <a:br/>
+            <a:r>
+              <a:t>Data Systems</a:t>
+            </a:r>
+          </a:p>
+        </p:txBody>
+      </p:sp>
+      <p:sp>
+        <p:nvSpPr>
+          <p:cNvPr id="19" name="TextBox 18"/>
+          <p:cNvSpPr txBox="1"/>
+          <p:nvPr/>
+        </p:nvSpPr>
+        <p:spPr>
+          <a:xfrm>
+            <a:off x="2880360" y="3794759"/>
+            <a:ext cx="1965960" cy="457200"/>
+          </a:xfrm>
+          <a:prstGeom prst="rect">
+            <a:avLst/>
+          </a:prstGeom>
+          <a:noFill/>
+        </p:spPr>
+        <p:txBody>
+          <a:bodyPr wrap="square">
+            <a:spAutoFit/>
+          </a:bodyPr>
+          <a:lstStyle/>
+          <a:p>
+            <a:pPr algn="ctr">
+              <a:defRPr sz="1300" b="1">
+                <a:solidFill>
+                  <a:srgbClr val="475569"/>
+                </a:solidFill>
+              </a:defRPr>
+            </a:pPr>
+            <a:r>
+              <a:t>Bring scattered info together</a:t>
+            </a:r>
+          </a:p>
+        </p:txBody>
+      </p:sp>
+      <p:sp>
+        <p:nvSpPr>
+          <p:cNvPr id="20" name="TextBox 19"/>
+          <p:cNvSpPr txBox="1"/>
+          <p:nvPr/>
+        </p:nvSpPr>
+        <p:spPr>
+          <a:xfrm>
+            <a:off x="2880360" y="4251960"/>
+            <a:ext cx="1965960" cy="1280160"/>
+          </a:xfrm>
+          <a:prstGeom prst="rect">
+            <a:avLst/>
+          </a:prstGeom>
+          <a:noFill/>
+        </p:spPr>
+        <p:txBody>
+          <a:bodyPr wrap="square">
+            <a:spAutoFit/>
+          </a:bodyPr>
+          <a:lstStyle/>
+          <a:p>
+            <a:pPr algn="ctr">
+              <a:defRPr sz="1100">
+                <a:solidFill>
+                  <a:srgbClr val="64748B"/>
+                </a:solidFill>
+              </a:defRPr>
+            </a:pPr>
+            <a:r>
+              <a:t>Link spreadsheets, databases, and documents in one place</a:t>
+            </a:r>
+          </a:p>
+        </p:txBody>
+      </p:sp>
+      <p:sp>
+        <p:nvSpPr>
+          <p:cNvPr id="21" name="Right Arrow 20"/>
           <p:cNvSpPr/>
           <p:nvPr/>
         </p:nvSpPr>
         <p:spPr>
           <a:xfrm>
-            <a:off x="8229600" y="1508760"/>
-            <a:ext cx="457200" cy="457200"/>
-          </a:xfrm>
-          <a:prstGeom prst="ellipse">
+            <a:off x="4956048" y="2651760"/>
+            <a:ext cx="146304" cy="228600"/>
+          </a:xfrm>
+          <a:prstGeom prst="rightArrow">
+            <a:avLst/>
+          </a:prstGeom>
+          <a:solidFill>
+            <a:srgbClr val="C8D2DC"/>
+          </a:solidFill>
+          <a:ln>
+            <a:noFill/>
+          </a:ln>
+        </p:spPr>
+        <p:style>
+          <a:lnRef idx="1">
+            <a:schemeClr val="accent1"/>
+          </a:lnRef>
+          <a:fillRef idx="3">
+            <a:schemeClr val="accent1"/>
+          </a:fillRef>
+          <a:effectRef idx="2">
+            <a:schemeClr val="accent1"/>
+          </a:effectRef>
+          <a:fontRef idx="minor">
+            <a:schemeClr val="lt1"/>
+          </a:fontRef>
+        </p:style>
+        <p:txBody>
+          <a:bodyPr rtlCol="0" anchor="ctr"/>
+          <a:lstStyle/>
+          <a:p>
+            <a:pPr algn="ctr"/>
+          </a:p>
+        </p:txBody>
+      </p:sp>
+      <p:sp>
+        <p:nvSpPr>
+          <p:cNvPr id="22" name="Rounded Rectangle 21"/>
+          <p:cNvSpPr/>
+          <p:nvPr/>
+        </p:nvSpPr>
+        <p:spPr>
+          <a:xfrm>
+            <a:off x="5120640" y="1920240"/>
+            <a:ext cx="2148840" cy="3840480"/>
+          </a:xfrm>
+          <a:prstGeom prst="roundRect">
+            <a:avLst/>
+          </a:prstGeom>
+          <a:solidFill>
+            <a:srgbClr val="FFFFFF"/>
+          </a:solidFill>
+          <a:ln w="25400">
+            <a:solidFill>
+              <a:srgbClr val="558B6E"/>
+            </a:solidFill>
+          </a:ln>
+        </p:spPr>
+        <p:style>
+          <a:lnRef idx="1">
+            <a:schemeClr val="accent1"/>
+          </a:lnRef>
+          <a:fillRef idx="3">
+            <a:schemeClr val="accent1"/>
+          </a:fillRef>
+          <a:effectRef idx="2">
+            <a:schemeClr val="accent1"/>
+          </a:effectRef>
+          <a:fontRef idx="minor">
+            <a:schemeClr val="lt1"/>
+          </a:fontRef>
+        </p:style>
+        <p:txBody>
+          <a:bodyPr rtlCol="0" anchor="ctr"/>
+          <a:lstStyle/>
+          <a:p>
+            <a:pPr algn="ctr"/>
+          </a:p>
+        </p:txBody>
+      </p:sp>
+      <p:sp>
+        <p:nvSpPr>
+          <p:cNvPr id="23" name="Rectangle 22"/>
+          <p:cNvSpPr/>
+          <p:nvPr/>
+        </p:nvSpPr>
+        <p:spPr>
+          <a:xfrm>
+            <a:off x="5120640" y="1920240"/>
+            <a:ext cx="2148840" cy="137160"/>
+          </a:xfrm>
+          <a:prstGeom prst="rect">
             <a:avLst/>
           </a:prstGeom>
           <a:solidFill>
@@ -7123,126 +7508,23 @@
       </p:sp>
       <p:sp>
         <p:nvSpPr>
-          <p:cNvPr id="17" name="TextBox 16"/>
-          <p:cNvSpPr txBox="1"/>
-          <p:nvPr/>
-        </p:nvSpPr>
-        <p:spPr>
-          <a:xfrm>
-            <a:off x="8229600" y="1554480"/>
-            <a:ext cx="457200" cy="365760"/>
-          </a:xfrm>
-          <a:prstGeom prst="rect">
-            <a:avLst/>
-          </a:prstGeom>
-          <a:noFill/>
-        </p:spPr>
-        <p:txBody>
-          <a:bodyPr wrap="none">
-            <a:spAutoFit/>
-          </a:bodyPr>
-          <a:lstStyle/>
-          <a:p>
-            <a:pPr algn="ctr">
-              <a:defRPr sz="2000"/>
-            </a:pPr>
-            <a:r>
-              <a:t>📄</a:t>
-            </a:r>
-          </a:p>
-        </p:txBody>
-      </p:sp>
-      <p:sp>
-        <p:nvSpPr>
-          <p:cNvPr id="18" name="TextBox 17"/>
-          <p:cNvSpPr txBox="1"/>
-          <p:nvPr/>
-        </p:nvSpPr>
-        <p:spPr>
-          <a:xfrm>
-            <a:off x="8778240" y="1554480"/>
-            <a:ext cx="2834640" cy="411480"/>
-          </a:xfrm>
-          <a:prstGeom prst="rect">
-            <a:avLst/>
-          </a:prstGeom>
-          <a:noFill/>
-        </p:spPr>
-        <p:txBody>
-          <a:bodyPr wrap="none">
-            <a:spAutoFit/>
-          </a:bodyPr>
-          <a:lstStyle/>
-          <a:p>
-            <a:pPr>
-              <a:defRPr sz="1400" b="1">
-                <a:solidFill>
-                  <a:srgbClr val="172A45"/>
-                </a:solidFill>
-              </a:defRPr>
-            </a:pPr>
-            <a:r>
-              <a:t>Automatic Report Generator</a:t>
-            </a:r>
-          </a:p>
-        </p:txBody>
-      </p:sp>
-      <p:sp>
-        <p:nvSpPr>
-          <p:cNvPr id="19" name="TextBox 18"/>
-          <p:cNvSpPr txBox="1"/>
-          <p:nvPr/>
-        </p:nvSpPr>
-        <p:spPr>
-          <a:xfrm>
-            <a:off x="8229600" y="2011680"/>
-            <a:ext cx="3383280" cy="914400"/>
-          </a:xfrm>
-          <a:prstGeom prst="rect">
-            <a:avLst/>
-          </a:prstGeom>
-          <a:noFill/>
-        </p:spPr>
-        <p:txBody>
-          <a:bodyPr wrap="square">
-            <a:spAutoFit/>
-          </a:bodyPr>
-          <a:lstStyle/>
-          <a:p>
-            <a:pPr>
-              <a:defRPr sz="1100">
-                <a:solidFill>
-                  <a:srgbClr val="475569"/>
-                </a:solidFill>
-              </a:defRPr>
-            </a:pPr>
-            <a:r>
-              <a:t>Feed in your project data, get a formatted status report or permit application draft — ready to review</a:t>
-            </a:r>
-          </a:p>
-        </p:txBody>
-      </p:sp>
-      <p:sp>
-        <p:nvSpPr>
-          <p:cNvPr id="20" name="Rounded Rectangle 19"/>
+          <p:cNvPr id="24" name="Oval 23"/>
           <p:cNvSpPr/>
           <p:nvPr/>
         </p:nvSpPr>
         <p:spPr>
           <a:xfrm>
-            <a:off x="502920" y="3108960"/>
-            <a:ext cx="3657600" cy="1600200"/>
-          </a:xfrm>
-          <a:prstGeom prst="roundRect">
+            <a:off x="5829300" y="2240280"/>
+            <a:ext cx="731520" cy="731520"/>
+          </a:xfrm>
+          <a:prstGeom prst="ellipse">
             <a:avLst/>
           </a:prstGeom>
           <a:solidFill>
-            <a:srgbClr val="F8FAFC"/>
+            <a:srgbClr val="558B6E"/>
           </a:solidFill>
-          <a:ln w="19050">
-            <a:solidFill>
-              <a:srgbClr val="9370A5"/>
-            </a:solidFill>
+          <a:ln>
+            <a:noFill/>
           </a:ln>
         </p:spPr>
         <p:style>
@@ -7269,16 +7551,244 @@
       </p:sp>
       <p:sp>
         <p:nvSpPr>
-          <p:cNvPr id="21" name="Oval 20"/>
+          <p:cNvPr id="25" name="TextBox 24"/>
+          <p:cNvSpPr txBox="1"/>
+          <p:nvPr/>
+        </p:nvSpPr>
+        <p:spPr>
+          <a:xfrm>
+            <a:off x="5875020" y="2331720"/>
+            <a:ext cx="640080" cy="548640"/>
+          </a:xfrm>
+          <a:prstGeom prst="rect">
+            <a:avLst/>
+          </a:prstGeom>
+          <a:noFill/>
+        </p:spPr>
+        <p:txBody>
+          <a:bodyPr wrap="none">
+            <a:spAutoFit/>
+          </a:bodyPr>
+          <a:lstStyle/>
+          <a:p>
+            <a:pPr algn="ctr">
+              <a:defRPr sz="2800"/>
+            </a:pPr>
+            <a:r>
+              <a:t>📈</a:t>
+            </a:r>
+          </a:p>
+        </p:txBody>
+      </p:sp>
+      <p:sp>
+        <p:nvSpPr>
+          <p:cNvPr id="26" name="TextBox 25"/>
+          <p:cNvSpPr txBox="1"/>
+          <p:nvPr/>
+        </p:nvSpPr>
+        <p:spPr>
+          <a:xfrm>
+            <a:off x="5212080" y="3063240"/>
+            <a:ext cx="1965960" cy="731520"/>
+          </a:xfrm>
+          <a:prstGeom prst="rect">
+            <a:avLst/>
+          </a:prstGeom>
+          <a:noFill/>
+        </p:spPr>
+        <p:txBody>
+          <a:bodyPr wrap="square">
+            <a:spAutoFit/>
+          </a:bodyPr>
+          <a:lstStyle/>
+          <a:p>
+            <a:pPr algn="ctr">
+              <a:defRPr sz="1400" b="1">
+                <a:solidFill>
+                  <a:srgbClr val="558B6E"/>
+                </a:solidFill>
+              </a:defRPr>
+            </a:pPr>
+            <a:r>
+              <a:t>Analysis &amp;</a:t>
+            </a:r>
+            <a:br/>
+            <a:r>
+              <a:t>Insights</a:t>
+            </a:r>
+          </a:p>
+        </p:txBody>
+      </p:sp>
+      <p:sp>
+        <p:nvSpPr>
+          <p:cNvPr id="27" name="TextBox 26"/>
+          <p:cNvSpPr txBox="1"/>
+          <p:nvPr/>
+        </p:nvSpPr>
+        <p:spPr>
+          <a:xfrm>
+            <a:off x="5212080" y="3794759"/>
+            <a:ext cx="1965960" cy="457200"/>
+          </a:xfrm>
+          <a:prstGeom prst="rect">
+            <a:avLst/>
+          </a:prstGeom>
+          <a:noFill/>
+        </p:spPr>
+        <p:txBody>
+          <a:bodyPr wrap="square">
+            <a:spAutoFit/>
+          </a:bodyPr>
+          <a:lstStyle/>
+          <a:p>
+            <a:pPr algn="ctr">
+              <a:defRPr sz="1300" b="1">
+                <a:solidFill>
+                  <a:srgbClr val="475569"/>
+                </a:solidFill>
+              </a:defRPr>
+            </a:pPr>
+            <a:r>
+              <a:t>Find patterns and trends</a:t>
+            </a:r>
+          </a:p>
+        </p:txBody>
+      </p:sp>
+      <p:sp>
+        <p:nvSpPr>
+          <p:cNvPr id="28" name="TextBox 27"/>
+          <p:cNvSpPr txBox="1"/>
+          <p:nvPr/>
+        </p:nvSpPr>
+        <p:spPr>
+          <a:xfrm>
+            <a:off x="5212080" y="4251960"/>
+            <a:ext cx="1965960" cy="1280160"/>
+          </a:xfrm>
+          <a:prstGeom prst="rect">
+            <a:avLst/>
+          </a:prstGeom>
+          <a:noFill/>
+        </p:spPr>
+        <p:txBody>
+          <a:bodyPr wrap="square">
+            <a:spAutoFit/>
+          </a:bodyPr>
+          <a:lstStyle/>
+          <a:p>
+            <a:pPr algn="ctr">
+              <a:defRPr sz="1100">
+                <a:solidFill>
+                  <a:srgbClr val="64748B"/>
+                </a:solidFill>
+              </a:defRPr>
+            </a:pPr>
+            <a:r>
+              <a:t>What's working? What's slowing down? Where to focus?</a:t>
+            </a:r>
+          </a:p>
+        </p:txBody>
+      </p:sp>
+      <p:sp>
+        <p:nvSpPr>
+          <p:cNvPr id="29" name="Right Arrow 28"/>
           <p:cNvSpPr/>
           <p:nvPr/>
         </p:nvSpPr>
         <p:spPr>
           <a:xfrm>
-            <a:off x="640080" y="3246120"/>
-            <a:ext cx="457200" cy="457200"/>
-          </a:xfrm>
-          <a:prstGeom prst="ellipse">
+            <a:off x="7287768" y="2651760"/>
+            <a:ext cx="146304" cy="228600"/>
+          </a:xfrm>
+          <a:prstGeom prst="rightArrow">
+            <a:avLst/>
+          </a:prstGeom>
+          <a:solidFill>
+            <a:srgbClr val="C8D2DC"/>
+          </a:solidFill>
+          <a:ln>
+            <a:noFill/>
+          </a:ln>
+        </p:spPr>
+        <p:style>
+          <a:lnRef idx="1">
+            <a:schemeClr val="accent1"/>
+          </a:lnRef>
+          <a:fillRef idx="3">
+            <a:schemeClr val="accent1"/>
+          </a:fillRef>
+          <a:effectRef idx="2">
+            <a:schemeClr val="accent1"/>
+          </a:effectRef>
+          <a:fontRef idx="minor">
+            <a:schemeClr val="lt1"/>
+          </a:fontRef>
+        </p:style>
+        <p:txBody>
+          <a:bodyPr rtlCol="0" anchor="ctr"/>
+          <a:lstStyle/>
+          <a:p>
+            <a:pPr algn="ctr"/>
+          </a:p>
+        </p:txBody>
+      </p:sp>
+      <p:sp>
+        <p:nvSpPr>
+          <p:cNvPr id="30" name="Rounded Rectangle 29"/>
+          <p:cNvSpPr/>
+          <p:nvPr/>
+        </p:nvSpPr>
+        <p:spPr>
+          <a:xfrm>
+            <a:off x="7452360" y="1920240"/>
+            <a:ext cx="2148840" cy="3840480"/>
+          </a:xfrm>
+          <a:prstGeom prst="roundRect">
+            <a:avLst/>
+          </a:prstGeom>
+          <a:solidFill>
+            <a:srgbClr val="FFFFFF"/>
+          </a:solidFill>
+          <a:ln w="25400">
+            <a:solidFill>
+              <a:srgbClr val="9370A5"/>
+            </a:solidFill>
+          </a:ln>
+        </p:spPr>
+        <p:style>
+          <a:lnRef idx="1">
+            <a:schemeClr val="accent1"/>
+          </a:lnRef>
+          <a:fillRef idx="3">
+            <a:schemeClr val="accent1"/>
+          </a:fillRef>
+          <a:effectRef idx="2">
+            <a:schemeClr val="accent1"/>
+          </a:effectRef>
+          <a:fontRef idx="minor">
+            <a:schemeClr val="lt1"/>
+          </a:fontRef>
+        </p:style>
+        <p:txBody>
+          <a:bodyPr rtlCol="0" anchor="ctr"/>
+          <a:lstStyle/>
+          <a:p>
+            <a:pPr algn="ctr"/>
+          </a:p>
+        </p:txBody>
+      </p:sp>
+      <p:sp>
+        <p:nvSpPr>
+          <p:cNvPr id="31" name="Rectangle 30"/>
+          <p:cNvSpPr/>
+          <p:nvPr/>
+        </p:nvSpPr>
+        <p:spPr>
+          <a:xfrm>
+            <a:off x="7452360" y="1920240"/>
+            <a:ext cx="2148840" cy="137160"/>
+          </a:xfrm>
+          <a:prstGeom prst="rect">
             <a:avLst/>
           </a:prstGeom>
           <a:solidFill>
@@ -7312,126 +7822,23 @@
       </p:sp>
       <p:sp>
         <p:nvSpPr>
-          <p:cNvPr id="22" name="TextBox 21"/>
-          <p:cNvSpPr txBox="1"/>
-          <p:nvPr/>
-        </p:nvSpPr>
-        <p:spPr>
-          <a:xfrm>
-            <a:off x="640080" y="3291840"/>
-            <a:ext cx="457200" cy="365760"/>
-          </a:xfrm>
-          <a:prstGeom prst="rect">
-            <a:avLst/>
-          </a:prstGeom>
-          <a:noFill/>
-        </p:spPr>
-        <p:txBody>
-          <a:bodyPr wrap="none">
-            <a:spAutoFit/>
-          </a:bodyPr>
-          <a:lstStyle/>
-          <a:p>
-            <a:pPr algn="ctr">
-              <a:defRPr sz="2000"/>
-            </a:pPr>
-            <a:r>
-              <a:t>🗺️</a:t>
-            </a:r>
-          </a:p>
-        </p:txBody>
-      </p:sp>
-      <p:sp>
-        <p:nvSpPr>
-          <p:cNvPr id="23" name="TextBox 22"/>
-          <p:cNvSpPr txBox="1"/>
-          <p:nvPr/>
-        </p:nvSpPr>
-        <p:spPr>
-          <a:xfrm>
-            <a:off x="1188720" y="3291840"/>
-            <a:ext cx="2834640" cy="411480"/>
-          </a:xfrm>
-          <a:prstGeom prst="rect">
-            <a:avLst/>
-          </a:prstGeom>
-          <a:noFill/>
-        </p:spPr>
-        <p:txBody>
-          <a:bodyPr wrap="none">
-            <a:spAutoFit/>
-          </a:bodyPr>
-          <a:lstStyle/>
-          <a:p>
-            <a:pPr>
-              <a:defRPr sz="1400" b="1">
-                <a:solidFill>
-                  <a:srgbClr val="172A45"/>
-                </a:solidFill>
-              </a:defRPr>
-            </a:pPr>
-            <a:r>
-              <a:t>Interactive Project Maps</a:t>
-            </a:r>
-          </a:p>
-        </p:txBody>
-      </p:sp>
-      <p:sp>
-        <p:nvSpPr>
-          <p:cNvPr id="24" name="TextBox 23"/>
-          <p:cNvSpPr txBox="1"/>
-          <p:nvPr/>
-        </p:nvSpPr>
-        <p:spPr>
-          <a:xfrm>
-            <a:off x="640080" y="3749040"/>
-            <a:ext cx="3383280" cy="914400"/>
-          </a:xfrm>
-          <a:prstGeom prst="rect">
-            <a:avLst/>
-          </a:prstGeom>
-          <a:noFill/>
-        </p:spPr>
-        <p:txBody>
-          <a:bodyPr wrap="square">
-            <a:spAutoFit/>
-          </a:bodyPr>
-          <a:lstStyle/>
-          <a:p>
-            <a:pPr>
-              <a:defRPr sz="1100">
-                <a:solidFill>
-                  <a:srgbClr val="475569"/>
-                </a:solidFill>
-              </a:defRPr>
-            </a:pPr>
-            <a:r>
-              <a:t>Visual maps showing land status, permitting progress, and key metrics you can explore and filter</a:t>
-            </a:r>
-          </a:p>
-        </p:txBody>
-      </p:sp>
-      <p:sp>
-        <p:nvSpPr>
-          <p:cNvPr id="25" name="Rounded Rectangle 24"/>
+          <p:cNvPr id="32" name="Oval 31"/>
           <p:cNvSpPr/>
           <p:nvPr/>
         </p:nvSpPr>
         <p:spPr>
           <a:xfrm>
-            <a:off x="4297680" y="3108960"/>
-            <a:ext cx="3657600" cy="1600200"/>
-          </a:xfrm>
-          <a:prstGeom prst="roundRect">
+            <a:off x="8161020" y="2240280"/>
+            <a:ext cx="731520" cy="731520"/>
+          </a:xfrm>
+          <a:prstGeom prst="ellipse">
             <a:avLst/>
           </a:prstGeom>
           <a:solidFill>
-            <a:srgbClr val="F8FAFC"/>
+            <a:srgbClr val="9370A5"/>
           </a:solidFill>
-          <a:ln w="19050">
-            <a:solidFill>
-              <a:srgbClr val="CD853F"/>
-            </a:solidFill>
+          <a:ln>
+            <a:noFill/>
           </a:ln>
         </p:spPr>
         <p:style>
@@ -7458,16 +7865,244 @@
       </p:sp>
       <p:sp>
         <p:nvSpPr>
-          <p:cNvPr id="26" name="Oval 25"/>
+          <p:cNvPr id="33" name="TextBox 32"/>
+          <p:cNvSpPr txBox="1"/>
+          <p:nvPr/>
+        </p:nvSpPr>
+        <p:spPr>
+          <a:xfrm>
+            <a:off x="8206740" y="2331720"/>
+            <a:ext cx="640080" cy="548640"/>
+          </a:xfrm>
+          <a:prstGeom prst="rect">
+            <a:avLst/>
+          </a:prstGeom>
+          <a:noFill/>
+        </p:spPr>
+        <p:txBody>
+          <a:bodyPr wrap="none">
+            <a:spAutoFit/>
+          </a:bodyPr>
+          <a:lstStyle/>
+          <a:p>
+            <a:pPr algn="ctr">
+              <a:defRPr sz="2800"/>
+            </a:pPr>
+            <a:r>
+              <a:t>🔮</a:t>
+            </a:r>
+          </a:p>
+        </p:txBody>
+      </p:sp>
+      <p:sp>
+        <p:nvSpPr>
+          <p:cNvPr id="34" name="TextBox 33"/>
+          <p:cNvSpPr txBox="1"/>
+          <p:nvPr/>
+        </p:nvSpPr>
+        <p:spPr>
+          <a:xfrm>
+            <a:off x="7543800" y="3063240"/>
+            <a:ext cx="1965960" cy="731520"/>
+          </a:xfrm>
+          <a:prstGeom prst="rect">
+            <a:avLst/>
+          </a:prstGeom>
+          <a:noFill/>
+        </p:spPr>
+        <p:txBody>
+          <a:bodyPr wrap="square">
+            <a:spAutoFit/>
+          </a:bodyPr>
+          <a:lstStyle/>
+          <a:p>
+            <a:pPr algn="ctr">
+              <a:defRPr sz="1400" b="1">
+                <a:solidFill>
+                  <a:srgbClr val="9370A5"/>
+                </a:solidFill>
+              </a:defRPr>
+            </a:pPr>
+            <a:r>
+              <a:t>Predictions &amp;</a:t>
+            </a:r>
+            <a:br/>
+            <a:r>
+              <a:t>Forecasts</a:t>
+            </a:r>
+          </a:p>
+        </p:txBody>
+      </p:sp>
+      <p:sp>
+        <p:nvSpPr>
+          <p:cNvPr id="35" name="TextBox 34"/>
+          <p:cNvSpPr txBox="1"/>
+          <p:nvPr/>
+        </p:nvSpPr>
+        <p:spPr>
+          <a:xfrm>
+            <a:off x="7543800" y="3794759"/>
+            <a:ext cx="1965960" cy="457200"/>
+          </a:xfrm>
+          <a:prstGeom prst="rect">
+            <a:avLst/>
+          </a:prstGeom>
+          <a:noFill/>
+        </p:spPr>
+        <p:txBody>
+          <a:bodyPr wrap="square">
+            <a:spAutoFit/>
+          </a:bodyPr>
+          <a:lstStyle/>
+          <a:p>
+            <a:pPr algn="ctr">
+              <a:defRPr sz="1300" b="1">
+                <a:solidFill>
+                  <a:srgbClr val="475569"/>
+                </a:solidFill>
+              </a:defRPr>
+            </a:pPr>
+            <a:r>
+              <a:t>See what's likely coming</a:t>
+            </a:r>
+          </a:p>
+        </p:txBody>
+      </p:sp>
+      <p:sp>
+        <p:nvSpPr>
+          <p:cNvPr id="36" name="TextBox 35"/>
+          <p:cNvSpPr txBox="1"/>
+          <p:nvPr/>
+        </p:nvSpPr>
+        <p:spPr>
+          <a:xfrm>
+            <a:off x="7543800" y="4251960"/>
+            <a:ext cx="1965960" cy="1280160"/>
+          </a:xfrm>
+          <a:prstGeom prst="rect">
+            <a:avLst/>
+          </a:prstGeom>
+          <a:noFill/>
+        </p:spPr>
+        <p:txBody>
+          <a:bodyPr wrap="square">
+            <a:spAutoFit/>
+          </a:bodyPr>
+          <a:lstStyle/>
+          <a:p>
+            <a:pPr algn="ctr">
+              <a:defRPr sz="1100">
+                <a:solidFill>
+                  <a:srgbClr val="64748B"/>
+                </a:solidFill>
+              </a:defRPr>
+            </a:pPr>
+            <a:r>
+              <a:t>Timeline estimates, risk flags, outcome probabilities</a:t>
+            </a:r>
+          </a:p>
+        </p:txBody>
+      </p:sp>
+      <p:sp>
+        <p:nvSpPr>
+          <p:cNvPr id="37" name="Right Arrow 36"/>
           <p:cNvSpPr/>
           <p:nvPr/>
         </p:nvSpPr>
         <p:spPr>
           <a:xfrm>
-            <a:off x="4434840" y="3246120"/>
-            <a:ext cx="457200" cy="457200"/>
-          </a:xfrm>
-          <a:prstGeom prst="ellipse">
+            <a:off x="9619488" y="2651760"/>
+            <a:ext cx="146304" cy="228600"/>
+          </a:xfrm>
+          <a:prstGeom prst="rightArrow">
+            <a:avLst/>
+          </a:prstGeom>
+          <a:solidFill>
+            <a:srgbClr val="C8D2DC"/>
+          </a:solidFill>
+          <a:ln>
+            <a:noFill/>
+          </a:ln>
+        </p:spPr>
+        <p:style>
+          <a:lnRef idx="1">
+            <a:schemeClr val="accent1"/>
+          </a:lnRef>
+          <a:fillRef idx="3">
+            <a:schemeClr val="accent1"/>
+          </a:fillRef>
+          <a:effectRef idx="2">
+            <a:schemeClr val="accent1"/>
+          </a:effectRef>
+          <a:fontRef idx="minor">
+            <a:schemeClr val="lt1"/>
+          </a:fontRef>
+        </p:style>
+        <p:txBody>
+          <a:bodyPr rtlCol="0" anchor="ctr"/>
+          <a:lstStyle/>
+          <a:p>
+            <a:pPr algn="ctr"/>
+          </a:p>
+        </p:txBody>
+      </p:sp>
+      <p:sp>
+        <p:nvSpPr>
+          <p:cNvPr id="38" name="Rounded Rectangle 37"/>
+          <p:cNvSpPr/>
+          <p:nvPr/>
+        </p:nvSpPr>
+        <p:spPr>
+          <a:xfrm>
+            <a:off x="9784080" y="1920240"/>
+            <a:ext cx="2148840" cy="3840480"/>
+          </a:xfrm>
+          <a:prstGeom prst="roundRect">
+            <a:avLst/>
+          </a:prstGeom>
+          <a:solidFill>
+            <a:srgbClr val="FFFFFF"/>
+          </a:solidFill>
+          <a:ln w="25400">
+            <a:solidFill>
+              <a:srgbClr val="CD853F"/>
+            </a:solidFill>
+          </a:ln>
+        </p:spPr>
+        <p:style>
+          <a:lnRef idx="1">
+            <a:schemeClr val="accent1"/>
+          </a:lnRef>
+          <a:fillRef idx="3">
+            <a:schemeClr val="accent1"/>
+          </a:fillRef>
+          <a:effectRef idx="2">
+            <a:schemeClr val="accent1"/>
+          </a:effectRef>
+          <a:fontRef idx="minor">
+            <a:schemeClr val="lt1"/>
+          </a:fontRef>
+        </p:style>
+        <p:txBody>
+          <a:bodyPr rtlCol="0" anchor="ctr"/>
+          <a:lstStyle/>
+          <a:p>
+            <a:pPr algn="ctr"/>
+          </a:p>
+        </p:txBody>
+      </p:sp>
+      <p:sp>
+        <p:nvSpPr>
+          <p:cNvPr id="39" name="Rectangle 38"/>
+          <p:cNvSpPr/>
+          <p:nvPr/>
+        </p:nvSpPr>
+        <p:spPr>
+          <a:xfrm>
+            <a:off x="9784080" y="1920240"/>
+            <a:ext cx="2148840" cy="137160"/>
+          </a:xfrm>
+          <a:prstGeom prst="rect">
             <a:avLst/>
           </a:prstGeom>
           <a:solidFill>
@@ -7501,126 +8136,23 @@
       </p:sp>
       <p:sp>
         <p:nvSpPr>
-          <p:cNvPr id="27" name="TextBox 26"/>
-          <p:cNvSpPr txBox="1"/>
-          <p:nvPr/>
-        </p:nvSpPr>
-        <p:spPr>
-          <a:xfrm>
-            <a:off x="4434840" y="3291840"/>
-            <a:ext cx="457200" cy="365760"/>
-          </a:xfrm>
-          <a:prstGeom prst="rect">
-            <a:avLst/>
-          </a:prstGeom>
-          <a:noFill/>
-        </p:spPr>
-        <p:txBody>
-          <a:bodyPr wrap="none">
-            <a:spAutoFit/>
-          </a:bodyPr>
-          <a:lstStyle/>
-          <a:p>
-            <a:pPr algn="ctr">
-              <a:defRPr sz="2000"/>
-            </a:pPr>
-            <a:r>
-              <a:t>💬</a:t>
-            </a:r>
-          </a:p>
-        </p:txBody>
-      </p:sp>
-      <p:sp>
-        <p:nvSpPr>
-          <p:cNvPr id="28" name="TextBox 27"/>
-          <p:cNvSpPr txBox="1"/>
-          <p:nvPr/>
-        </p:nvSpPr>
-        <p:spPr>
-          <a:xfrm>
-            <a:off x="4983480" y="3291840"/>
-            <a:ext cx="2834640" cy="411480"/>
-          </a:xfrm>
-          <a:prstGeom prst="rect">
-            <a:avLst/>
-          </a:prstGeom>
-          <a:noFill/>
-        </p:spPr>
-        <p:txBody>
-          <a:bodyPr wrap="none">
-            <a:spAutoFit/>
-          </a:bodyPr>
-          <a:lstStyle/>
-          <a:p>
-            <a:pPr>
-              <a:defRPr sz="1400" b="1">
-                <a:solidFill>
-                  <a:srgbClr val="172A45"/>
-                </a:solidFill>
-              </a:defRPr>
-            </a:pPr>
-            <a:r>
-              <a:t>Project Data Assistant</a:t>
-            </a:r>
-          </a:p>
-        </p:txBody>
-      </p:sp>
-      <p:sp>
-        <p:nvSpPr>
-          <p:cNvPr id="29" name="TextBox 28"/>
-          <p:cNvSpPr txBox="1"/>
-          <p:nvPr/>
-        </p:nvSpPr>
-        <p:spPr>
-          <a:xfrm>
-            <a:off x="4434840" y="3749040"/>
-            <a:ext cx="3383280" cy="914400"/>
-          </a:xfrm>
-          <a:prstGeom prst="rect">
-            <a:avLst/>
-          </a:prstGeom>
-          <a:noFill/>
-        </p:spPr>
-        <p:txBody>
-          <a:bodyPr wrap="square">
-            <a:spAutoFit/>
-          </a:bodyPr>
-          <a:lstStyle/>
-          <a:p>
-            <a:pPr>
-              <a:defRPr sz="1100">
-                <a:solidFill>
-                  <a:srgbClr val="475569"/>
-                </a:solidFill>
-              </a:defRPr>
-            </a:pPr>
-            <a:r>
-              <a:t>Ask questions in plain English like "Which projects in Texas are waiting on permits?" and get instant answers</a:t>
-            </a:r>
-          </a:p>
-        </p:txBody>
-      </p:sp>
-      <p:sp>
-        <p:nvSpPr>
-          <p:cNvPr id="30" name="Rounded Rectangle 29"/>
+          <p:cNvPr id="40" name="Oval 39"/>
           <p:cNvSpPr/>
           <p:nvPr/>
         </p:nvSpPr>
         <p:spPr>
           <a:xfrm>
-            <a:off x="8092440" y="3108960"/>
-            <a:ext cx="3657600" cy="1600200"/>
-          </a:xfrm>
-          <a:prstGeom prst="roundRect">
+            <a:off x="10492740" y="2240280"/>
+            <a:ext cx="731520" cy="731520"/>
+          </a:xfrm>
+          <a:prstGeom prst="ellipse">
             <a:avLst/>
           </a:prstGeom>
           <a:solidFill>
-            <a:srgbClr val="F8FAFC"/>
+            <a:srgbClr val="CD853F"/>
           </a:solidFill>
-          <a:ln w="19050">
-            <a:solidFill>
-              <a:srgbClr val="778899"/>
-            </a:solidFill>
+          <a:ln>
+            <a:noFill/>
           </a:ln>
         </p:spPr>
         <p:style>
@@ -7647,57 +8179,14 @@
       </p:sp>
       <p:sp>
         <p:nvSpPr>
-          <p:cNvPr id="31" name="Oval 30"/>
-          <p:cNvSpPr/>
-          <p:nvPr/>
-        </p:nvSpPr>
-        <p:spPr>
-          <a:xfrm>
-            <a:off x="8229600" y="3246120"/>
-            <a:ext cx="457200" cy="457200"/>
-          </a:xfrm>
-          <a:prstGeom prst="ellipse">
-            <a:avLst/>
-          </a:prstGeom>
-          <a:solidFill>
-            <a:srgbClr val="778899"/>
-          </a:solidFill>
-          <a:ln>
-            <a:noFill/>
-          </a:ln>
-        </p:spPr>
-        <p:style>
-          <a:lnRef idx="1">
-            <a:schemeClr val="accent1"/>
-          </a:lnRef>
-          <a:fillRef idx="3">
-            <a:schemeClr val="accent1"/>
-          </a:fillRef>
-          <a:effectRef idx="2">
-            <a:schemeClr val="accent1"/>
-          </a:effectRef>
-          <a:fontRef idx="minor">
-            <a:schemeClr val="lt1"/>
-          </a:fontRef>
-        </p:style>
-        <p:txBody>
-          <a:bodyPr rtlCol="0" anchor="ctr"/>
-          <a:lstStyle/>
-          <a:p>
-            <a:pPr algn="ctr"/>
-          </a:p>
-        </p:txBody>
-      </p:sp>
-      <p:sp>
-        <p:nvSpPr>
-          <p:cNvPr id="32" name="TextBox 31"/>
+          <p:cNvPr id="41" name="TextBox 40"/>
           <p:cNvSpPr txBox="1"/>
           <p:nvPr/>
         </p:nvSpPr>
         <p:spPr>
           <a:xfrm>
-            <a:off x="8229600" y="3291840"/>
-            <a:ext cx="457200" cy="365760"/>
+            <a:off x="10538460" y="2331720"/>
+            <a:ext cx="640080" cy="548640"/>
           </a:xfrm>
           <a:prstGeom prst="rect">
             <a:avLst/>
@@ -7711,24 +8200,133 @@
           <a:lstStyle/>
           <a:p>
             <a:pPr algn="ctr">
-              <a:defRPr sz="2000"/>
-            </a:pPr>
-            <a:r>
-              <a:t>🔗</a:t>
-            </a:r>
-          </a:p>
-        </p:txBody>
-      </p:sp>
-      <p:sp>
-        <p:nvSpPr>
-          <p:cNvPr id="33" name="TextBox 32"/>
+              <a:defRPr sz="2800"/>
+            </a:pPr>
+            <a:r>
+              <a:t>🤖</a:t>
+            </a:r>
+          </a:p>
+        </p:txBody>
+      </p:sp>
+      <p:sp>
+        <p:nvSpPr>
+          <p:cNvPr id="42" name="TextBox 41"/>
           <p:cNvSpPr txBox="1"/>
           <p:nvPr/>
         </p:nvSpPr>
         <p:spPr>
           <a:xfrm>
-            <a:off x="8778240" y="3291840"/>
-            <a:ext cx="2834640" cy="411480"/>
+            <a:off x="9875520" y="3063240"/>
+            <a:ext cx="1965960" cy="731520"/>
+          </a:xfrm>
+          <a:prstGeom prst="rect">
+            <a:avLst/>
+          </a:prstGeom>
+          <a:noFill/>
+        </p:spPr>
+        <p:txBody>
+          <a:bodyPr wrap="square">
+            <a:spAutoFit/>
+          </a:bodyPr>
+          <a:lstStyle/>
+          <a:p>
+            <a:pPr algn="ctr">
+              <a:defRPr sz="1400" b="1">
+                <a:solidFill>
+                  <a:srgbClr val="CD853F"/>
+                </a:solidFill>
+              </a:defRPr>
+            </a:pPr>
+            <a:r>
+              <a:t>AI-Powered</a:t>
+            </a:r>
+            <a:br/>
+            <a:r>
+              <a:t>Tools</a:t>
+            </a:r>
+          </a:p>
+        </p:txBody>
+      </p:sp>
+      <p:sp>
+        <p:nvSpPr>
+          <p:cNvPr id="43" name="TextBox 42"/>
+          <p:cNvSpPr txBox="1"/>
+          <p:nvPr/>
+        </p:nvSpPr>
+        <p:spPr>
+          <a:xfrm>
+            <a:off x="9875520" y="3794759"/>
+            <a:ext cx="1965960" cy="457200"/>
+          </a:xfrm>
+          <a:prstGeom prst="rect">
+            <a:avLst/>
+          </a:prstGeom>
+          <a:noFill/>
+        </p:spPr>
+        <p:txBody>
+          <a:bodyPr wrap="square">
+            <a:spAutoFit/>
+          </a:bodyPr>
+          <a:lstStyle/>
+          <a:p>
+            <a:pPr algn="ctr">
+              <a:defRPr sz="1300" b="1">
+                <a:solidFill>
+                  <a:srgbClr val="475569"/>
+                </a:solidFill>
+              </a:defRPr>
+            </a:pPr>
+            <a:r>
+              <a:t>Smart automation</a:t>
+            </a:r>
+          </a:p>
+        </p:txBody>
+      </p:sp>
+      <p:sp>
+        <p:nvSpPr>
+          <p:cNvPr id="44" name="TextBox 43"/>
+          <p:cNvSpPr txBox="1"/>
+          <p:nvPr/>
+        </p:nvSpPr>
+        <p:spPr>
+          <a:xfrm>
+            <a:off x="9875520" y="4251960"/>
+            <a:ext cx="1965960" cy="1280160"/>
+          </a:xfrm>
+          <a:prstGeom prst="rect">
+            <a:avLst/>
+          </a:prstGeom>
+          <a:noFill/>
+        </p:spPr>
+        <p:txBody>
+          <a:bodyPr wrap="square">
+            <a:spAutoFit/>
+          </a:bodyPr>
+          <a:lstStyle/>
+          <a:p>
+            <a:pPr algn="ctr">
+              <a:defRPr sz="1100">
+                <a:solidFill>
+                  <a:srgbClr val="64748B"/>
+                </a:solidFill>
+              </a:defRPr>
+            </a:pPr>
+            <a:r>
+              <a:t>Document generation, Q&amp;A assistants, intelligent workflows</a:t>
+            </a:r>
+          </a:p>
+        </p:txBody>
+      </p:sp>
+      <p:sp>
+        <p:nvSpPr>
+          <p:cNvPr id="45" name="TextBox 44"/>
+          <p:cNvSpPr txBox="1"/>
+          <p:nvPr/>
+        </p:nvSpPr>
+        <p:spPr>
+          <a:xfrm>
+            <a:off x="457200" y="5943600"/>
+            <a:ext cx="11247120" cy="457200"/>
           </a:xfrm>
           <a:prstGeom prst="rect">
             <a:avLst/>
@@ -7741,92 +8339,22 @@
           </a:bodyPr>
           <a:lstStyle/>
           <a:p>
-            <a:pPr>
-              <a:defRPr sz="1400" b="1">
-                <a:solidFill>
-                  <a:srgbClr val="172A45"/>
-                </a:solidFill>
-              </a:defRPr>
-            </a:pPr>
-            <a:r>
-              <a:t>Connected Data Systems</a:t>
-            </a:r>
-          </a:p>
-        </p:txBody>
-      </p:sp>
-      <p:sp>
-        <p:nvSpPr>
-          <p:cNvPr id="34" name="TextBox 33"/>
-          <p:cNvSpPr txBox="1"/>
-          <p:nvPr/>
-        </p:nvSpPr>
-        <p:spPr>
-          <a:xfrm>
-            <a:off x="8229600" y="3749040"/>
-            <a:ext cx="3383280" cy="914400"/>
-          </a:xfrm>
-          <a:prstGeom prst="rect">
-            <a:avLst/>
-          </a:prstGeom>
-          <a:noFill/>
-        </p:spPr>
-        <p:txBody>
-          <a:bodyPr wrap="square">
-            <a:spAutoFit/>
-          </a:bodyPr>
-          <a:lstStyle/>
-          <a:p>
-            <a:pPr>
-              <a:defRPr sz="1100">
-                <a:solidFill>
-                  <a:srgbClr val="475569"/>
-                </a:solidFill>
-              </a:defRPr>
-            </a:pPr>
-            <a:r>
-              <a:t>Link your spreadsheets, databases, and documents so information flows automatically — no more manual updates</a:t>
-            </a:r>
-          </a:p>
-        </p:txBody>
-      </p:sp>
-      <p:sp>
-        <p:nvSpPr>
-          <p:cNvPr id="35" name="TextBox 34"/>
-          <p:cNvSpPr txBox="1"/>
-          <p:nvPr/>
-        </p:nvSpPr>
-        <p:spPr>
-          <a:xfrm>
-            <a:off x="457200" y="4709160"/>
-            <a:ext cx="11247120" cy="457200"/>
-          </a:xfrm>
-          <a:prstGeom prst="rect">
-            <a:avLst/>
-          </a:prstGeom>
-          <a:noFill/>
-        </p:spPr>
-        <p:txBody>
-          <a:bodyPr wrap="none">
-            <a:spAutoFit/>
-          </a:bodyPr>
-          <a:lstStyle/>
-          <a:p>
             <a:pPr algn="ctr">
-              <a:defRPr sz="1400" i="1">
-                <a:solidFill>
-                  <a:srgbClr val="64748B"/>
-                </a:solidFill>
-              </a:defRPr>
-            </a:pPr>
-            <a:r>
-              <a:t>These are just examples — every solution is tailored to your specific needs</a:t>
-            </a:r>
-          </a:p>
-        </p:txBody>
-      </p:sp>
-      <p:sp>
-        <p:nvSpPr>
-          <p:cNvPr id="36" name="TextBox 35"/>
+              <a:defRPr sz="1600" b="1">
+                <a:solidFill>
+                  <a:srgbClr val="008080"/>
+                </a:solidFill>
+              </a:defRPr>
+            </a:pPr>
+            <a:r>
+              <a:t>Let's look at some real examples →</a:t>
+            </a:r>
+          </a:p>
+        </p:txBody>
+      </p:sp>
+      <p:sp>
+        <p:nvSpPr>
+          <p:cNvPr id="46" name="TextBox 45"/>
           <p:cNvSpPr txBox="1"/>
           <p:nvPr/>
         </p:nvSpPr>

--- a/Enterprise_Analytics_AI_Team.pptx
+++ b/Enterprise_Analytics_AI_Team.pptx
@@ -5625,8 +5625,8 @@
         </p:nvSpPr>
         <p:spPr>
           <a:xfrm>
-            <a:off x="548640" y="1417320"/>
-            <a:ext cx="5546750" cy="2468880"/>
+            <a:off x="457200" y="1371600"/>
+            <a:ext cx="3657600" cy="2286000"/>
           </a:xfrm>
           <a:prstGeom prst="roundRect">
             <a:avLst/>
@@ -5670,8 +5670,8 @@
         </p:nvSpPr>
         <p:spPr>
           <a:xfrm>
-            <a:off x="548640" y="1417320"/>
-            <a:ext cx="137160" cy="2468880"/>
+            <a:off x="457200" y="1371600"/>
+            <a:ext cx="137160" cy="2286000"/>
           </a:xfrm>
           <a:prstGeom prst="rect">
             <a:avLst/>
@@ -5713,8 +5713,8 @@
         </p:nvSpPr>
         <p:spPr>
           <a:xfrm>
-            <a:off x="868680" y="1554480"/>
-            <a:ext cx="5089550" cy="457200"/>
+            <a:off x="777240" y="1508760"/>
+            <a:ext cx="3200400" cy="457200"/>
           </a:xfrm>
           <a:prstGeom prst="rect">
             <a:avLst/>
@@ -5735,7 +5735,7 @@
               </a:defRPr>
             </a:pPr>
             <a:r>
-              <a:t>📊  Data &amp; Dashboards</a:t>
+              <a:t>👁️  See Your Data Clearly</a:t>
             </a:r>
           </a:p>
         </p:txBody>
@@ -5748,8 +5748,8 @@
         </p:nvSpPr>
         <p:spPr>
           <a:xfrm>
-            <a:off x="868680" y="1965960"/>
-            <a:ext cx="5089550" cy="365760"/>
+            <a:off x="777240" y="1920240"/>
+            <a:ext cx="3200400" cy="365760"/>
           </a:xfrm>
           <a:prstGeom prst="rect">
             <a:avLst/>
@@ -5770,7 +5770,7 @@
               </a:defRPr>
             </a:pPr>
             <a:r>
-              <a:t>See what's happening across your projects</a:t>
+              <a:t>From scattered spreadsheets to a single source of truth</a:t>
             </a:r>
           </a:p>
         </p:txBody>
@@ -5783,8 +5783,8 @@
         </p:nvSpPr>
         <p:spPr>
           <a:xfrm>
-            <a:off x="868680" y="2377440"/>
-            <a:ext cx="5089550" cy="1371600"/>
+            <a:off x="777240" y="2331720"/>
+            <a:ext cx="3200400" cy="1371600"/>
           </a:xfrm>
           <a:prstGeom prst="rect">
             <a:avLst/>
@@ -5808,7 +5808,7 @@
               </a:defRPr>
             </a:pPr>
             <a:r>
-              <a:t>• Connect scattered data into one clear view</a:t>
+              <a:t>• Dashboards that show project status at a glance</a:t>
             </a:r>
           </a:p>
           <a:p>
@@ -5823,7 +5823,7 @@
               </a:defRPr>
             </a:pPr>
             <a:r>
-              <a:t>• Build visual dashboards that update automatically</a:t>
+              <a:t>• Maps and visuals that update automatically</a:t>
             </a:r>
           </a:p>
           <a:p>
@@ -5838,22 +5838,7 @@
               </a:defRPr>
             </a:pPr>
             <a:r>
-              <a:t>• Perform deep-dive analysis to spot trends</a:t>
-            </a:r>
-          </a:p>
-          <a:p>
-            <a:pPr>
-              <a:spcAft>
-                <a:spcPts val="300"/>
-              </a:spcAft>
-              <a:defRPr sz="1200">
-                <a:solidFill>
-                  <a:srgbClr val="475569"/>
-                </a:solidFill>
-              </a:defRPr>
-            </a:pPr>
-            <a:r>
-              <a:t>• Support teams that don't have dedicated data staff</a:t>
+              <a:t>• One place to see what's happening across teams</a:t>
             </a:r>
           </a:p>
         </p:txBody>
@@ -5866,8 +5851,8 @@
         </p:nvSpPr>
         <p:spPr>
           <a:xfrm>
-            <a:off x="6323990" y="1417320"/>
-            <a:ext cx="5546750" cy="2468880"/>
+            <a:off x="4297680" y="1371600"/>
+            <a:ext cx="3657600" cy="2286000"/>
           </a:xfrm>
           <a:prstGeom prst="roundRect">
             <a:avLst/>
@@ -5911,8 +5896,8 @@
         </p:nvSpPr>
         <p:spPr>
           <a:xfrm>
-            <a:off x="6323990" y="1417320"/>
-            <a:ext cx="137160" cy="2468880"/>
+            <a:off x="4297680" y="1371600"/>
+            <a:ext cx="137160" cy="2286000"/>
           </a:xfrm>
           <a:prstGeom prst="rect">
             <a:avLst/>
@@ -5954,8 +5939,8 @@
         </p:nvSpPr>
         <p:spPr>
           <a:xfrm>
-            <a:off x="6644030" y="1554480"/>
-            <a:ext cx="5089550" cy="457200"/>
+            <a:off x="4617720" y="1508760"/>
+            <a:ext cx="3200400" cy="457200"/>
           </a:xfrm>
           <a:prstGeom prst="rect">
             <a:avLst/>
@@ -5976,7 +5961,7 @@
               </a:defRPr>
             </a:pPr>
             <a:r>
-              <a:t>🤖  Custom AI Solutions</a:t>
+              <a:t>🔍  Understand What's Happening</a:t>
             </a:r>
           </a:p>
         </p:txBody>
@@ -5989,8 +5974,8 @@
         </p:nvSpPr>
         <p:spPr>
           <a:xfrm>
-            <a:off x="6644030" y="1965960"/>
-            <a:ext cx="5089550" cy="365760"/>
+            <a:off x="4617720" y="1920240"/>
+            <a:ext cx="3200400" cy="365760"/>
           </a:xfrm>
           <a:prstGeom prst="rect">
             <a:avLst/>
@@ -6011,7 +5996,7 @@
               </a:defRPr>
             </a:pPr>
             <a:r>
-              <a:t>Smart tools built for your specific challenges</a:t>
+              <a:t>Turn raw data into answers</a:t>
             </a:r>
           </a:p>
         </p:txBody>
@@ -6024,8 +6009,8 @@
         </p:nvSpPr>
         <p:spPr>
           <a:xfrm>
-            <a:off x="6644030" y="2377440"/>
-            <a:ext cx="5089550" cy="1371600"/>
+            <a:off x="4617720" y="2331720"/>
+            <a:ext cx="3200400" cy="1371600"/>
           </a:xfrm>
           <a:prstGeom prst="rect">
             <a:avLst/>
@@ -6049,7 +6034,7 @@
               </a:defRPr>
             </a:pPr>
             <a:r>
-              <a:t>• Predict outcomes (like permit timelines)</a:t>
+              <a:t>• Spot trends and patterns you'd otherwise miss</a:t>
             </a:r>
           </a:p>
           <a:p>
@@ -6064,7 +6049,7 @@
               </a:defRPr>
             </a:pPr>
             <a:r>
-              <a:t>• Automate repetitive data tasks</a:t>
+              <a:t>• Find root causes when things slow down</a:t>
             </a:r>
           </a:p>
           <a:p>
@@ -6079,22 +6064,7 @@
               </a:defRPr>
             </a:pPr>
             <a:r>
-              <a:t>• Build assistants that answer questions from your data</a:t>
-            </a:r>
-          </a:p>
-          <a:p>
-            <a:pPr>
-              <a:spcAft>
-                <a:spcPts val="300"/>
-              </a:spcAft>
-              <a:defRPr sz="1200">
-                <a:solidFill>
-                  <a:srgbClr val="475569"/>
-                </a:solidFill>
-              </a:defRPr>
-            </a:pPr>
-            <a:r>
-              <a:t>• Create systems that learn and improve over time</a:t>
+              <a:t>• Deep-dive analysis when you need to dig in</a:t>
             </a:r>
           </a:p>
         </p:txBody>
@@ -6107,8 +6077,8 @@
         </p:nvSpPr>
         <p:spPr>
           <a:xfrm>
-            <a:off x="548640" y="4114800"/>
-            <a:ext cx="5546750" cy="2468880"/>
+            <a:off x="8138160" y="1371600"/>
+            <a:ext cx="3657600" cy="2286000"/>
           </a:xfrm>
           <a:prstGeom prst="roundRect">
             <a:avLst/>
@@ -6152,8 +6122,8 @@
         </p:nvSpPr>
         <p:spPr>
           <a:xfrm>
-            <a:off x="548640" y="4114800"/>
-            <a:ext cx="137160" cy="2468880"/>
+            <a:off x="8138160" y="1371600"/>
+            <a:ext cx="137160" cy="2286000"/>
           </a:xfrm>
           <a:prstGeom prst="rect">
             <a:avLst/>
@@ -6195,8 +6165,8 @@
         </p:nvSpPr>
         <p:spPr>
           <a:xfrm>
-            <a:off x="868680" y="4251960"/>
-            <a:ext cx="5089550" cy="457200"/>
+            <a:off x="8458200" y="1508760"/>
+            <a:ext cx="3200400" cy="457200"/>
           </a:xfrm>
           <a:prstGeom prst="rect">
             <a:avLst/>
@@ -6217,7 +6187,7 @@
               </a:defRPr>
             </a:pPr>
             <a:r>
-              <a:t>🔍  AI Tools &amp; Guidance</a:t>
+              <a:t>🔮  Predict What's Coming</a:t>
             </a:r>
           </a:p>
         </p:txBody>
@@ -6230,8 +6200,8 @@
         </p:nvSpPr>
         <p:spPr>
           <a:xfrm>
-            <a:off x="868680" y="4663440"/>
-            <a:ext cx="5089550" cy="365760"/>
+            <a:off x="8458200" y="1920240"/>
+            <a:ext cx="3200400" cy="365760"/>
           </a:xfrm>
           <a:prstGeom prst="rect">
             <a:avLst/>
@@ -6252,7 +6222,7 @@
               </a:defRPr>
             </a:pPr>
             <a:r>
-              <a:t>Navigate the AI landscape safely</a:t>
+              <a:t>See around corners before problems arrive</a:t>
             </a:r>
           </a:p>
         </p:txBody>
@@ -6265,8 +6235,8 @@
         </p:nvSpPr>
         <p:spPr>
           <a:xfrm>
-            <a:off x="868680" y="5074920"/>
-            <a:ext cx="5089550" cy="1371600"/>
+            <a:off x="8458200" y="2331720"/>
+            <a:ext cx="3200400" cy="1371600"/>
           </a:xfrm>
           <a:prstGeom prst="rect">
             <a:avLst/>
@@ -6290,7 +6260,7 @@
               </a:defRPr>
             </a:pPr>
             <a:r>
-              <a:t>• Help you use ChatGPT and similar tools wisely</a:t>
+              <a:t>• Forecast timelines (like permit approvals)</a:t>
             </a:r>
           </a:p>
           <a:p>
@@ -6305,7 +6275,7 @@
               </a:defRPr>
             </a:pPr>
             <a:r>
-              <a:t>• Evaluate which AI products are worth buying</a:t>
+              <a:t>• Flag risks early so you can act</a:t>
             </a:r>
           </a:p>
           <a:p>
@@ -6320,22 +6290,7 @@
               </a:defRPr>
             </a:pPr>
             <a:r>
-              <a:t>• Connect with universities and research partners</a:t>
-            </a:r>
-          </a:p>
-          <a:p>
-            <a:pPr>
-              <a:spcAft>
-                <a:spcPts val="300"/>
-              </a:spcAft>
-              <a:defRPr sz="1200">
-                <a:solidFill>
-                  <a:srgbClr val="475569"/>
-                </a:solidFill>
-              </a:defRPr>
-            </a:pPr>
-            <a:r>
-              <a:t>• Ensure AI is used responsibly and securely</a:t>
+              <a:t>• Model scenarios to plan ahead</a:t>
             </a:r>
           </a:p>
         </p:txBody>
@@ -6348,8 +6303,8 @@
         </p:nvSpPr>
         <p:spPr>
           <a:xfrm>
-            <a:off x="6323990" y="4114800"/>
-            <a:ext cx="5546750" cy="2468880"/>
+            <a:off x="2331720" y="3840480"/>
+            <a:ext cx="3657600" cy="2286000"/>
           </a:xfrm>
           <a:prstGeom prst="roundRect">
             <a:avLst/>
@@ -6393,8 +6348,8 @@
         </p:nvSpPr>
         <p:spPr>
           <a:xfrm>
-            <a:off x="6323990" y="4114800"/>
-            <a:ext cx="137160" cy="2468880"/>
+            <a:off x="2331720" y="3840480"/>
+            <a:ext cx="137160" cy="2286000"/>
           </a:xfrm>
           <a:prstGeom prst="rect">
             <a:avLst/>
@@ -6436,8 +6391,8 @@
         </p:nvSpPr>
         <p:spPr>
           <a:xfrm>
-            <a:off x="6644030" y="4251960"/>
-            <a:ext cx="5089550" cy="457200"/>
+            <a:off x="2651760" y="3977640"/>
+            <a:ext cx="3200400" cy="457200"/>
           </a:xfrm>
           <a:prstGeom prst="rect">
             <a:avLst/>
@@ -6458,7 +6413,7 @@
               </a:defRPr>
             </a:pPr>
             <a:r>
-              <a:t>🤝  Company-Wide Collaboration</a:t>
+              <a:t>🤖  Work Smarter with AI</a:t>
             </a:r>
           </a:p>
         </p:txBody>
@@ -6471,8 +6426,8 @@
         </p:nvSpPr>
         <p:spPr>
           <a:xfrm>
-            <a:off x="6644030" y="4663440"/>
-            <a:ext cx="5089550" cy="365760"/>
+            <a:off x="2651760" y="4389120"/>
+            <a:ext cx="3200400" cy="365760"/>
           </a:xfrm>
           <a:prstGeom prst="rect">
             <a:avLst/>
@@ -6493,7 +6448,7 @@
               </a:defRPr>
             </a:pPr>
             <a:r>
-              <a:t>Connecting data expertise across teams</a:t>
+              <a:t>Intelligent tools that multiply your capacity</a:t>
             </a:r>
           </a:p>
         </p:txBody>
@@ -6506,8 +6461,8 @@
         </p:nvSpPr>
         <p:spPr>
           <a:xfrm>
-            <a:off x="6644030" y="5074920"/>
-            <a:ext cx="5089550" cy="1371600"/>
+            <a:off x="2651760" y="4800600"/>
+            <a:ext cx="3200400" cy="1371600"/>
           </a:xfrm>
           <a:prstGeom prst="rect">
             <a:avLst/>
@@ -6531,7 +6486,7 @@
               </a:defRPr>
             </a:pPr>
             <a:r>
-              <a:t>• Work alongside data professionals in every department</a:t>
+              <a:t>• Generate reports and documents automatically</a:t>
             </a:r>
           </a:p>
           <a:p>
@@ -6546,7 +6501,7 @@
               </a:defRPr>
             </a:pPr>
             <a:r>
-              <a:t>• Share best practices so everyone benefits</a:t>
+              <a:t>• Ask questions and get instant answers from your data</a:t>
             </a:r>
           </a:p>
           <a:p>
@@ -6561,7 +6516,7 @@
               </a:defRPr>
             </a:pPr>
             <a:r>
-              <a:t>• Organize working groups to solve common challenges</a:t>
+              <a:t>• Automate routine tasks so you can focus on judgment calls</a:t>
             </a:r>
           </a:p>
           <a:p>
@@ -6576,14 +6531,240 @@
               </a:defRPr>
             </a:pPr>
             <a:r>
-              <a:t>• Build tools that multiple teams can use</a:t>
-            </a:r>
-          </a:p>
-        </p:txBody>
-      </p:sp>
-      <p:sp>
-        <p:nvSpPr>
-          <p:cNvPr id="25" name="TextBox 24"/>
+              <a:t>• Get smart alerts when something needs your attention</a:t>
+            </a:r>
+          </a:p>
+        </p:txBody>
+      </p:sp>
+      <p:sp>
+        <p:nvSpPr>
+          <p:cNvPr id="25" name="Rounded Rectangle 24"/>
+          <p:cNvSpPr/>
+          <p:nvPr/>
+        </p:nvSpPr>
+        <p:spPr>
+          <a:xfrm>
+            <a:off x="6172200" y="3840480"/>
+            <a:ext cx="3657600" cy="2286000"/>
+          </a:xfrm>
+          <a:prstGeom prst="roundRect">
+            <a:avLst/>
+          </a:prstGeom>
+          <a:solidFill>
+            <a:srgbClr val="FFFFFF"/>
+          </a:solidFill>
+          <a:ln w="25400">
+            <a:solidFill>
+              <a:srgbClr val="CD853F"/>
+            </a:solidFill>
+          </a:ln>
+        </p:spPr>
+        <p:style>
+          <a:lnRef idx="1">
+            <a:schemeClr val="accent1"/>
+          </a:lnRef>
+          <a:fillRef idx="3">
+            <a:schemeClr val="accent1"/>
+          </a:fillRef>
+          <a:effectRef idx="2">
+            <a:schemeClr val="accent1"/>
+          </a:effectRef>
+          <a:fontRef idx="minor">
+            <a:schemeClr val="lt1"/>
+          </a:fontRef>
+        </p:style>
+        <p:txBody>
+          <a:bodyPr rtlCol="0" anchor="ctr"/>
+          <a:lstStyle/>
+          <a:p>
+            <a:pPr algn="ctr"/>
+          </a:p>
+        </p:txBody>
+      </p:sp>
+      <p:sp>
+        <p:nvSpPr>
+          <p:cNvPr id="26" name="Rectangle 25"/>
+          <p:cNvSpPr/>
+          <p:nvPr/>
+        </p:nvSpPr>
+        <p:spPr>
+          <a:xfrm>
+            <a:off x="6172200" y="3840480"/>
+            <a:ext cx="137160" cy="2286000"/>
+          </a:xfrm>
+          <a:prstGeom prst="rect">
+            <a:avLst/>
+          </a:prstGeom>
+          <a:solidFill>
+            <a:srgbClr val="CD853F"/>
+          </a:solidFill>
+          <a:ln>
+            <a:noFill/>
+          </a:ln>
+        </p:spPr>
+        <p:style>
+          <a:lnRef idx="1">
+            <a:schemeClr val="accent1"/>
+          </a:lnRef>
+          <a:fillRef idx="3">
+            <a:schemeClr val="accent1"/>
+          </a:fillRef>
+          <a:effectRef idx="2">
+            <a:schemeClr val="accent1"/>
+          </a:effectRef>
+          <a:fontRef idx="minor">
+            <a:schemeClr val="lt1"/>
+          </a:fontRef>
+        </p:style>
+        <p:txBody>
+          <a:bodyPr rtlCol="0" anchor="ctr"/>
+          <a:lstStyle/>
+          <a:p>
+            <a:pPr algn="ctr"/>
+          </a:p>
+        </p:txBody>
+      </p:sp>
+      <p:sp>
+        <p:nvSpPr>
+          <p:cNvPr id="27" name="TextBox 26"/>
+          <p:cNvSpPr txBox="1"/>
+          <p:nvPr/>
+        </p:nvSpPr>
+        <p:spPr>
+          <a:xfrm>
+            <a:off x="6492240" y="3977640"/>
+            <a:ext cx="3200400" cy="457200"/>
+          </a:xfrm>
+          <a:prstGeom prst="rect">
+            <a:avLst/>
+          </a:prstGeom>
+          <a:noFill/>
+        </p:spPr>
+        <p:txBody>
+          <a:bodyPr wrap="none">
+            <a:spAutoFit/>
+          </a:bodyPr>
+          <a:lstStyle/>
+          <a:p>
+            <a:pPr>
+              <a:defRPr sz="2000" b="1">
+                <a:solidFill>
+                  <a:srgbClr val="CD853F"/>
+                </a:solidFill>
+              </a:defRPr>
+            </a:pPr>
+            <a:r>
+              <a:t>🧭  Navigate AI Confidently</a:t>
+            </a:r>
+          </a:p>
+        </p:txBody>
+      </p:sp>
+      <p:sp>
+        <p:nvSpPr>
+          <p:cNvPr id="28" name="TextBox 27"/>
+          <p:cNvSpPr txBox="1"/>
+          <p:nvPr/>
+        </p:nvSpPr>
+        <p:spPr>
+          <a:xfrm>
+            <a:off x="6492240" y="4389120"/>
+            <a:ext cx="3200400" cy="365760"/>
+          </a:xfrm>
+          <a:prstGeom prst="rect">
+            <a:avLst/>
+          </a:prstGeom>
+          <a:noFill/>
+        </p:spPr>
+        <p:txBody>
+          <a:bodyPr wrap="none">
+            <a:spAutoFit/>
+          </a:bodyPr>
+          <a:lstStyle/>
+          <a:p>
+            <a:pPr>
+              <a:defRPr sz="1300" i="1">
+                <a:solidFill>
+                  <a:srgbClr val="64748B"/>
+                </a:solidFill>
+              </a:defRPr>
+            </a:pPr>
+            <a:r>
+              <a:t>Make smart choices in a fast-moving landscape</a:t>
+            </a:r>
+          </a:p>
+        </p:txBody>
+      </p:sp>
+      <p:sp>
+        <p:nvSpPr>
+          <p:cNvPr id="29" name="TextBox 28"/>
+          <p:cNvSpPr txBox="1"/>
+          <p:nvPr/>
+        </p:nvSpPr>
+        <p:spPr>
+          <a:xfrm>
+            <a:off x="6492240" y="4800600"/>
+            <a:ext cx="3200400" cy="1371600"/>
+          </a:xfrm>
+          <a:prstGeom prst="rect">
+            <a:avLst/>
+          </a:prstGeom>
+          <a:noFill/>
+        </p:spPr>
+        <p:txBody>
+          <a:bodyPr wrap="square">
+            <a:spAutoFit/>
+          </a:bodyPr>
+          <a:lstStyle/>
+          <a:p>
+            <a:pPr>
+              <a:spcAft>
+                <a:spcPts val="300"/>
+              </a:spcAft>
+              <a:defRPr sz="1200">
+                <a:solidFill>
+                  <a:srgbClr val="475569"/>
+                </a:solidFill>
+              </a:defRPr>
+            </a:pPr>
+            <a:r>
+              <a:t>• Guidance on using ChatGPT and similar tools safely</a:t>
+            </a:r>
+          </a:p>
+          <a:p>
+            <a:pPr>
+              <a:spcAft>
+                <a:spcPts val="300"/>
+              </a:spcAft>
+              <a:defRPr sz="1200">
+                <a:solidFill>
+                  <a:srgbClr val="475569"/>
+                </a:solidFill>
+              </a:defRPr>
+            </a:pPr>
+            <a:r>
+              <a:t>• Evaluate which AI products are actually worth it</a:t>
+            </a:r>
+          </a:p>
+          <a:p>
+            <a:pPr>
+              <a:spcAft>
+                <a:spcPts val="300"/>
+              </a:spcAft>
+              <a:defRPr sz="1200">
+                <a:solidFill>
+                  <a:srgbClr val="475569"/>
+                </a:solidFill>
+              </a:defRPr>
+            </a:pPr>
+            <a:r>
+              <a:t>• Stay ahead with university and industry connections</a:t>
+            </a:r>
+          </a:p>
+        </p:txBody>
+      </p:sp>
+      <p:sp>
+        <p:nvSpPr>
+          <p:cNvPr id="30" name="TextBox 29"/>
           <p:cNvSpPr txBox="1"/>
           <p:nvPr/>
         </p:nvSpPr>

--- a/Enterprise_Analytics_AI_Team.pptx
+++ b/Enterprise_Analytics_AI_Team.pptx
@@ -5612,21 +5612,56 @@
               </a:defRPr>
             </a:pPr>
             <a:r>
-              <a:t>What We Offer</a:t>
-            </a:r>
-          </a:p>
-        </p:txBody>
-      </p:sp>
-      <p:sp>
-        <p:nvSpPr>
-          <p:cNvPr id="5" name="Rounded Rectangle 4"/>
+              <a:t>What We Build</a:t>
+            </a:r>
+          </a:p>
+        </p:txBody>
+      </p:sp>
+      <p:sp>
+        <p:nvSpPr>
+          <p:cNvPr id="5" name="TextBox 4"/>
+          <p:cNvSpPr txBox="1"/>
+          <p:nvPr/>
+        </p:nvSpPr>
+        <p:spPr>
+          <a:xfrm>
+            <a:off x="731520" y="1325880"/>
+            <a:ext cx="10515600" cy="457200"/>
+          </a:xfrm>
+          <a:prstGeom prst="rect">
+            <a:avLst/>
+          </a:prstGeom>
+          <a:noFill/>
+        </p:spPr>
+        <p:txBody>
+          <a:bodyPr wrap="none">
+            <a:spAutoFit/>
+          </a:bodyPr>
+          <a:lstStyle/>
+          <a:p>
+            <a:pPr>
+              <a:defRPr sz="1600">
+                <a:solidFill>
+                  <a:srgbClr val="64748B"/>
+                </a:solidFill>
+              </a:defRPr>
+            </a:pPr>
+            <a:r>
+              <a:t>When you work with us, here's what you can expect to get</a:t>
+            </a:r>
+          </a:p>
+        </p:txBody>
+      </p:sp>
+      <p:sp>
+        <p:nvSpPr>
+          <p:cNvPr id="6" name="Rounded Rectangle 5"/>
           <p:cNvSpPr/>
           <p:nvPr/>
         </p:nvSpPr>
         <p:spPr>
           <a:xfrm>
-            <a:off x="457200" y="1371600"/>
-            <a:ext cx="3657600" cy="2286000"/>
+            <a:off x="411480" y="1828800"/>
+            <a:ext cx="2743200" cy="3657600"/>
           </a:xfrm>
           <a:prstGeom prst="roundRect">
             <a:avLst/>
@@ -5664,14 +5699,14 @@
       </p:sp>
       <p:sp>
         <p:nvSpPr>
-          <p:cNvPr id="6" name="Rectangle 5"/>
+          <p:cNvPr id="7" name="Rectangle 6"/>
           <p:cNvSpPr/>
           <p:nvPr/>
         </p:nvSpPr>
         <p:spPr>
           <a:xfrm>
-            <a:off x="457200" y="1371600"/>
-            <a:ext cx="137160" cy="2286000"/>
+            <a:off x="411480" y="1828800"/>
+            <a:ext cx="2743200" cy="109728"/>
           </a:xfrm>
           <a:prstGeom prst="rect">
             <a:avLst/>
@@ -5707,14 +5742,57 @@
       </p:sp>
       <p:sp>
         <p:nvSpPr>
-          <p:cNvPr id="7" name="TextBox 6"/>
+          <p:cNvPr id="8" name="Oval 7"/>
+          <p:cNvSpPr/>
+          <p:nvPr/>
+        </p:nvSpPr>
+        <p:spPr>
+          <a:xfrm>
+            <a:off x="1417320" y="2103120"/>
+            <a:ext cx="731520" cy="731520"/>
+          </a:xfrm>
+          <a:prstGeom prst="ellipse">
+            <a:avLst/>
+          </a:prstGeom>
+          <a:solidFill>
+            <a:srgbClr val="4682B4"/>
+          </a:solidFill>
+          <a:ln>
+            <a:noFill/>
+          </a:ln>
+        </p:spPr>
+        <p:style>
+          <a:lnRef idx="1">
+            <a:schemeClr val="accent1"/>
+          </a:lnRef>
+          <a:fillRef idx="3">
+            <a:schemeClr val="accent1"/>
+          </a:fillRef>
+          <a:effectRef idx="2">
+            <a:schemeClr val="accent1"/>
+          </a:effectRef>
+          <a:fontRef idx="minor">
+            <a:schemeClr val="lt1"/>
+          </a:fontRef>
+        </p:style>
+        <p:txBody>
+          <a:bodyPr rtlCol="0" anchor="ctr"/>
+          <a:lstStyle/>
+          <a:p>
+            <a:pPr algn="ctr"/>
+          </a:p>
+        </p:txBody>
+      </p:sp>
+      <p:sp>
+        <p:nvSpPr>
+          <p:cNvPr id="9" name="TextBox 8"/>
           <p:cNvSpPr txBox="1"/>
           <p:nvPr/>
         </p:nvSpPr>
         <p:spPr>
           <a:xfrm>
-            <a:off x="777240" y="1508760"/>
-            <a:ext cx="3200400" cy="457200"/>
+            <a:off x="1463040" y="2194560"/>
+            <a:ext cx="640080" cy="548640"/>
           </a:xfrm>
           <a:prstGeom prst="rect">
             <a:avLst/>
@@ -5727,29 +5805,25 @@
           </a:bodyPr>
           <a:lstStyle/>
           <a:p>
-            <a:pPr>
-              <a:defRPr sz="2000" b="1">
-                <a:solidFill>
-                  <a:srgbClr val="4682B4"/>
-                </a:solidFill>
-              </a:defRPr>
+            <a:pPr algn="ctr">
+              <a:defRPr sz="2800"/>
             </a:pPr>
             <a:r>
-              <a:t>👁️  See Your Data Clearly</a:t>
-            </a:r>
-          </a:p>
-        </p:txBody>
-      </p:sp>
-      <p:sp>
-        <p:nvSpPr>
-          <p:cNvPr id="8" name="TextBox 7"/>
+              <a:t>👁️</a:t>
+            </a:r>
+          </a:p>
+        </p:txBody>
+      </p:sp>
+      <p:sp>
+        <p:nvSpPr>
+          <p:cNvPr id="10" name="TextBox 9"/>
           <p:cNvSpPr txBox="1"/>
           <p:nvPr/>
         </p:nvSpPr>
         <p:spPr>
           <a:xfrm>
-            <a:off x="777240" y="1920240"/>
-            <a:ext cx="3200400" cy="365760"/>
+            <a:off x="502920" y="2926080"/>
+            <a:ext cx="2560320" cy="457200"/>
           </a:xfrm>
           <a:prstGeom prst="rect">
             <a:avLst/>
@@ -5762,29 +5836,64 @@
           </a:bodyPr>
           <a:lstStyle/>
           <a:p>
-            <a:pPr>
-              <a:defRPr sz="1300" i="1">
+            <a:pPr algn="ctr">
+              <a:defRPr sz="1800" b="1">
+                <a:solidFill>
+                  <a:srgbClr val="4682B4"/>
+                </a:solidFill>
+              </a:defRPr>
+            </a:pPr>
+            <a:r>
+              <a:t>Visibility</a:t>
+            </a:r>
+          </a:p>
+        </p:txBody>
+      </p:sp>
+      <p:sp>
+        <p:nvSpPr>
+          <p:cNvPr id="11" name="TextBox 10"/>
+          <p:cNvSpPr txBox="1"/>
+          <p:nvPr/>
+        </p:nvSpPr>
+        <p:spPr>
+          <a:xfrm>
+            <a:off x="502920" y="3337560"/>
+            <a:ext cx="2560320" cy="365760"/>
+          </a:xfrm>
+          <a:prstGeom prst="rect">
+            <a:avLst/>
+          </a:prstGeom>
+          <a:noFill/>
+        </p:spPr>
+        <p:txBody>
+          <a:bodyPr wrap="none">
+            <a:spAutoFit/>
+          </a:bodyPr>
+          <a:lstStyle/>
+          <a:p>
+            <a:pPr algn="ctr">
+              <a:defRPr sz="1200" i="1">
                 <a:solidFill>
                   <a:srgbClr val="64748B"/>
                 </a:solidFill>
               </a:defRPr>
             </a:pPr>
             <a:r>
-              <a:t>From scattered spreadsheets to a single source of truth</a:t>
-            </a:r>
-          </a:p>
-        </p:txBody>
-      </p:sp>
-      <p:sp>
-        <p:nvSpPr>
-          <p:cNvPr id="9" name="TextBox 8"/>
+              <a:t>See your data clearly</a:t>
+            </a:r>
+          </a:p>
+        </p:txBody>
+      </p:sp>
+      <p:sp>
+        <p:nvSpPr>
+          <p:cNvPr id="12" name="TextBox 11"/>
           <p:cNvSpPr txBox="1"/>
           <p:nvPr/>
         </p:nvSpPr>
         <p:spPr>
           <a:xfrm>
-            <a:off x="777240" y="2331720"/>
-            <a:ext cx="3200400" cy="1371600"/>
+            <a:off x="548640" y="3749040"/>
+            <a:ext cx="2468880" cy="1554480"/>
           </a:xfrm>
           <a:prstGeom prst="rect">
             <a:avLst/>
@@ -5799,24 +5908,24 @@
           <a:p>
             <a:pPr>
               <a:spcAft>
-                <a:spcPts val="300"/>
+                <a:spcPts val="400"/>
               </a:spcAft>
-              <a:defRPr sz="1200">
+              <a:defRPr sz="1100">
                 <a:solidFill>
                   <a:srgbClr val="475569"/>
                 </a:solidFill>
               </a:defRPr>
             </a:pPr>
             <a:r>
-              <a:t>• Dashboards that show project status at a glance</a:t>
+              <a:t>• Dashboards showing status at a glance</a:t>
             </a:r>
           </a:p>
           <a:p>
             <a:pPr>
               <a:spcAft>
-                <a:spcPts val="300"/>
+                <a:spcPts val="400"/>
               </a:spcAft>
-              <a:defRPr sz="1200">
+              <a:defRPr sz="1100">
                 <a:solidFill>
                   <a:srgbClr val="475569"/>
                 </a:solidFill>
@@ -5829,30 +5938,73 @@
           <a:p>
             <a:pPr>
               <a:spcAft>
-                <a:spcPts val="300"/>
+                <a:spcPts val="400"/>
               </a:spcAft>
-              <a:defRPr sz="1200">
+              <a:defRPr sz="1100">
                 <a:solidFill>
                   <a:srgbClr val="475569"/>
                 </a:solidFill>
               </a:defRPr>
             </a:pPr>
             <a:r>
-              <a:t>• One place to see what's happening across teams</a:t>
-            </a:r>
-          </a:p>
-        </p:txBody>
-      </p:sp>
-      <p:sp>
-        <p:nvSpPr>
-          <p:cNvPr id="10" name="Rounded Rectangle 9"/>
+              <a:t>• One place to see across teams</a:t>
+            </a:r>
+          </a:p>
+        </p:txBody>
+      </p:sp>
+      <p:sp>
+        <p:nvSpPr>
+          <p:cNvPr id="13" name="Right Arrow 12"/>
           <p:cNvSpPr/>
           <p:nvPr/>
         </p:nvSpPr>
         <p:spPr>
           <a:xfrm>
-            <a:off x="4297680" y="1371600"/>
-            <a:ext cx="3657600" cy="2286000"/>
+            <a:off x="3182112" y="2331720"/>
+            <a:ext cx="128016" cy="201168"/>
+          </a:xfrm>
+          <a:prstGeom prst="rightArrow">
+            <a:avLst/>
+          </a:prstGeom>
+          <a:solidFill>
+            <a:srgbClr val="C8D2DC"/>
+          </a:solidFill>
+          <a:ln>
+            <a:noFill/>
+          </a:ln>
+        </p:spPr>
+        <p:style>
+          <a:lnRef idx="1">
+            <a:schemeClr val="accent1"/>
+          </a:lnRef>
+          <a:fillRef idx="3">
+            <a:schemeClr val="accent1"/>
+          </a:fillRef>
+          <a:effectRef idx="2">
+            <a:schemeClr val="accent1"/>
+          </a:effectRef>
+          <a:fontRef idx="minor">
+            <a:schemeClr val="lt1"/>
+          </a:fontRef>
+        </p:style>
+        <p:txBody>
+          <a:bodyPr rtlCol="0" anchor="ctr"/>
+          <a:lstStyle/>
+          <a:p>
+            <a:pPr algn="ctr"/>
+          </a:p>
+        </p:txBody>
+      </p:sp>
+      <p:sp>
+        <p:nvSpPr>
+          <p:cNvPr id="14" name="Rounded Rectangle 13"/>
+          <p:cNvSpPr/>
+          <p:nvPr/>
+        </p:nvSpPr>
+        <p:spPr>
+          <a:xfrm>
+            <a:off x="3337560" y="1828800"/>
+            <a:ext cx="2743200" cy="3657600"/>
           </a:xfrm>
           <a:prstGeom prst="roundRect">
             <a:avLst/>
@@ -5890,14 +6042,14 @@
       </p:sp>
       <p:sp>
         <p:nvSpPr>
-          <p:cNvPr id="11" name="Rectangle 10"/>
+          <p:cNvPr id="15" name="Rectangle 14"/>
           <p:cNvSpPr/>
           <p:nvPr/>
         </p:nvSpPr>
         <p:spPr>
           <a:xfrm>
-            <a:off x="4297680" y="1371600"/>
-            <a:ext cx="137160" cy="2286000"/>
+            <a:off x="3337560" y="1828800"/>
+            <a:ext cx="2743200" cy="109728"/>
           </a:xfrm>
           <a:prstGeom prst="rect">
             <a:avLst/>
@@ -5933,14 +6085,57 @@
       </p:sp>
       <p:sp>
         <p:nvSpPr>
-          <p:cNvPr id="12" name="TextBox 11"/>
+          <p:cNvPr id="16" name="Oval 15"/>
+          <p:cNvSpPr/>
+          <p:nvPr/>
+        </p:nvSpPr>
+        <p:spPr>
+          <a:xfrm>
+            <a:off x="4343400" y="2103120"/>
+            <a:ext cx="731520" cy="731520"/>
+          </a:xfrm>
+          <a:prstGeom prst="ellipse">
+            <a:avLst/>
+          </a:prstGeom>
+          <a:solidFill>
+            <a:srgbClr val="008080"/>
+          </a:solidFill>
+          <a:ln>
+            <a:noFill/>
+          </a:ln>
+        </p:spPr>
+        <p:style>
+          <a:lnRef idx="1">
+            <a:schemeClr val="accent1"/>
+          </a:lnRef>
+          <a:fillRef idx="3">
+            <a:schemeClr val="accent1"/>
+          </a:fillRef>
+          <a:effectRef idx="2">
+            <a:schemeClr val="accent1"/>
+          </a:effectRef>
+          <a:fontRef idx="minor">
+            <a:schemeClr val="lt1"/>
+          </a:fontRef>
+        </p:style>
+        <p:txBody>
+          <a:bodyPr rtlCol="0" anchor="ctr"/>
+          <a:lstStyle/>
+          <a:p>
+            <a:pPr algn="ctr"/>
+          </a:p>
+        </p:txBody>
+      </p:sp>
+      <p:sp>
+        <p:nvSpPr>
+          <p:cNvPr id="17" name="TextBox 16"/>
           <p:cNvSpPr txBox="1"/>
           <p:nvPr/>
         </p:nvSpPr>
         <p:spPr>
           <a:xfrm>
-            <a:off x="4617720" y="1508760"/>
-            <a:ext cx="3200400" cy="457200"/>
+            <a:off x="4389120" y="2194560"/>
+            <a:ext cx="640080" cy="548640"/>
           </a:xfrm>
           <a:prstGeom prst="rect">
             <a:avLst/>
@@ -5953,29 +6148,25 @@
           </a:bodyPr>
           <a:lstStyle/>
           <a:p>
-            <a:pPr>
-              <a:defRPr sz="2000" b="1">
-                <a:solidFill>
-                  <a:srgbClr val="008080"/>
-                </a:solidFill>
-              </a:defRPr>
+            <a:pPr algn="ctr">
+              <a:defRPr sz="2800"/>
             </a:pPr>
             <a:r>
-              <a:t>🔍  Understand What's Happening</a:t>
-            </a:r>
-          </a:p>
-        </p:txBody>
-      </p:sp>
-      <p:sp>
-        <p:nvSpPr>
-          <p:cNvPr id="13" name="TextBox 12"/>
+              <a:t>🔍</a:t>
+            </a:r>
+          </a:p>
+        </p:txBody>
+      </p:sp>
+      <p:sp>
+        <p:nvSpPr>
+          <p:cNvPr id="18" name="TextBox 17"/>
           <p:cNvSpPr txBox="1"/>
           <p:nvPr/>
         </p:nvSpPr>
         <p:spPr>
           <a:xfrm>
-            <a:off x="4617720" y="1920240"/>
-            <a:ext cx="3200400" cy="365760"/>
+            <a:off x="3429000" y="2926080"/>
+            <a:ext cx="2560320" cy="457200"/>
           </a:xfrm>
           <a:prstGeom prst="rect">
             <a:avLst/>
@@ -5988,29 +6179,64 @@
           </a:bodyPr>
           <a:lstStyle/>
           <a:p>
-            <a:pPr>
-              <a:defRPr sz="1300" i="1">
+            <a:pPr algn="ctr">
+              <a:defRPr sz="1800" b="1">
+                <a:solidFill>
+                  <a:srgbClr val="008080"/>
+                </a:solidFill>
+              </a:defRPr>
+            </a:pPr>
+            <a:r>
+              <a:t>Understanding</a:t>
+            </a:r>
+          </a:p>
+        </p:txBody>
+      </p:sp>
+      <p:sp>
+        <p:nvSpPr>
+          <p:cNvPr id="19" name="TextBox 18"/>
+          <p:cNvSpPr txBox="1"/>
+          <p:nvPr/>
+        </p:nvSpPr>
+        <p:spPr>
+          <a:xfrm>
+            <a:off x="3429000" y="3337560"/>
+            <a:ext cx="2560320" cy="365760"/>
+          </a:xfrm>
+          <a:prstGeom prst="rect">
+            <a:avLst/>
+          </a:prstGeom>
+          <a:noFill/>
+        </p:spPr>
+        <p:txBody>
+          <a:bodyPr wrap="none">
+            <a:spAutoFit/>
+          </a:bodyPr>
+          <a:lstStyle/>
+          <a:p>
+            <a:pPr algn="ctr">
+              <a:defRPr sz="1200" i="1">
                 <a:solidFill>
                   <a:srgbClr val="64748B"/>
                 </a:solidFill>
               </a:defRPr>
             </a:pPr>
             <a:r>
-              <a:t>Turn raw data into answers</a:t>
-            </a:r>
-          </a:p>
-        </p:txBody>
-      </p:sp>
-      <p:sp>
-        <p:nvSpPr>
-          <p:cNvPr id="14" name="TextBox 13"/>
+              <a:t>Know what's really happening</a:t>
+            </a:r>
+          </a:p>
+        </p:txBody>
+      </p:sp>
+      <p:sp>
+        <p:nvSpPr>
+          <p:cNvPr id="20" name="TextBox 19"/>
           <p:cNvSpPr txBox="1"/>
           <p:nvPr/>
         </p:nvSpPr>
         <p:spPr>
           <a:xfrm>
-            <a:off x="4617720" y="2331720"/>
-            <a:ext cx="3200400" cy="1371600"/>
+            <a:off x="3474720" y="3749040"/>
+            <a:ext cx="2468880" cy="1554480"/>
           </a:xfrm>
           <a:prstGeom prst="rect">
             <a:avLst/>
@@ -6025,24 +6251,24 @@
           <a:p>
             <a:pPr>
               <a:spcAft>
-                <a:spcPts val="300"/>
+                <a:spcPts val="400"/>
               </a:spcAft>
-              <a:defRPr sz="1200">
+              <a:defRPr sz="1100">
                 <a:solidFill>
                   <a:srgbClr val="475569"/>
                 </a:solidFill>
               </a:defRPr>
             </a:pPr>
             <a:r>
-              <a:t>• Spot trends and patterns you'd otherwise miss</a:t>
+              <a:t>• Spot trends you'd otherwise miss</a:t>
             </a:r>
           </a:p>
           <a:p>
             <a:pPr>
               <a:spcAft>
-                <a:spcPts val="300"/>
+                <a:spcPts val="400"/>
               </a:spcAft>
-              <a:defRPr sz="1200">
+              <a:defRPr sz="1100">
                 <a:solidFill>
                   <a:srgbClr val="475569"/>
                 </a:solidFill>
@@ -6055,30 +6281,73 @@
           <a:p>
             <a:pPr>
               <a:spcAft>
-                <a:spcPts val="300"/>
+                <a:spcPts val="400"/>
               </a:spcAft>
-              <a:defRPr sz="1200">
+              <a:defRPr sz="1100">
                 <a:solidFill>
                   <a:srgbClr val="475569"/>
                 </a:solidFill>
               </a:defRPr>
             </a:pPr>
             <a:r>
-              <a:t>• Deep-dive analysis when you need to dig in</a:t>
-            </a:r>
-          </a:p>
-        </p:txBody>
-      </p:sp>
-      <p:sp>
-        <p:nvSpPr>
-          <p:cNvPr id="15" name="Rounded Rectangle 14"/>
+              <a:t>• Analysis that answers your questions</a:t>
+            </a:r>
+          </a:p>
+        </p:txBody>
+      </p:sp>
+      <p:sp>
+        <p:nvSpPr>
+          <p:cNvPr id="21" name="Right Arrow 20"/>
           <p:cNvSpPr/>
           <p:nvPr/>
         </p:nvSpPr>
         <p:spPr>
           <a:xfrm>
-            <a:off x="8138160" y="1371600"/>
-            <a:ext cx="3657600" cy="2286000"/>
+            <a:off x="6108192" y="2331720"/>
+            <a:ext cx="128016" cy="201168"/>
+          </a:xfrm>
+          <a:prstGeom prst="rightArrow">
+            <a:avLst/>
+          </a:prstGeom>
+          <a:solidFill>
+            <a:srgbClr val="C8D2DC"/>
+          </a:solidFill>
+          <a:ln>
+            <a:noFill/>
+          </a:ln>
+        </p:spPr>
+        <p:style>
+          <a:lnRef idx="1">
+            <a:schemeClr val="accent1"/>
+          </a:lnRef>
+          <a:fillRef idx="3">
+            <a:schemeClr val="accent1"/>
+          </a:fillRef>
+          <a:effectRef idx="2">
+            <a:schemeClr val="accent1"/>
+          </a:effectRef>
+          <a:fontRef idx="minor">
+            <a:schemeClr val="lt1"/>
+          </a:fontRef>
+        </p:style>
+        <p:txBody>
+          <a:bodyPr rtlCol="0" anchor="ctr"/>
+          <a:lstStyle/>
+          <a:p>
+            <a:pPr algn="ctr"/>
+          </a:p>
+        </p:txBody>
+      </p:sp>
+      <p:sp>
+        <p:nvSpPr>
+          <p:cNvPr id="22" name="Rounded Rectangle 21"/>
+          <p:cNvSpPr/>
+          <p:nvPr/>
+        </p:nvSpPr>
+        <p:spPr>
+          <a:xfrm>
+            <a:off x="6263640" y="1828800"/>
+            <a:ext cx="2743200" cy="3657600"/>
           </a:xfrm>
           <a:prstGeom prst="roundRect">
             <a:avLst/>
@@ -6116,14 +6385,14 @@
       </p:sp>
       <p:sp>
         <p:nvSpPr>
-          <p:cNvPr id="16" name="Rectangle 15"/>
+          <p:cNvPr id="23" name="Rectangle 22"/>
           <p:cNvSpPr/>
           <p:nvPr/>
         </p:nvSpPr>
         <p:spPr>
           <a:xfrm>
-            <a:off x="8138160" y="1371600"/>
-            <a:ext cx="137160" cy="2286000"/>
+            <a:off x="6263640" y="1828800"/>
+            <a:ext cx="2743200" cy="109728"/>
           </a:xfrm>
           <a:prstGeom prst="rect">
             <a:avLst/>
@@ -6159,14 +6428,57 @@
       </p:sp>
       <p:sp>
         <p:nvSpPr>
-          <p:cNvPr id="17" name="TextBox 16"/>
+          <p:cNvPr id="24" name="Oval 23"/>
+          <p:cNvSpPr/>
+          <p:nvPr/>
+        </p:nvSpPr>
+        <p:spPr>
+          <a:xfrm>
+            <a:off x="7269480" y="2103120"/>
+            <a:ext cx="731520" cy="731520"/>
+          </a:xfrm>
+          <a:prstGeom prst="ellipse">
+            <a:avLst/>
+          </a:prstGeom>
+          <a:solidFill>
+            <a:srgbClr val="558B6E"/>
+          </a:solidFill>
+          <a:ln>
+            <a:noFill/>
+          </a:ln>
+        </p:spPr>
+        <p:style>
+          <a:lnRef idx="1">
+            <a:schemeClr val="accent1"/>
+          </a:lnRef>
+          <a:fillRef idx="3">
+            <a:schemeClr val="accent1"/>
+          </a:fillRef>
+          <a:effectRef idx="2">
+            <a:schemeClr val="accent1"/>
+          </a:effectRef>
+          <a:fontRef idx="minor">
+            <a:schemeClr val="lt1"/>
+          </a:fontRef>
+        </p:style>
+        <p:txBody>
+          <a:bodyPr rtlCol="0" anchor="ctr"/>
+          <a:lstStyle/>
+          <a:p>
+            <a:pPr algn="ctr"/>
+          </a:p>
+        </p:txBody>
+      </p:sp>
+      <p:sp>
+        <p:nvSpPr>
+          <p:cNvPr id="25" name="TextBox 24"/>
           <p:cNvSpPr txBox="1"/>
           <p:nvPr/>
         </p:nvSpPr>
         <p:spPr>
           <a:xfrm>
-            <a:off x="8458200" y="1508760"/>
-            <a:ext cx="3200400" cy="457200"/>
+            <a:off x="7315200" y="2194560"/>
+            <a:ext cx="640080" cy="548640"/>
           </a:xfrm>
           <a:prstGeom prst="rect">
             <a:avLst/>
@@ -6179,29 +6491,25 @@
           </a:bodyPr>
           <a:lstStyle/>
           <a:p>
-            <a:pPr>
-              <a:defRPr sz="2000" b="1">
-                <a:solidFill>
-                  <a:srgbClr val="558B6E"/>
-                </a:solidFill>
-              </a:defRPr>
+            <a:pPr algn="ctr">
+              <a:defRPr sz="2800"/>
             </a:pPr>
             <a:r>
-              <a:t>🔮  Predict What's Coming</a:t>
-            </a:r>
-          </a:p>
-        </p:txBody>
-      </p:sp>
-      <p:sp>
-        <p:nvSpPr>
-          <p:cNvPr id="18" name="TextBox 17"/>
+              <a:t>🔮</a:t>
+            </a:r>
+          </a:p>
+        </p:txBody>
+      </p:sp>
+      <p:sp>
+        <p:nvSpPr>
+          <p:cNvPr id="26" name="TextBox 25"/>
           <p:cNvSpPr txBox="1"/>
           <p:nvPr/>
         </p:nvSpPr>
         <p:spPr>
           <a:xfrm>
-            <a:off x="8458200" y="1920240"/>
-            <a:ext cx="3200400" cy="365760"/>
+            <a:off x="6355080" y="2926080"/>
+            <a:ext cx="2560320" cy="457200"/>
           </a:xfrm>
           <a:prstGeom prst="rect">
             <a:avLst/>
@@ -6214,29 +6522,64 @@
           </a:bodyPr>
           <a:lstStyle/>
           <a:p>
-            <a:pPr>
-              <a:defRPr sz="1300" i="1">
+            <a:pPr algn="ctr">
+              <a:defRPr sz="1800" b="1">
+                <a:solidFill>
+                  <a:srgbClr val="558B6E"/>
+                </a:solidFill>
+              </a:defRPr>
+            </a:pPr>
+            <a:r>
+              <a:t>Foresight</a:t>
+            </a:r>
+          </a:p>
+        </p:txBody>
+      </p:sp>
+      <p:sp>
+        <p:nvSpPr>
+          <p:cNvPr id="27" name="TextBox 26"/>
+          <p:cNvSpPr txBox="1"/>
+          <p:nvPr/>
+        </p:nvSpPr>
+        <p:spPr>
+          <a:xfrm>
+            <a:off x="6355080" y="3337560"/>
+            <a:ext cx="2560320" cy="365760"/>
+          </a:xfrm>
+          <a:prstGeom prst="rect">
+            <a:avLst/>
+          </a:prstGeom>
+          <a:noFill/>
+        </p:spPr>
+        <p:txBody>
+          <a:bodyPr wrap="none">
+            <a:spAutoFit/>
+          </a:bodyPr>
+          <a:lstStyle/>
+          <a:p>
+            <a:pPr algn="ctr">
+              <a:defRPr sz="1200" i="1">
                 <a:solidFill>
                   <a:srgbClr val="64748B"/>
                 </a:solidFill>
               </a:defRPr>
             </a:pPr>
             <a:r>
-              <a:t>See around corners before problems arrive</a:t>
-            </a:r>
-          </a:p>
-        </p:txBody>
-      </p:sp>
-      <p:sp>
-        <p:nvSpPr>
-          <p:cNvPr id="19" name="TextBox 18"/>
+              <a:t>See what's coming</a:t>
+            </a:r>
+          </a:p>
+        </p:txBody>
+      </p:sp>
+      <p:sp>
+        <p:nvSpPr>
+          <p:cNvPr id="28" name="TextBox 27"/>
           <p:cNvSpPr txBox="1"/>
           <p:nvPr/>
         </p:nvSpPr>
         <p:spPr>
           <a:xfrm>
-            <a:off x="8458200" y="2331720"/>
-            <a:ext cx="3200400" cy="1371600"/>
+            <a:off x="6400800" y="3749040"/>
+            <a:ext cx="2468880" cy="1554480"/>
           </a:xfrm>
           <a:prstGeom prst="rect">
             <a:avLst/>
@@ -6251,39 +6594,39 @@
           <a:p>
             <a:pPr>
               <a:spcAft>
-                <a:spcPts val="300"/>
+                <a:spcPts val="400"/>
               </a:spcAft>
-              <a:defRPr sz="1200">
+              <a:defRPr sz="1100">
                 <a:solidFill>
                   <a:srgbClr val="475569"/>
                 </a:solidFill>
               </a:defRPr>
             </a:pPr>
             <a:r>
-              <a:t>• Forecast timelines (like permit approvals)</a:t>
+              <a:t>• Forecast timelines and outcomes</a:t>
             </a:r>
           </a:p>
           <a:p>
             <a:pPr>
               <a:spcAft>
-                <a:spcPts val="300"/>
+                <a:spcPts val="400"/>
               </a:spcAft>
-              <a:defRPr sz="1200">
+              <a:defRPr sz="1100">
                 <a:solidFill>
                   <a:srgbClr val="475569"/>
                 </a:solidFill>
               </a:defRPr>
             </a:pPr>
             <a:r>
-              <a:t>• Flag risks early so you can act</a:t>
+              <a:t>• Flag risks before they become problems</a:t>
             </a:r>
           </a:p>
           <a:p>
             <a:pPr>
               <a:spcAft>
-                <a:spcPts val="300"/>
+                <a:spcPts val="400"/>
               </a:spcAft>
-              <a:defRPr sz="1200">
+              <a:defRPr sz="1100">
                 <a:solidFill>
                   <a:srgbClr val="475569"/>
                 </a:solidFill>
@@ -6297,14 +6640,57 @@
       </p:sp>
       <p:sp>
         <p:nvSpPr>
-          <p:cNvPr id="20" name="Rounded Rectangle 19"/>
+          <p:cNvPr id="29" name="Right Arrow 28"/>
           <p:cNvSpPr/>
           <p:nvPr/>
         </p:nvSpPr>
         <p:spPr>
           <a:xfrm>
-            <a:off x="2331720" y="3840480"/>
-            <a:ext cx="3657600" cy="2286000"/>
+            <a:off x="9034272" y="2331720"/>
+            <a:ext cx="128016" cy="201168"/>
+          </a:xfrm>
+          <a:prstGeom prst="rightArrow">
+            <a:avLst/>
+          </a:prstGeom>
+          <a:solidFill>
+            <a:srgbClr val="C8D2DC"/>
+          </a:solidFill>
+          <a:ln>
+            <a:noFill/>
+          </a:ln>
+        </p:spPr>
+        <p:style>
+          <a:lnRef idx="1">
+            <a:schemeClr val="accent1"/>
+          </a:lnRef>
+          <a:fillRef idx="3">
+            <a:schemeClr val="accent1"/>
+          </a:fillRef>
+          <a:effectRef idx="2">
+            <a:schemeClr val="accent1"/>
+          </a:effectRef>
+          <a:fontRef idx="minor">
+            <a:schemeClr val="lt1"/>
+          </a:fontRef>
+        </p:style>
+        <p:txBody>
+          <a:bodyPr rtlCol="0" anchor="ctr"/>
+          <a:lstStyle/>
+          <a:p>
+            <a:pPr algn="ctr"/>
+          </a:p>
+        </p:txBody>
+      </p:sp>
+      <p:sp>
+        <p:nvSpPr>
+          <p:cNvPr id="30" name="Rounded Rectangle 29"/>
+          <p:cNvSpPr/>
+          <p:nvPr/>
+        </p:nvSpPr>
+        <p:spPr>
+          <a:xfrm>
+            <a:off x="9189720" y="1828800"/>
+            <a:ext cx="2743200" cy="3657600"/>
           </a:xfrm>
           <a:prstGeom prst="roundRect">
             <a:avLst/>
@@ -6342,14 +6728,14 @@
       </p:sp>
       <p:sp>
         <p:nvSpPr>
-          <p:cNvPr id="21" name="Rectangle 20"/>
+          <p:cNvPr id="31" name="Rectangle 30"/>
           <p:cNvSpPr/>
           <p:nvPr/>
         </p:nvSpPr>
         <p:spPr>
           <a:xfrm>
-            <a:off x="2331720" y="3840480"/>
-            <a:ext cx="137160" cy="2286000"/>
+            <a:off x="9189720" y="1828800"/>
+            <a:ext cx="2743200" cy="109728"/>
           </a:xfrm>
           <a:prstGeom prst="rect">
             <a:avLst/>
@@ -6385,178 +6771,23 @@
       </p:sp>
       <p:sp>
         <p:nvSpPr>
-          <p:cNvPr id="22" name="TextBox 21"/>
-          <p:cNvSpPr txBox="1"/>
-          <p:nvPr/>
-        </p:nvSpPr>
-        <p:spPr>
-          <a:xfrm>
-            <a:off x="2651760" y="3977640"/>
-            <a:ext cx="3200400" cy="457200"/>
-          </a:xfrm>
-          <a:prstGeom prst="rect">
-            <a:avLst/>
-          </a:prstGeom>
-          <a:noFill/>
-        </p:spPr>
-        <p:txBody>
-          <a:bodyPr wrap="none">
-            <a:spAutoFit/>
-          </a:bodyPr>
-          <a:lstStyle/>
-          <a:p>
-            <a:pPr>
-              <a:defRPr sz="2000" b="1">
-                <a:solidFill>
-                  <a:srgbClr val="9370A5"/>
-                </a:solidFill>
-              </a:defRPr>
-            </a:pPr>
-            <a:r>
-              <a:t>🤖  Work Smarter with AI</a:t>
-            </a:r>
-          </a:p>
-        </p:txBody>
-      </p:sp>
-      <p:sp>
-        <p:nvSpPr>
-          <p:cNvPr id="23" name="TextBox 22"/>
-          <p:cNvSpPr txBox="1"/>
-          <p:nvPr/>
-        </p:nvSpPr>
-        <p:spPr>
-          <a:xfrm>
-            <a:off x="2651760" y="4389120"/>
-            <a:ext cx="3200400" cy="365760"/>
-          </a:xfrm>
-          <a:prstGeom prst="rect">
-            <a:avLst/>
-          </a:prstGeom>
-          <a:noFill/>
-        </p:spPr>
-        <p:txBody>
-          <a:bodyPr wrap="none">
-            <a:spAutoFit/>
-          </a:bodyPr>
-          <a:lstStyle/>
-          <a:p>
-            <a:pPr>
-              <a:defRPr sz="1300" i="1">
-                <a:solidFill>
-                  <a:srgbClr val="64748B"/>
-                </a:solidFill>
-              </a:defRPr>
-            </a:pPr>
-            <a:r>
-              <a:t>Intelligent tools that multiply your capacity</a:t>
-            </a:r>
-          </a:p>
-        </p:txBody>
-      </p:sp>
-      <p:sp>
-        <p:nvSpPr>
-          <p:cNvPr id="24" name="TextBox 23"/>
-          <p:cNvSpPr txBox="1"/>
-          <p:nvPr/>
-        </p:nvSpPr>
-        <p:spPr>
-          <a:xfrm>
-            <a:off x="2651760" y="4800600"/>
-            <a:ext cx="3200400" cy="1371600"/>
-          </a:xfrm>
-          <a:prstGeom prst="rect">
-            <a:avLst/>
-          </a:prstGeom>
-          <a:noFill/>
-        </p:spPr>
-        <p:txBody>
-          <a:bodyPr wrap="square">
-            <a:spAutoFit/>
-          </a:bodyPr>
-          <a:lstStyle/>
-          <a:p>
-            <a:pPr>
-              <a:spcAft>
-                <a:spcPts val="300"/>
-              </a:spcAft>
-              <a:defRPr sz="1200">
-                <a:solidFill>
-                  <a:srgbClr val="475569"/>
-                </a:solidFill>
-              </a:defRPr>
-            </a:pPr>
-            <a:r>
-              <a:t>• Generate reports and documents automatically</a:t>
-            </a:r>
-          </a:p>
-          <a:p>
-            <a:pPr>
-              <a:spcAft>
-                <a:spcPts val="300"/>
-              </a:spcAft>
-              <a:defRPr sz="1200">
-                <a:solidFill>
-                  <a:srgbClr val="475569"/>
-                </a:solidFill>
-              </a:defRPr>
-            </a:pPr>
-            <a:r>
-              <a:t>• Ask questions and get instant answers from your data</a:t>
-            </a:r>
-          </a:p>
-          <a:p>
-            <a:pPr>
-              <a:spcAft>
-                <a:spcPts val="300"/>
-              </a:spcAft>
-              <a:defRPr sz="1200">
-                <a:solidFill>
-                  <a:srgbClr val="475569"/>
-                </a:solidFill>
-              </a:defRPr>
-            </a:pPr>
-            <a:r>
-              <a:t>• Automate routine tasks so you can focus on judgment calls</a:t>
-            </a:r>
-          </a:p>
-          <a:p>
-            <a:pPr>
-              <a:spcAft>
-                <a:spcPts val="300"/>
-              </a:spcAft>
-              <a:defRPr sz="1200">
-                <a:solidFill>
-                  <a:srgbClr val="475569"/>
-                </a:solidFill>
-              </a:defRPr>
-            </a:pPr>
-            <a:r>
-              <a:t>• Get smart alerts when something needs your attention</a:t>
-            </a:r>
-          </a:p>
-        </p:txBody>
-      </p:sp>
-      <p:sp>
-        <p:nvSpPr>
-          <p:cNvPr id="25" name="Rounded Rectangle 24"/>
+          <p:cNvPr id="32" name="Oval 31"/>
           <p:cNvSpPr/>
           <p:nvPr/>
         </p:nvSpPr>
         <p:spPr>
           <a:xfrm>
-            <a:off x="6172200" y="3840480"/>
-            <a:ext cx="3657600" cy="2286000"/>
-          </a:xfrm>
-          <a:prstGeom prst="roundRect">
+            <a:off x="10195560" y="2103120"/>
+            <a:ext cx="731520" cy="731520"/>
+          </a:xfrm>
+          <a:prstGeom prst="ellipse">
             <a:avLst/>
           </a:prstGeom>
           <a:solidFill>
-            <a:srgbClr val="FFFFFF"/>
+            <a:srgbClr val="9370A5"/>
           </a:solidFill>
-          <a:ln w="25400">
-            <a:solidFill>
-              <a:srgbClr val="CD853F"/>
-            </a:solidFill>
+          <a:ln>
+            <a:noFill/>
           </a:ln>
         </p:spPr>
         <p:style>
@@ -6583,57 +6814,14 @@
       </p:sp>
       <p:sp>
         <p:nvSpPr>
-          <p:cNvPr id="26" name="Rectangle 25"/>
-          <p:cNvSpPr/>
-          <p:nvPr/>
-        </p:nvSpPr>
-        <p:spPr>
-          <a:xfrm>
-            <a:off x="6172200" y="3840480"/>
-            <a:ext cx="137160" cy="2286000"/>
-          </a:xfrm>
-          <a:prstGeom prst="rect">
-            <a:avLst/>
-          </a:prstGeom>
-          <a:solidFill>
-            <a:srgbClr val="CD853F"/>
-          </a:solidFill>
-          <a:ln>
-            <a:noFill/>
-          </a:ln>
-        </p:spPr>
-        <p:style>
-          <a:lnRef idx="1">
-            <a:schemeClr val="accent1"/>
-          </a:lnRef>
-          <a:fillRef idx="3">
-            <a:schemeClr val="accent1"/>
-          </a:fillRef>
-          <a:effectRef idx="2">
-            <a:schemeClr val="accent1"/>
-          </a:effectRef>
-          <a:fontRef idx="minor">
-            <a:schemeClr val="lt1"/>
-          </a:fontRef>
-        </p:style>
-        <p:txBody>
-          <a:bodyPr rtlCol="0" anchor="ctr"/>
-          <a:lstStyle/>
-          <a:p>
-            <a:pPr algn="ctr"/>
-          </a:p>
-        </p:txBody>
-      </p:sp>
-      <p:sp>
-        <p:nvSpPr>
-          <p:cNvPr id="27" name="TextBox 26"/>
+          <p:cNvPr id="33" name="TextBox 32"/>
           <p:cNvSpPr txBox="1"/>
           <p:nvPr/>
         </p:nvSpPr>
         <p:spPr>
           <a:xfrm>
-            <a:off x="6492240" y="3977640"/>
-            <a:ext cx="3200400" cy="457200"/>
+            <a:off x="10241280" y="2194560"/>
+            <a:ext cx="640080" cy="548640"/>
           </a:xfrm>
           <a:prstGeom prst="rect">
             <a:avLst/>
@@ -6646,29 +6834,25 @@
           </a:bodyPr>
           <a:lstStyle/>
           <a:p>
-            <a:pPr>
-              <a:defRPr sz="2000" b="1">
-                <a:solidFill>
-                  <a:srgbClr val="CD853F"/>
-                </a:solidFill>
-              </a:defRPr>
+            <a:pPr algn="ctr">
+              <a:defRPr sz="2800"/>
             </a:pPr>
             <a:r>
-              <a:t>🧭  Navigate AI Confidently</a:t>
-            </a:r>
-          </a:p>
-        </p:txBody>
-      </p:sp>
-      <p:sp>
-        <p:nvSpPr>
-          <p:cNvPr id="28" name="TextBox 27"/>
+              <a:t>🤖</a:t>
+            </a:r>
+          </a:p>
+        </p:txBody>
+      </p:sp>
+      <p:sp>
+        <p:nvSpPr>
+          <p:cNvPr id="34" name="TextBox 33"/>
           <p:cNvSpPr txBox="1"/>
           <p:nvPr/>
         </p:nvSpPr>
         <p:spPr>
           <a:xfrm>
-            <a:off x="6492240" y="4389120"/>
-            <a:ext cx="3200400" cy="365760"/>
+            <a:off x="9281160" y="2926080"/>
+            <a:ext cx="2560320" cy="457200"/>
           </a:xfrm>
           <a:prstGeom prst="rect">
             <a:avLst/>
@@ -6681,29 +6865,64 @@
           </a:bodyPr>
           <a:lstStyle/>
           <a:p>
-            <a:pPr>
-              <a:defRPr sz="1300" i="1">
+            <a:pPr algn="ctr">
+              <a:defRPr sz="1800" b="1">
+                <a:solidFill>
+                  <a:srgbClr val="9370A5"/>
+                </a:solidFill>
+              </a:defRPr>
+            </a:pPr>
+            <a:r>
+              <a:t>Intelligent Tools</a:t>
+            </a:r>
+          </a:p>
+        </p:txBody>
+      </p:sp>
+      <p:sp>
+        <p:nvSpPr>
+          <p:cNvPr id="35" name="TextBox 34"/>
+          <p:cNvSpPr txBox="1"/>
+          <p:nvPr/>
+        </p:nvSpPr>
+        <p:spPr>
+          <a:xfrm>
+            <a:off x="9281160" y="3337560"/>
+            <a:ext cx="2560320" cy="365760"/>
+          </a:xfrm>
+          <a:prstGeom prst="rect">
+            <a:avLst/>
+          </a:prstGeom>
+          <a:noFill/>
+        </p:spPr>
+        <p:txBody>
+          <a:bodyPr wrap="none">
+            <a:spAutoFit/>
+          </a:bodyPr>
+          <a:lstStyle/>
+          <a:p>
+            <a:pPr algn="ctr">
+              <a:defRPr sz="1200" i="1">
                 <a:solidFill>
                   <a:srgbClr val="64748B"/>
                 </a:solidFill>
               </a:defRPr>
             </a:pPr>
             <a:r>
-              <a:t>Make smart choices in a fast-moving landscape</a:t>
-            </a:r>
-          </a:p>
-        </p:txBody>
-      </p:sp>
-      <p:sp>
-        <p:nvSpPr>
-          <p:cNvPr id="29" name="TextBox 28"/>
+              <a:t>AI that works for you</a:t>
+            </a:r>
+          </a:p>
+        </p:txBody>
+      </p:sp>
+      <p:sp>
+        <p:nvSpPr>
+          <p:cNvPr id="36" name="TextBox 35"/>
           <p:cNvSpPr txBox="1"/>
           <p:nvPr/>
         </p:nvSpPr>
         <p:spPr>
           <a:xfrm>
-            <a:off x="6492240" y="4800600"/>
-            <a:ext cx="3200400" cy="1371600"/>
+            <a:off x="9326880" y="3749040"/>
+            <a:ext cx="2468880" cy="1554480"/>
           </a:xfrm>
           <a:prstGeom prst="rect">
             <a:avLst/>
@@ -6718,53 +6937,88 @@
           <a:p>
             <a:pPr>
               <a:spcAft>
-                <a:spcPts val="300"/>
+                <a:spcPts val="400"/>
               </a:spcAft>
-              <a:defRPr sz="1200">
+              <a:defRPr sz="1100">
                 <a:solidFill>
                   <a:srgbClr val="475569"/>
                 </a:solidFill>
               </a:defRPr>
             </a:pPr>
             <a:r>
-              <a:t>• Guidance on using ChatGPT and similar tools safely</a:t>
+              <a:t>• Generate reports and documents automatically</a:t>
             </a:r>
           </a:p>
           <a:p>
             <a:pPr>
               <a:spcAft>
-                <a:spcPts val="300"/>
+                <a:spcPts val="400"/>
               </a:spcAft>
-              <a:defRPr sz="1200">
+              <a:defRPr sz="1100">
                 <a:solidFill>
                   <a:srgbClr val="475569"/>
                 </a:solidFill>
               </a:defRPr>
             </a:pPr>
             <a:r>
-              <a:t>• Evaluate which AI products are actually worth it</a:t>
+              <a:t>• Ask questions, get instant answers</a:t>
             </a:r>
           </a:p>
           <a:p>
             <a:pPr>
               <a:spcAft>
-                <a:spcPts val="300"/>
+                <a:spcPts val="400"/>
               </a:spcAft>
-              <a:defRPr sz="1200">
+              <a:defRPr sz="1100">
                 <a:solidFill>
                   <a:srgbClr val="475569"/>
                 </a:solidFill>
               </a:defRPr>
             </a:pPr>
             <a:r>
-              <a:t>• Stay ahead with university and industry connections</a:t>
-            </a:r>
-          </a:p>
-        </p:txBody>
-      </p:sp>
-      <p:sp>
-        <p:nvSpPr>
-          <p:cNvPr id="30" name="TextBox 29"/>
+              <a:t>• Smart alerts when you need to act</a:t>
+            </a:r>
+          </a:p>
+        </p:txBody>
+      </p:sp>
+      <p:sp>
+        <p:nvSpPr>
+          <p:cNvPr id="37" name="TextBox 36"/>
+          <p:cNvSpPr txBox="1"/>
+          <p:nvPr/>
+        </p:nvSpPr>
+        <p:spPr>
+          <a:xfrm>
+            <a:off x="457200" y="5669280"/>
+            <a:ext cx="11247120" cy="457200"/>
+          </a:xfrm>
+          <a:prstGeom prst="rect">
+            <a:avLst/>
+          </a:prstGeom>
+          <a:noFill/>
+        </p:spPr>
+        <p:txBody>
+          <a:bodyPr wrap="none">
+            <a:spAutoFit/>
+          </a:bodyPr>
+          <a:lstStyle/>
+          <a:p>
+            <a:pPr algn="ctr">
+              <a:defRPr sz="1400" i="1">
+                <a:solidFill>
+                  <a:srgbClr val="64748B"/>
+                </a:solidFill>
+              </a:defRPr>
+            </a:pPr>
+            <a:r>
+              <a:t>Each solution is tailored to your specific needs — let's look at some examples →</a:t>
+            </a:r>
+          </a:p>
+        </p:txBody>
+      </p:sp>
+      <p:sp>
+        <p:nvSpPr>
+          <p:cNvPr id="38" name="TextBox 37"/>
           <p:cNvSpPr txBox="1"/>
           <p:nvPr/>
         </p:nvSpPr>
@@ -6931,7 +7185,7 @@
               </a:defRPr>
             </a:pPr>
             <a:r>
-              <a:t>Types of Solutions We Build</a:t>
+              <a:t>Beyond Project Work</a:t>
             </a:r>
           </a:p>
         </p:txBody>
@@ -6944,7 +7198,7 @@
         </p:nvSpPr>
         <p:spPr>
           <a:xfrm>
-            <a:off x="731520" y="1371600"/>
+            <a:off x="731520" y="1325880"/>
             <a:ext cx="10515600" cy="457200"/>
           </a:xfrm>
           <a:prstGeom prst="rect">
@@ -6966,7 +7220,7 @@
               </a:defRPr>
             </a:pPr>
             <a:r>
-              <a:t>A spectrum of tools — from simple visibility to intelligent automation</a:t>
+              <a:t>How we support the broader organization</a:t>
             </a:r>
           </a:p>
         </p:txBody>
@@ -6979,8 +7233,8 @@
         </p:nvSpPr>
         <p:spPr>
           <a:xfrm>
-            <a:off x="457200" y="1920240"/>
-            <a:ext cx="2148840" cy="3840480"/>
+            <a:off x="411480" y="1828800"/>
+            <a:ext cx="3657600" cy="1737360"/>
           </a:xfrm>
           <a:prstGeom prst="roundRect">
             <a:avLst/>
@@ -6988,9 +7242,9 @@
           <a:solidFill>
             <a:srgbClr val="FFFFFF"/>
           </a:solidFill>
-          <a:ln w="25400">
+          <a:ln w="19050">
             <a:solidFill>
-              <a:srgbClr val="4682B4"/>
+              <a:srgbClr val="CD853F"/>
             </a:solidFill>
           </a:ln>
         </p:spPr>
@@ -7024,8 +7278,166 @@
         </p:nvSpPr>
         <p:spPr>
           <a:xfrm>
-            <a:off x="457200" y="1920240"/>
-            <a:ext cx="2148840" cy="137160"/>
+            <a:off x="411480" y="1828800"/>
+            <a:ext cx="109728" cy="1737360"/>
+          </a:xfrm>
+          <a:prstGeom prst="rect">
+            <a:avLst/>
+          </a:prstGeom>
+          <a:solidFill>
+            <a:srgbClr val="CD853F"/>
+          </a:solidFill>
+          <a:ln>
+            <a:noFill/>
+          </a:ln>
+        </p:spPr>
+        <p:style>
+          <a:lnRef idx="1">
+            <a:schemeClr val="accent1"/>
+          </a:lnRef>
+          <a:fillRef idx="3">
+            <a:schemeClr val="accent1"/>
+          </a:fillRef>
+          <a:effectRef idx="2">
+            <a:schemeClr val="accent1"/>
+          </a:effectRef>
+          <a:fontRef idx="minor">
+            <a:schemeClr val="lt1"/>
+          </a:fontRef>
+        </p:style>
+        <p:txBody>
+          <a:bodyPr rtlCol="0" anchor="ctr"/>
+          <a:lstStyle/>
+          <a:p>
+            <a:pPr algn="ctr"/>
+          </a:p>
+        </p:txBody>
+      </p:sp>
+      <p:sp>
+        <p:nvSpPr>
+          <p:cNvPr id="8" name="TextBox 7"/>
+          <p:cNvSpPr txBox="1"/>
+          <p:nvPr/>
+        </p:nvSpPr>
+        <p:spPr>
+          <a:xfrm>
+            <a:off x="640080" y="1965960"/>
+            <a:ext cx="3291840" cy="457200"/>
+          </a:xfrm>
+          <a:prstGeom prst="rect">
+            <a:avLst/>
+          </a:prstGeom>
+          <a:noFill/>
+        </p:spPr>
+        <p:txBody>
+          <a:bodyPr wrap="none">
+            <a:spAutoFit/>
+          </a:bodyPr>
+          <a:lstStyle/>
+          <a:p>
+            <a:pPr>
+              <a:defRPr sz="1600" b="1">
+                <a:solidFill>
+                  <a:srgbClr val="CD853F"/>
+                </a:solidFill>
+              </a:defRPr>
+            </a:pPr>
+            <a:r>
+              <a:t>🧭  AI Guidance</a:t>
+            </a:r>
+          </a:p>
+        </p:txBody>
+      </p:sp>
+      <p:sp>
+        <p:nvSpPr>
+          <p:cNvPr id="9" name="TextBox 8"/>
+          <p:cNvSpPr txBox="1"/>
+          <p:nvPr/>
+        </p:nvSpPr>
+        <p:spPr>
+          <a:xfrm>
+            <a:off x="640080" y="2377440"/>
+            <a:ext cx="3291840" cy="1097280"/>
+          </a:xfrm>
+          <a:prstGeom prst="rect">
+            <a:avLst/>
+          </a:prstGeom>
+          <a:noFill/>
+        </p:spPr>
+        <p:txBody>
+          <a:bodyPr wrap="square">
+            <a:spAutoFit/>
+          </a:bodyPr>
+          <a:lstStyle/>
+          <a:p>
+            <a:pPr>
+              <a:defRPr sz="1200">
+                <a:solidFill>
+                  <a:srgbClr val="475569"/>
+                </a:solidFill>
+              </a:defRPr>
+            </a:pPr>
+            <a:r>
+              <a:t>Navigate AI tools confidently — we help you use ChatGPT and similar tools safely, and evaluate which products are worth buying</a:t>
+            </a:r>
+          </a:p>
+        </p:txBody>
+      </p:sp>
+      <p:sp>
+        <p:nvSpPr>
+          <p:cNvPr id="10" name="Rounded Rectangle 9"/>
+          <p:cNvSpPr/>
+          <p:nvPr/>
+        </p:nvSpPr>
+        <p:spPr>
+          <a:xfrm>
+            <a:off x="4251960" y="1828800"/>
+            <a:ext cx="3657600" cy="1737360"/>
+          </a:xfrm>
+          <a:prstGeom prst="roundRect">
+            <a:avLst/>
+          </a:prstGeom>
+          <a:solidFill>
+            <a:srgbClr val="FFFFFF"/>
+          </a:solidFill>
+          <a:ln w="19050">
+            <a:solidFill>
+              <a:srgbClr val="4682B4"/>
+            </a:solidFill>
+          </a:ln>
+        </p:spPr>
+        <p:style>
+          <a:lnRef idx="1">
+            <a:schemeClr val="accent1"/>
+          </a:lnRef>
+          <a:fillRef idx="3">
+            <a:schemeClr val="accent1"/>
+          </a:fillRef>
+          <a:effectRef idx="2">
+            <a:schemeClr val="accent1"/>
+          </a:effectRef>
+          <a:fontRef idx="minor">
+            <a:schemeClr val="lt1"/>
+          </a:fontRef>
+        </p:style>
+        <p:txBody>
+          <a:bodyPr rtlCol="0" anchor="ctr"/>
+          <a:lstStyle/>
+          <a:p>
+            <a:pPr algn="ctr"/>
+          </a:p>
+        </p:txBody>
+      </p:sp>
+      <p:sp>
+        <p:nvSpPr>
+          <p:cNvPr id="11" name="Rectangle 10"/>
+          <p:cNvSpPr/>
+          <p:nvPr/>
+        </p:nvSpPr>
+        <p:spPr>
+          <a:xfrm>
+            <a:off x="4251960" y="1828800"/>
+            <a:ext cx="109728" cy="1737360"/>
           </a:xfrm>
           <a:prstGeom prst="rect">
             <a:avLst/>
@@ -7061,23 +7473,95 @@
       </p:sp>
       <p:sp>
         <p:nvSpPr>
-          <p:cNvPr id="8" name="Oval 7"/>
+          <p:cNvPr id="12" name="TextBox 11"/>
+          <p:cNvSpPr txBox="1"/>
+          <p:nvPr/>
+        </p:nvSpPr>
+        <p:spPr>
+          <a:xfrm>
+            <a:off x="4480560" y="1965960"/>
+            <a:ext cx="3291840" cy="457200"/>
+          </a:xfrm>
+          <a:prstGeom prst="rect">
+            <a:avLst/>
+          </a:prstGeom>
+          <a:noFill/>
+        </p:spPr>
+        <p:txBody>
+          <a:bodyPr wrap="none">
+            <a:spAutoFit/>
+          </a:bodyPr>
+          <a:lstStyle/>
+          <a:p>
+            <a:pPr>
+              <a:defRPr sz="1600" b="1">
+                <a:solidFill>
+                  <a:srgbClr val="4682B4"/>
+                </a:solidFill>
+              </a:defRPr>
+            </a:pPr>
+            <a:r>
+              <a:t>🎓  Training &amp; Skills</a:t>
+            </a:r>
+          </a:p>
+        </p:txBody>
+      </p:sp>
+      <p:sp>
+        <p:nvSpPr>
+          <p:cNvPr id="13" name="TextBox 12"/>
+          <p:cNvSpPr txBox="1"/>
+          <p:nvPr/>
+        </p:nvSpPr>
+        <p:spPr>
+          <a:xfrm>
+            <a:off x="4480560" y="2377440"/>
+            <a:ext cx="3291840" cy="1097280"/>
+          </a:xfrm>
+          <a:prstGeom prst="rect">
+            <a:avLst/>
+          </a:prstGeom>
+          <a:noFill/>
+        </p:spPr>
+        <p:txBody>
+          <a:bodyPr wrap="square">
+            <a:spAutoFit/>
+          </a:bodyPr>
+          <a:lstStyle/>
+          <a:p>
+            <a:pPr>
+              <a:defRPr sz="1200">
+                <a:solidFill>
+                  <a:srgbClr val="475569"/>
+                </a:solidFill>
+              </a:defRPr>
+            </a:pPr>
+            <a:r>
+              <a:t>Level up your team's data capabilities through workshops, office hours, and hands-on learning opportunities</a:t>
+            </a:r>
+          </a:p>
+        </p:txBody>
+      </p:sp>
+      <p:sp>
+        <p:nvSpPr>
+          <p:cNvPr id="14" name="Rounded Rectangle 13"/>
           <p:cNvSpPr/>
           <p:nvPr/>
         </p:nvSpPr>
         <p:spPr>
           <a:xfrm>
-            <a:off x="1165860" y="2240280"/>
-            <a:ext cx="731520" cy="731520"/>
-          </a:xfrm>
-          <a:prstGeom prst="ellipse">
+            <a:off x="8092440" y="1828800"/>
+            <a:ext cx="3657600" cy="1737360"/>
+          </a:xfrm>
+          <a:prstGeom prst="roundRect">
             <a:avLst/>
           </a:prstGeom>
           <a:solidFill>
-            <a:srgbClr val="4682B4"/>
+            <a:srgbClr val="FFFFFF"/>
           </a:solidFill>
-          <a:ln>
-            <a:noFill/>
+          <a:ln w="19050">
+            <a:solidFill>
+              <a:srgbClr val="008080"/>
+            </a:solidFill>
           </a:ln>
         </p:spPr>
         <p:style>
@@ -7104,242 +7588,14 @@
       </p:sp>
       <p:sp>
         <p:nvSpPr>
-          <p:cNvPr id="9" name="TextBox 8"/>
-          <p:cNvSpPr txBox="1"/>
-          <p:nvPr/>
-        </p:nvSpPr>
-        <p:spPr>
-          <a:xfrm>
-            <a:off x="1211580" y="2331720"/>
-            <a:ext cx="640080" cy="548640"/>
-          </a:xfrm>
-          <a:prstGeom prst="rect">
-            <a:avLst/>
-          </a:prstGeom>
-          <a:noFill/>
-        </p:spPr>
-        <p:txBody>
-          <a:bodyPr wrap="none">
-            <a:spAutoFit/>
-          </a:bodyPr>
-          <a:lstStyle/>
-          <a:p>
-            <a:pPr algn="ctr">
-              <a:defRPr sz="2800"/>
-            </a:pPr>
-            <a:r>
-              <a:t>📊</a:t>
-            </a:r>
-          </a:p>
-        </p:txBody>
-      </p:sp>
-      <p:sp>
-        <p:nvSpPr>
-          <p:cNvPr id="10" name="TextBox 9"/>
-          <p:cNvSpPr txBox="1"/>
-          <p:nvPr/>
-        </p:nvSpPr>
-        <p:spPr>
-          <a:xfrm>
-            <a:off x="548640" y="3063240"/>
-            <a:ext cx="1965960" cy="731520"/>
-          </a:xfrm>
-          <a:prstGeom prst="rect">
-            <a:avLst/>
-          </a:prstGeom>
-          <a:noFill/>
-        </p:spPr>
-        <p:txBody>
-          <a:bodyPr wrap="square">
-            <a:spAutoFit/>
-          </a:bodyPr>
-          <a:lstStyle/>
-          <a:p>
-            <a:pPr algn="ctr">
-              <a:defRPr sz="1400" b="1">
-                <a:solidFill>
-                  <a:srgbClr val="4682B4"/>
-                </a:solidFill>
-              </a:defRPr>
-            </a:pPr>
-            <a:r>
-              <a:t>Dashboards &amp;</a:t>
-            </a:r>
-            <a:br/>
-            <a:r>
-              <a:t>Visualizations</a:t>
-            </a:r>
-          </a:p>
-        </p:txBody>
-      </p:sp>
-      <p:sp>
-        <p:nvSpPr>
-          <p:cNvPr id="11" name="TextBox 10"/>
-          <p:cNvSpPr txBox="1"/>
-          <p:nvPr/>
-        </p:nvSpPr>
-        <p:spPr>
-          <a:xfrm>
-            <a:off x="548640" y="3794759"/>
-            <a:ext cx="1965960" cy="457200"/>
-          </a:xfrm>
-          <a:prstGeom prst="rect">
-            <a:avLst/>
-          </a:prstGeom>
-          <a:noFill/>
-        </p:spPr>
-        <p:txBody>
-          <a:bodyPr wrap="square">
-            <a:spAutoFit/>
-          </a:bodyPr>
-          <a:lstStyle/>
-          <a:p>
-            <a:pPr algn="ctr">
-              <a:defRPr sz="1300" b="1">
-                <a:solidFill>
-                  <a:srgbClr val="475569"/>
-                </a:solidFill>
-              </a:defRPr>
-            </a:pPr>
-            <a:r>
-              <a:t>See your data clearly</a:t>
-            </a:r>
-          </a:p>
-        </p:txBody>
-      </p:sp>
-      <p:sp>
-        <p:nvSpPr>
-          <p:cNvPr id="12" name="TextBox 11"/>
-          <p:cNvSpPr txBox="1"/>
-          <p:nvPr/>
-        </p:nvSpPr>
-        <p:spPr>
-          <a:xfrm>
-            <a:off x="548640" y="4251960"/>
-            <a:ext cx="1965960" cy="1280160"/>
-          </a:xfrm>
-          <a:prstGeom prst="rect">
-            <a:avLst/>
-          </a:prstGeom>
-          <a:noFill/>
-        </p:spPr>
-        <p:txBody>
-          <a:bodyPr wrap="square">
-            <a:spAutoFit/>
-          </a:bodyPr>
-          <a:lstStyle/>
-          <a:p>
-            <a:pPr algn="ctr">
-              <a:defRPr sz="1100">
-                <a:solidFill>
-                  <a:srgbClr val="64748B"/>
-                </a:solidFill>
-              </a:defRPr>
-            </a:pPr>
-            <a:r>
-              <a:t>Status trackers, maps, charts that update automatically</a:t>
-            </a:r>
-          </a:p>
-        </p:txBody>
-      </p:sp>
-      <p:sp>
-        <p:nvSpPr>
-          <p:cNvPr id="13" name="Right Arrow 12"/>
-          <p:cNvSpPr/>
-          <p:nvPr/>
-        </p:nvSpPr>
-        <p:spPr>
-          <a:xfrm>
-            <a:off x="2624328" y="2651760"/>
-            <a:ext cx="146304" cy="228600"/>
-          </a:xfrm>
-          <a:prstGeom prst="rightArrow">
-            <a:avLst/>
-          </a:prstGeom>
-          <a:solidFill>
-            <a:srgbClr val="C8D2DC"/>
-          </a:solidFill>
-          <a:ln>
-            <a:noFill/>
-          </a:ln>
-        </p:spPr>
-        <p:style>
-          <a:lnRef idx="1">
-            <a:schemeClr val="accent1"/>
-          </a:lnRef>
-          <a:fillRef idx="3">
-            <a:schemeClr val="accent1"/>
-          </a:fillRef>
-          <a:effectRef idx="2">
-            <a:schemeClr val="accent1"/>
-          </a:effectRef>
-          <a:fontRef idx="minor">
-            <a:schemeClr val="lt1"/>
-          </a:fontRef>
-        </p:style>
-        <p:txBody>
-          <a:bodyPr rtlCol="0" anchor="ctr"/>
-          <a:lstStyle/>
-          <a:p>
-            <a:pPr algn="ctr"/>
-          </a:p>
-        </p:txBody>
-      </p:sp>
-      <p:sp>
-        <p:nvSpPr>
-          <p:cNvPr id="14" name="Rounded Rectangle 13"/>
-          <p:cNvSpPr/>
-          <p:nvPr/>
-        </p:nvSpPr>
-        <p:spPr>
-          <a:xfrm>
-            <a:off x="2788920" y="1920240"/>
-            <a:ext cx="2148840" cy="3840480"/>
-          </a:xfrm>
-          <a:prstGeom prst="roundRect">
-            <a:avLst/>
-          </a:prstGeom>
-          <a:solidFill>
-            <a:srgbClr val="FFFFFF"/>
-          </a:solidFill>
-          <a:ln w="25400">
-            <a:solidFill>
-              <a:srgbClr val="008080"/>
-            </a:solidFill>
-          </a:ln>
-        </p:spPr>
-        <p:style>
-          <a:lnRef idx="1">
-            <a:schemeClr val="accent1"/>
-          </a:lnRef>
-          <a:fillRef idx="3">
-            <a:schemeClr val="accent1"/>
-          </a:fillRef>
-          <a:effectRef idx="2">
-            <a:schemeClr val="accent1"/>
-          </a:effectRef>
-          <a:fontRef idx="minor">
-            <a:schemeClr val="lt1"/>
-          </a:fontRef>
-        </p:style>
-        <p:txBody>
-          <a:bodyPr rtlCol="0" anchor="ctr"/>
-          <a:lstStyle/>
-          <a:p>
-            <a:pPr algn="ctr"/>
-          </a:p>
-        </p:txBody>
-      </p:sp>
-      <p:sp>
-        <p:nvSpPr>
           <p:cNvPr id="15" name="Rectangle 14"/>
           <p:cNvSpPr/>
           <p:nvPr/>
         </p:nvSpPr>
         <p:spPr>
           <a:xfrm>
-            <a:off x="2788920" y="1920240"/>
-            <a:ext cx="2148840" cy="137160"/>
+            <a:off x="8092440" y="1828800"/>
+            <a:ext cx="109728" cy="1737360"/>
           </a:xfrm>
           <a:prstGeom prst="rect">
             <a:avLst/>
@@ -7375,23 +7631,95 @@
       </p:sp>
       <p:sp>
         <p:nvSpPr>
-          <p:cNvPr id="16" name="Oval 15"/>
+          <p:cNvPr id="16" name="TextBox 15"/>
+          <p:cNvSpPr txBox="1"/>
+          <p:nvPr/>
+        </p:nvSpPr>
+        <p:spPr>
+          <a:xfrm>
+            <a:off x="8321040" y="1965960"/>
+            <a:ext cx="3291840" cy="457200"/>
+          </a:xfrm>
+          <a:prstGeom prst="rect">
+            <a:avLst/>
+          </a:prstGeom>
+          <a:noFill/>
+        </p:spPr>
+        <p:txBody>
+          <a:bodyPr wrap="none">
+            <a:spAutoFit/>
+          </a:bodyPr>
+          <a:lstStyle/>
+          <a:p>
+            <a:pPr>
+              <a:defRPr sz="1600" b="1">
+                <a:solidFill>
+                  <a:srgbClr val="008080"/>
+                </a:solidFill>
+              </a:defRPr>
+            </a:pPr>
+            <a:r>
+              <a:t>🔬  External Partnerships</a:t>
+            </a:r>
+          </a:p>
+        </p:txBody>
+      </p:sp>
+      <p:sp>
+        <p:nvSpPr>
+          <p:cNvPr id="17" name="TextBox 16"/>
+          <p:cNvSpPr txBox="1"/>
+          <p:nvPr/>
+        </p:nvSpPr>
+        <p:spPr>
+          <a:xfrm>
+            <a:off x="8321040" y="2377440"/>
+            <a:ext cx="3291840" cy="1097280"/>
+          </a:xfrm>
+          <a:prstGeom prst="rect">
+            <a:avLst/>
+          </a:prstGeom>
+          <a:noFill/>
+        </p:spPr>
+        <p:txBody>
+          <a:bodyPr wrap="square">
+            <a:spAutoFit/>
+          </a:bodyPr>
+          <a:lstStyle/>
+          <a:p>
+            <a:pPr>
+              <a:defRPr sz="1200">
+                <a:solidFill>
+                  <a:srgbClr val="475569"/>
+                </a:solidFill>
+              </a:defRPr>
+            </a:pPr>
+            <a:r>
+              <a:t>Connections to universities, national labs, and industry partners to bring cutting-edge solutions to our challenges</a:t>
+            </a:r>
+          </a:p>
+        </p:txBody>
+      </p:sp>
+      <p:sp>
+        <p:nvSpPr>
+          <p:cNvPr id="18" name="Rounded Rectangle 17"/>
           <p:cNvSpPr/>
           <p:nvPr/>
         </p:nvSpPr>
         <p:spPr>
           <a:xfrm>
-            <a:off x="3497580" y="2240280"/>
-            <a:ext cx="731520" cy="731520"/>
-          </a:xfrm>
-          <a:prstGeom prst="ellipse">
+            <a:off x="2331720" y="3749039"/>
+            <a:ext cx="3657600" cy="1737360"/>
+          </a:xfrm>
+          <a:prstGeom prst="roundRect">
             <a:avLst/>
           </a:prstGeom>
           <a:solidFill>
-            <a:srgbClr val="008080"/>
+            <a:srgbClr val="FFFFFF"/>
           </a:solidFill>
-          <a:ln>
-            <a:noFill/>
+          <a:ln w="19050">
+            <a:solidFill>
+              <a:srgbClr val="558B6E"/>
+            </a:solidFill>
           </a:ln>
         </p:spPr>
         <p:style>
@@ -7418,242 +7746,14 @@
       </p:sp>
       <p:sp>
         <p:nvSpPr>
-          <p:cNvPr id="17" name="TextBox 16"/>
-          <p:cNvSpPr txBox="1"/>
-          <p:nvPr/>
-        </p:nvSpPr>
-        <p:spPr>
-          <a:xfrm>
-            <a:off x="3543300" y="2331720"/>
-            <a:ext cx="640080" cy="548640"/>
-          </a:xfrm>
-          <a:prstGeom prst="rect">
-            <a:avLst/>
-          </a:prstGeom>
-          <a:noFill/>
-        </p:spPr>
-        <p:txBody>
-          <a:bodyPr wrap="none">
-            <a:spAutoFit/>
-          </a:bodyPr>
-          <a:lstStyle/>
-          <a:p>
-            <a:pPr algn="ctr">
-              <a:defRPr sz="2800"/>
-            </a:pPr>
-            <a:r>
-              <a:t>🔗</a:t>
-            </a:r>
-          </a:p>
-        </p:txBody>
-      </p:sp>
-      <p:sp>
-        <p:nvSpPr>
-          <p:cNvPr id="18" name="TextBox 17"/>
-          <p:cNvSpPr txBox="1"/>
-          <p:nvPr/>
-        </p:nvSpPr>
-        <p:spPr>
-          <a:xfrm>
-            <a:off x="2880360" y="3063240"/>
-            <a:ext cx="1965960" cy="731520"/>
-          </a:xfrm>
-          <a:prstGeom prst="rect">
-            <a:avLst/>
-          </a:prstGeom>
-          <a:noFill/>
-        </p:spPr>
-        <p:txBody>
-          <a:bodyPr wrap="square">
-            <a:spAutoFit/>
-          </a:bodyPr>
-          <a:lstStyle/>
-          <a:p>
-            <a:pPr algn="ctr">
-              <a:defRPr sz="1400" b="1">
-                <a:solidFill>
-                  <a:srgbClr val="008080"/>
-                </a:solidFill>
-              </a:defRPr>
-            </a:pPr>
-            <a:r>
-              <a:t>Connected</a:t>
-            </a:r>
-            <a:br/>
-            <a:r>
-              <a:t>Data Systems</a:t>
-            </a:r>
-          </a:p>
-        </p:txBody>
-      </p:sp>
-      <p:sp>
-        <p:nvSpPr>
-          <p:cNvPr id="19" name="TextBox 18"/>
-          <p:cNvSpPr txBox="1"/>
-          <p:nvPr/>
-        </p:nvSpPr>
-        <p:spPr>
-          <a:xfrm>
-            <a:off x="2880360" y="3794759"/>
-            <a:ext cx="1965960" cy="457200"/>
-          </a:xfrm>
-          <a:prstGeom prst="rect">
-            <a:avLst/>
-          </a:prstGeom>
-          <a:noFill/>
-        </p:spPr>
-        <p:txBody>
-          <a:bodyPr wrap="square">
-            <a:spAutoFit/>
-          </a:bodyPr>
-          <a:lstStyle/>
-          <a:p>
-            <a:pPr algn="ctr">
-              <a:defRPr sz="1300" b="1">
-                <a:solidFill>
-                  <a:srgbClr val="475569"/>
-                </a:solidFill>
-              </a:defRPr>
-            </a:pPr>
-            <a:r>
-              <a:t>Bring scattered info together</a:t>
-            </a:r>
-          </a:p>
-        </p:txBody>
-      </p:sp>
-      <p:sp>
-        <p:nvSpPr>
-          <p:cNvPr id="20" name="TextBox 19"/>
-          <p:cNvSpPr txBox="1"/>
-          <p:nvPr/>
-        </p:nvSpPr>
-        <p:spPr>
-          <a:xfrm>
-            <a:off x="2880360" y="4251960"/>
-            <a:ext cx="1965960" cy="1280160"/>
-          </a:xfrm>
-          <a:prstGeom prst="rect">
-            <a:avLst/>
-          </a:prstGeom>
-          <a:noFill/>
-        </p:spPr>
-        <p:txBody>
-          <a:bodyPr wrap="square">
-            <a:spAutoFit/>
-          </a:bodyPr>
-          <a:lstStyle/>
-          <a:p>
-            <a:pPr algn="ctr">
-              <a:defRPr sz="1100">
-                <a:solidFill>
-                  <a:srgbClr val="64748B"/>
-                </a:solidFill>
-              </a:defRPr>
-            </a:pPr>
-            <a:r>
-              <a:t>Link spreadsheets, databases, and documents in one place</a:t>
-            </a:r>
-          </a:p>
-        </p:txBody>
-      </p:sp>
-      <p:sp>
-        <p:nvSpPr>
-          <p:cNvPr id="21" name="Right Arrow 20"/>
+          <p:cNvPr id="19" name="Rectangle 18"/>
           <p:cNvSpPr/>
           <p:nvPr/>
         </p:nvSpPr>
         <p:spPr>
           <a:xfrm>
-            <a:off x="4956048" y="2651760"/>
-            <a:ext cx="146304" cy="228600"/>
-          </a:xfrm>
-          <a:prstGeom prst="rightArrow">
-            <a:avLst/>
-          </a:prstGeom>
-          <a:solidFill>
-            <a:srgbClr val="C8D2DC"/>
-          </a:solidFill>
-          <a:ln>
-            <a:noFill/>
-          </a:ln>
-        </p:spPr>
-        <p:style>
-          <a:lnRef idx="1">
-            <a:schemeClr val="accent1"/>
-          </a:lnRef>
-          <a:fillRef idx="3">
-            <a:schemeClr val="accent1"/>
-          </a:fillRef>
-          <a:effectRef idx="2">
-            <a:schemeClr val="accent1"/>
-          </a:effectRef>
-          <a:fontRef idx="minor">
-            <a:schemeClr val="lt1"/>
-          </a:fontRef>
-        </p:style>
-        <p:txBody>
-          <a:bodyPr rtlCol="0" anchor="ctr"/>
-          <a:lstStyle/>
-          <a:p>
-            <a:pPr algn="ctr"/>
-          </a:p>
-        </p:txBody>
-      </p:sp>
-      <p:sp>
-        <p:nvSpPr>
-          <p:cNvPr id="22" name="Rounded Rectangle 21"/>
-          <p:cNvSpPr/>
-          <p:nvPr/>
-        </p:nvSpPr>
-        <p:spPr>
-          <a:xfrm>
-            <a:off x="5120640" y="1920240"/>
-            <a:ext cx="2148840" cy="3840480"/>
-          </a:xfrm>
-          <a:prstGeom prst="roundRect">
-            <a:avLst/>
-          </a:prstGeom>
-          <a:solidFill>
-            <a:srgbClr val="FFFFFF"/>
-          </a:solidFill>
-          <a:ln w="25400">
-            <a:solidFill>
-              <a:srgbClr val="558B6E"/>
-            </a:solidFill>
-          </a:ln>
-        </p:spPr>
-        <p:style>
-          <a:lnRef idx="1">
-            <a:schemeClr val="accent1"/>
-          </a:lnRef>
-          <a:fillRef idx="3">
-            <a:schemeClr val="accent1"/>
-          </a:fillRef>
-          <a:effectRef idx="2">
-            <a:schemeClr val="accent1"/>
-          </a:effectRef>
-          <a:fontRef idx="minor">
-            <a:schemeClr val="lt1"/>
-          </a:fontRef>
-        </p:style>
-        <p:txBody>
-          <a:bodyPr rtlCol="0" anchor="ctr"/>
-          <a:lstStyle/>
-          <a:p>
-            <a:pPr algn="ctr"/>
-          </a:p>
-        </p:txBody>
-      </p:sp>
-      <p:sp>
-        <p:nvSpPr>
-          <p:cNvPr id="23" name="Rectangle 22"/>
-          <p:cNvSpPr/>
-          <p:nvPr/>
-        </p:nvSpPr>
-        <p:spPr>
-          <a:xfrm>
-            <a:off x="5120640" y="1920240"/>
-            <a:ext cx="2148840" cy="137160"/>
+            <a:off x="2331720" y="3749039"/>
+            <a:ext cx="109728" cy="1737360"/>
           </a:xfrm>
           <a:prstGeom prst="rect">
             <a:avLst/>
@@ -7689,23 +7789,95 @@
       </p:sp>
       <p:sp>
         <p:nvSpPr>
-          <p:cNvPr id="24" name="Oval 23"/>
+          <p:cNvPr id="20" name="TextBox 19"/>
+          <p:cNvSpPr txBox="1"/>
+          <p:nvPr/>
+        </p:nvSpPr>
+        <p:spPr>
+          <a:xfrm>
+            <a:off x="2560320" y="3886199"/>
+            <a:ext cx="3291840" cy="457200"/>
+          </a:xfrm>
+          <a:prstGeom prst="rect">
+            <a:avLst/>
+          </a:prstGeom>
+          <a:noFill/>
+        </p:spPr>
+        <p:txBody>
+          <a:bodyPr wrap="none">
+            <a:spAutoFit/>
+          </a:bodyPr>
+          <a:lstStyle/>
+          <a:p>
+            <a:pPr>
+              <a:defRPr sz="1600" b="1">
+                <a:solidFill>
+                  <a:srgbClr val="558B6E"/>
+                </a:solidFill>
+              </a:defRPr>
+            </a:pPr>
+            <a:r>
+              <a:t>🤝  Cross-Company Collaboration</a:t>
+            </a:r>
+          </a:p>
+        </p:txBody>
+      </p:sp>
+      <p:sp>
+        <p:nvSpPr>
+          <p:cNvPr id="21" name="TextBox 20"/>
+          <p:cNvSpPr txBox="1"/>
+          <p:nvPr/>
+        </p:nvSpPr>
+        <p:spPr>
+          <a:xfrm>
+            <a:off x="2560320" y="4297679"/>
+            <a:ext cx="3291840" cy="1097280"/>
+          </a:xfrm>
+          <a:prstGeom prst="rect">
+            <a:avLst/>
+          </a:prstGeom>
+          <a:noFill/>
+        </p:spPr>
+        <p:txBody>
+          <a:bodyPr wrap="square">
+            <a:spAutoFit/>
+          </a:bodyPr>
+          <a:lstStyle/>
+          <a:p>
+            <a:pPr>
+              <a:defRPr sz="1200">
+                <a:solidFill>
+                  <a:srgbClr val="475569"/>
+                </a:solidFill>
+              </a:defRPr>
+            </a:pPr>
+            <a:r>
+              <a:t>Working alongside data professionals in every department to share best practices and build tools everyone can use</a:t>
+            </a:r>
+          </a:p>
+        </p:txBody>
+      </p:sp>
+      <p:sp>
+        <p:nvSpPr>
+          <p:cNvPr id="22" name="Rounded Rectangle 21"/>
           <p:cNvSpPr/>
           <p:nvPr/>
         </p:nvSpPr>
         <p:spPr>
           <a:xfrm>
-            <a:off x="5829300" y="2240280"/>
-            <a:ext cx="731520" cy="731520"/>
-          </a:xfrm>
-          <a:prstGeom prst="ellipse">
+            <a:off x="6172200" y="3749039"/>
+            <a:ext cx="3657600" cy="1737360"/>
+          </a:xfrm>
+          <a:prstGeom prst="roundRect">
             <a:avLst/>
           </a:prstGeom>
           <a:solidFill>
-            <a:srgbClr val="558B6E"/>
+            <a:srgbClr val="FFFFFF"/>
           </a:solidFill>
-          <a:ln>
-            <a:noFill/>
+          <a:ln w="19050">
+            <a:solidFill>
+              <a:srgbClr val="9370A5"/>
+            </a:solidFill>
           </a:ln>
         </p:spPr>
         <p:style>
@@ -7732,242 +7904,14 @@
       </p:sp>
       <p:sp>
         <p:nvSpPr>
-          <p:cNvPr id="25" name="TextBox 24"/>
-          <p:cNvSpPr txBox="1"/>
-          <p:nvPr/>
-        </p:nvSpPr>
-        <p:spPr>
-          <a:xfrm>
-            <a:off x="5875020" y="2331720"/>
-            <a:ext cx="640080" cy="548640"/>
-          </a:xfrm>
-          <a:prstGeom prst="rect">
-            <a:avLst/>
-          </a:prstGeom>
-          <a:noFill/>
-        </p:spPr>
-        <p:txBody>
-          <a:bodyPr wrap="none">
-            <a:spAutoFit/>
-          </a:bodyPr>
-          <a:lstStyle/>
-          <a:p>
-            <a:pPr algn="ctr">
-              <a:defRPr sz="2800"/>
-            </a:pPr>
-            <a:r>
-              <a:t>📈</a:t>
-            </a:r>
-          </a:p>
-        </p:txBody>
-      </p:sp>
-      <p:sp>
-        <p:nvSpPr>
-          <p:cNvPr id="26" name="TextBox 25"/>
-          <p:cNvSpPr txBox="1"/>
-          <p:nvPr/>
-        </p:nvSpPr>
-        <p:spPr>
-          <a:xfrm>
-            <a:off x="5212080" y="3063240"/>
-            <a:ext cx="1965960" cy="731520"/>
-          </a:xfrm>
-          <a:prstGeom prst="rect">
-            <a:avLst/>
-          </a:prstGeom>
-          <a:noFill/>
-        </p:spPr>
-        <p:txBody>
-          <a:bodyPr wrap="square">
-            <a:spAutoFit/>
-          </a:bodyPr>
-          <a:lstStyle/>
-          <a:p>
-            <a:pPr algn="ctr">
-              <a:defRPr sz="1400" b="1">
-                <a:solidFill>
-                  <a:srgbClr val="558B6E"/>
-                </a:solidFill>
-              </a:defRPr>
-            </a:pPr>
-            <a:r>
-              <a:t>Analysis &amp;</a:t>
-            </a:r>
-            <a:br/>
-            <a:r>
-              <a:t>Insights</a:t>
-            </a:r>
-          </a:p>
-        </p:txBody>
-      </p:sp>
-      <p:sp>
-        <p:nvSpPr>
-          <p:cNvPr id="27" name="TextBox 26"/>
-          <p:cNvSpPr txBox="1"/>
-          <p:nvPr/>
-        </p:nvSpPr>
-        <p:spPr>
-          <a:xfrm>
-            <a:off x="5212080" y="3794759"/>
-            <a:ext cx="1965960" cy="457200"/>
-          </a:xfrm>
-          <a:prstGeom prst="rect">
-            <a:avLst/>
-          </a:prstGeom>
-          <a:noFill/>
-        </p:spPr>
-        <p:txBody>
-          <a:bodyPr wrap="square">
-            <a:spAutoFit/>
-          </a:bodyPr>
-          <a:lstStyle/>
-          <a:p>
-            <a:pPr algn="ctr">
-              <a:defRPr sz="1300" b="1">
-                <a:solidFill>
-                  <a:srgbClr val="475569"/>
-                </a:solidFill>
-              </a:defRPr>
-            </a:pPr>
-            <a:r>
-              <a:t>Find patterns and trends</a:t>
-            </a:r>
-          </a:p>
-        </p:txBody>
-      </p:sp>
-      <p:sp>
-        <p:nvSpPr>
-          <p:cNvPr id="28" name="TextBox 27"/>
-          <p:cNvSpPr txBox="1"/>
-          <p:nvPr/>
-        </p:nvSpPr>
-        <p:spPr>
-          <a:xfrm>
-            <a:off x="5212080" y="4251960"/>
-            <a:ext cx="1965960" cy="1280160"/>
-          </a:xfrm>
-          <a:prstGeom prst="rect">
-            <a:avLst/>
-          </a:prstGeom>
-          <a:noFill/>
-        </p:spPr>
-        <p:txBody>
-          <a:bodyPr wrap="square">
-            <a:spAutoFit/>
-          </a:bodyPr>
-          <a:lstStyle/>
-          <a:p>
-            <a:pPr algn="ctr">
-              <a:defRPr sz="1100">
-                <a:solidFill>
-                  <a:srgbClr val="64748B"/>
-                </a:solidFill>
-              </a:defRPr>
-            </a:pPr>
-            <a:r>
-              <a:t>What's working? What's slowing down? Where to focus?</a:t>
-            </a:r>
-          </a:p>
-        </p:txBody>
-      </p:sp>
-      <p:sp>
-        <p:nvSpPr>
-          <p:cNvPr id="29" name="Right Arrow 28"/>
+          <p:cNvPr id="23" name="Rectangle 22"/>
           <p:cNvSpPr/>
           <p:nvPr/>
         </p:nvSpPr>
         <p:spPr>
           <a:xfrm>
-            <a:off x="7287768" y="2651760"/>
-            <a:ext cx="146304" cy="228600"/>
-          </a:xfrm>
-          <a:prstGeom prst="rightArrow">
-            <a:avLst/>
-          </a:prstGeom>
-          <a:solidFill>
-            <a:srgbClr val="C8D2DC"/>
-          </a:solidFill>
-          <a:ln>
-            <a:noFill/>
-          </a:ln>
-        </p:spPr>
-        <p:style>
-          <a:lnRef idx="1">
-            <a:schemeClr val="accent1"/>
-          </a:lnRef>
-          <a:fillRef idx="3">
-            <a:schemeClr val="accent1"/>
-          </a:fillRef>
-          <a:effectRef idx="2">
-            <a:schemeClr val="accent1"/>
-          </a:effectRef>
-          <a:fontRef idx="minor">
-            <a:schemeClr val="lt1"/>
-          </a:fontRef>
-        </p:style>
-        <p:txBody>
-          <a:bodyPr rtlCol="0" anchor="ctr"/>
-          <a:lstStyle/>
-          <a:p>
-            <a:pPr algn="ctr"/>
-          </a:p>
-        </p:txBody>
-      </p:sp>
-      <p:sp>
-        <p:nvSpPr>
-          <p:cNvPr id="30" name="Rounded Rectangle 29"/>
-          <p:cNvSpPr/>
-          <p:nvPr/>
-        </p:nvSpPr>
-        <p:spPr>
-          <a:xfrm>
-            <a:off x="7452360" y="1920240"/>
-            <a:ext cx="2148840" cy="3840480"/>
-          </a:xfrm>
-          <a:prstGeom prst="roundRect">
-            <a:avLst/>
-          </a:prstGeom>
-          <a:solidFill>
-            <a:srgbClr val="FFFFFF"/>
-          </a:solidFill>
-          <a:ln w="25400">
-            <a:solidFill>
-              <a:srgbClr val="9370A5"/>
-            </a:solidFill>
-          </a:ln>
-        </p:spPr>
-        <p:style>
-          <a:lnRef idx="1">
-            <a:schemeClr val="accent1"/>
-          </a:lnRef>
-          <a:fillRef idx="3">
-            <a:schemeClr val="accent1"/>
-          </a:fillRef>
-          <a:effectRef idx="2">
-            <a:schemeClr val="accent1"/>
-          </a:effectRef>
-          <a:fontRef idx="minor">
-            <a:schemeClr val="lt1"/>
-          </a:fontRef>
-        </p:style>
-        <p:txBody>
-          <a:bodyPr rtlCol="0" anchor="ctr"/>
-          <a:lstStyle/>
-          <a:p>
-            <a:pPr algn="ctr"/>
-          </a:p>
-        </p:txBody>
-      </p:sp>
-      <p:sp>
-        <p:nvSpPr>
-          <p:cNvPr id="31" name="Rectangle 30"/>
-          <p:cNvSpPr/>
-          <p:nvPr/>
-        </p:nvSpPr>
-        <p:spPr>
-          <a:xfrm>
-            <a:off x="7452360" y="1920240"/>
-            <a:ext cx="2148840" cy="137160"/>
+            <a:off x="6172200" y="3749039"/>
+            <a:ext cx="109728" cy="1737360"/>
           </a:xfrm>
           <a:prstGeom prst="rect">
             <a:avLst/>
@@ -8003,57 +7947,14 @@
       </p:sp>
       <p:sp>
         <p:nvSpPr>
-          <p:cNvPr id="32" name="Oval 31"/>
-          <p:cNvSpPr/>
-          <p:nvPr/>
-        </p:nvSpPr>
-        <p:spPr>
-          <a:xfrm>
-            <a:off x="8161020" y="2240280"/>
-            <a:ext cx="731520" cy="731520"/>
-          </a:xfrm>
-          <a:prstGeom prst="ellipse">
-            <a:avLst/>
-          </a:prstGeom>
-          <a:solidFill>
-            <a:srgbClr val="9370A5"/>
-          </a:solidFill>
-          <a:ln>
-            <a:noFill/>
-          </a:ln>
-        </p:spPr>
-        <p:style>
-          <a:lnRef idx="1">
-            <a:schemeClr val="accent1"/>
-          </a:lnRef>
-          <a:fillRef idx="3">
-            <a:schemeClr val="accent1"/>
-          </a:fillRef>
-          <a:effectRef idx="2">
-            <a:schemeClr val="accent1"/>
-          </a:effectRef>
-          <a:fontRef idx="minor">
-            <a:schemeClr val="lt1"/>
-          </a:fontRef>
-        </p:style>
-        <p:txBody>
-          <a:bodyPr rtlCol="0" anchor="ctr"/>
-          <a:lstStyle/>
-          <a:p>
-            <a:pPr algn="ctr"/>
-          </a:p>
-        </p:txBody>
-      </p:sp>
-      <p:sp>
-        <p:nvSpPr>
-          <p:cNvPr id="33" name="TextBox 32"/>
+          <p:cNvPr id="24" name="TextBox 23"/>
           <p:cNvSpPr txBox="1"/>
           <p:nvPr/>
         </p:nvSpPr>
         <p:spPr>
           <a:xfrm>
-            <a:off x="8206740" y="2331720"/>
-            <a:ext cx="640080" cy="548640"/>
+            <a:off x="6400800" y="3886199"/>
+            <a:ext cx="3291840" cy="457200"/>
           </a:xfrm>
           <a:prstGeom prst="rect">
             <a:avLst/>
@@ -8066,25 +7967,29 @@
           </a:bodyPr>
           <a:lstStyle/>
           <a:p>
-            <a:pPr algn="ctr">
-              <a:defRPr sz="2800"/>
+            <a:pPr>
+              <a:defRPr sz="1600" b="1">
+                <a:solidFill>
+                  <a:srgbClr val="9370A5"/>
+                </a:solidFill>
+              </a:defRPr>
             </a:pPr>
             <a:r>
-              <a:t>🔮</a:t>
-            </a:r>
-          </a:p>
-        </p:txBody>
-      </p:sp>
-      <p:sp>
-        <p:nvSpPr>
-          <p:cNvPr id="34" name="TextBox 33"/>
+              <a:t>👥  Communities of Practice</a:t>
+            </a:r>
+          </a:p>
+        </p:txBody>
+      </p:sp>
+      <p:sp>
+        <p:nvSpPr>
+          <p:cNvPr id="25" name="TextBox 24"/>
           <p:cNvSpPr txBox="1"/>
           <p:nvPr/>
         </p:nvSpPr>
         <p:spPr>
           <a:xfrm>
-            <a:off x="7543800" y="3063240"/>
-            <a:ext cx="1965960" cy="731520"/>
+            <a:off x="6400800" y="4297679"/>
+            <a:ext cx="3291840" cy="1097280"/>
           </a:xfrm>
           <a:prstGeom prst="rect">
             <a:avLst/>
@@ -8097,277 +8002,29 @@
           </a:bodyPr>
           <a:lstStyle/>
           <a:p>
-            <a:pPr algn="ctr">
-              <a:defRPr sz="1400" b="1">
-                <a:solidFill>
-                  <a:srgbClr val="9370A5"/>
+            <a:pPr>
+              <a:defRPr sz="1200">
+                <a:solidFill>
+                  <a:srgbClr val="475569"/>
                 </a:solidFill>
               </a:defRPr>
             </a:pPr>
             <a:r>
-              <a:t>Predictions &amp;</a:t>
-            </a:r>
-            <a:br/>
-            <a:r>
-              <a:t>Forecasts</a:t>
-            </a:r>
-          </a:p>
-        </p:txBody>
-      </p:sp>
-      <p:sp>
-        <p:nvSpPr>
-          <p:cNvPr id="35" name="TextBox 34"/>
+              <a:t>User groups and working sessions where people across the company can learn from each other and solve common challenges</a:t>
+            </a:r>
+          </a:p>
+        </p:txBody>
+      </p:sp>
+      <p:sp>
+        <p:nvSpPr>
+          <p:cNvPr id="26" name="TextBox 25"/>
           <p:cNvSpPr txBox="1"/>
           <p:nvPr/>
         </p:nvSpPr>
         <p:spPr>
           <a:xfrm>
-            <a:off x="7543800" y="3794759"/>
-            <a:ext cx="1965960" cy="457200"/>
-          </a:xfrm>
-          <a:prstGeom prst="rect">
-            <a:avLst/>
-          </a:prstGeom>
-          <a:noFill/>
-        </p:spPr>
-        <p:txBody>
-          <a:bodyPr wrap="square">
-            <a:spAutoFit/>
-          </a:bodyPr>
-          <a:lstStyle/>
-          <a:p>
-            <a:pPr algn="ctr">
-              <a:defRPr sz="1300" b="1">
-                <a:solidFill>
-                  <a:srgbClr val="475569"/>
-                </a:solidFill>
-              </a:defRPr>
-            </a:pPr>
-            <a:r>
-              <a:t>See what's likely coming</a:t>
-            </a:r>
-          </a:p>
-        </p:txBody>
-      </p:sp>
-      <p:sp>
-        <p:nvSpPr>
-          <p:cNvPr id="36" name="TextBox 35"/>
-          <p:cNvSpPr txBox="1"/>
-          <p:nvPr/>
-        </p:nvSpPr>
-        <p:spPr>
-          <a:xfrm>
-            <a:off x="7543800" y="4251960"/>
-            <a:ext cx="1965960" cy="1280160"/>
-          </a:xfrm>
-          <a:prstGeom prst="rect">
-            <a:avLst/>
-          </a:prstGeom>
-          <a:noFill/>
-        </p:spPr>
-        <p:txBody>
-          <a:bodyPr wrap="square">
-            <a:spAutoFit/>
-          </a:bodyPr>
-          <a:lstStyle/>
-          <a:p>
-            <a:pPr algn="ctr">
-              <a:defRPr sz="1100">
-                <a:solidFill>
-                  <a:srgbClr val="64748B"/>
-                </a:solidFill>
-              </a:defRPr>
-            </a:pPr>
-            <a:r>
-              <a:t>Timeline estimates, risk flags, outcome probabilities</a:t>
-            </a:r>
-          </a:p>
-        </p:txBody>
-      </p:sp>
-      <p:sp>
-        <p:nvSpPr>
-          <p:cNvPr id="37" name="Right Arrow 36"/>
-          <p:cNvSpPr/>
-          <p:nvPr/>
-        </p:nvSpPr>
-        <p:spPr>
-          <a:xfrm>
-            <a:off x="9619488" y="2651760"/>
-            <a:ext cx="146304" cy="228600"/>
-          </a:xfrm>
-          <a:prstGeom prst="rightArrow">
-            <a:avLst/>
-          </a:prstGeom>
-          <a:solidFill>
-            <a:srgbClr val="C8D2DC"/>
-          </a:solidFill>
-          <a:ln>
-            <a:noFill/>
-          </a:ln>
-        </p:spPr>
-        <p:style>
-          <a:lnRef idx="1">
-            <a:schemeClr val="accent1"/>
-          </a:lnRef>
-          <a:fillRef idx="3">
-            <a:schemeClr val="accent1"/>
-          </a:fillRef>
-          <a:effectRef idx="2">
-            <a:schemeClr val="accent1"/>
-          </a:effectRef>
-          <a:fontRef idx="minor">
-            <a:schemeClr val="lt1"/>
-          </a:fontRef>
-        </p:style>
-        <p:txBody>
-          <a:bodyPr rtlCol="0" anchor="ctr"/>
-          <a:lstStyle/>
-          <a:p>
-            <a:pPr algn="ctr"/>
-          </a:p>
-        </p:txBody>
-      </p:sp>
-      <p:sp>
-        <p:nvSpPr>
-          <p:cNvPr id="38" name="Rounded Rectangle 37"/>
-          <p:cNvSpPr/>
-          <p:nvPr/>
-        </p:nvSpPr>
-        <p:spPr>
-          <a:xfrm>
-            <a:off x="9784080" y="1920240"/>
-            <a:ext cx="2148840" cy="3840480"/>
-          </a:xfrm>
-          <a:prstGeom prst="roundRect">
-            <a:avLst/>
-          </a:prstGeom>
-          <a:solidFill>
-            <a:srgbClr val="FFFFFF"/>
-          </a:solidFill>
-          <a:ln w="25400">
-            <a:solidFill>
-              <a:srgbClr val="CD853F"/>
-            </a:solidFill>
-          </a:ln>
-        </p:spPr>
-        <p:style>
-          <a:lnRef idx="1">
-            <a:schemeClr val="accent1"/>
-          </a:lnRef>
-          <a:fillRef idx="3">
-            <a:schemeClr val="accent1"/>
-          </a:fillRef>
-          <a:effectRef idx="2">
-            <a:schemeClr val="accent1"/>
-          </a:effectRef>
-          <a:fontRef idx="minor">
-            <a:schemeClr val="lt1"/>
-          </a:fontRef>
-        </p:style>
-        <p:txBody>
-          <a:bodyPr rtlCol="0" anchor="ctr"/>
-          <a:lstStyle/>
-          <a:p>
-            <a:pPr algn="ctr"/>
-          </a:p>
-        </p:txBody>
-      </p:sp>
-      <p:sp>
-        <p:nvSpPr>
-          <p:cNvPr id="39" name="Rectangle 38"/>
-          <p:cNvSpPr/>
-          <p:nvPr/>
-        </p:nvSpPr>
-        <p:spPr>
-          <a:xfrm>
-            <a:off x="9784080" y="1920240"/>
-            <a:ext cx="2148840" cy="137160"/>
-          </a:xfrm>
-          <a:prstGeom prst="rect">
-            <a:avLst/>
-          </a:prstGeom>
-          <a:solidFill>
-            <a:srgbClr val="CD853F"/>
-          </a:solidFill>
-          <a:ln>
-            <a:noFill/>
-          </a:ln>
-        </p:spPr>
-        <p:style>
-          <a:lnRef idx="1">
-            <a:schemeClr val="accent1"/>
-          </a:lnRef>
-          <a:fillRef idx="3">
-            <a:schemeClr val="accent1"/>
-          </a:fillRef>
-          <a:effectRef idx="2">
-            <a:schemeClr val="accent1"/>
-          </a:effectRef>
-          <a:fontRef idx="minor">
-            <a:schemeClr val="lt1"/>
-          </a:fontRef>
-        </p:style>
-        <p:txBody>
-          <a:bodyPr rtlCol="0" anchor="ctr"/>
-          <a:lstStyle/>
-          <a:p>
-            <a:pPr algn="ctr"/>
-          </a:p>
-        </p:txBody>
-      </p:sp>
-      <p:sp>
-        <p:nvSpPr>
-          <p:cNvPr id="40" name="Oval 39"/>
-          <p:cNvSpPr/>
-          <p:nvPr/>
-        </p:nvSpPr>
-        <p:spPr>
-          <a:xfrm>
-            <a:off x="10492740" y="2240280"/>
-            <a:ext cx="731520" cy="731520"/>
-          </a:xfrm>
-          <a:prstGeom prst="ellipse">
-            <a:avLst/>
-          </a:prstGeom>
-          <a:solidFill>
-            <a:srgbClr val="CD853F"/>
-          </a:solidFill>
-          <a:ln>
-            <a:noFill/>
-          </a:ln>
-        </p:spPr>
-        <p:style>
-          <a:lnRef idx="1">
-            <a:schemeClr val="accent1"/>
-          </a:lnRef>
-          <a:fillRef idx="3">
-            <a:schemeClr val="accent1"/>
-          </a:fillRef>
-          <a:effectRef idx="2">
-            <a:schemeClr val="accent1"/>
-          </a:effectRef>
-          <a:fontRef idx="minor">
-            <a:schemeClr val="lt1"/>
-          </a:fontRef>
-        </p:style>
-        <p:txBody>
-          <a:bodyPr rtlCol="0" anchor="ctr"/>
-          <a:lstStyle/>
-          <a:p>
-            <a:pPr algn="ctr"/>
-          </a:p>
-        </p:txBody>
-      </p:sp>
-      <p:sp>
-        <p:nvSpPr>
-          <p:cNvPr id="41" name="TextBox 40"/>
-          <p:cNvSpPr txBox="1"/>
-          <p:nvPr/>
-        </p:nvSpPr>
-        <p:spPr>
-          <a:xfrm>
-            <a:off x="10538460" y="2331720"/>
-            <a:ext cx="640080" cy="548640"/>
+            <a:off x="457200" y="5669280"/>
+            <a:ext cx="11247120" cy="457200"/>
           </a:xfrm>
           <a:prstGeom prst="rect">
             <a:avLst/>
@@ -8381,161 +8038,21 @@
           <a:lstStyle/>
           <a:p>
             <a:pPr algn="ctr">
-              <a:defRPr sz="2800"/>
+              <a:defRPr sz="1400" i="1">
+                <a:solidFill>
+                  <a:srgbClr val="64748B"/>
+                </a:solidFill>
+              </a:defRPr>
             </a:pPr>
             <a:r>
-              <a:t>🤖</a:t>
-            </a:r>
-          </a:p>
-        </p:txBody>
-      </p:sp>
-      <p:sp>
-        <p:nvSpPr>
-          <p:cNvPr id="42" name="TextBox 41"/>
-          <p:cNvSpPr txBox="1"/>
-          <p:nvPr/>
-        </p:nvSpPr>
-        <p:spPr>
-          <a:xfrm>
-            <a:off x="9875520" y="3063240"/>
-            <a:ext cx="1965960" cy="731520"/>
-          </a:xfrm>
-          <a:prstGeom prst="rect">
-            <a:avLst/>
-          </a:prstGeom>
-          <a:noFill/>
-        </p:spPr>
-        <p:txBody>
-          <a:bodyPr wrap="square">
-            <a:spAutoFit/>
-          </a:bodyPr>
-          <a:lstStyle/>
-          <a:p>
-            <a:pPr algn="ctr">
-              <a:defRPr sz="1400" b="1">
-                <a:solidFill>
-                  <a:srgbClr val="CD853F"/>
-                </a:solidFill>
-              </a:defRPr>
-            </a:pPr>
-            <a:r>
-              <a:t>AI-Powered</a:t>
-            </a:r>
-            <a:br/>
-            <a:r>
-              <a:t>Tools</a:t>
-            </a:r>
-          </a:p>
-        </p:txBody>
-      </p:sp>
-      <p:sp>
-        <p:nvSpPr>
-          <p:cNvPr id="43" name="TextBox 42"/>
-          <p:cNvSpPr txBox="1"/>
-          <p:nvPr/>
-        </p:nvSpPr>
-        <p:spPr>
-          <a:xfrm>
-            <a:off x="9875520" y="3794759"/>
-            <a:ext cx="1965960" cy="457200"/>
-          </a:xfrm>
-          <a:prstGeom prst="rect">
-            <a:avLst/>
-          </a:prstGeom>
-          <a:noFill/>
-        </p:spPr>
-        <p:txBody>
-          <a:bodyPr wrap="square">
-            <a:spAutoFit/>
-          </a:bodyPr>
-          <a:lstStyle/>
-          <a:p>
-            <a:pPr algn="ctr">
-              <a:defRPr sz="1300" b="1">
-                <a:solidFill>
-                  <a:srgbClr val="475569"/>
-                </a:solidFill>
-              </a:defRPr>
-            </a:pPr>
-            <a:r>
-              <a:t>Smart automation</a:t>
-            </a:r>
-          </a:p>
-        </p:txBody>
-      </p:sp>
-      <p:sp>
-        <p:nvSpPr>
-          <p:cNvPr id="44" name="TextBox 43"/>
-          <p:cNvSpPr txBox="1"/>
-          <p:nvPr/>
-        </p:nvSpPr>
-        <p:spPr>
-          <a:xfrm>
-            <a:off x="9875520" y="4251960"/>
-            <a:ext cx="1965960" cy="1280160"/>
-          </a:xfrm>
-          <a:prstGeom prst="rect">
-            <a:avLst/>
-          </a:prstGeom>
-          <a:noFill/>
-        </p:spPr>
-        <p:txBody>
-          <a:bodyPr wrap="square">
-            <a:spAutoFit/>
-          </a:bodyPr>
-          <a:lstStyle/>
-          <a:p>
-            <a:pPr algn="ctr">
-              <a:defRPr sz="1100">
-                <a:solidFill>
-                  <a:srgbClr val="64748B"/>
-                </a:solidFill>
-              </a:defRPr>
-            </a:pPr>
-            <a:r>
-              <a:t>Document generation, Q&amp;A assistants, intelligent workflows</a:t>
-            </a:r>
-          </a:p>
-        </p:txBody>
-      </p:sp>
-      <p:sp>
-        <p:nvSpPr>
-          <p:cNvPr id="45" name="TextBox 44"/>
-          <p:cNvSpPr txBox="1"/>
-          <p:nvPr/>
-        </p:nvSpPr>
-        <p:spPr>
-          <a:xfrm>
-            <a:off x="457200" y="5943600"/>
-            <a:ext cx="11247120" cy="457200"/>
-          </a:xfrm>
-          <a:prstGeom prst="rect">
-            <a:avLst/>
-          </a:prstGeom>
-          <a:noFill/>
-        </p:spPr>
-        <p:txBody>
-          <a:bodyPr wrap="none">
-            <a:spAutoFit/>
-          </a:bodyPr>
-          <a:lstStyle/>
-          <a:p>
-            <a:pPr algn="ctr">
-              <a:defRPr sz="1600" b="1">
-                <a:solidFill>
-                  <a:srgbClr val="008080"/>
-                </a:solidFill>
-              </a:defRPr>
-            </a:pPr>
-            <a:r>
-              <a:t>Let's look at some real examples →</a:t>
-            </a:r>
-          </a:p>
-        </p:txBody>
-      </p:sp>
-      <p:sp>
-        <p:nvSpPr>
-          <p:cNvPr id="46" name="TextBox 45"/>
+              <a:t>These services are available to everyone — no project required</a:t>
+            </a:r>
+          </a:p>
+        </p:txBody>
+      </p:sp>
+      <p:sp>
+        <p:nvSpPr>
+          <p:cNvPr id="27" name="TextBox 26"/>
           <p:cNvSpPr txBox="1"/>
           <p:nvPr/>
         </p:nvSpPr>
